--- a/entregas-agosto26/carrossel-instagram-agosto26.pptx
+++ b/entregas-agosto26/carrossel-instagram-agosto26.pptx
@@ -3466,9 +3466,9 @@
                 <a:solidFill>
                   <a:srgbClr val="FFFFFF"/>
                 </a:solidFill>
-                <a:latin typeface="Cambria" pitchFamily="34" charset="0"/>
-                <a:ea typeface="Cambria" pitchFamily="34" charset="-122"/>
-                <a:cs typeface="Cambria" pitchFamily="34" charset="-120"/>
+                <a:latin typeface="Libre Baskerville" pitchFamily="34" charset="0"/>
+                <a:ea typeface="Libre Baskerville" pitchFamily="34" charset="-122"/>
+                <a:cs typeface="Libre Baskerville" pitchFamily="34" charset="-120"/>
               </a:rPr>
               <a:t>CONSUMER</a:t>
             </a:r>
@@ -3483,9 +3483,9 @@
                 <a:solidFill>
                   <a:srgbClr val="FFFFFF"/>
                 </a:solidFill>
-                <a:latin typeface="Cambria" pitchFamily="34" charset="0"/>
-                <a:ea typeface="Cambria" pitchFamily="34" charset="-122"/>
-                <a:cs typeface="Cambria" pitchFamily="34" charset="-120"/>
+                <a:latin typeface="Libre Baskerville" pitchFamily="34" charset="0"/>
+                <a:ea typeface="Libre Baskerville" pitchFamily="34" charset="-122"/>
+                <a:cs typeface="Libre Baskerville" pitchFamily="34" charset="-120"/>
               </a:rPr>
               <a:t>TRENDS</a:t>
             </a:r>
@@ -3522,9 +3522,9 @@
                 <a:solidFill>
                   <a:srgbClr val="DAFF94"/>
                 </a:solidFill>
-                <a:latin typeface="Cambria" pitchFamily="34" charset="0"/>
-                <a:ea typeface="Cambria" pitchFamily="34" charset="-122"/>
-                <a:cs typeface="Cambria" pitchFamily="34" charset="-120"/>
+                <a:latin typeface="Libre Baskerville" pitchFamily="34" charset="0"/>
+                <a:ea typeface="Libre Baskerville" pitchFamily="34" charset="-122"/>
+                <a:cs typeface="Libre Baskerville" pitchFamily="34" charset="-120"/>
               </a:rPr>
               <a:t>edição</a:t>
             </a:r>
@@ -3561,9 +3561,9 @@
                 <a:solidFill>
                   <a:srgbClr val="DAFF94"/>
                 </a:solidFill>
-                <a:latin typeface="Cambria" pitchFamily="34" charset="0"/>
-                <a:ea typeface="Cambria" pitchFamily="34" charset="-122"/>
-                <a:cs typeface="Cambria" pitchFamily="34" charset="-120"/>
+                <a:latin typeface="Libre Baskerville" pitchFamily="34" charset="0"/>
+                <a:ea typeface="Libre Baskerville" pitchFamily="34" charset="-122"/>
+                <a:cs typeface="Libre Baskerville" pitchFamily="34" charset="-120"/>
               </a:rPr>
               <a:t>AGOSTO_26</a:t>
             </a:r>
@@ -3656,9 +3656,9 @@
                 <a:solidFill>
                   <a:srgbClr val="DAFF94"/>
                 </a:solidFill>
-                <a:latin typeface="Courier New" pitchFamily="34" charset="0"/>
-                <a:ea typeface="Courier New" pitchFamily="34" charset="-122"/>
-                <a:cs typeface="Courier New" pitchFamily="34" charset="-120"/>
+                <a:latin typeface="JetBrains Mono" pitchFamily="34" charset="0"/>
+                <a:ea typeface="JetBrains Mono" pitchFamily="34" charset="-122"/>
+                <a:cs typeface="JetBrains Mono" pitchFamily="34" charset="-120"/>
               </a:rPr>
               <a:t>report↗</a:t>
             </a:r>
@@ -3695,9 +3695,9 @@
                 <a:solidFill>
                   <a:srgbClr val="DAFF94"/>
                 </a:solidFill>
-                <a:latin typeface="Cambria" pitchFamily="34" charset="0"/>
-                <a:ea typeface="Cambria" pitchFamily="34" charset="-122"/>
-                <a:cs typeface="Cambria" pitchFamily="34" charset="-120"/>
+                <a:latin typeface="Libre Baskerville" pitchFamily="34" charset="0"/>
+                <a:ea typeface="Libre Baskerville" pitchFamily="34" charset="-122"/>
+                <a:cs typeface="Libre Baskerville" pitchFamily="34" charset="-120"/>
               </a:rPr>
               <a:t>arpejo</a:t>
             </a:r>
@@ -3734,9 +3734,9 @@
                 <a:solidFill>
                   <a:srgbClr val="DAFF94"/>
                 </a:solidFill>
-                <a:latin typeface="Courier New" pitchFamily="34" charset="0"/>
-                <a:ea typeface="Courier New" pitchFamily="34" charset="-122"/>
-                <a:cs typeface="Courier New" pitchFamily="34" charset="-120"/>
+                <a:latin typeface="JetBrains Mono" pitchFamily="34" charset="0"/>
+                <a:ea typeface="JetBrains Mono" pitchFamily="34" charset="-122"/>
+                <a:cs typeface="JetBrains Mono" pitchFamily="34" charset="-120"/>
               </a:rPr>
               <a:t>agosto_26</a:t>
             </a:r>
@@ -3795,9 +3795,9 @@
                 <a:solidFill>
                   <a:srgbClr val="DAFF94"/>
                 </a:solidFill>
-                <a:latin typeface="Cambria" pitchFamily="34" charset="0"/>
-                <a:ea typeface="Cambria" pitchFamily="34" charset="-122"/>
-                <a:cs typeface="Cambria" pitchFamily="34" charset="-120"/>
+                <a:latin typeface="Libre Baskerville" pitchFamily="34" charset="0"/>
+                <a:ea typeface="Libre Baskerville" pitchFamily="34" charset="-122"/>
+                <a:cs typeface="Libre Baskerville" pitchFamily="34" charset="-120"/>
               </a:rPr>
               <a:t>TRENDS</a:t>
             </a:r>
@@ -3834,9 +3834,9 @@
                 <a:solidFill>
                   <a:srgbClr val="DAFF94"/>
                 </a:solidFill>
-                <a:latin typeface="Cambria" pitchFamily="34" charset="0"/>
-                <a:ea typeface="Cambria" pitchFamily="34" charset="-122"/>
-                <a:cs typeface="Cambria" pitchFamily="34" charset="-120"/>
+                <a:latin typeface="Libre Baskerville" pitchFamily="34" charset="0"/>
+                <a:ea typeface="Libre Baskerville" pitchFamily="34" charset="-122"/>
+                <a:cs typeface="Libre Baskerville" pitchFamily="34" charset="-120"/>
               </a:rPr>
               <a:t>HIPER-</a:t>
             </a:r>
@@ -3851,9 +3851,9 @@
                 <a:solidFill>
                   <a:srgbClr val="DAFF94"/>
                 </a:solidFill>
-                <a:latin typeface="Cambria" pitchFamily="34" charset="0"/>
-                <a:ea typeface="Cambria" pitchFamily="34" charset="-122"/>
-                <a:cs typeface="Cambria" pitchFamily="34" charset="-120"/>
+                <a:latin typeface="Libre Baskerville" pitchFamily="34" charset="0"/>
+                <a:ea typeface="Libre Baskerville" pitchFamily="34" charset="-122"/>
+                <a:cs typeface="Libre Baskerville" pitchFamily="34" charset="-120"/>
               </a:rPr>
               <a:t>REALIDADE</a:t>
             </a:r>
@@ -3951,9 +3951,9 @@
                 <a:solidFill>
                   <a:srgbClr val="DAFF94"/>
                 </a:solidFill>
-                <a:latin typeface="Courier New" pitchFamily="34" charset="0"/>
-                <a:ea typeface="Courier New" pitchFamily="34" charset="-122"/>
-                <a:cs typeface="Courier New" pitchFamily="34" charset="-120"/>
+                <a:latin typeface="JetBrains Mono" pitchFamily="34" charset="0"/>
+                <a:ea typeface="JetBrains Mono" pitchFamily="34" charset="-122"/>
+                <a:cs typeface="JetBrains Mono" pitchFamily="34" charset="-120"/>
               </a:rPr>
               <a:t>40% dos jovens dizem que “é tudo real”, sem diferenciar o virtual do físico.</a:t>
             </a:r>
@@ -3990,9 +3990,9 @@
                 <a:solidFill>
                   <a:srgbClr val="DAFF94"/>
                 </a:solidFill>
-                <a:latin typeface="Courier New" pitchFamily="34" charset="0"/>
-                <a:ea typeface="Courier New" pitchFamily="34" charset="-122"/>
-                <a:cs typeface="Courier New" pitchFamily="34" charset="-120"/>
+                <a:latin typeface="JetBrains Mono" pitchFamily="34" charset="0"/>
+                <a:ea typeface="JetBrains Mono" pitchFamily="34" charset="-122"/>
+                <a:cs typeface="JetBrains Mono" pitchFamily="34" charset="-120"/>
               </a:rPr>
               <a:t>1 / 5</a:t>
             </a:r>
@@ -4100,9 +4100,9 @@
                 <a:solidFill>
                   <a:srgbClr val="000000"/>
                 </a:solidFill>
-                <a:latin typeface="Courier New" pitchFamily="34" charset="0"/>
-                <a:ea typeface="Courier New" pitchFamily="34" charset="-122"/>
-                <a:cs typeface="Courier New" pitchFamily="34" charset="-120"/>
+                <a:latin typeface="JetBrains Mono" pitchFamily="34" charset="0"/>
+                <a:ea typeface="JetBrains Mono" pitchFamily="34" charset="-122"/>
+                <a:cs typeface="JetBrains Mono" pitchFamily="34" charset="-120"/>
               </a:rPr>
               <a:t>report↗</a:t>
             </a:r>
@@ -4139,9 +4139,9 @@
                 <a:solidFill>
                   <a:srgbClr val="000000"/>
                 </a:solidFill>
-                <a:latin typeface="Cambria" pitchFamily="34" charset="0"/>
-                <a:ea typeface="Cambria" pitchFamily="34" charset="-122"/>
-                <a:cs typeface="Cambria" pitchFamily="34" charset="-120"/>
+                <a:latin typeface="Libre Baskerville" pitchFamily="34" charset="0"/>
+                <a:ea typeface="Libre Baskerville" pitchFamily="34" charset="-122"/>
+                <a:cs typeface="Libre Baskerville" pitchFamily="34" charset="-120"/>
               </a:rPr>
               <a:t>arpejo</a:t>
             </a:r>
@@ -4178,9 +4178,9 @@
                 <a:solidFill>
                   <a:srgbClr val="000000"/>
                 </a:solidFill>
-                <a:latin typeface="Courier New" pitchFamily="34" charset="0"/>
-                <a:ea typeface="Courier New" pitchFamily="34" charset="-122"/>
-                <a:cs typeface="Courier New" pitchFamily="34" charset="-120"/>
+                <a:latin typeface="JetBrains Mono" pitchFamily="34" charset="0"/>
+                <a:ea typeface="JetBrains Mono" pitchFamily="34" charset="-122"/>
+                <a:cs typeface="JetBrains Mono" pitchFamily="34" charset="-120"/>
               </a:rPr>
               <a:t>agosto_26</a:t>
             </a:r>
@@ -4239,9 +4239,9 @@
                 <a:solidFill>
                   <a:srgbClr val="000000"/>
                 </a:solidFill>
-                <a:latin typeface="Cambria" pitchFamily="34" charset="0"/>
-                <a:ea typeface="Cambria" pitchFamily="34" charset="-122"/>
-                <a:cs typeface="Cambria" pitchFamily="34" charset="-120"/>
+                <a:latin typeface="Libre Baskerville" pitchFamily="34" charset="0"/>
+                <a:ea typeface="Libre Baskerville" pitchFamily="34" charset="-122"/>
+                <a:cs typeface="Libre Baskerville" pitchFamily="34" charset="-120"/>
               </a:rPr>
               <a:t>NEWS</a:t>
             </a:r>
@@ -4278,9 +4278,9 @@
                 <a:solidFill>
                   <a:srgbClr val="000000"/>
                 </a:solidFill>
-                <a:latin typeface="Cambria" pitchFamily="34" charset="0"/>
-                <a:ea typeface="Cambria" pitchFamily="34" charset="-122"/>
-                <a:cs typeface="Cambria" pitchFamily="34" charset="-120"/>
+                <a:latin typeface="Libre Baskerville" pitchFamily="34" charset="0"/>
+                <a:ea typeface="Libre Baskerville" pitchFamily="34" charset="-122"/>
+                <a:cs typeface="Libre Baskerville" pitchFamily="34" charset="-120"/>
               </a:rPr>
               <a:t>AGENTIC</a:t>
             </a:r>
@@ -4295,9 +4295,9 @@
                 <a:solidFill>
                   <a:srgbClr val="000000"/>
                 </a:solidFill>
-                <a:latin typeface="Cambria" pitchFamily="34" charset="0"/>
-                <a:ea typeface="Cambria" pitchFamily="34" charset="-122"/>
-                <a:cs typeface="Cambria" pitchFamily="34" charset="-120"/>
+                <a:latin typeface="Libre Baskerville" pitchFamily="34" charset="0"/>
+                <a:ea typeface="Libre Baskerville" pitchFamily="34" charset="-122"/>
+                <a:cs typeface="Libre Baskerville" pitchFamily="34" charset="-120"/>
               </a:rPr>
               <a:t>SEARCH</a:t>
             </a:r>
@@ -4397,9 +4397,9 @@
                 <a:solidFill>
                   <a:srgbClr val="000000"/>
                 </a:solidFill>
-                <a:latin typeface="Courier New" pitchFamily="34" charset="0"/>
-                <a:ea typeface="Courier New" pitchFamily="34" charset="-122"/>
-                <a:cs typeface="Courier New" pitchFamily="34" charset="-120"/>
+                <a:latin typeface="JetBrains Mono" pitchFamily="34" charset="0"/>
+                <a:ea typeface="JetBrains Mono" pitchFamily="34" charset="-122"/>
+                <a:cs typeface="JetBrains Mono" pitchFamily="34" charset="-120"/>
               </a:rPr>
               <a:t>Buscas por IA para descobrir produtos cresceram 200% em 1 ano.</a:t>
             </a:r>
@@ -4436,9 +4436,9 @@
                 <a:solidFill>
                   <a:srgbClr val="000000"/>
                 </a:solidFill>
-                <a:latin typeface="Courier New" pitchFamily="34" charset="0"/>
-                <a:ea typeface="Courier New" pitchFamily="34" charset="-122"/>
-                <a:cs typeface="Courier New" pitchFamily="34" charset="-120"/>
+                <a:latin typeface="JetBrains Mono" pitchFamily="34" charset="0"/>
+                <a:ea typeface="JetBrains Mono" pitchFamily="34" charset="-122"/>
+                <a:cs typeface="JetBrains Mono" pitchFamily="34" charset="-120"/>
               </a:rPr>
               <a:t>2 / 5</a:t>
             </a:r>
@@ -4546,9 +4546,9 @@
                 <a:solidFill>
                   <a:srgbClr val="000000"/>
                 </a:solidFill>
-                <a:latin typeface="Courier New" pitchFamily="34" charset="0"/>
-                <a:ea typeface="Courier New" pitchFamily="34" charset="-122"/>
-                <a:cs typeface="Courier New" pitchFamily="34" charset="-120"/>
+                <a:latin typeface="JetBrains Mono" pitchFamily="34" charset="0"/>
+                <a:ea typeface="JetBrains Mono" pitchFamily="34" charset="-122"/>
+                <a:cs typeface="JetBrains Mono" pitchFamily="34" charset="-120"/>
               </a:rPr>
               <a:t>report↗</a:t>
             </a:r>
@@ -4585,9 +4585,9 @@
                 <a:solidFill>
                   <a:srgbClr val="000000"/>
                 </a:solidFill>
-                <a:latin typeface="Cambria" pitchFamily="34" charset="0"/>
-                <a:ea typeface="Cambria" pitchFamily="34" charset="-122"/>
-                <a:cs typeface="Cambria" pitchFamily="34" charset="-120"/>
+                <a:latin typeface="Libre Baskerville" pitchFamily="34" charset="0"/>
+                <a:ea typeface="Libre Baskerville" pitchFamily="34" charset="-122"/>
+                <a:cs typeface="Libre Baskerville" pitchFamily="34" charset="-120"/>
               </a:rPr>
               <a:t>arpejo</a:t>
             </a:r>
@@ -4624,9 +4624,9 @@
                 <a:solidFill>
                   <a:srgbClr val="000000"/>
                 </a:solidFill>
-                <a:latin typeface="Courier New" pitchFamily="34" charset="0"/>
-                <a:ea typeface="Courier New" pitchFamily="34" charset="-122"/>
-                <a:cs typeface="Courier New" pitchFamily="34" charset="-120"/>
+                <a:latin typeface="JetBrains Mono" pitchFamily="34" charset="0"/>
+                <a:ea typeface="JetBrains Mono" pitchFamily="34" charset="-122"/>
+                <a:cs typeface="JetBrains Mono" pitchFamily="34" charset="-120"/>
               </a:rPr>
               <a:t>agosto_26</a:t>
             </a:r>
@@ -4685,9 +4685,9 @@
                 <a:solidFill>
                   <a:srgbClr val="000000"/>
                 </a:solidFill>
-                <a:latin typeface="Cambria" pitchFamily="34" charset="0"/>
-                <a:ea typeface="Cambria" pitchFamily="34" charset="-122"/>
-                <a:cs typeface="Cambria" pitchFamily="34" charset="-120"/>
+                <a:latin typeface="Libre Baskerville" pitchFamily="34" charset="0"/>
+                <a:ea typeface="Libre Baskerville" pitchFamily="34" charset="-122"/>
+                <a:cs typeface="Libre Baskerville" pitchFamily="34" charset="-120"/>
               </a:rPr>
               <a:t>TRENDS</a:t>
             </a:r>
@@ -4724,9 +4724,9 @@
                 <a:solidFill>
                   <a:srgbClr val="000000"/>
                 </a:solidFill>
-                <a:latin typeface="Cambria" pitchFamily="34" charset="0"/>
-                <a:ea typeface="Cambria" pitchFamily="34" charset="-122"/>
-                <a:cs typeface="Cambria" pitchFamily="34" charset="-120"/>
+                <a:latin typeface="Libre Baskerville" pitchFamily="34" charset="0"/>
+                <a:ea typeface="Libre Baskerville" pitchFamily="34" charset="-122"/>
+                <a:cs typeface="Libre Baskerville" pitchFamily="34" charset="-120"/>
               </a:rPr>
               <a:t>GERAÇÃO</a:t>
             </a:r>
@@ -4741,9 +4741,9 @@
                 <a:solidFill>
                   <a:srgbClr val="000000"/>
                 </a:solidFill>
-                <a:latin typeface="Cambria" pitchFamily="34" charset="0"/>
-                <a:ea typeface="Cambria" pitchFamily="34" charset="-122"/>
-                <a:cs typeface="Cambria" pitchFamily="34" charset="-120"/>
+                <a:latin typeface="Libre Baskerville" pitchFamily="34" charset="0"/>
+                <a:ea typeface="Libre Baskerville" pitchFamily="34" charset="-122"/>
+                <a:cs typeface="Libre Baskerville" pitchFamily="34" charset="-120"/>
               </a:rPr>
               <a:t>SEM RESSACA</a:t>
             </a:r>
@@ -4843,9 +4843,9 @@
                 <a:solidFill>
                   <a:srgbClr val="000000"/>
                 </a:solidFill>
-                <a:latin typeface="Courier New" pitchFamily="34" charset="0"/>
-                <a:ea typeface="Courier New" pitchFamily="34" charset="-122"/>
-                <a:cs typeface="Courier New" pitchFamily="34" charset="-120"/>
+                <a:latin typeface="JetBrains Mono" pitchFamily="34" charset="0"/>
+                <a:ea typeface="JetBrains Mono" pitchFamily="34" charset="-122"/>
+                <a:cs typeface="JetBrains Mono" pitchFamily="34" charset="-120"/>
               </a:rPr>
               <a:t>64% dos brasileiros declararam não consumir álcool em 2025.</a:t>
             </a:r>
@@ -4882,9 +4882,9 @@
                 <a:solidFill>
                   <a:srgbClr val="000000"/>
                 </a:solidFill>
-                <a:latin typeface="Courier New" pitchFamily="34" charset="0"/>
-                <a:ea typeface="Courier New" pitchFamily="34" charset="-122"/>
-                <a:cs typeface="Courier New" pitchFamily="34" charset="-120"/>
+                <a:latin typeface="JetBrains Mono" pitchFamily="34" charset="0"/>
+                <a:ea typeface="JetBrains Mono" pitchFamily="34" charset="-122"/>
+                <a:cs typeface="JetBrains Mono" pitchFamily="34" charset="-120"/>
               </a:rPr>
               <a:t>3 / 5</a:t>
             </a:r>
@@ -4992,9 +4992,9 @@
                 <a:solidFill>
                   <a:srgbClr val="DAFF94"/>
                 </a:solidFill>
-                <a:latin typeface="Courier New" pitchFamily="34" charset="0"/>
-                <a:ea typeface="Courier New" pitchFamily="34" charset="-122"/>
-                <a:cs typeface="Courier New" pitchFamily="34" charset="-120"/>
+                <a:latin typeface="JetBrains Mono" pitchFamily="34" charset="0"/>
+                <a:ea typeface="JetBrains Mono" pitchFamily="34" charset="-122"/>
+                <a:cs typeface="JetBrains Mono" pitchFamily="34" charset="-120"/>
               </a:rPr>
               <a:t>report↗</a:t>
             </a:r>
@@ -5031,9 +5031,9 @@
                 <a:solidFill>
                   <a:srgbClr val="DAFF94"/>
                 </a:solidFill>
-                <a:latin typeface="Cambria" pitchFamily="34" charset="0"/>
-                <a:ea typeface="Cambria" pitchFamily="34" charset="-122"/>
-                <a:cs typeface="Cambria" pitchFamily="34" charset="-120"/>
+                <a:latin typeface="Libre Baskerville" pitchFamily="34" charset="0"/>
+                <a:ea typeface="Libre Baskerville" pitchFamily="34" charset="-122"/>
+                <a:cs typeface="Libre Baskerville" pitchFamily="34" charset="-120"/>
               </a:rPr>
               <a:t>arpejo</a:t>
             </a:r>
@@ -5070,9 +5070,9 @@
                 <a:solidFill>
                   <a:srgbClr val="DAFF94"/>
                 </a:solidFill>
-                <a:latin typeface="Courier New" pitchFamily="34" charset="0"/>
-                <a:ea typeface="Courier New" pitchFamily="34" charset="-122"/>
-                <a:cs typeface="Courier New" pitchFamily="34" charset="-120"/>
+                <a:latin typeface="JetBrains Mono" pitchFamily="34" charset="0"/>
+                <a:ea typeface="JetBrains Mono" pitchFamily="34" charset="-122"/>
+                <a:cs typeface="JetBrains Mono" pitchFamily="34" charset="-120"/>
               </a:rPr>
               <a:t>agosto_26</a:t>
             </a:r>
@@ -5131,9 +5131,9 @@
                 <a:solidFill>
                   <a:srgbClr val="DAFF94"/>
                 </a:solidFill>
-                <a:latin typeface="Cambria" pitchFamily="34" charset="0"/>
-                <a:ea typeface="Cambria" pitchFamily="34" charset="-122"/>
-                <a:cs typeface="Cambria" pitchFamily="34" charset="-120"/>
+                <a:latin typeface="Libre Baskerville" pitchFamily="34" charset="0"/>
+                <a:ea typeface="Libre Baskerville" pitchFamily="34" charset="-122"/>
+                <a:cs typeface="Libre Baskerville" pitchFamily="34" charset="-120"/>
               </a:rPr>
               <a:t>TRENDS</a:t>
             </a:r>
@@ -5170,9 +5170,9 @@
                 <a:solidFill>
                   <a:srgbClr val="DAFF94"/>
                 </a:solidFill>
-                <a:latin typeface="Cambria" pitchFamily="34" charset="0"/>
-                <a:ea typeface="Cambria" pitchFamily="34" charset="-122"/>
-                <a:cs typeface="Cambria" pitchFamily="34" charset="-120"/>
+                <a:latin typeface="Libre Baskerville" pitchFamily="34" charset="0"/>
+                <a:ea typeface="Libre Baskerville" pitchFamily="34" charset="-122"/>
+                <a:cs typeface="Libre Baskerville" pitchFamily="34" charset="-120"/>
               </a:rPr>
               <a:t>NEW-WAVE</a:t>
             </a:r>
@@ -5187,9 +5187,9 @@
                 <a:solidFill>
                   <a:srgbClr val="DAFF94"/>
                 </a:solidFill>
-                <a:latin typeface="Cambria" pitchFamily="34" charset="0"/>
-                <a:ea typeface="Cambria" pitchFamily="34" charset="-122"/>
-                <a:cs typeface="Cambria" pitchFamily="34" charset="-120"/>
+                <a:latin typeface="Libre Baskerville" pitchFamily="34" charset="0"/>
+                <a:ea typeface="Libre Baskerville" pitchFamily="34" charset="-122"/>
+                <a:cs typeface="Libre Baskerville" pitchFamily="34" charset="-120"/>
               </a:rPr>
               <a:t>SPORT FANDOM</a:t>
             </a:r>
@@ -5287,9 +5287,9 @@
                 <a:solidFill>
                   <a:srgbClr val="DAFF94"/>
                 </a:solidFill>
-                <a:latin typeface="Courier New" pitchFamily="34" charset="0"/>
-                <a:ea typeface="Courier New" pitchFamily="34" charset="-122"/>
-                <a:cs typeface="Courier New" pitchFamily="34" charset="-120"/>
+                <a:latin typeface="JetBrains Mono" pitchFamily="34" charset="0"/>
+                <a:ea typeface="JetBrains Mono" pitchFamily="34" charset="-122"/>
+                <a:cs typeface="JetBrains Mono" pitchFamily="34" charset="-120"/>
               </a:rPr>
               <a:t>3 em cada 4 novos fãs de Fórmula 1 são mulheres.</a:t>
             </a:r>
@@ -5326,9 +5326,9 @@
                 <a:solidFill>
                   <a:srgbClr val="DAFF94"/>
                 </a:solidFill>
-                <a:latin typeface="Courier New" pitchFamily="34" charset="0"/>
-                <a:ea typeface="Courier New" pitchFamily="34" charset="-122"/>
-                <a:cs typeface="Courier New" pitchFamily="34" charset="-120"/>
+                <a:latin typeface="JetBrains Mono" pitchFamily="34" charset="0"/>
+                <a:ea typeface="JetBrains Mono" pitchFamily="34" charset="-122"/>
+                <a:cs typeface="JetBrains Mono" pitchFamily="34" charset="-120"/>
               </a:rPr>
               <a:t>4 / 5</a:t>
             </a:r>
@@ -5436,9 +5436,9 @@
                 <a:solidFill>
                   <a:srgbClr val="000000"/>
                 </a:solidFill>
-                <a:latin typeface="Courier New" pitchFamily="34" charset="0"/>
-                <a:ea typeface="Courier New" pitchFamily="34" charset="-122"/>
-                <a:cs typeface="Courier New" pitchFamily="34" charset="-120"/>
+                <a:latin typeface="JetBrains Mono" pitchFamily="34" charset="0"/>
+                <a:ea typeface="JetBrains Mono" pitchFamily="34" charset="-122"/>
+                <a:cs typeface="JetBrains Mono" pitchFamily="34" charset="-120"/>
               </a:rPr>
               <a:t>report↗</a:t>
             </a:r>
@@ -5475,9 +5475,9 @@
                 <a:solidFill>
                   <a:srgbClr val="000000"/>
                 </a:solidFill>
-                <a:latin typeface="Cambria" pitchFamily="34" charset="0"/>
-                <a:ea typeface="Cambria" pitchFamily="34" charset="-122"/>
-                <a:cs typeface="Cambria" pitchFamily="34" charset="-120"/>
+                <a:latin typeface="Libre Baskerville" pitchFamily="34" charset="0"/>
+                <a:ea typeface="Libre Baskerville" pitchFamily="34" charset="-122"/>
+                <a:cs typeface="Libre Baskerville" pitchFamily="34" charset="-120"/>
               </a:rPr>
               <a:t>arpejo</a:t>
             </a:r>
@@ -5514,9 +5514,9 @@
                 <a:solidFill>
                   <a:srgbClr val="000000"/>
                 </a:solidFill>
-                <a:latin typeface="Courier New" pitchFamily="34" charset="0"/>
-                <a:ea typeface="Courier New" pitchFamily="34" charset="-122"/>
-                <a:cs typeface="Courier New" pitchFamily="34" charset="-120"/>
+                <a:latin typeface="JetBrains Mono" pitchFamily="34" charset="0"/>
+                <a:ea typeface="JetBrains Mono" pitchFamily="34" charset="-122"/>
+                <a:cs typeface="JetBrains Mono" pitchFamily="34" charset="-120"/>
               </a:rPr>
               <a:t>agosto_26</a:t>
             </a:r>
@@ -5575,9 +5575,9 @@
                 <a:solidFill>
                   <a:srgbClr val="000000"/>
                 </a:solidFill>
-                <a:latin typeface="Cambria" pitchFamily="34" charset="0"/>
-                <a:ea typeface="Cambria" pitchFamily="34" charset="-122"/>
-                <a:cs typeface="Cambria" pitchFamily="34" charset="-120"/>
+                <a:latin typeface="Libre Baskerville" pitchFamily="34" charset="0"/>
+                <a:ea typeface="Libre Baskerville" pitchFamily="34" charset="-122"/>
+                <a:cs typeface="Libre Baskerville" pitchFamily="34" charset="-120"/>
               </a:rPr>
               <a:t>TRENDS</a:t>
             </a:r>
@@ -5614,9 +5614,9 @@
                 <a:solidFill>
                   <a:srgbClr val="000000"/>
                 </a:solidFill>
-                <a:latin typeface="Cambria" pitchFamily="34" charset="0"/>
-                <a:ea typeface="Cambria" pitchFamily="34" charset="-122"/>
-                <a:cs typeface="Cambria" pitchFamily="34" charset="-120"/>
+                <a:latin typeface="Libre Baskerville" pitchFamily="34" charset="0"/>
+                <a:ea typeface="Libre Baskerville" pitchFamily="34" charset="-122"/>
+                <a:cs typeface="Libre Baskerville" pitchFamily="34" charset="-120"/>
               </a:rPr>
               <a:t>EXPERIÊNCIAS</a:t>
             </a:r>
@@ -5631,9 +5631,9 @@
                 <a:solidFill>
                   <a:srgbClr val="000000"/>
                 </a:solidFill>
-                <a:latin typeface="Cambria" pitchFamily="34" charset="0"/>
-                <a:ea typeface="Cambria" pitchFamily="34" charset="-122"/>
-                <a:cs typeface="Cambria" pitchFamily="34" charset="-120"/>
+                <a:latin typeface="Libre Baskerville" pitchFamily="34" charset="0"/>
+                <a:ea typeface="Libre Baskerville" pitchFamily="34" charset="-122"/>
+                <a:cs typeface="Libre Baskerville" pitchFamily="34" charset="-120"/>
               </a:rPr>
               <a:t>TRANSFORMADORAS</a:t>
             </a:r>
@@ -5733,9 +5733,9 @@
                 <a:solidFill>
                   <a:srgbClr val="000000"/>
                 </a:solidFill>
-                <a:latin typeface="Courier New" pitchFamily="34" charset="0"/>
-                <a:ea typeface="Courier New" pitchFamily="34" charset="-122"/>
-                <a:cs typeface="Courier New" pitchFamily="34" charset="-120"/>
+                <a:latin typeface="JetBrains Mono" pitchFamily="34" charset="0"/>
+                <a:ea typeface="JetBrains Mono" pitchFamily="34" charset="-122"/>
+                <a:cs typeface="JetBrains Mono" pitchFamily="34" charset="-120"/>
               </a:rPr>
               <a:t>88% das pessoas buscam hoje vivências com propósito.</a:t>
             </a:r>
@@ -5772,9 +5772,9 @@
                 <a:solidFill>
                   <a:srgbClr val="000000"/>
                 </a:solidFill>
-                <a:latin typeface="Courier New" pitchFamily="34" charset="0"/>
-                <a:ea typeface="Courier New" pitchFamily="34" charset="-122"/>
-                <a:cs typeface="Courier New" pitchFamily="34" charset="-120"/>
+                <a:latin typeface="JetBrains Mono" pitchFamily="34" charset="0"/>
+                <a:ea typeface="JetBrains Mono" pitchFamily="34" charset="-122"/>
+                <a:cs typeface="JetBrains Mono" pitchFamily="34" charset="-120"/>
               </a:rPr>
               <a:t>5 / 5</a:t>
             </a:r>
@@ -7910,9 +7910,9 @@
                 <a:solidFill>
                   <a:srgbClr val="FFFFFF"/>
                 </a:solidFill>
-                <a:latin typeface="Cambria" pitchFamily="34" charset="0"/>
-                <a:ea typeface="Cambria" pitchFamily="34" charset="-122"/>
-                <a:cs typeface="Cambria" pitchFamily="34" charset="-120"/>
+                <a:latin typeface="Libre Baskerville" pitchFamily="34" charset="0"/>
+                <a:ea typeface="Libre Baskerville" pitchFamily="34" charset="-122"/>
+                <a:cs typeface="Libre Baskerville" pitchFamily="34" charset="-120"/>
               </a:rPr>
               <a:t>Esse é só um recorte</a:t>
             </a:r>
@@ -7927,9 +7927,9 @@
                 <a:solidFill>
                   <a:srgbClr val="FFFFFF"/>
                 </a:solidFill>
-                <a:latin typeface="Cambria" pitchFamily="34" charset="0"/>
-                <a:ea typeface="Cambria" pitchFamily="34" charset="-122"/>
-                <a:cs typeface="Cambria" pitchFamily="34" charset="-120"/>
+                <a:latin typeface="Libre Baskerville" pitchFamily="34" charset="0"/>
+                <a:ea typeface="Libre Baskerville" pitchFamily="34" charset="-122"/>
+                <a:cs typeface="Libre Baskerville" pitchFamily="34" charset="-120"/>
               </a:rPr>
               <a:t>do nosso .report mensal.</a:t>
             </a:r>
@@ -8039,9 +8039,9 @@
                 <a:solidFill>
                   <a:srgbClr val="FFFFFF"/>
                 </a:solidFill>
-                <a:latin typeface="Courier New" pitchFamily="34" charset="0"/>
-                <a:ea typeface="Courier New" pitchFamily="34" charset="-122"/>
-                <a:cs typeface="Courier New" pitchFamily="34" charset="-120"/>
+                <a:latin typeface="JetBrains Mono" pitchFamily="34" charset="0"/>
+                <a:ea typeface="JetBrains Mono" pitchFamily="34" charset="-122"/>
+                <a:cs typeface="JetBrains Mono" pitchFamily="34" charset="-120"/>
               </a:rPr>
               <a:t>Fala com a gente → @arpejo</a:t>
             </a:r>

--- a/entregas-agosto26/carrossel-instagram-agosto26.pptx
+++ b/entregas-agosto26/carrossel-instagram-agosto26.pptx
@@ -3281,165 +3281,105 @@
           </a:p>
         </p:txBody>
       </p:sp>
-      <p:sp>
-        <p:nvSpPr>
-          <p:cNvPr id="50" name="Text 48"/>
-          <p:cNvSpPr/>
-          <p:nvPr/>
-        </p:nvSpPr>
-        <p:spPr>
-          <a:xfrm>
-            <a:off x="365760" y="365760"/>
-            <a:ext cx="365760" cy="365760"/>
-          </a:xfrm>
-          <a:prstGeom prst="rect">
-            <a:avLst/>
-          </a:prstGeom>
-          <a:noFill/>
-          <a:ln/>
-        </p:spPr>
-        <p:txBody>
-          <a:bodyPr wrap="square" lIns="0" tIns="0" rIns="0" bIns="0" rtlCol="0" anchor="ctr"/>
-          <a:lstStyle/>
-          <a:p>
-            <a:pPr algn="ctr" indent="0" marL="0">
-              <a:buNone/>
-            </a:pPr>
-            <a:r>
-              <a:rPr lang="en-US" sz="2200" b="1" dirty="0">
-                <a:solidFill>
-                  <a:srgbClr val="DAFF94"/>
-                </a:solidFill>
-                <a:latin typeface="Arial" pitchFamily="34" charset="0"/>
-                <a:ea typeface="Arial" pitchFamily="34" charset="-122"/>
-                <a:cs typeface="Arial" pitchFamily="34" charset="-120"/>
-              </a:rPr>
-              <a:t>↖</a:t>
-            </a:r>
-            <a:endParaRPr lang="en-US" sz="2200" dirty="0"/>
-          </a:p>
-        </p:txBody>
-      </p:sp>
-      <p:sp>
-        <p:nvSpPr>
-          <p:cNvPr id="51" name="Text 49"/>
-          <p:cNvSpPr/>
-          <p:nvPr/>
-        </p:nvSpPr>
-        <p:spPr>
-          <a:xfrm>
-            <a:off x="7498080" y="365760"/>
-            <a:ext cx="365760" cy="365760"/>
-          </a:xfrm>
-          <a:prstGeom prst="rect">
-            <a:avLst/>
-          </a:prstGeom>
-          <a:noFill/>
-          <a:ln/>
-        </p:spPr>
-        <p:txBody>
-          <a:bodyPr wrap="square" lIns="0" tIns="0" rIns="0" bIns="0" rtlCol="0" anchor="ctr"/>
-          <a:lstStyle/>
-          <a:p>
-            <a:pPr algn="ctr" indent="0" marL="0">
-              <a:buNone/>
-            </a:pPr>
-            <a:r>
-              <a:rPr lang="en-US" sz="2200" b="1" dirty="0">
-                <a:solidFill>
-                  <a:srgbClr val="DAFF94"/>
-                </a:solidFill>
-                <a:latin typeface="Arial" pitchFamily="34" charset="0"/>
-                <a:ea typeface="Arial" pitchFamily="34" charset="-122"/>
-                <a:cs typeface="Arial" pitchFamily="34" charset="-120"/>
-              </a:rPr>
-              <a:t>↗</a:t>
-            </a:r>
-            <a:endParaRPr lang="en-US" sz="2200" dirty="0"/>
-          </a:p>
-        </p:txBody>
-      </p:sp>
-      <p:sp>
-        <p:nvSpPr>
-          <p:cNvPr id="52" name="Text 50"/>
-          <p:cNvSpPr/>
-          <p:nvPr/>
-        </p:nvSpPr>
-        <p:spPr>
-          <a:xfrm>
-            <a:off x="365760" y="9555480"/>
-            <a:ext cx="365760" cy="365760"/>
-          </a:xfrm>
-          <a:prstGeom prst="rect">
-            <a:avLst/>
-          </a:prstGeom>
-          <a:noFill/>
-          <a:ln/>
-        </p:spPr>
-        <p:txBody>
-          <a:bodyPr wrap="square" lIns="0" tIns="0" rIns="0" bIns="0" rtlCol="0" anchor="ctr"/>
-          <a:lstStyle/>
-          <a:p>
-            <a:pPr algn="ctr" indent="0" marL="0">
-              <a:buNone/>
-            </a:pPr>
-            <a:r>
-              <a:rPr lang="en-US" sz="2200" b="1" dirty="0">
-                <a:solidFill>
-                  <a:srgbClr val="DAFF94"/>
-                </a:solidFill>
-                <a:latin typeface="Arial" pitchFamily="34" charset="0"/>
-                <a:ea typeface="Arial" pitchFamily="34" charset="-122"/>
-                <a:cs typeface="Arial" pitchFamily="34" charset="-120"/>
-              </a:rPr>
-              <a:t>↙</a:t>
-            </a:r>
-            <a:endParaRPr lang="en-US" sz="2200" dirty="0"/>
-          </a:p>
-        </p:txBody>
-      </p:sp>
-      <p:sp>
-        <p:nvSpPr>
-          <p:cNvPr id="53" name="Text 51"/>
-          <p:cNvSpPr/>
-          <p:nvPr/>
-        </p:nvSpPr>
-        <p:spPr>
-          <a:xfrm>
-            <a:off x="7498080" y="9555480"/>
-            <a:ext cx="365760" cy="365760"/>
-          </a:xfrm>
-          <a:prstGeom prst="rect">
-            <a:avLst/>
-          </a:prstGeom>
-          <a:noFill/>
-          <a:ln/>
-        </p:spPr>
-        <p:txBody>
-          <a:bodyPr wrap="square" lIns="0" tIns="0" rIns="0" bIns="0" rtlCol="0" anchor="ctr"/>
-          <a:lstStyle/>
-          <a:p>
-            <a:pPr algn="ctr" indent="0" marL="0">
-              <a:buNone/>
-            </a:pPr>
-            <a:r>
-              <a:rPr lang="en-US" sz="2200" b="1" dirty="0">
-                <a:solidFill>
-                  <a:srgbClr val="DAFF94"/>
-                </a:solidFill>
-                <a:latin typeface="Arial" pitchFamily="34" charset="0"/>
-                <a:ea typeface="Arial" pitchFamily="34" charset="-122"/>
-                <a:cs typeface="Arial" pitchFamily="34" charset="-120"/>
-              </a:rPr>
-              <a:t>↘</a:t>
-            </a:r>
-            <a:endParaRPr lang="en-US" sz="2200" dirty="0"/>
-          </a:p>
-        </p:txBody>
-      </p:sp>
-      <p:sp>
-        <p:nvSpPr>
-          <p:cNvPr id="54" name="Text 52"/>
+      <p:pic>
+        <p:nvPicPr>
+          <p:cNvPr id="50" name="Image 0" descr="/home/user/data-manipulation-exercises/.claude/skills/brand-guidelines/assets/textures/arrow-lime.png">    </p:cNvPr>
+          <p:cNvPicPr>
+            <a:picLocks noChangeAspect="1"/>
+          </p:cNvPicPr>
+          <p:nvPr/>
+        </p:nvPicPr>
+        <p:blipFill>
+          <a:blip r:embed="rId1"/>
+          <a:stretch>
+            <a:fillRect/>
+          </a:stretch>
+        </p:blipFill>
+        <p:spPr>
+          <a:xfrm rot="16200000">
+            <a:off x="320040" y="320040"/>
+            <a:ext cx="292608" cy="292608"/>
+          </a:xfrm>
+          <a:prstGeom prst="rect">
+            <a:avLst/>
+          </a:prstGeom>
+        </p:spPr>
+      </p:pic>
+      <p:pic>
+        <p:nvPicPr>
+          <p:cNvPr id="51" name="Image 1" descr="/home/user/data-manipulation-exercises/.claude/skills/brand-guidelines/assets/textures/arrow-lime.png">    </p:cNvPr>
+          <p:cNvPicPr>
+            <a:picLocks noChangeAspect="1"/>
+          </p:cNvPicPr>
+          <p:nvPr/>
+        </p:nvPicPr>
+        <p:blipFill>
+          <a:blip r:embed="rId2"/>
+          <a:stretch>
+            <a:fillRect/>
+          </a:stretch>
+        </p:blipFill>
+        <p:spPr>
+          <a:xfrm>
+            <a:off x="7616952" y="320040"/>
+            <a:ext cx="292608" cy="292608"/>
+          </a:xfrm>
+          <a:prstGeom prst="rect">
+            <a:avLst/>
+          </a:prstGeom>
+        </p:spPr>
+      </p:pic>
+      <p:pic>
+        <p:nvPicPr>
+          <p:cNvPr id="52" name="Image 2" descr="/home/user/data-manipulation-exercises/.claude/skills/brand-guidelines/assets/textures/arrow-lime.png">    </p:cNvPr>
+          <p:cNvPicPr>
+            <a:picLocks noChangeAspect="1"/>
+          </p:cNvPicPr>
+          <p:nvPr/>
+        </p:nvPicPr>
+        <p:blipFill>
+          <a:blip r:embed="rId3"/>
+          <a:stretch>
+            <a:fillRect/>
+          </a:stretch>
+        </p:blipFill>
+        <p:spPr>
+          <a:xfrm rot="10800000">
+            <a:off x="320040" y="9674352"/>
+            <a:ext cx="292608" cy="292608"/>
+          </a:xfrm>
+          <a:prstGeom prst="rect">
+            <a:avLst/>
+          </a:prstGeom>
+        </p:spPr>
+      </p:pic>
+      <p:pic>
+        <p:nvPicPr>
+          <p:cNvPr id="53" name="Image 3" descr="/home/user/data-manipulation-exercises/.claude/skills/brand-guidelines/assets/textures/arrow-lime.png">    </p:cNvPr>
+          <p:cNvPicPr>
+            <a:picLocks noChangeAspect="1"/>
+          </p:cNvPicPr>
+          <p:nvPr/>
+        </p:nvPicPr>
+        <p:blipFill>
+          <a:blip r:embed="rId4"/>
+          <a:stretch>
+            <a:fillRect/>
+          </a:stretch>
+        </p:blipFill>
+        <p:spPr>
+          <a:xfrm rot="5400000">
+            <a:off x="7616952" y="9674352"/>
+            <a:ext cx="292608" cy="292608"/>
+          </a:xfrm>
+          <a:prstGeom prst="rect">
+            <a:avLst/>
+          </a:prstGeom>
+        </p:spPr>
+      </p:pic>
+      <p:sp>
+        <p:nvSpPr>
+          <p:cNvPr id="54" name="Text 48"/>
           <p:cNvSpPr/>
           <p:nvPr/>
         </p:nvSpPr>
@@ -3495,7 +3435,7 @@
       </p:sp>
       <p:sp>
         <p:nvSpPr>
-          <p:cNvPr id="55" name="Text 53"/>
+          <p:cNvPr id="55" name="Text 49"/>
           <p:cNvSpPr/>
           <p:nvPr/>
         </p:nvSpPr>
@@ -3534,7 +3474,7 @@
       </p:sp>
       <p:sp>
         <p:nvSpPr>
-          <p:cNvPr id="56" name="Text 54"/>
+          <p:cNvPr id="56" name="Text 50"/>
           <p:cNvSpPr/>
           <p:nvPr/>
         </p:nvSpPr>
@@ -3573,14 +3513,14 @@
       </p:sp>
       <p:pic>
         <p:nvPicPr>
-          <p:cNvPr id="57" name="Image 0" descr="/home/user/data-manipulation-exercises/.claude/skills/arpejo-report-desdobramento/assets/arpejo-report-logo.png">    </p:cNvPr>
+          <p:cNvPr id="57" name="Image 4" descr="/home/user/data-manipulation-exercises/.claude/skills/arpejo-report-desdobramento/assets/arpejo-report-logo.png">    </p:cNvPr>
           <p:cNvPicPr>
             <a:picLocks noChangeAspect="1"/>
           </p:cNvPicPr>
           <p:nvPr/>
         </p:nvPicPr>
         <p:blipFill>
-          <a:blip r:embed="rId1"/>
+          <a:blip r:embed="rId5"/>
           <a:stretch>
             <a:fillRect/>
           </a:stretch>
@@ -3805,9 +3745,33 @@
           </a:p>
         </p:txBody>
       </p:sp>
-      <p:sp>
-        <p:nvSpPr>
-          <p:cNvPr id="7" name="Text 5"/>
+      <p:pic>
+        <p:nvPicPr>
+          <p:cNvPr id="7" name="Image 0" descr="/home/user/data-manipulation-exercises/.claude/skills/brand-guidelines/assets/textures/globe-lime.png">    </p:cNvPr>
+          <p:cNvPicPr>
+            <a:picLocks noChangeAspect="1"/>
+          </p:cNvPicPr>
+          <p:nvPr/>
+        </p:nvPicPr>
+        <p:blipFill>
+          <a:blip r:embed="rId1"/>
+          <a:stretch>
+            <a:fillRect/>
+          </a:stretch>
+        </p:blipFill>
+        <p:spPr>
+          <a:xfrm>
+            <a:off x="5389656" y="1374343"/>
+            <a:ext cx="268834" cy="268834"/>
+          </a:xfrm>
+          <a:prstGeom prst="rect">
+            <a:avLst/>
+          </a:prstGeom>
+        </p:spPr>
+      </p:pic>
+      <p:sp>
+        <p:nvSpPr>
+          <p:cNvPr id="8" name="Text 5"/>
           <p:cNvSpPr/>
           <p:nvPr/>
         </p:nvSpPr>
@@ -3863,7 +3827,7 @@
       </p:sp>
       <p:sp>
         <p:nvSpPr>
-          <p:cNvPr id="8" name="Shape 6"/>
+          <p:cNvPr id="9" name="Shape 6"/>
           <p:cNvSpPr/>
           <p:nvPr/>
         </p:nvSpPr>
@@ -3885,7 +3849,7 @@
       </p:sp>
       <p:sp>
         <p:nvSpPr>
-          <p:cNvPr id="9" name="Text 7"/>
+          <p:cNvPr id="10" name="Text 7"/>
           <p:cNvSpPr/>
           <p:nvPr/>
         </p:nvSpPr>
@@ -3924,7 +3888,7 @@
       </p:sp>
       <p:sp>
         <p:nvSpPr>
-          <p:cNvPr id="10" name="Text 8"/>
+          <p:cNvPr id="11" name="Text 8"/>
           <p:cNvSpPr/>
           <p:nvPr/>
         </p:nvSpPr>
@@ -3963,7 +3927,7 @@
       </p:sp>
       <p:sp>
         <p:nvSpPr>
-          <p:cNvPr id="11" name="Text 9"/>
+          <p:cNvPr id="12" name="Text 9"/>
           <p:cNvSpPr/>
           <p:nvPr/>
         </p:nvSpPr>
@@ -4000,45 +3964,30 @@
           </a:p>
         </p:txBody>
       </p:sp>
-      <p:sp>
-        <p:nvSpPr>
-          <p:cNvPr id="12" name="Text 10"/>
-          <p:cNvSpPr/>
-          <p:nvPr/>
-        </p:nvSpPr>
-        <p:spPr>
-          <a:xfrm>
+      <p:pic>
+        <p:nvPicPr>
+          <p:cNvPr id="13" name="Image 1" descr="/home/user/data-manipulation-exercises/.claude/skills/brand-guidelines/assets/textures/arrow-lime.png">    </p:cNvPr>
+          <p:cNvPicPr>
+            <a:picLocks noChangeAspect="1"/>
+          </p:cNvPicPr>
+          <p:nvPr/>
+        </p:nvPicPr>
+        <p:blipFill>
+          <a:blip r:embed="rId2"/>
+          <a:stretch>
+            <a:fillRect/>
+          </a:stretch>
+        </p:blipFill>
+        <p:spPr>
+          <a:xfrm rot="5400000">
             <a:off x="7223760" y="9281160"/>
-            <a:ext cx="457200" cy="457200"/>
-          </a:xfrm>
-          <a:prstGeom prst="rect">
-            <a:avLst/>
-          </a:prstGeom>
-          <a:noFill/>
-          <a:ln/>
-        </p:spPr>
-        <p:txBody>
-          <a:bodyPr wrap="square" lIns="0" tIns="0" rIns="0" bIns="0" rtlCol="0" anchor="ctr"/>
-          <a:lstStyle/>
-          <a:p>
-            <a:pPr algn="ctr" indent="0" marL="0">
-              <a:buNone/>
-            </a:pPr>
-            <a:r>
-              <a:rPr lang="en-US" sz="2600" b="1" dirty="0">
-                <a:solidFill>
-                  <a:srgbClr val="DAFF94"/>
-                </a:solidFill>
-                <a:latin typeface="Arial" pitchFamily="34" charset="0"/>
-                <a:ea typeface="Arial" pitchFamily="34" charset="-122"/>
-                <a:cs typeface="Arial" pitchFamily="34" charset="-120"/>
-              </a:rPr>
-              <a:t>↘</a:t>
-            </a:r>
-            <a:endParaRPr lang="en-US" sz="2600" dirty="0"/>
-          </a:p>
-        </p:txBody>
-      </p:sp>
+            <a:ext cx="292608" cy="292608"/>
+          </a:xfrm>
+          <a:prstGeom prst="rect">
+            <a:avLst/>
+          </a:prstGeom>
+        </p:spPr>
+      </p:pic>
     </p:spTree>
   </p:cSld>
   <p:clrMapOvr>
@@ -4249,9 +4198,33 @@
           </a:p>
         </p:txBody>
       </p:sp>
-      <p:sp>
-        <p:nvSpPr>
-          <p:cNvPr id="7" name="Text 5"/>
+      <p:pic>
+        <p:nvPicPr>
+          <p:cNvPr id="7" name="Image 0" descr="/home/user/data-manipulation-exercises/.claude/skills/brand-guidelines/assets/textures/globe-black.png">    </p:cNvPr>
+          <p:cNvPicPr>
+            <a:picLocks noChangeAspect="1"/>
+          </p:cNvPicPr>
+          <p:nvPr/>
+        </p:nvPicPr>
+        <p:blipFill>
+          <a:blip r:embed="rId1"/>
+          <a:stretch>
+            <a:fillRect/>
+          </a:stretch>
+        </p:blipFill>
+        <p:spPr>
+          <a:xfrm>
+            <a:off x="5389656" y="1374343"/>
+            <a:ext cx="268834" cy="268834"/>
+          </a:xfrm>
+          <a:prstGeom prst="rect">
+            <a:avLst/>
+          </a:prstGeom>
+        </p:spPr>
+      </p:pic>
+      <p:sp>
+        <p:nvSpPr>
+          <p:cNvPr id="8" name="Text 5"/>
           <p:cNvSpPr/>
           <p:nvPr/>
         </p:nvSpPr>
@@ -4307,7 +4280,7 @@
       </p:sp>
       <p:sp>
         <p:nvSpPr>
-          <p:cNvPr id="8" name="Shape 6"/>
+          <p:cNvPr id="9" name="Shape 6"/>
           <p:cNvSpPr/>
           <p:nvPr/>
         </p:nvSpPr>
@@ -4331,7 +4304,7 @@
       </p:sp>
       <p:sp>
         <p:nvSpPr>
-          <p:cNvPr id="9" name="Text 7"/>
+          <p:cNvPr id="10" name="Text 7"/>
           <p:cNvSpPr/>
           <p:nvPr/>
         </p:nvSpPr>
@@ -4370,7 +4343,7 @@
       </p:sp>
       <p:sp>
         <p:nvSpPr>
-          <p:cNvPr id="10" name="Text 8"/>
+          <p:cNvPr id="11" name="Text 8"/>
           <p:cNvSpPr/>
           <p:nvPr/>
         </p:nvSpPr>
@@ -4409,7 +4382,7 @@
       </p:sp>
       <p:sp>
         <p:nvSpPr>
-          <p:cNvPr id="11" name="Text 9"/>
+          <p:cNvPr id="12" name="Text 9"/>
           <p:cNvSpPr/>
           <p:nvPr/>
         </p:nvSpPr>
@@ -4446,45 +4419,30 @@
           </a:p>
         </p:txBody>
       </p:sp>
-      <p:sp>
-        <p:nvSpPr>
-          <p:cNvPr id="12" name="Text 10"/>
-          <p:cNvSpPr/>
-          <p:nvPr/>
-        </p:nvSpPr>
-        <p:spPr>
-          <a:xfrm>
+      <p:pic>
+        <p:nvPicPr>
+          <p:cNvPr id="13" name="Image 1" descr="/home/user/data-manipulation-exercises/.claude/skills/brand-guidelines/assets/textures/arrow-black.png">    </p:cNvPr>
+          <p:cNvPicPr>
+            <a:picLocks noChangeAspect="1"/>
+          </p:cNvPicPr>
+          <p:nvPr/>
+        </p:nvPicPr>
+        <p:blipFill>
+          <a:blip r:embed="rId2"/>
+          <a:stretch>
+            <a:fillRect/>
+          </a:stretch>
+        </p:blipFill>
+        <p:spPr>
+          <a:xfrm rot="5400000">
             <a:off x="7223760" y="9281160"/>
-            <a:ext cx="457200" cy="457200"/>
-          </a:xfrm>
-          <a:prstGeom prst="rect">
-            <a:avLst/>
-          </a:prstGeom>
-          <a:noFill/>
-          <a:ln/>
-        </p:spPr>
-        <p:txBody>
-          <a:bodyPr wrap="square" lIns="0" tIns="0" rIns="0" bIns="0" rtlCol="0" anchor="ctr"/>
-          <a:lstStyle/>
-          <a:p>
-            <a:pPr algn="ctr" indent="0" marL="0">
-              <a:buNone/>
-            </a:pPr>
-            <a:r>
-              <a:rPr lang="en-US" sz="2600" b="1" dirty="0">
-                <a:solidFill>
-                  <a:srgbClr val="000000"/>
-                </a:solidFill>
-                <a:latin typeface="Arial" pitchFamily="34" charset="0"/>
-                <a:ea typeface="Arial" pitchFamily="34" charset="-122"/>
-                <a:cs typeface="Arial" pitchFamily="34" charset="-120"/>
-              </a:rPr>
-              <a:t>↘</a:t>
-            </a:r>
-            <a:endParaRPr lang="en-US" sz="2600" dirty="0"/>
-          </a:p>
-        </p:txBody>
-      </p:sp>
+            <a:ext cx="292608" cy="292608"/>
+          </a:xfrm>
+          <a:prstGeom prst="rect">
+            <a:avLst/>
+          </a:prstGeom>
+        </p:spPr>
+      </p:pic>
     </p:spTree>
   </p:cSld>
   <p:clrMapOvr>
@@ -4695,9 +4653,33 @@
           </a:p>
         </p:txBody>
       </p:sp>
-      <p:sp>
-        <p:nvSpPr>
-          <p:cNvPr id="7" name="Text 5"/>
+      <p:pic>
+        <p:nvPicPr>
+          <p:cNvPr id="7" name="Image 0" descr="/home/user/data-manipulation-exercises/.claude/skills/brand-guidelines/assets/textures/globe-black.png">    </p:cNvPr>
+          <p:cNvPicPr>
+            <a:picLocks noChangeAspect="1"/>
+          </p:cNvPicPr>
+          <p:nvPr/>
+        </p:nvPicPr>
+        <p:blipFill>
+          <a:blip r:embed="rId1"/>
+          <a:stretch>
+            <a:fillRect/>
+          </a:stretch>
+        </p:blipFill>
+        <p:spPr>
+          <a:xfrm>
+            <a:off x="5389656" y="1374343"/>
+            <a:ext cx="268834" cy="268834"/>
+          </a:xfrm>
+          <a:prstGeom prst="rect">
+            <a:avLst/>
+          </a:prstGeom>
+        </p:spPr>
+      </p:pic>
+      <p:sp>
+        <p:nvSpPr>
+          <p:cNvPr id="8" name="Text 5"/>
           <p:cNvSpPr/>
           <p:nvPr/>
         </p:nvSpPr>
@@ -4753,7 +4735,7 @@
       </p:sp>
       <p:sp>
         <p:nvSpPr>
-          <p:cNvPr id="8" name="Shape 6"/>
+          <p:cNvPr id="9" name="Shape 6"/>
           <p:cNvSpPr/>
           <p:nvPr/>
         </p:nvSpPr>
@@ -4777,7 +4759,7 @@
       </p:sp>
       <p:sp>
         <p:nvSpPr>
-          <p:cNvPr id="9" name="Text 7"/>
+          <p:cNvPr id="10" name="Text 7"/>
           <p:cNvSpPr/>
           <p:nvPr/>
         </p:nvSpPr>
@@ -4816,7 +4798,7 @@
       </p:sp>
       <p:sp>
         <p:nvSpPr>
-          <p:cNvPr id="10" name="Text 8"/>
+          <p:cNvPr id="11" name="Text 8"/>
           <p:cNvSpPr/>
           <p:nvPr/>
         </p:nvSpPr>
@@ -4855,7 +4837,7 @@
       </p:sp>
       <p:sp>
         <p:nvSpPr>
-          <p:cNvPr id="11" name="Text 9"/>
+          <p:cNvPr id="12" name="Text 9"/>
           <p:cNvSpPr/>
           <p:nvPr/>
         </p:nvSpPr>
@@ -4892,45 +4874,30 @@
           </a:p>
         </p:txBody>
       </p:sp>
-      <p:sp>
-        <p:nvSpPr>
-          <p:cNvPr id="12" name="Text 10"/>
-          <p:cNvSpPr/>
-          <p:nvPr/>
-        </p:nvSpPr>
-        <p:spPr>
-          <a:xfrm>
+      <p:pic>
+        <p:nvPicPr>
+          <p:cNvPr id="13" name="Image 1" descr="/home/user/data-manipulation-exercises/.claude/skills/brand-guidelines/assets/textures/arrow-black.png">    </p:cNvPr>
+          <p:cNvPicPr>
+            <a:picLocks noChangeAspect="1"/>
+          </p:cNvPicPr>
+          <p:nvPr/>
+        </p:nvPicPr>
+        <p:blipFill>
+          <a:blip r:embed="rId2"/>
+          <a:stretch>
+            <a:fillRect/>
+          </a:stretch>
+        </p:blipFill>
+        <p:spPr>
+          <a:xfrm rot="5400000">
             <a:off x="7223760" y="9281160"/>
-            <a:ext cx="457200" cy="457200"/>
-          </a:xfrm>
-          <a:prstGeom prst="rect">
-            <a:avLst/>
-          </a:prstGeom>
-          <a:noFill/>
-          <a:ln/>
-        </p:spPr>
-        <p:txBody>
-          <a:bodyPr wrap="square" lIns="0" tIns="0" rIns="0" bIns="0" rtlCol="0" anchor="ctr"/>
-          <a:lstStyle/>
-          <a:p>
-            <a:pPr algn="ctr" indent="0" marL="0">
-              <a:buNone/>
-            </a:pPr>
-            <a:r>
-              <a:rPr lang="en-US" sz="2600" b="1" dirty="0">
-                <a:solidFill>
-                  <a:srgbClr val="000000"/>
-                </a:solidFill>
-                <a:latin typeface="Arial" pitchFamily="34" charset="0"/>
-                <a:ea typeface="Arial" pitchFamily="34" charset="-122"/>
-                <a:cs typeface="Arial" pitchFamily="34" charset="-120"/>
-              </a:rPr>
-              <a:t>↘</a:t>
-            </a:r>
-            <a:endParaRPr lang="en-US" sz="2600" dirty="0"/>
-          </a:p>
-        </p:txBody>
-      </p:sp>
+            <a:ext cx="292608" cy="292608"/>
+          </a:xfrm>
+          <a:prstGeom prst="rect">
+            <a:avLst/>
+          </a:prstGeom>
+        </p:spPr>
+      </p:pic>
     </p:spTree>
   </p:cSld>
   <p:clrMapOvr>
@@ -5141,9 +5108,33 @@
           </a:p>
         </p:txBody>
       </p:sp>
-      <p:sp>
-        <p:nvSpPr>
-          <p:cNvPr id="7" name="Text 5"/>
+      <p:pic>
+        <p:nvPicPr>
+          <p:cNvPr id="7" name="Image 0" descr="/home/user/data-manipulation-exercises/.claude/skills/brand-guidelines/assets/textures/globe-lime.png">    </p:cNvPr>
+          <p:cNvPicPr>
+            <a:picLocks noChangeAspect="1"/>
+          </p:cNvPicPr>
+          <p:nvPr/>
+        </p:nvPicPr>
+        <p:blipFill>
+          <a:blip r:embed="rId1"/>
+          <a:stretch>
+            <a:fillRect/>
+          </a:stretch>
+        </p:blipFill>
+        <p:spPr>
+          <a:xfrm>
+            <a:off x="5389656" y="1374343"/>
+            <a:ext cx="268834" cy="268834"/>
+          </a:xfrm>
+          <a:prstGeom prst="rect">
+            <a:avLst/>
+          </a:prstGeom>
+        </p:spPr>
+      </p:pic>
+      <p:sp>
+        <p:nvSpPr>
+          <p:cNvPr id="8" name="Text 5"/>
           <p:cNvSpPr/>
           <p:nvPr/>
         </p:nvSpPr>
@@ -5199,7 +5190,7 @@
       </p:sp>
       <p:sp>
         <p:nvSpPr>
-          <p:cNvPr id="8" name="Shape 6"/>
+          <p:cNvPr id="9" name="Shape 6"/>
           <p:cNvSpPr/>
           <p:nvPr/>
         </p:nvSpPr>
@@ -5221,7 +5212,7 @@
       </p:sp>
       <p:sp>
         <p:nvSpPr>
-          <p:cNvPr id="9" name="Text 7"/>
+          <p:cNvPr id="10" name="Text 7"/>
           <p:cNvSpPr/>
           <p:nvPr/>
         </p:nvSpPr>
@@ -5260,7 +5251,7 @@
       </p:sp>
       <p:sp>
         <p:nvSpPr>
-          <p:cNvPr id="10" name="Text 8"/>
+          <p:cNvPr id="11" name="Text 8"/>
           <p:cNvSpPr/>
           <p:nvPr/>
         </p:nvSpPr>
@@ -5299,7 +5290,7 @@
       </p:sp>
       <p:sp>
         <p:nvSpPr>
-          <p:cNvPr id="11" name="Text 9"/>
+          <p:cNvPr id="12" name="Text 9"/>
           <p:cNvSpPr/>
           <p:nvPr/>
         </p:nvSpPr>
@@ -5336,45 +5327,30 @@
           </a:p>
         </p:txBody>
       </p:sp>
-      <p:sp>
-        <p:nvSpPr>
-          <p:cNvPr id="12" name="Text 10"/>
-          <p:cNvSpPr/>
-          <p:nvPr/>
-        </p:nvSpPr>
-        <p:spPr>
-          <a:xfrm>
+      <p:pic>
+        <p:nvPicPr>
+          <p:cNvPr id="13" name="Image 1" descr="/home/user/data-manipulation-exercises/.claude/skills/brand-guidelines/assets/textures/arrow-lime.png">    </p:cNvPr>
+          <p:cNvPicPr>
+            <a:picLocks noChangeAspect="1"/>
+          </p:cNvPicPr>
+          <p:nvPr/>
+        </p:nvPicPr>
+        <p:blipFill>
+          <a:blip r:embed="rId2"/>
+          <a:stretch>
+            <a:fillRect/>
+          </a:stretch>
+        </p:blipFill>
+        <p:spPr>
+          <a:xfrm rot="5400000">
             <a:off x="7223760" y="9281160"/>
-            <a:ext cx="457200" cy="457200"/>
-          </a:xfrm>
-          <a:prstGeom prst="rect">
-            <a:avLst/>
-          </a:prstGeom>
-          <a:noFill/>
-          <a:ln/>
-        </p:spPr>
-        <p:txBody>
-          <a:bodyPr wrap="square" lIns="0" tIns="0" rIns="0" bIns="0" rtlCol="0" anchor="ctr"/>
-          <a:lstStyle/>
-          <a:p>
-            <a:pPr algn="ctr" indent="0" marL="0">
-              <a:buNone/>
-            </a:pPr>
-            <a:r>
-              <a:rPr lang="en-US" sz="2600" b="1" dirty="0">
-                <a:solidFill>
-                  <a:srgbClr val="DAFF94"/>
-                </a:solidFill>
-                <a:latin typeface="Arial" pitchFamily="34" charset="0"/>
-                <a:ea typeface="Arial" pitchFamily="34" charset="-122"/>
-                <a:cs typeface="Arial" pitchFamily="34" charset="-120"/>
-              </a:rPr>
-              <a:t>↘</a:t>
-            </a:r>
-            <a:endParaRPr lang="en-US" sz="2600" dirty="0"/>
-          </a:p>
-        </p:txBody>
-      </p:sp>
+            <a:ext cx="292608" cy="292608"/>
+          </a:xfrm>
+          <a:prstGeom prst="rect">
+            <a:avLst/>
+          </a:prstGeom>
+        </p:spPr>
+      </p:pic>
     </p:spTree>
   </p:cSld>
   <p:clrMapOvr>
@@ -5585,9 +5561,33 @@
           </a:p>
         </p:txBody>
       </p:sp>
-      <p:sp>
-        <p:nvSpPr>
-          <p:cNvPr id="7" name="Text 5"/>
+      <p:pic>
+        <p:nvPicPr>
+          <p:cNvPr id="7" name="Image 0" descr="/home/user/data-manipulation-exercises/.claude/skills/brand-guidelines/assets/textures/globe-black.png">    </p:cNvPr>
+          <p:cNvPicPr>
+            <a:picLocks noChangeAspect="1"/>
+          </p:cNvPicPr>
+          <p:nvPr/>
+        </p:nvPicPr>
+        <p:blipFill>
+          <a:blip r:embed="rId1"/>
+          <a:stretch>
+            <a:fillRect/>
+          </a:stretch>
+        </p:blipFill>
+        <p:spPr>
+          <a:xfrm>
+            <a:off x="5389656" y="1374343"/>
+            <a:ext cx="268834" cy="268834"/>
+          </a:xfrm>
+          <a:prstGeom prst="rect">
+            <a:avLst/>
+          </a:prstGeom>
+        </p:spPr>
+      </p:pic>
+      <p:sp>
+        <p:nvSpPr>
+          <p:cNvPr id="8" name="Text 5"/>
           <p:cNvSpPr/>
           <p:nvPr/>
         </p:nvSpPr>
@@ -5643,7 +5643,7 @@
       </p:sp>
       <p:sp>
         <p:nvSpPr>
-          <p:cNvPr id="8" name="Shape 6"/>
+          <p:cNvPr id="9" name="Shape 6"/>
           <p:cNvSpPr/>
           <p:nvPr/>
         </p:nvSpPr>
@@ -5667,7 +5667,7 @@
       </p:sp>
       <p:sp>
         <p:nvSpPr>
-          <p:cNvPr id="9" name="Text 7"/>
+          <p:cNvPr id="10" name="Text 7"/>
           <p:cNvSpPr/>
           <p:nvPr/>
         </p:nvSpPr>
@@ -5706,7 +5706,7 @@
       </p:sp>
       <p:sp>
         <p:nvSpPr>
-          <p:cNvPr id="10" name="Text 8"/>
+          <p:cNvPr id="11" name="Text 8"/>
           <p:cNvSpPr/>
           <p:nvPr/>
         </p:nvSpPr>
@@ -5745,7 +5745,7 @@
       </p:sp>
       <p:sp>
         <p:nvSpPr>
-          <p:cNvPr id="11" name="Text 9"/>
+          <p:cNvPr id="12" name="Text 9"/>
           <p:cNvSpPr/>
           <p:nvPr/>
         </p:nvSpPr>
@@ -5782,45 +5782,30 @@
           </a:p>
         </p:txBody>
       </p:sp>
-      <p:sp>
-        <p:nvSpPr>
-          <p:cNvPr id="12" name="Text 10"/>
-          <p:cNvSpPr/>
-          <p:nvPr/>
-        </p:nvSpPr>
-        <p:spPr>
-          <a:xfrm>
+      <p:pic>
+        <p:nvPicPr>
+          <p:cNvPr id="13" name="Image 1" descr="/home/user/data-manipulation-exercises/.claude/skills/brand-guidelines/assets/textures/arrow-black.png">    </p:cNvPr>
+          <p:cNvPicPr>
+            <a:picLocks noChangeAspect="1"/>
+          </p:cNvPicPr>
+          <p:nvPr/>
+        </p:nvPicPr>
+        <p:blipFill>
+          <a:blip r:embed="rId2"/>
+          <a:stretch>
+            <a:fillRect/>
+          </a:stretch>
+        </p:blipFill>
+        <p:spPr>
+          <a:xfrm rot="5400000">
             <a:off x="7223760" y="9281160"/>
-            <a:ext cx="457200" cy="457200"/>
-          </a:xfrm>
-          <a:prstGeom prst="rect">
-            <a:avLst/>
-          </a:prstGeom>
-          <a:noFill/>
-          <a:ln/>
-        </p:spPr>
-        <p:txBody>
-          <a:bodyPr wrap="square" lIns="0" tIns="0" rIns="0" bIns="0" rtlCol="0" anchor="ctr"/>
-          <a:lstStyle/>
-          <a:p>
-            <a:pPr algn="ctr" indent="0" marL="0">
-              <a:buNone/>
-            </a:pPr>
-            <a:r>
-              <a:rPr lang="en-US" sz="2600" b="1" dirty="0">
-                <a:solidFill>
-                  <a:srgbClr val="000000"/>
-                </a:solidFill>
-                <a:latin typeface="Arial" pitchFamily="34" charset="0"/>
-                <a:ea typeface="Arial" pitchFamily="34" charset="-122"/>
-                <a:cs typeface="Arial" pitchFamily="34" charset="-120"/>
-              </a:rPr>
-              <a:t>↘</a:t>
-            </a:r>
-            <a:endParaRPr lang="en-US" sz="2600" dirty="0"/>
-          </a:p>
-        </p:txBody>
-      </p:sp>
+            <a:ext cx="292608" cy="292608"/>
+          </a:xfrm>
+          <a:prstGeom prst="rect">
+            <a:avLst/>
+          </a:prstGeom>
+        </p:spPr>
+      </p:pic>
     </p:spTree>
   </p:cSld>
   <p:clrMapOvr>
@@ -7725,165 +7710,105 @@
           </a:p>
         </p:txBody>
       </p:sp>
-      <p:sp>
-        <p:nvSpPr>
-          <p:cNvPr id="50" name="Text 48"/>
-          <p:cNvSpPr/>
-          <p:nvPr/>
-        </p:nvSpPr>
-        <p:spPr>
-          <a:xfrm>
-            <a:off x="365760" y="365760"/>
-            <a:ext cx="365760" cy="365760"/>
-          </a:xfrm>
-          <a:prstGeom prst="rect">
-            <a:avLst/>
-          </a:prstGeom>
-          <a:noFill/>
-          <a:ln/>
-        </p:spPr>
-        <p:txBody>
-          <a:bodyPr wrap="square" lIns="0" tIns="0" rIns="0" bIns="0" rtlCol="0" anchor="ctr"/>
-          <a:lstStyle/>
-          <a:p>
-            <a:pPr algn="ctr" indent="0" marL="0">
-              <a:buNone/>
-            </a:pPr>
-            <a:r>
-              <a:rPr lang="en-US" sz="2200" b="1" dirty="0">
-                <a:solidFill>
-                  <a:srgbClr val="DAFF94"/>
-                </a:solidFill>
-                <a:latin typeface="Arial" pitchFamily="34" charset="0"/>
-                <a:ea typeface="Arial" pitchFamily="34" charset="-122"/>
-                <a:cs typeface="Arial" pitchFamily="34" charset="-120"/>
-              </a:rPr>
-              <a:t>↖</a:t>
-            </a:r>
-            <a:endParaRPr lang="en-US" sz="2200" dirty="0"/>
-          </a:p>
-        </p:txBody>
-      </p:sp>
-      <p:sp>
-        <p:nvSpPr>
-          <p:cNvPr id="51" name="Text 49"/>
-          <p:cNvSpPr/>
-          <p:nvPr/>
-        </p:nvSpPr>
-        <p:spPr>
-          <a:xfrm>
-            <a:off x="7498080" y="365760"/>
-            <a:ext cx="365760" cy="365760"/>
-          </a:xfrm>
-          <a:prstGeom prst="rect">
-            <a:avLst/>
-          </a:prstGeom>
-          <a:noFill/>
-          <a:ln/>
-        </p:spPr>
-        <p:txBody>
-          <a:bodyPr wrap="square" lIns="0" tIns="0" rIns="0" bIns="0" rtlCol="0" anchor="ctr"/>
-          <a:lstStyle/>
-          <a:p>
-            <a:pPr algn="ctr" indent="0" marL="0">
-              <a:buNone/>
-            </a:pPr>
-            <a:r>
-              <a:rPr lang="en-US" sz="2200" b="1" dirty="0">
-                <a:solidFill>
-                  <a:srgbClr val="DAFF94"/>
-                </a:solidFill>
-                <a:latin typeface="Arial" pitchFamily="34" charset="0"/>
-                <a:ea typeface="Arial" pitchFamily="34" charset="-122"/>
-                <a:cs typeface="Arial" pitchFamily="34" charset="-120"/>
-              </a:rPr>
-              <a:t>↗</a:t>
-            </a:r>
-            <a:endParaRPr lang="en-US" sz="2200" dirty="0"/>
-          </a:p>
-        </p:txBody>
-      </p:sp>
-      <p:sp>
-        <p:nvSpPr>
-          <p:cNvPr id="52" name="Text 50"/>
-          <p:cNvSpPr/>
-          <p:nvPr/>
-        </p:nvSpPr>
-        <p:spPr>
-          <a:xfrm>
-            <a:off x="365760" y="9555480"/>
-            <a:ext cx="365760" cy="365760"/>
-          </a:xfrm>
-          <a:prstGeom prst="rect">
-            <a:avLst/>
-          </a:prstGeom>
-          <a:noFill/>
-          <a:ln/>
-        </p:spPr>
-        <p:txBody>
-          <a:bodyPr wrap="square" lIns="0" tIns="0" rIns="0" bIns="0" rtlCol="0" anchor="ctr"/>
-          <a:lstStyle/>
-          <a:p>
-            <a:pPr algn="ctr" indent="0" marL="0">
-              <a:buNone/>
-            </a:pPr>
-            <a:r>
-              <a:rPr lang="en-US" sz="2200" b="1" dirty="0">
-                <a:solidFill>
-                  <a:srgbClr val="DAFF94"/>
-                </a:solidFill>
-                <a:latin typeface="Arial" pitchFamily="34" charset="0"/>
-                <a:ea typeface="Arial" pitchFamily="34" charset="-122"/>
-                <a:cs typeface="Arial" pitchFamily="34" charset="-120"/>
-              </a:rPr>
-              <a:t>↙</a:t>
-            </a:r>
-            <a:endParaRPr lang="en-US" sz="2200" dirty="0"/>
-          </a:p>
-        </p:txBody>
-      </p:sp>
-      <p:sp>
-        <p:nvSpPr>
-          <p:cNvPr id="53" name="Text 51"/>
-          <p:cNvSpPr/>
-          <p:nvPr/>
-        </p:nvSpPr>
-        <p:spPr>
-          <a:xfrm>
-            <a:off x="7498080" y="9555480"/>
-            <a:ext cx="365760" cy="365760"/>
-          </a:xfrm>
-          <a:prstGeom prst="rect">
-            <a:avLst/>
-          </a:prstGeom>
-          <a:noFill/>
-          <a:ln/>
-        </p:spPr>
-        <p:txBody>
-          <a:bodyPr wrap="square" lIns="0" tIns="0" rIns="0" bIns="0" rtlCol="0" anchor="ctr"/>
-          <a:lstStyle/>
-          <a:p>
-            <a:pPr algn="ctr" indent="0" marL="0">
-              <a:buNone/>
-            </a:pPr>
-            <a:r>
-              <a:rPr lang="en-US" sz="2200" b="1" dirty="0">
-                <a:solidFill>
-                  <a:srgbClr val="DAFF94"/>
-                </a:solidFill>
-                <a:latin typeface="Arial" pitchFamily="34" charset="0"/>
-                <a:ea typeface="Arial" pitchFamily="34" charset="-122"/>
-                <a:cs typeface="Arial" pitchFamily="34" charset="-120"/>
-              </a:rPr>
-              <a:t>↘</a:t>
-            </a:r>
-            <a:endParaRPr lang="en-US" sz="2200" dirty="0"/>
-          </a:p>
-        </p:txBody>
-      </p:sp>
-      <p:sp>
-        <p:nvSpPr>
-          <p:cNvPr id="54" name="Text 52"/>
+      <p:pic>
+        <p:nvPicPr>
+          <p:cNvPr id="50" name="Image 0" descr="/home/user/data-manipulation-exercises/.claude/skills/brand-guidelines/assets/textures/arrow-lime.png">    </p:cNvPr>
+          <p:cNvPicPr>
+            <a:picLocks noChangeAspect="1"/>
+          </p:cNvPicPr>
+          <p:nvPr/>
+        </p:nvPicPr>
+        <p:blipFill>
+          <a:blip r:embed="rId1"/>
+          <a:stretch>
+            <a:fillRect/>
+          </a:stretch>
+        </p:blipFill>
+        <p:spPr>
+          <a:xfrm rot="16200000">
+            <a:off x="320040" y="320040"/>
+            <a:ext cx="292608" cy="292608"/>
+          </a:xfrm>
+          <a:prstGeom prst="rect">
+            <a:avLst/>
+          </a:prstGeom>
+        </p:spPr>
+      </p:pic>
+      <p:pic>
+        <p:nvPicPr>
+          <p:cNvPr id="51" name="Image 1" descr="/home/user/data-manipulation-exercises/.claude/skills/brand-guidelines/assets/textures/arrow-lime.png">    </p:cNvPr>
+          <p:cNvPicPr>
+            <a:picLocks noChangeAspect="1"/>
+          </p:cNvPicPr>
+          <p:nvPr/>
+        </p:nvPicPr>
+        <p:blipFill>
+          <a:blip r:embed="rId2"/>
+          <a:stretch>
+            <a:fillRect/>
+          </a:stretch>
+        </p:blipFill>
+        <p:spPr>
+          <a:xfrm>
+            <a:off x="7616952" y="320040"/>
+            <a:ext cx="292608" cy="292608"/>
+          </a:xfrm>
+          <a:prstGeom prst="rect">
+            <a:avLst/>
+          </a:prstGeom>
+        </p:spPr>
+      </p:pic>
+      <p:pic>
+        <p:nvPicPr>
+          <p:cNvPr id="52" name="Image 2" descr="/home/user/data-manipulation-exercises/.claude/skills/brand-guidelines/assets/textures/arrow-lime.png">    </p:cNvPr>
+          <p:cNvPicPr>
+            <a:picLocks noChangeAspect="1"/>
+          </p:cNvPicPr>
+          <p:nvPr/>
+        </p:nvPicPr>
+        <p:blipFill>
+          <a:blip r:embed="rId3"/>
+          <a:stretch>
+            <a:fillRect/>
+          </a:stretch>
+        </p:blipFill>
+        <p:spPr>
+          <a:xfrm rot="10800000">
+            <a:off x="320040" y="9674352"/>
+            <a:ext cx="292608" cy="292608"/>
+          </a:xfrm>
+          <a:prstGeom prst="rect">
+            <a:avLst/>
+          </a:prstGeom>
+        </p:spPr>
+      </p:pic>
+      <p:pic>
+        <p:nvPicPr>
+          <p:cNvPr id="53" name="Image 3" descr="/home/user/data-manipulation-exercises/.claude/skills/brand-guidelines/assets/textures/arrow-lime.png">    </p:cNvPr>
+          <p:cNvPicPr>
+            <a:picLocks noChangeAspect="1"/>
+          </p:cNvPicPr>
+          <p:nvPr/>
+        </p:nvPicPr>
+        <p:blipFill>
+          <a:blip r:embed="rId4"/>
+          <a:stretch>
+            <a:fillRect/>
+          </a:stretch>
+        </p:blipFill>
+        <p:spPr>
+          <a:xfrm rot="5400000">
+            <a:off x="7616952" y="9674352"/>
+            <a:ext cx="292608" cy="292608"/>
+          </a:xfrm>
+          <a:prstGeom prst="rect">
+            <a:avLst/>
+          </a:prstGeom>
+        </p:spPr>
+      </p:pic>
+      <p:sp>
+        <p:nvSpPr>
+          <p:cNvPr id="54" name="Text 48"/>
           <p:cNvSpPr/>
           <p:nvPr/>
         </p:nvSpPr>
@@ -7939,7 +7864,7 @@
       </p:sp>
       <p:sp>
         <p:nvSpPr>
-          <p:cNvPr id="55" name="Text 53"/>
+          <p:cNvPr id="55" name="Text 49"/>
           <p:cNvSpPr/>
           <p:nvPr/>
         </p:nvSpPr>
@@ -8012,7 +7937,7 @@
       </p:sp>
       <p:sp>
         <p:nvSpPr>
-          <p:cNvPr id="56" name="Text 54"/>
+          <p:cNvPr id="56" name="Text 50"/>
           <p:cNvSpPr/>
           <p:nvPr/>
         </p:nvSpPr>
@@ -8051,14 +7976,14 @@
       </p:sp>
       <p:pic>
         <p:nvPicPr>
-          <p:cNvPr id="57" name="Image 0" descr="/home/user/data-manipulation-exercises/.claude/skills/arpejo-report-desdobramento/assets/arpejo-report-logo.png">    </p:cNvPr>
+          <p:cNvPr id="57" name="Image 4" descr="/home/user/data-manipulation-exercises/.claude/skills/arpejo-report-desdobramento/assets/arpejo-report-logo.png">    </p:cNvPr>
           <p:cNvPicPr>
             <a:picLocks noChangeAspect="1"/>
           </p:cNvPicPr>
           <p:nvPr/>
         </p:nvPicPr>
         <p:blipFill>
-          <a:blip r:embed="rId1"/>
+          <a:blip r:embed="rId5"/>
           <a:stretch>
             <a:fillRect/>
           </a:stretch>

--- a/entregas-agosto26/carrossel-instagram-agosto26.pptx
+++ b/entregas-agosto26/carrossel-instagram-agosto26.pptx
@@ -1,6 +1,6 @@
 
 <file path=ppt/presentation.xml><?xml version="1.0" encoding="utf-8"?>
-<p:presentation xmlns:a="http://schemas.openxmlformats.org/drawingml/2006/main" xmlns:r="http://schemas.openxmlformats.org/officeDocument/2006/relationships" xmlns:p="http://schemas.openxmlformats.org/presentationml/2006/main" saveSubsetFonts="1" autoCompressPictures="0">
+<p:presentation xmlns:a="http://schemas.openxmlformats.org/drawingml/2006/main" xmlns:r="http://schemas.openxmlformats.org/officeDocument/2006/relationships" xmlns:p="http://schemas.openxmlformats.org/presentationml/2006/main" embedTrueTypeFonts="1" saveSubsetFonts="1" autoCompressPictures="0">
   <p:sldMasterIdLst>
     <p:sldMasterId id="2147483648" r:id="rId1"/>
   </p:sldMasterIdLst>
@@ -18,6 +18,36 @@
   </p:notesMasterIdLst>
   <p:sldSz cx="8229600" cy="10287000"/>
   <p:notesSz cx="10287000" cy="8229600"/>
+  <p:embeddedFontLst>
+    <p:embeddedFont>
+      <p:font typeface="JetBrains Mono Medium"/>
+      <p:regular r:id="rId14"/>
+      <p:bold r:id="rId15"/>
+      <p:italic r:id="rId16"/>
+      <p:boldItalic r:id="rId17"/>
+    </p:embeddedFont>
+    <p:embeddedFont>
+      <p:font typeface="Urbanist"/>
+      <p:regular r:id="rId18"/>
+      <p:bold r:id="rId19"/>
+      <p:italic r:id="rId20"/>
+      <p:boldItalic r:id="rId21"/>
+    </p:embeddedFont>
+    <p:embeddedFont>
+      <p:font typeface="Libre Baskerville"/>
+      <p:regular r:id="rId22"/>
+      <p:bold r:id="rId23"/>
+      <p:italic r:id="rId24"/>
+      <p:boldItalic r:id="rId25"/>
+    </p:embeddedFont>
+    <p:embeddedFont>
+      <p:font typeface="Ubuntu Mono"/>
+      <p:regular r:id="rId26"/>
+      <p:bold r:id="rId27"/>
+      <p:italic r:id="rId28"/>
+      <p:boldItalic r:id="rId29"/>
+    </p:embeddedFont>
+  </p:embeddedFontLst>
   <p:defaultTextStyle>
     <a:lvl1pPr marL="0" algn="l" defTabSz="914400" rtl="0" eaLnBrk="1" latinLnBrk="0" hangingPunct="1">
       <a:defRPr sz="1800" kern="1200">

--- a/entregas-agosto26/carrossel-instagram-agosto26.pptx
+++ b/entregas-agosto26/carrossel-instagram-agosto26.pptx
@@ -3597,9 +3597,54 @@
           <a:chExt cx="0" cy="0"/>
         </a:xfrm>
       </p:grpSpPr>
-      <p:sp>
-        <p:nvSpPr>
-          <p:cNvPr id="2" name="Text 0"/>
+      <p:pic>
+        <p:nvPicPr>
+          <p:cNvPr id="2" name="Image 0" descr="/tmp/claude-0/-home-user-data-manipulation-exercises/f19acac8-ccb4-5197-8e49-c3b6029ad477/scratchpad/report-images/final/ig-hiper-realidade.jpg">    </p:cNvPr>
+          <p:cNvPicPr>
+            <a:picLocks noChangeAspect="1"/>
+          </p:cNvPicPr>
+          <p:nvPr/>
+        </p:nvPicPr>
+        <p:blipFill>
+          <a:blip r:embed="rId1"/>
+          <a:srcRect l="0" r="0" t="0" b="0"/>
+          <a:stretch/>
+        </p:blipFill>
+        <p:spPr>
+          <a:xfrm>
+            <a:off x="0" y="0"/>
+            <a:ext cx="8229600" cy="10287000"/>
+          </a:xfrm>
+          <a:prstGeom prst="rect">
+            <a:avLst/>
+          </a:prstGeom>
+        </p:spPr>
+      </p:pic>
+      <p:sp>
+        <p:nvSpPr>
+          <p:cNvPr id="3" name="Shape 0"/>
+          <p:cNvSpPr/>
+          <p:nvPr/>
+        </p:nvSpPr>
+        <p:spPr>
+          <a:xfrm>
+            <a:off x="0" y="0"/>
+            <a:ext cx="8229600" cy="4937760"/>
+          </a:xfrm>
+          <a:prstGeom prst="rect">
+            <a:avLst/>
+          </a:prstGeom>
+          <a:solidFill>
+            <a:srgbClr val="000000">
+              <a:alpha val="68000"/>
+            </a:srgbClr>
+          </a:solidFill>
+          <a:ln/>
+        </p:spPr>
+      </p:sp>
+      <p:sp>
+        <p:nvSpPr>
+          <p:cNvPr id="4" name="Text 1"/>
           <p:cNvSpPr/>
           <p:nvPr/>
         </p:nvSpPr>
@@ -3638,7 +3683,7 @@
       </p:sp>
       <p:sp>
         <p:nvSpPr>
-          <p:cNvPr id="3" name="Text 1"/>
+          <p:cNvPr id="5" name="Text 2"/>
           <p:cNvSpPr/>
           <p:nvPr/>
         </p:nvSpPr>
@@ -3677,7 +3722,7 @@
       </p:sp>
       <p:sp>
         <p:nvSpPr>
-          <p:cNvPr id="4" name="Text 2"/>
+          <p:cNvPr id="6" name="Text 3"/>
           <p:cNvSpPr/>
           <p:nvPr/>
         </p:nvSpPr>
@@ -3716,7 +3761,7 @@
       </p:sp>
       <p:sp>
         <p:nvSpPr>
-          <p:cNvPr id="5" name="Shape 3"/>
+          <p:cNvPr id="7" name="Shape 4"/>
           <p:cNvSpPr/>
           <p:nvPr/>
         </p:nvSpPr>
@@ -3738,7 +3783,7 @@
       </p:sp>
       <p:sp>
         <p:nvSpPr>
-          <p:cNvPr id="6" name="Text 4"/>
+          <p:cNvPr id="8" name="Text 5"/>
           <p:cNvSpPr/>
           <p:nvPr/>
         </p:nvSpPr>
@@ -3777,14 +3822,14 @@
       </p:sp>
       <p:pic>
         <p:nvPicPr>
-          <p:cNvPr id="7" name="Image 0" descr="/home/user/data-manipulation-exercises/.claude/skills/brand-guidelines/assets/textures/globe-lime.png">    </p:cNvPr>
+          <p:cNvPr id="9" name="Image 1" descr="/home/user/data-manipulation-exercises/.claude/skills/brand-guidelines/assets/textures/globe-lime.png">    </p:cNvPr>
           <p:cNvPicPr>
             <a:picLocks noChangeAspect="1"/>
           </p:cNvPicPr>
           <p:nvPr/>
         </p:nvPicPr>
         <p:blipFill>
-          <a:blip r:embed="rId1"/>
+          <a:blip r:embed="rId2"/>
           <a:stretch>
             <a:fillRect/>
           </a:stretch>
@@ -3801,7 +3846,7 @@
       </p:pic>
       <p:sp>
         <p:nvSpPr>
-          <p:cNvPr id="8" name="Text 5"/>
+          <p:cNvPr id="10" name="Text 6"/>
           <p:cNvSpPr/>
           <p:nvPr/>
         </p:nvSpPr>
@@ -3857,7 +3902,7 @@
       </p:sp>
       <p:sp>
         <p:nvSpPr>
-          <p:cNvPr id="9" name="Shape 6"/>
+          <p:cNvPr id="11" name="Shape 7"/>
           <p:cNvSpPr/>
           <p:nvPr/>
         </p:nvSpPr>
@@ -3872,14 +3917,16 @@
             </a:avLst>
           </a:prstGeom>
           <a:solidFill>
-            <a:srgbClr val="1A1A1A"/>
+            <a:srgbClr val="000000">
+              <a:alpha val="78000"/>
+            </a:srgbClr>
           </a:solidFill>
           <a:ln/>
         </p:spPr>
       </p:sp>
       <p:sp>
         <p:nvSpPr>
-          <p:cNvPr id="10" name="Text 7"/>
+          <p:cNvPr id="12" name="Text 8"/>
           <p:cNvSpPr/>
           <p:nvPr/>
         </p:nvSpPr>
@@ -3918,7 +3965,7 @@
       </p:sp>
       <p:sp>
         <p:nvSpPr>
-          <p:cNvPr id="11" name="Text 8"/>
+          <p:cNvPr id="13" name="Text 9"/>
           <p:cNvSpPr/>
           <p:nvPr/>
         </p:nvSpPr>
@@ -3957,7 +4004,7 @@
       </p:sp>
       <p:sp>
         <p:nvSpPr>
-          <p:cNvPr id="12" name="Text 9"/>
+          <p:cNvPr id="14" name="Text 10"/>
           <p:cNvSpPr/>
           <p:nvPr/>
         </p:nvSpPr>
@@ -3996,14 +4043,14 @@
       </p:sp>
       <p:pic>
         <p:nvPicPr>
-          <p:cNvPr id="13" name="Image 1" descr="/home/user/data-manipulation-exercises/.claude/skills/brand-guidelines/assets/textures/arrow-lime.png">    </p:cNvPr>
+          <p:cNvPr id="15" name="Image 2" descr="/home/user/data-manipulation-exercises/.claude/skills/brand-guidelines/assets/textures/arrow-lime.png">    </p:cNvPr>
           <p:cNvPicPr>
             <a:picLocks noChangeAspect="1"/>
           </p:cNvPicPr>
           <p:nvPr/>
         </p:nvPicPr>
         <p:blipFill>
-          <a:blip r:embed="rId2"/>
+          <a:blip r:embed="rId3"/>
           <a:stretch>
             <a:fillRect/>
           </a:stretch>
@@ -4505,9 +4552,54 @@
           <a:chExt cx="0" cy="0"/>
         </a:xfrm>
       </p:grpSpPr>
-      <p:sp>
-        <p:nvSpPr>
-          <p:cNvPr id="2" name="Text 0"/>
+      <p:pic>
+        <p:nvPicPr>
+          <p:cNvPr id="2" name="Image 0" descr="/tmp/claude-0/-home-user-data-manipulation-exercises/f19acac8-ccb4-5197-8e49-c3b6029ad477/scratchpad/report-images/final/ig-sem-ressaca.jpg">    </p:cNvPr>
+          <p:cNvPicPr>
+            <a:picLocks noChangeAspect="1"/>
+          </p:cNvPicPr>
+          <p:nvPr/>
+        </p:nvPicPr>
+        <p:blipFill>
+          <a:blip r:embed="rId1"/>
+          <a:srcRect l="0" r="0" t="0" b="0"/>
+          <a:stretch/>
+        </p:blipFill>
+        <p:spPr>
+          <a:xfrm>
+            <a:off x="0" y="0"/>
+            <a:ext cx="8229600" cy="10287000"/>
+          </a:xfrm>
+          <a:prstGeom prst="rect">
+            <a:avLst/>
+          </a:prstGeom>
+        </p:spPr>
+      </p:pic>
+      <p:sp>
+        <p:nvSpPr>
+          <p:cNvPr id="3" name="Shape 0"/>
+          <p:cNvSpPr/>
+          <p:nvPr/>
+        </p:nvSpPr>
+        <p:spPr>
+          <a:xfrm>
+            <a:off x="0" y="0"/>
+            <a:ext cx="8229600" cy="4937760"/>
+          </a:xfrm>
+          <a:prstGeom prst="rect">
+            <a:avLst/>
+          </a:prstGeom>
+          <a:solidFill>
+            <a:srgbClr val="000000">
+              <a:alpha val="68000"/>
+            </a:srgbClr>
+          </a:solidFill>
+          <a:ln/>
+        </p:spPr>
+      </p:sp>
+      <p:sp>
+        <p:nvSpPr>
+          <p:cNvPr id="4" name="Text 1"/>
           <p:cNvSpPr/>
           <p:nvPr/>
         </p:nvSpPr>
@@ -4546,7 +4638,7 @@
       </p:sp>
       <p:sp>
         <p:nvSpPr>
-          <p:cNvPr id="3" name="Text 1"/>
+          <p:cNvPr id="5" name="Text 2"/>
           <p:cNvSpPr/>
           <p:nvPr/>
         </p:nvSpPr>
@@ -4585,7 +4677,7 @@
       </p:sp>
       <p:sp>
         <p:nvSpPr>
-          <p:cNvPr id="4" name="Text 2"/>
+          <p:cNvPr id="6" name="Text 3"/>
           <p:cNvSpPr/>
           <p:nvPr/>
         </p:nvSpPr>
@@ -4624,7 +4716,7 @@
       </p:sp>
       <p:sp>
         <p:nvSpPr>
-          <p:cNvPr id="5" name="Shape 3"/>
+          <p:cNvPr id="7" name="Shape 4"/>
           <p:cNvSpPr/>
           <p:nvPr/>
         </p:nvSpPr>
@@ -4646,7 +4738,7 @@
       </p:sp>
       <p:sp>
         <p:nvSpPr>
-          <p:cNvPr id="6" name="Text 4"/>
+          <p:cNvPr id="8" name="Text 5"/>
           <p:cNvSpPr/>
           <p:nvPr/>
         </p:nvSpPr>
@@ -4685,14 +4777,14 @@
       </p:sp>
       <p:pic>
         <p:nvPicPr>
-          <p:cNvPr id="7" name="Image 0" descr="/home/user/data-manipulation-exercises/.claude/skills/brand-guidelines/assets/textures/globe-black.png">    </p:cNvPr>
+          <p:cNvPr id="9" name="Image 1" descr="/home/user/data-manipulation-exercises/.claude/skills/brand-guidelines/assets/textures/globe-lime.png">    </p:cNvPr>
           <p:cNvPicPr>
             <a:picLocks noChangeAspect="1"/>
           </p:cNvPicPr>
           <p:nvPr/>
         </p:nvPicPr>
         <p:blipFill>
-          <a:blip r:embed="rId1"/>
+          <a:blip r:embed="rId2"/>
           <a:stretch>
             <a:fillRect/>
           </a:stretch>
@@ -4709,7 +4801,7 @@
       </p:pic>
       <p:sp>
         <p:nvSpPr>
-          <p:cNvPr id="8" name="Text 5"/>
+          <p:cNvPr id="10" name="Text 6"/>
           <p:cNvSpPr/>
           <p:nvPr/>
         </p:nvSpPr>
@@ -4765,7 +4857,7 @@
       </p:sp>
       <p:sp>
         <p:nvSpPr>
-          <p:cNvPr id="9" name="Shape 6"/>
+          <p:cNvPr id="11" name="Shape 7"/>
           <p:cNvSpPr/>
           <p:nvPr/>
         </p:nvSpPr>
@@ -4780,8 +4872,8 @@
             </a:avLst>
           </a:prstGeom>
           <a:solidFill>
-            <a:srgbClr val="FFFFFF">
-              <a:alpha val="45000"/>
+            <a:srgbClr val="000000">
+              <a:alpha val="78000"/>
             </a:srgbClr>
           </a:solidFill>
           <a:ln/>
@@ -4789,7 +4881,7 @@
       </p:sp>
       <p:sp>
         <p:nvSpPr>
-          <p:cNvPr id="10" name="Text 7"/>
+          <p:cNvPr id="12" name="Text 8"/>
           <p:cNvSpPr/>
           <p:nvPr/>
         </p:nvSpPr>
@@ -4828,7 +4920,7 @@
       </p:sp>
       <p:sp>
         <p:nvSpPr>
-          <p:cNvPr id="11" name="Text 8"/>
+          <p:cNvPr id="13" name="Text 9"/>
           <p:cNvSpPr/>
           <p:nvPr/>
         </p:nvSpPr>
@@ -4867,7 +4959,7 @@
       </p:sp>
       <p:sp>
         <p:nvSpPr>
-          <p:cNvPr id="12" name="Text 9"/>
+          <p:cNvPr id="14" name="Text 10"/>
           <p:cNvSpPr/>
           <p:nvPr/>
         </p:nvSpPr>
@@ -4906,14 +4998,14 @@
       </p:sp>
       <p:pic>
         <p:nvPicPr>
-          <p:cNvPr id="13" name="Image 1" descr="/home/user/data-manipulation-exercises/.claude/skills/brand-guidelines/assets/textures/arrow-black.png">    </p:cNvPr>
+          <p:cNvPr id="15" name="Image 2" descr="/home/user/data-manipulation-exercises/.claude/skills/brand-guidelines/assets/textures/arrow-lime.png">    </p:cNvPr>
           <p:cNvPicPr>
             <a:picLocks noChangeAspect="1"/>
           </p:cNvPicPr>
           <p:nvPr/>
         </p:nvPicPr>
         <p:blipFill>
-          <a:blip r:embed="rId2"/>
+          <a:blip r:embed="rId3"/>
           <a:stretch>
             <a:fillRect/>
           </a:stretch>
@@ -4960,9 +5052,54 @@
           <a:chExt cx="0" cy="0"/>
         </a:xfrm>
       </p:grpSpPr>
-      <p:sp>
-        <p:nvSpPr>
-          <p:cNvPr id="2" name="Text 0"/>
+      <p:pic>
+        <p:nvPicPr>
+          <p:cNvPr id="2" name="Image 0" descr="/tmp/claude-0/-home-user-data-manipulation-exercises/f19acac8-ccb4-5197-8e49-c3b6029ad477/scratchpad/report-images/final/ig-sport-fandom.jpg">    </p:cNvPr>
+          <p:cNvPicPr>
+            <a:picLocks noChangeAspect="1"/>
+          </p:cNvPicPr>
+          <p:nvPr/>
+        </p:nvPicPr>
+        <p:blipFill>
+          <a:blip r:embed="rId1"/>
+          <a:srcRect l="0" r="0" t="0" b="0"/>
+          <a:stretch/>
+        </p:blipFill>
+        <p:spPr>
+          <a:xfrm>
+            <a:off x="0" y="0"/>
+            <a:ext cx="8229600" cy="10287000"/>
+          </a:xfrm>
+          <a:prstGeom prst="rect">
+            <a:avLst/>
+          </a:prstGeom>
+        </p:spPr>
+      </p:pic>
+      <p:sp>
+        <p:nvSpPr>
+          <p:cNvPr id="3" name="Shape 0"/>
+          <p:cNvSpPr/>
+          <p:nvPr/>
+        </p:nvSpPr>
+        <p:spPr>
+          <a:xfrm>
+            <a:off x="0" y="0"/>
+            <a:ext cx="8229600" cy="4937760"/>
+          </a:xfrm>
+          <a:prstGeom prst="rect">
+            <a:avLst/>
+          </a:prstGeom>
+          <a:solidFill>
+            <a:srgbClr val="000000">
+              <a:alpha val="68000"/>
+            </a:srgbClr>
+          </a:solidFill>
+          <a:ln/>
+        </p:spPr>
+      </p:sp>
+      <p:sp>
+        <p:nvSpPr>
+          <p:cNvPr id="4" name="Text 1"/>
           <p:cNvSpPr/>
           <p:nvPr/>
         </p:nvSpPr>
@@ -5001,7 +5138,7 @@
       </p:sp>
       <p:sp>
         <p:nvSpPr>
-          <p:cNvPr id="3" name="Text 1"/>
+          <p:cNvPr id="5" name="Text 2"/>
           <p:cNvSpPr/>
           <p:nvPr/>
         </p:nvSpPr>
@@ -5040,7 +5177,7 @@
       </p:sp>
       <p:sp>
         <p:nvSpPr>
-          <p:cNvPr id="4" name="Text 2"/>
+          <p:cNvPr id="6" name="Text 3"/>
           <p:cNvSpPr/>
           <p:nvPr/>
         </p:nvSpPr>
@@ -5079,7 +5216,7 @@
       </p:sp>
       <p:sp>
         <p:nvSpPr>
-          <p:cNvPr id="5" name="Shape 3"/>
+          <p:cNvPr id="7" name="Shape 4"/>
           <p:cNvSpPr/>
           <p:nvPr/>
         </p:nvSpPr>
@@ -5101,7 +5238,7 @@
       </p:sp>
       <p:sp>
         <p:nvSpPr>
-          <p:cNvPr id="6" name="Text 4"/>
+          <p:cNvPr id="8" name="Text 5"/>
           <p:cNvSpPr/>
           <p:nvPr/>
         </p:nvSpPr>
@@ -5140,14 +5277,14 @@
       </p:sp>
       <p:pic>
         <p:nvPicPr>
-          <p:cNvPr id="7" name="Image 0" descr="/home/user/data-manipulation-exercises/.claude/skills/brand-guidelines/assets/textures/globe-lime.png">    </p:cNvPr>
+          <p:cNvPr id="9" name="Image 1" descr="/home/user/data-manipulation-exercises/.claude/skills/brand-guidelines/assets/textures/globe-lime.png">    </p:cNvPr>
           <p:cNvPicPr>
             <a:picLocks noChangeAspect="1"/>
           </p:cNvPicPr>
           <p:nvPr/>
         </p:nvPicPr>
         <p:blipFill>
-          <a:blip r:embed="rId1"/>
+          <a:blip r:embed="rId2"/>
           <a:stretch>
             <a:fillRect/>
           </a:stretch>
@@ -5164,7 +5301,7 @@
       </p:pic>
       <p:sp>
         <p:nvSpPr>
-          <p:cNvPr id="8" name="Text 5"/>
+          <p:cNvPr id="10" name="Text 6"/>
           <p:cNvSpPr/>
           <p:nvPr/>
         </p:nvSpPr>
@@ -5220,7 +5357,7 @@
       </p:sp>
       <p:sp>
         <p:nvSpPr>
-          <p:cNvPr id="9" name="Shape 6"/>
+          <p:cNvPr id="11" name="Shape 7"/>
           <p:cNvSpPr/>
           <p:nvPr/>
         </p:nvSpPr>
@@ -5235,14 +5372,16 @@
             </a:avLst>
           </a:prstGeom>
           <a:solidFill>
-            <a:srgbClr val="1A1A1A"/>
+            <a:srgbClr val="000000">
+              <a:alpha val="78000"/>
+            </a:srgbClr>
           </a:solidFill>
           <a:ln/>
         </p:spPr>
       </p:sp>
       <p:sp>
         <p:nvSpPr>
-          <p:cNvPr id="10" name="Text 7"/>
+          <p:cNvPr id="12" name="Text 8"/>
           <p:cNvSpPr/>
           <p:nvPr/>
         </p:nvSpPr>
@@ -5281,7 +5420,7 @@
       </p:sp>
       <p:sp>
         <p:nvSpPr>
-          <p:cNvPr id="11" name="Text 8"/>
+          <p:cNvPr id="13" name="Text 9"/>
           <p:cNvSpPr/>
           <p:nvPr/>
         </p:nvSpPr>
@@ -5320,7 +5459,7 @@
       </p:sp>
       <p:sp>
         <p:nvSpPr>
-          <p:cNvPr id="12" name="Text 9"/>
+          <p:cNvPr id="14" name="Text 10"/>
           <p:cNvSpPr/>
           <p:nvPr/>
         </p:nvSpPr>
@@ -5359,14 +5498,14 @@
       </p:sp>
       <p:pic>
         <p:nvPicPr>
-          <p:cNvPr id="13" name="Image 1" descr="/home/user/data-manipulation-exercises/.claude/skills/brand-guidelines/assets/textures/arrow-lime.png">    </p:cNvPr>
+          <p:cNvPr id="15" name="Image 2" descr="/home/user/data-manipulation-exercises/.claude/skills/brand-guidelines/assets/textures/arrow-lime.png">    </p:cNvPr>
           <p:cNvPicPr>
             <a:picLocks noChangeAspect="1"/>
           </p:cNvPicPr>
           <p:nvPr/>
         </p:nvPicPr>
         <p:blipFill>
-          <a:blip r:embed="rId2"/>
+          <a:blip r:embed="rId3"/>
           <a:stretch>
             <a:fillRect/>
           </a:stretch>
@@ -5413,9 +5552,54 @@
           <a:chExt cx="0" cy="0"/>
         </a:xfrm>
       </p:grpSpPr>
-      <p:sp>
-        <p:nvSpPr>
-          <p:cNvPr id="2" name="Text 0"/>
+      <p:pic>
+        <p:nvPicPr>
+          <p:cNvPr id="2" name="Image 0" descr="/tmp/claude-0/-home-user-data-manipulation-exercises/f19acac8-ccb4-5197-8e49-c3b6029ad477/scratchpad/report-images/final/ig-experiencias-transformadoras.jpg">    </p:cNvPr>
+          <p:cNvPicPr>
+            <a:picLocks noChangeAspect="1"/>
+          </p:cNvPicPr>
+          <p:nvPr/>
+        </p:nvPicPr>
+        <p:blipFill>
+          <a:blip r:embed="rId1"/>
+          <a:srcRect l="0" r="0" t="0" b="0"/>
+          <a:stretch/>
+        </p:blipFill>
+        <p:spPr>
+          <a:xfrm>
+            <a:off x="0" y="0"/>
+            <a:ext cx="8229600" cy="10287000"/>
+          </a:xfrm>
+          <a:prstGeom prst="rect">
+            <a:avLst/>
+          </a:prstGeom>
+        </p:spPr>
+      </p:pic>
+      <p:sp>
+        <p:nvSpPr>
+          <p:cNvPr id="3" name="Shape 0"/>
+          <p:cNvSpPr/>
+          <p:nvPr/>
+        </p:nvSpPr>
+        <p:spPr>
+          <a:xfrm>
+            <a:off x="0" y="0"/>
+            <a:ext cx="8229600" cy="4937760"/>
+          </a:xfrm>
+          <a:prstGeom prst="rect">
+            <a:avLst/>
+          </a:prstGeom>
+          <a:solidFill>
+            <a:srgbClr val="000000">
+              <a:alpha val="68000"/>
+            </a:srgbClr>
+          </a:solidFill>
+          <a:ln/>
+        </p:spPr>
+      </p:sp>
+      <p:sp>
+        <p:nvSpPr>
+          <p:cNvPr id="4" name="Text 1"/>
           <p:cNvSpPr/>
           <p:nvPr/>
         </p:nvSpPr>
@@ -5440,7 +5624,7 @@
             <a:r>
               <a:rPr lang="en-US" sz="1000" b="1" dirty="0">
                 <a:solidFill>
-                  <a:srgbClr val="000000"/>
+                  <a:srgbClr val="DAFF94"/>
                 </a:solidFill>
                 <a:latin typeface="JetBrains Mono" pitchFamily="34" charset="0"/>
                 <a:ea typeface="JetBrains Mono" pitchFamily="34" charset="-122"/>
@@ -5454,7 +5638,7 @@
       </p:sp>
       <p:sp>
         <p:nvSpPr>
-          <p:cNvPr id="3" name="Text 1"/>
+          <p:cNvPr id="5" name="Text 2"/>
           <p:cNvSpPr/>
           <p:nvPr/>
         </p:nvSpPr>
@@ -5479,7 +5663,7 @@
             <a:r>
               <a:rPr lang="en-US" sz="1000" i="1" dirty="0">
                 <a:solidFill>
-                  <a:srgbClr val="000000"/>
+                  <a:srgbClr val="DAFF94"/>
                 </a:solidFill>
                 <a:latin typeface="Libre Baskerville" pitchFamily="34" charset="0"/>
                 <a:ea typeface="Libre Baskerville" pitchFamily="34" charset="-122"/>
@@ -5493,7 +5677,7 @@
       </p:sp>
       <p:sp>
         <p:nvSpPr>
-          <p:cNvPr id="4" name="Text 2"/>
+          <p:cNvPr id="6" name="Text 3"/>
           <p:cNvSpPr/>
           <p:nvPr/>
         </p:nvSpPr>
@@ -5518,7 +5702,7 @@
             <a:r>
               <a:rPr lang="en-US" sz="1000" dirty="0">
                 <a:solidFill>
-                  <a:srgbClr val="000000"/>
+                  <a:srgbClr val="DAFF94"/>
                 </a:solidFill>
                 <a:latin typeface="JetBrains Mono" pitchFamily="34" charset="0"/>
                 <a:ea typeface="JetBrains Mono" pitchFamily="34" charset="-122"/>
@@ -5532,7 +5716,7 @@
       </p:sp>
       <p:sp>
         <p:nvSpPr>
-          <p:cNvPr id="5" name="Shape 3"/>
+          <p:cNvPr id="7" name="Shape 4"/>
           <p:cNvSpPr/>
           <p:nvPr/>
         </p:nvSpPr>
@@ -5546,7 +5730,7 @@
           </a:prstGeom>
           <a:ln w="19050">
             <a:solidFill>
-              <a:srgbClr val="000000"/>
+              <a:srgbClr val="DAFF94"/>
             </a:solidFill>
             <a:prstDash val="solid"/>
           </a:ln>
@@ -5554,7 +5738,7 @@
       </p:sp>
       <p:sp>
         <p:nvSpPr>
-          <p:cNvPr id="6" name="Text 4"/>
+          <p:cNvPr id="8" name="Text 5"/>
           <p:cNvSpPr/>
           <p:nvPr/>
         </p:nvSpPr>
@@ -5579,7 +5763,7 @@
             <a:r>
               <a:rPr lang="en-US" sz="1600" i="1" dirty="0">
                 <a:solidFill>
-                  <a:srgbClr val="000000"/>
+                  <a:srgbClr val="DAFF94"/>
                 </a:solidFill>
                 <a:latin typeface="Libre Baskerville" pitchFamily="34" charset="0"/>
                 <a:ea typeface="Libre Baskerville" pitchFamily="34" charset="-122"/>
@@ -5593,14 +5777,14 @@
       </p:sp>
       <p:pic>
         <p:nvPicPr>
-          <p:cNvPr id="7" name="Image 0" descr="/home/user/data-manipulation-exercises/.claude/skills/brand-guidelines/assets/textures/globe-black.png">    </p:cNvPr>
+          <p:cNvPr id="9" name="Image 1" descr="/home/user/data-manipulation-exercises/.claude/skills/brand-guidelines/assets/textures/globe-lime.png">    </p:cNvPr>
           <p:cNvPicPr>
             <a:picLocks noChangeAspect="1"/>
           </p:cNvPicPr>
           <p:nvPr/>
         </p:nvPicPr>
         <p:blipFill>
-          <a:blip r:embed="rId1"/>
+          <a:blip r:embed="rId2"/>
           <a:stretch>
             <a:fillRect/>
           </a:stretch>
@@ -5617,7 +5801,7 @@
       </p:pic>
       <p:sp>
         <p:nvSpPr>
-          <p:cNvPr id="8" name="Text 5"/>
+          <p:cNvPr id="10" name="Text 6"/>
           <p:cNvSpPr/>
           <p:nvPr/>
         </p:nvSpPr>
@@ -5642,7 +5826,7 @@
             <a:r>
               <a:rPr lang="en-US" sz="4000" b="1" i="1" dirty="0">
                 <a:solidFill>
-                  <a:srgbClr val="000000"/>
+                  <a:srgbClr val="DAFF94"/>
                 </a:solidFill>
                 <a:latin typeface="Libre Baskerville" pitchFamily="34" charset="0"/>
                 <a:ea typeface="Libre Baskerville" pitchFamily="34" charset="-122"/>
@@ -5659,7 +5843,7 @@
             <a:r>
               <a:rPr lang="en-US" sz="4000" b="1" i="1" dirty="0">
                 <a:solidFill>
-                  <a:srgbClr val="000000"/>
+                  <a:srgbClr val="DAFF94"/>
                 </a:solidFill>
                 <a:latin typeface="Libre Baskerville" pitchFamily="34" charset="0"/>
                 <a:ea typeface="Libre Baskerville" pitchFamily="34" charset="-122"/>
@@ -5673,7 +5857,7 @@
       </p:sp>
       <p:sp>
         <p:nvSpPr>
-          <p:cNvPr id="9" name="Shape 6"/>
+          <p:cNvPr id="11" name="Shape 7"/>
           <p:cNvSpPr/>
           <p:nvPr/>
         </p:nvSpPr>
@@ -5688,8 +5872,8 @@
             </a:avLst>
           </a:prstGeom>
           <a:solidFill>
-            <a:srgbClr val="FFFFFF">
-              <a:alpha val="45000"/>
+            <a:srgbClr val="000000">
+              <a:alpha val="78000"/>
             </a:srgbClr>
           </a:solidFill>
           <a:ln/>
@@ -5697,7 +5881,7 @@
       </p:sp>
       <p:sp>
         <p:nvSpPr>
-          <p:cNvPr id="10" name="Text 7"/>
+          <p:cNvPr id="12" name="Text 8"/>
           <p:cNvSpPr/>
           <p:nvPr/>
         </p:nvSpPr>
@@ -5722,7 +5906,7 @@
             <a:r>
               <a:rPr lang="en-US" sz="2200" b="1" dirty="0">
                 <a:solidFill>
-                  <a:srgbClr val="000000"/>
+                  <a:srgbClr val="DAFF94"/>
                 </a:solidFill>
                 <a:latin typeface="Arial" pitchFamily="34" charset="0"/>
                 <a:ea typeface="Arial" pitchFamily="34" charset="-122"/>
@@ -5736,7 +5920,7 @@
       </p:sp>
       <p:sp>
         <p:nvSpPr>
-          <p:cNvPr id="11" name="Text 8"/>
+          <p:cNvPr id="13" name="Text 9"/>
           <p:cNvSpPr/>
           <p:nvPr/>
         </p:nvSpPr>
@@ -5761,7 +5945,7 @@
             <a:r>
               <a:rPr lang="en-US" sz="1300" dirty="0">
                 <a:solidFill>
-                  <a:srgbClr val="000000"/>
+                  <a:srgbClr val="DAFF94"/>
                 </a:solidFill>
                 <a:latin typeface="JetBrains Mono" pitchFamily="34" charset="0"/>
                 <a:ea typeface="JetBrains Mono" pitchFamily="34" charset="-122"/>
@@ -5775,7 +5959,7 @@
       </p:sp>
       <p:sp>
         <p:nvSpPr>
-          <p:cNvPr id="12" name="Text 9"/>
+          <p:cNvPr id="14" name="Text 10"/>
           <p:cNvSpPr/>
           <p:nvPr/>
         </p:nvSpPr>
@@ -5800,7 +5984,7 @@
             <a:r>
               <a:rPr lang="en-US" sz="1100" dirty="0">
                 <a:solidFill>
-                  <a:srgbClr val="000000"/>
+                  <a:srgbClr val="DAFF94"/>
                 </a:solidFill>
                 <a:latin typeface="JetBrains Mono" pitchFamily="34" charset="0"/>
                 <a:ea typeface="JetBrains Mono" pitchFamily="34" charset="-122"/>
@@ -5814,14 +5998,14 @@
       </p:sp>
       <p:pic>
         <p:nvPicPr>
-          <p:cNvPr id="13" name="Image 1" descr="/home/user/data-manipulation-exercises/.claude/skills/brand-guidelines/assets/textures/arrow-black.png">    </p:cNvPr>
+          <p:cNvPr id="15" name="Image 2" descr="/home/user/data-manipulation-exercises/.claude/skills/brand-guidelines/assets/textures/arrow-lime.png">    </p:cNvPr>
           <p:cNvPicPr>
             <a:picLocks noChangeAspect="1"/>
           </p:cNvPicPr>
           <p:nvPr/>
         </p:nvPicPr>
         <p:blipFill>
-          <a:blip r:embed="rId2"/>
+          <a:blip r:embed="rId3"/>
           <a:stretch>
             <a:fillRect/>
           </a:stretch>

--- a/entregas-agosto26/carrossel-instagram-agosto26.pptx
+++ b/entregas-agosto26/carrossel-instagram-agosto26.pptx
@@ -3612,8 +3612,8 @@
         </p:blipFill>
         <p:spPr>
           <a:xfrm>
-            <a:off x="0" y="0"/>
-            <a:ext cx="8229600" cy="10287000"/>
+            <a:off x="0" y="4937760"/>
+            <a:ext cx="8229600" cy="5349240"/>
           </a:xfrm>
           <a:prstGeom prst="rect">
             <a:avLst/>
@@ -3622,29 +3622,7 @@
       </p:pic>
       <p:sp>
         <p:nvSpPr>
-          <p:cNvPr id="3" name="Shape 0"/>
-          <p:cNvSpPr/>
-          <p:nvPr/>
-        </p:nvSpPr>
-        <p:spPr>
-          <a:xfrm>
-            <a:off x="0" y="0"/>
-            <a:ext cx="8229600" cy="4937760"/>
-          </a:xfrm>
-          <a:prstGeom prst="rect">
-            <a:avLst/>
-          </a:prstGeom>
-          <a:solidFill>
-            <a:srgbClr val="000000">
-              <a:alpha val="68000"/>
-            </a:srgbClr>
-          </a:solidFill>
-          <a:ln/>
-        </p:spPr>
-      </p:sp>
-      <p:sp>
-        <p:nvSpPr>
-          <p:cNvPr id="4" name="Text 1"/>
+          <p:cNvPr id="3" name="Text 0"/>
           <p:cNvSpPr/>
           <p:nvPr/>
         </p:nvSpPr>
@@ -3683,7 +3661,7 @@
       </p:sp>
       <p:sp>
         <p:nvSpPr>
-          <p:cNvPr id="5" name="Text 2"/>
+          <p:cNvPr id="4" name="Text 1"/>
           <p:cNvSpPr/>
           <p:nvPr/>
         </p:nvSpPr>
@@ -3722,7 +3700,7 @@
       </p:sp>
       <p:sp>
         <p:nvSpPr>
-          <p:cNvPr id="6" name="Text 3"/>
+          <p:cNvPr id="5" name="Text 2"/>
           <p:cNvSpPr/>
           <p:nvPr/>
         </p:nvSpPr>
@@ -3761,14 +3739,14 @@
       </p:sp>
       <p:sp>
         <p:nvSpPr>
-          <p:cNvPr id="7" name="Shape 4"/>
-          <p:cNvSpPr/>
-          <p:nvPr/>
-        </p:nvSpPr>
-        <p:spPr>
-          <a:xfrm>
-            <a:off x="2651760" y="1188720"/>
-            <a:ext cx="2926080" cy="640080"/>
+          <p:cNvPr id="6" name="Shape 3"/>
+          <p:cNvSpPr/>
+          <p:nvPr/>
+        </p:nvSpPr>
+        <p:spPr>
+          <a:xfrm>
+            <a:off x="2651760" y="685800"/>
+            <a:ext cx="2926080" cy="594360"/>
           </a:xfrm>
           <a:prstGeom prst="ellipse">
             <a:avLst/>
@@ -3783,30 +3761,30 @@
       </p:sp>
       <p:sp>
         <p:nvSpPr>
-          <p:cNvPr id="8" name="Text 5"/>
-          <p:cNvSpPr/>
-          <p:nvPr/>
-        </p:nvSpPr>
-        <p:spPr>
-          <a:xfrm>
-            <a:off x="2651760" y="1188720"/>
-            <a:ext cx="2926080" cy="640080"/>
-          </a:xfrm>
-          <a:prstGeom prst="rect">
-            <a:avLst/>
-          </a:prstGeom>
-          <a:noFill/>
-          <a:ln/>
-        </p:spPr>
-        <p:txBody>
-          <a:bodyPr wrap="square" lIns="0" tIns="0" rIns="0" bIns="0" rtlCol="0" anchor="ctr"/>
-          <a:lstStyle/>
-          <a:p>
-            <a:pPr algn="ctr" indent="0" marL="0">
-              <a:buNone/>
-            </a:pPr>
-            <a:r>
-              <a:rPr lang="en-US" sz="1600" i="1" dirty="0">
+          <p:cNvPr id="7" name="Text 4"/>
+          <p:cNvSpPr/>
+          <p:nvPr/>
+        </p:nvSpPr>
+        <p:spPr>
+          <a:xfrm>
+            <a:off x="2651760" y="685800"/>
+            <a:ext cx="2926080" cy="594360"/>
+          </a:xfrm>
+          <a:prstGeom prst="rect">
+            <a:avLst/>
+          </a:prstGeom>
+          <a:noFill/>
+          <a:ln/>
+        </p:spPr>
+        <p:txBody>
+          <a:bodyPr wrap="square" lIns="0" tIns="0" rIns="0" bIns="0" rtlCol="0" anchor="ctr"/>
+          <a:lstStyle/>
+          <a:p>
+            <a:pPr algn="ctr" indent="0" marL="0">
+              <a:buNone/>
+            </a:pPr>
+            <a:r>
+              <a:rPr lang="en-US" sz="1500" i="1" dirty="0">
                 <a:solidFill>
                   <a:srgbClr val="DAFF94"/>
                 </a:solidFill>
@@ -3816,13 +3794,13 @@
               </a:rPr>
               <a:t>TRENDS</a:t>
             </a:r>
-            <a:endParaRPr lang="en-US" sz="1600" dirty="0"/>
+            <a:endParaRPr lang="en-US" sz="1500" dirty="0"/>
           </a:p>
         </p:txBody>
       </p:sp>
       <p:pic>
         <p:nvPicPr>
-          <p:cNvPr id="9" name="Image 1" descr="/home/user/data-manipulation-exercises/.claude/skills/brand-guidelines/assets/textures/globe-lime.png">    </p:cNvPr>
+          <p:cNvPr id="8" name="Image 1" descr="/home/user/data-manipulation-exercises/.claude/skills/brand-guidelines/assets/textures/globe-lime.png">    </p:cNvPr>
           <p:cNvPicPr>
             <a:picLocks noChangeAspect="1"/>
           </p:cNvPicPr>
@@ -3836,8 +3814,8 @@
         </p:blipFill>
         <p:spPr>
           <a:xfrm>
-            <a:off x="5389656" y="1374343"/>
-            <a:ext cx="268834" cy="268834"/>
+            <a:off x="5403098" y="858164"/>
+            <a:ext cx="249631" cy="249631"/>
           </a:xfrm>
           <a:prstGeom prst="rect">
             <a:avLst/>
@@ -3846,30 +3824,30 @@
       </p:pic>
       <p:sp>
         <p:nvSpPr>
-          <p:cNvPr id="10" name="Text 6"/>
-          <p:cNvSpPr/>
-          <p:nvPr/>
-        </p:nvSpPr>
-        <p:spPr>
-          <a:xfrm>
-            <a:off x="640080" y="2194560"/>
-            <a:ext cx="6949440" cy="2377440"/>
-          </a:xfrm>
-          <a:prstGeom prst="rect">
-            <a:avLst/>
-          </a:prstGeom>
-          <a:noFill/>
-          <a:ln/>
-        </p:spPr>
-        <p:txBody>
-          <a:bodyPr wrap="square" lIns="0" tIns="0" rIns="0" bIns="0" rtlCol="0" anchor="ctr"/>
+          <p:cNvPr id="9" name="Text 5"/>
+          <p:cNvSpPr/>
+          <p:nvPr/>
+        </p:nvSpPr>
+        <p:spPr>
+          <a:xfrm>
+            <a:off x="640080" y="1371600"/>
+            <a:ext cx="6949440" cy="1097280"/>
+          </a:xfrm>
+          <a:prstGeom prst="rect">
+            <a:avLst/>
+          </a:prstGeom>
+          <a:noFill/>
+          <a:ln/>
+        </p:spPr>
+        <p:txBody>
+          <a:bodyPr wrap="square" lIns="0" tIns="0" rIns="0" bIns="0" rtlCol="0" anchor="t"/>
           <a:lstStyle/>
           <a:p>
             <a:pPr algn="l" indent="0" marL="0">
               <a:buNone/>
             </a:pPr>
             <a:r>
-              <a:rPr lang="en-US" sz="4000" b="1" i="1" dirty="0">
+              <a:rPr lang="en-US" sz="3000" b="1" i="1" dirty="0">
                 <a:solidFill>
                   <a:srgbClr val="DAFF94"/>
                 </a:solidFill>
@@ -3879,14 +3857,14 @@
               </a:rPr>
               <a:t>HIPER-</a:t>
             </a:r>
-            <a:endParaRPr lang="en-US" sz="4000" dirty="0"/>
+            <a:endParaRPr lang="en-US" sz="3000" dirty="0"/>
           </a:p>
           <a:p>
             <a:pPr algn="l" indent="0" marL="0">
               <a:buNone/>
             </a:pPr>
             <a:r>
-              <a:rPr lang="en-US" sz="4000" b="1" i="1" dirty="0">
+              <a:rPr lang="en-US" sz="3000" b="1" i="1" dirty="0">
                 <a:solidFill>
                   <a:srgbClr val="DAFF94"/>
                 </a:solidFill>
@@ -3896,44 +3874,20 @@
               </a:rPr>
               <a:t>REALIDADE</a:t>
             </a:r>
-            <a:endParaRPr lang="en-US" sz="4000" dirty="0"/>
-          </a:p>
-        </p:txBody>
-      </p:sp>
-      <p:sp>
-        <p:nvSpPr>
-          <p:cNvPr id="11" name="Shape 7"/>
-          <p:cNvSpPr/>
-          <p:nvPr/>
-        </p:nvSpPr>
-        <p:spPr>
-          <a:xfrm>
-            <a:off x="640080" y="4937760"/>
-            <a:ext cx="6949440" cy="3108960"/>
-          </a:xfrm>
-          <a:prstGeom prst="roundRect">
-            <a:avLst>
-              <a:gd name="adj" fmla="val 4412"/>
-            </a:avLst>
-          </a:prstGeom>
-          <a:solidFill>
-            <a:srgbClr val="000000">
-              <a:alpha val="78000"/>
-            </a:srgbClr>
-          </a:solidFill>
-          <a:ln/>
-        </p:spPr>
-      </p:sp>
-      <p:sp>
-        <p:nvSpPr>
-          <p:cNvPr id="12" name="Text 8"/>
-          <p:cNvSpPr/>
-          <p:nvPr/>
-        </p:nvSpPr>
-        <p:spPr>
-          <a:xfrm>
-            <a:off x="914400" y="5212080"/>
-            <a:ext cx="6400800" cy="1554480"/>
+            <a:endParaRPr lang="en-US" sz="3000" dirty="0"/>
+          </a:p>
+        </p:txBody>
+      </p:sp>
+      <p:sp>
+        <p:nvSpPr>
+          <p:cNvPr id="10" name="Text 6"/>
+          <p:cNvSpPr/>
+          <p:nvPr/>
+        </p:nvSpPr>
+        <p:spPr>
+          <a:xfrm>
+            <a:off x="640080" y="2606040"/>
+            <a:ext cx="6949440" cy="822960"/>
           </a:xfrm>
           <a:prstGeom prst="rect">
             <a:avLst/>
@@ -3949,7 +3903,7 @@
               <a:buNone/>
             </a:pPr>
             <a:r>
-              <a:rPr lang="en-US" sz="2200" b="1" dirty="0">
+              <a:rPr lang="en-US" sz="1500" b="1" dirty="0">
                 <a:solidFill>
                   <a:srgbClr val="DAFF94"/>
                 </a:solidFill>
@@ -3959,20 +3913,20 @@
               </a:rPr>
               <a:t>Online ou offline? Pra Geração Z, já não faz diferença.</a:t>
             </a:r>
-            <a:endParaRPr lang="en-US" sz="2200" dirty="0"/>
-          </a:p>
-        </p:txBody>
-      </p:sp>
-      <p:sp>
-        <p:nvSpPr>
-          <p:cNvPr id="13" name="Text 9"/>
-          <p:cNvSpPr/>
-          <p:nvPr/>
-        </p:nvSpPr>
-        <p:spPr>
-          <a:xfrm>
-            <a:off x="914400" y="6858000"/>
-            <a:ext cx="6400800" cy="1005840"/>
+            <a:endParaRPr lang="en-US" sz="1500" dirty="0"/>
+          </a:p>
+        </p:txBody>
+      </p:sp>
+      <p:sp>
+        <p:nvSpPr>
+          <p:cNvPr id="11" name="Text 7"/>
+          <p:cNvSpPr/>
+          <p:nvPr/>
+        </p:nvSpPr>
+        <p:spPr>
+          <a:xfrm>
+            <a:off x="640080" y="3566160"/>
+            <a:ext cx="6492240" cy="594360"/>
           </a:xfrm>
           <a:prstGeom prst="rect">
             <a:avLst/>
@@ -3988,7 +3942,7 @@
               <a:buNone/>
             </a:pPr>
             <a:r>
-              <a:rPr lang="en-US" sz="1300" dirty="0">
+              <a:rPr lang="en-US" sz="1000" dirty="0">
                 <a:solidFill>
                   <a:srgbClr val="DAFF94"/>
                 </a:solidFill>
@@ -3998,20 +3952,20 @@
               </a:rPr>
               <a:t>40% dos jovens dizem que “é tudo real”, sem diferenciar o virtual do físico.</a:t>
             </a:r>
-            <a:endParaRPr lang="en-US" sz="1300" dirty="0"/>
-          </a:p>
-        </p:txBody>
-      </p:sp>
-      <p:sp>
-        <p:nvSpPr>
-          <p:cNvPr id="14" name="Text 10"/>
-          <p:cNvSpPr/>
-          <p:nvPr/>
-        </p:nvSpPr>
-        <p:spPr>
-          <a:xfrm>
-            <a:off x="640080" y="9646920"/>
-            <a:ext cx="1828800" cy="365760"/>
+            <a:endParaRPr lang="en-US" sz="1000" dirty="0"/>
+          </a:p>
+        </p:txBody>
+      </p:sp>
+      <p:sp>
+        <p:nvSpPr>
+          <p:cNvPr id="12" name="Text 8"/>
+          <p:cNvSpPr/>
+          <p:nvPr/>
+        </p:nvSpPr>
+        <p:spPr>
+          <a:xfrm>
+            <a:off x="640080" y="4343400"/>
+            <a:ext cx="1828800" cy="320040"/>
           </a:xfrm>
           <a:prstGeom prst="rect">
             <a:avLst/>
@@ -4027,7 +3981,7 @@
               <a:buNone/>
             </a:pPr>
             <a:r>
-              <a:rPr lang="en-US" sz="1100" dirty="0">
+              <a:rPr lang="en-US" sz="1000" dirty="0">
                 <a:solidFill>
                   <a:srgbClr val="DAFF94"/>
                 </a:solidFill>
@@ -4037,13 +3991,13 @@
               </a:rPr>
               <a:t>1 / 5</a:t>
             </a:r>
-            <a:endParaRPr lang="en-US" sz="1100" dirty="0"/>
+            <a:endParaRPr lang="en-US" sz="1000" dirty="0"/>
           </a:p>
         </p:txBody>
       </p:sp>
       <p:pic>
         <p:nvPicPr>
-          <p:cNvPr id="15" name="Image 2" descr="/home/user/data-manipulation-exercises/.claude/skills/brand-guidelines/assets/textures/arrow-lime.png">    </p:cNvPr>
+          <p:cNvPr id="13" name="Image 2" descr="/home/user/data-manipulation-exercises/.claude/skills/brand-guidelines/assets/textures/arrow-lime.png">    </p:cNvPr>
           <p:cNvPicPr>
             <a:picLocks noChangeAspect="1"/>
           </p:cNvPicPr>
@@ -4057,7 +4011,7 @@
         </p:blipFill>
         <p:spPr>
           <a:xfrm rot="5400000">
-            <a:off x="7223760" y="9281160"/>
+            <a:off x="7223760" y="4279392"/>
             <a:ext cx="292608" cy="292608"/>
           </a:xfrm>
           <a:prstGeom prst="rect">
@@ -4357,27 +4311,42 @@
       </p:sp>
       <p:sp>
         <p:nvSpPr>
-          <p:cNvPr id="9" name="Shape 6"/>
-          <p:cNvSpPr/>
-          <p:nvPr/>
-        </p:nvSpPr>
-        <p:spPr>
-          <a:xfrm>
-            <a:off x="640080" y="4937760"/>
-            <a:ext cx="6949440" cy="3108960"/>
-          </a:xfrm>
-          <a:prstGeom prst="roundRect">
-            <a:avLst>
-              <a:gd name="adj" fmla="val 4412"/>
-            </a:avLst>
-          </a:prstGeom>
-          <a:solidFill>
-            <a:srgbClr val="FFFFFF">
-              <a:alpha val="45000"/>
-            </a:srgbClr>
-          </a:solidFill>
-          <a:ln/>
-        </p:spPr>
+          <p:cNvPr id="9" name="Text 6"/>
+          <p:cNvSpPr/>
+          <p:nvPr/>
+        </p:nvSpPr>
+        <p:spPr>
+          <a:xfrm>
+            <a:off x="914400" y="4937760"/>
+            <a:ext cx="6400800" cy="1554480"/>
+          </a:xfrm>
+          <a:prstGeom prst="rect">
+            <a:avLst/>
+          </a:prstGeom>
+          <a:noFill/>
+          <a:ln/>
+        </p:spPr>
+        <p:txBody>
+          <a:bodyPr wrap="square" lIns="0" tIns="0" rIns="0" bIns="0" rtlCol="0" anchor="t"/>
+          <a:lstStyle/>
+          <a:p>
+            <a:pPr algn="l" indent="0" marL="0">
+              <a:buNone/>
+            </a:pPr>
+            <a:r>
+              <a:rPr lang="en-US" sz="2200" b="1" dirty="0">
+                <a:solidFill>
+                  <a:srgbClr val="000000"/>
+                </a:solidFill>
+                <a:latin typeface="Arial" pitchFamily="34" charset="0"/>
+                <a:ea typeface="Arial" pitchFamily="34" charset="-122"/>
+                <a:cs typeface="Arial" pitchFamily="34" charset="-120"/>
+              </a:rPr>
+              <a:t>Sua marca já apareceu numa resposta de IA hoje?</a:t>
+            </a:r>
+            <a:endParaRPr lang="en-US" sz="2200" dirty="0"/>
+          </a:p>
+        </p:txBody>
       </p:sp>
       <p:sp>
         <p:nvSpPr>
@@ -4387,46 +4356,7 @@
         </p:nvSpPr>
         <p:spPr>
           <a:xfrm>
-            <a:off x="914400" y="5212080"/>
-            <a:ext cx="6400800" cy="1554480"/>
-          </a:xfrm>
-          <a:prstGeom prst="rect">
-            <a:avLst/>
-          </a:prstGeom>
-          <a:noFill/>
-          <a:ln/>
-        </p:spPr>
-        <p:txBody>
-          <a:bodyPr wrap="square" lIns="0" tIns="0" rIns="0" bIns="0" rtlCol="0" anchor="t"/>
-          <a:lstStyle/>
-          <a:p>
-            <a:pPr algn="l" indent="0" marL="0">
-              <a:buNone/>
-            </a:pPr>
-            <a:r>
-              <a:rPr lang="en-US" sz="2200" b="1" dirty="0">
-                <a:solidFill>
-                  <a:srgbClr val="000000"/>
-                </a:solidFill>
-                <a:latin typeface="Arial" pitchFamily="34" charset="0"/>
-                <a:ea typeface="Arial" pitchFamily="34" charset="-122"/>
-                <a:cs typeface="Arial" pitchFamily="34" charset="-120"/>
-              </a:rPr>
-              <a:t>Sua marca já apareceu numa resposta de IA hoje?</a:t>
-            </a:r>
-            <a:endParaRPr lang="en-US" sz="2200" dirty="0"/>
-          </a:p>
-        </p:txBody>
-      </p:sp>
-      <p:sp>
-        <p:nvSpPr>
-          <p:cNvPr id="11" name="Text 8"/>
-          <p:cNvSpPr/>
-          <p:nvPr/>
-        </p:nvSpPr>
-        <p:spPr>
-          <a:xfrm>
-            <a:off x="914400" y="6858000"/>
+            <a:off x="914400" y="6583680"/>
             <a:ext cx="6400800" cy="1005840"/>
           </a:xfrm>
           <a:prstGeom prst="rect">
@@ -4459,7 +4389,7 @@
       </p:sp>
       <p:sp>
         <p:nvSpPr>
-          <p:cNvPr id="12" name="Text 9"/>
+          <p:cNvPr id="11" name="Text 8"/>
           <p:cNvSpPr/>
           <p:nvPr/>
         </p:nvSpPr>
@@ -4498,7 +4428,7 @@
       </p:sp>
       <p:pic>
         <p:nvPicPr>
-          <p:cNvPr id="13" name="Image 1" descr="/home/user/data-manipulation-exercises/.claude/skills/brand-guidelines/assets/textures/arrow-black.png">    </p:cNvPr>
+          <p:cNvPr id="12" name="Image 1" descr="/home/user/data-manipulation-exercises/.claude/skills/brand-guidelines/assets/textures/arrow-black.png">    </p:cNvPr>
           <p:cNvPicPr>
             <a:picLocks noChangeAspect="1"/>
           </p:cNvPicPr>
@@ -4567,8 +4497,8 @@
         </p:blipFill>
         <p:spPr>
           <a:xfrm>
-            <a:off x="0" y="0"/>
-            <a:ext cx="8229600" cy="10287000"/>
+            <a:off x="0" y="4937760"/>
+            <a:ext cx="8229600" cy="5349240"/>
           </a:xfrm>
           <a:prstGeom prst="rect">
             <a:avLst/>
@@ -4577,29 +4507,7 @@
       </p:pic>
       <p:sp>
         <p:nvSpPr>
-          <p:cNvPr id="3" name="Shape 0"/>
-          <p:cNvSpPr/>
-          <p:nvPr/>
-        </p:nvSpPr>
-        <p:spPr>
-          <a:xfrm>
-            <a:off x="0" y="0"/>
-            <a:ext cx="8229600" cy="4937760"/>
-          </a:xfrm>
-          <a:prstGeom prst="rect">
-            <a:avLst/>
-          </a:prstGeom>
-          <a:solidFill>
-            <a:srgbClr val="000000">
-              <a:alpha val="68000"/>
-            </a:srgbClr>
-          </a:solidFill>
-          <a:ln/>
-        </p:spPr>
-      </p:sp>
-      <p:sp>
-        <p:nvSpPr>
-          <p:cNvPr id="4" name="Text 1"/>
+          <p:cNvPr id="3" name="Text 0"/>
           <p:cNvSpPr/>
           <p:nvPr/>
         </p:nvSpPr>
@@ -4638,7 +4546,7 @@
       </p:sp>
       <p:sp>
         <p:nvSpPr>
-          <p:cNvPr id="5" name="Text 2"/>
+          <p:cNvPr id="4" name="Text 1"/>
           <p:cNvSpPr/>
           <p:nvPr/>
         </p:nvSpPr>
@@ -4677,7 +4585,7 @@
       </p:sp>
       <p:sp>
         <p:nvSpPr>
-          <p:cNvPr id="6" name="Text 3"/>
+          <p:cNvPr id="5" name="Text 2"/>
           <p:cNvSpPr/>
           <p:nvPr/>
         </p:nvSpPr>
@@ -4716,14 +4624,14 @@
       </p:sp>
       <p:sp>
         <p:nvSpPr>
-          <p:cNvPr id="7" name="Shape 4"/>
-          <p:cNvSpPr/>
-          <p:nvPr/>
-        </p:nvSpPr>
-        <p:spPr>
-          <a:xfrm>
-            <a:off x="2651760" y="1188720"/>
-            <a:ext cx="2926080" cy="640080"/>
+          <p:cNvPr id="6" name="Shape 3"/>
+          <p:cNvSpPr/>
+          <p:nvPr/>
+        </p:nvSpPr>
+        <p:spPr>
+          <a:xfrm>
+            <a:off x="2651760" y="685800"/>
+            <a:ext cx="2926080" cy="594360"/>
           </a:xfrm>
           <a:prstGeom prst="ellipse">
             <a:avLst/>
@@ -4738,30 +4646,30 @@
       </p:sp>
       <p:sp>
         <p:nvSpPr>
-          <p:cNvPr id="8" name="Text 5"/>
-          <p:cNvSpPr/>
-          <p:nvPr/>
-        </p:nvSpPr>
-        <p:spPr>
-          <a:xfrm>
-            <a:off x="2651760" y="1188720"/>
-            <a:ext cx="2926080" cy="640080"/>
-          </a:xfrm>
-          <a:prstGeom prst="rect">
-            <a:avLst/>
-          </a:prstGeom>
-          <a:noFill/>
-          <a:ln/>
-        </p:spPr>
-        <p:txBody>
-          <a:bodyPr wrap="square" lIns="0" tIns="0" rIns="0" bIns="0" rtlCol="0" anchor="ctr"/>
-          <a:lstStyle/>
-          <a:p>
-            <a:pPr algn="ctr" indent="0" marL="0">
-              <a:buNone/>
-            </a:pPr>
-            <a:r>
-              <a:rPr lang="en-US" sz="1600" i="1" dirty="0">
+          <p:cNvPr id="7" name="Text 4"/>
+          <p:cNvSpPr/>
+          <p:nvPr/>
+        </p:nvSpPr>
+        <p:spPr>
+          <a:xfrm>
+            <a:off x="2651760" y="685800"/>
+            <a:ext cx="2926080" cy="594360"/>
+          </a:xfrm>
+          <a:prstGeom prst="rect">
+            <a:avLst/>
+          </a:prstGeom>
+          <a:noFill/>
+          <a:ln/>
+        </p:spPr>
+        <p:txBody>
+          <a:bodyPr wrap="square" lIns="0" tIns="0" rIns="0" bIns="0" rtlCol="0" anchor="ctr"/>
+          <a:lstStyle/>
+          <a:p>
+            <a:pPr algn="ctr" indent="0" marL="0">
+              <a:buNone/>
+            </a:pPr>
+            <a:r>
+              <a:rPr lang="en-US" sz="1500" i="1" dirty="0">
                 <a:solidFill>
                   <a:srgbClr val="000000"/>
                 </a:solidFill>
@@ -4771,13 +4679,13 @@
               </a:rPr>
               <a:t>TRENDS</a:t>
             </a:r>
-            <a:endParaRPr lang="en-US" sz="1600" dirty="0"/>
+            <a:endParaRPr lang="en-US" sz="1500" dirty="0"/>
           </a:p>
         </p:txBody>
       </p:sp>
       <p:pic>
         <p:nvPicPr>
-          <p:cNvPr id="9" name="Image 1" descr="/home/user/data-manipulation-exercises/.claude/skills/brand-guidelines/assets/textures/globe-lime.png">    </p:cNvPr>
+          <p:cNvPr id="8" name="Image 1" descr="/home/user/data-manipulation-exercises/.claude/skills/brand-guidelines/assets/textures/globe-lime.png">    </p:cNvPr>
           <p:cNvPicPr>
             <a:picLocks noChangeAspect="1"/>
           </p:cNvPicPr>
@@ -4791,8 +4699,8 @@
         </p:blipFill>
         <p:spPr>
           <a:xfrm>
-            <a:off x="5389656" y="1374343"/>
-            <a:ext cx="268834" cy="268834"/>
+            <a:off x="5403098" y="858164"/>
+            <a:ext cx="249631" cy="249631"/>
           </a:xfrm>
           <a:prstGeom prst="rect">
             <a:avLst/>
@@ -4801,30 +4709,30 @@
       </p:pic>
       <p:sp>
         <p:nvSpPr>
-          <p:cNvPr id="10" name="Text 6"/>
-          <p:cNvSpPr/>
-          <p:nvPr/>
-        </p:nvSpPr>
-        <p:spPr>
-          <a:xfrm>
-            <a:off x="640080" y="2194560"/>
-            <a:ext cx="6949440" cy="2377440"/>
-          </a:xfrm>
-          <a:prstGeom prst="rect">
-            <a:avLst/>
-          </a:prstGeom>
-          <a:noFill/>
-          <a:ln/>
-        </p:spPr>
-        <p:txBody>
-          <a:bodyPr wrap="square" lIns="0" tIns="0" rIns="0" bIns="0" rtlCol="0" anchor="ctr"/>
+          <p:cNvPr id="9" name="Text 5"/>
+          <p:cNvSpPr/>
+          <p:nvPr/>
+        </p:nvSpPr>
+        <p:spPr>
+          <a:xfrm>
+            <a:off x="640080" y="1371600"/>
+            <a:ext cx="6949440" cy="1097280"/>
+          </a:xfrm>
+          <a:prstGeom prst="rect">
+            <a:avLst/>
+          </a:prstGeom>
+          <a:noFill/>
+          <a:ln/>
+        </p:spPr>
+        <p:txBody>
+          <a:bodyPr wrap="square" lIns="0" tIns="0" rIns="0" bIns="0" rtlCol="0" anchor="t"/>
           <a:lstStyle/>
           <a:p>
             <a:pPr algn="l" indent="0" marL="0">
               <a:buNone/>
             </a:pPr>
             <a:r>
-              <a:rPr lang="en-US" sz="4000" b="1" i="1" dirty="0">
+              <a:rPr lang="en-US" sz="3000" b="1" i="1" dirty="0">
                 <a:solidFill>
                   <a:srgbClr val="000000"/>
                 </a:solidFill>
@@ -4834,14 +4742,14 @@
               </a:rPr>
               <a:t>GERAÇÃO</a:t>
             </a:r>
-            <a:endParaRPr lang="en-US" sz="4000" dirty="0"/>
+            <a:endParaRPr lang="en-US" sz="3000" dirty="0"/>
           </a:p>
           <a:p>
             <a:pPr algn="l" indent="0" marL="0">
               <a:buNone/>
             </a:pPr>
             <a:r>
-              <a:rPr lang="en-US" sz="4000" b="1" i="1" dirty="0">
+              <a:rPr lang="en-US" sz="3000" b="1" i="1" dirty="0">
                 <a:solidFill>
                   <a:srgbClr val="000000"/>
                 </a:solidFill>
@@ -4851,44 +4759,20 @@
               </a:rPr>
               <a:t>SEM RESSACA</a:t>
             </a:r>
-            <a:endParaRPr lang="en-US" sz="4000" dirty="0"/>
-          </a:p>
-        </p:txBody>
-      </p:sp>
-      <p:sp>
-        <p:nvSpPr>
-          <p:cNvPr id="11" name="Shape 7"/>
-          <p:cNvSpPr/>
-          <p:nvPr/>
-        </p:nvSpPr>
-        <p:spPr>
-          <a:xfrm>
-            <a:off x="640080" y="4937760"/>
-            <a:ext cx="6949440" cy="3108960"/>
-          </a:xfrm>
-          <a:prstGeom prst="roundRect">
-            <a:avLst>
-              <a:gd name="adj" fmla="val 4412"/>
-            </a:avLst>
-          </a:prstGeom>
-          <a:solidFill>
-            <a:srgbClr val="000000">
-              <a:alpha val="78000"/>
-            </a:srgbClr>
-          </a:solidFill>
-          <a:ln/>
-        </p:spPr>
-      </p:sp>
-      <p:sp>
-        <p:nvSpPr>
-          <p:cNvPr id="12" name="Text 8"/>
-          <p:cNvSpPr/>
-          <p:nvPr/>
-        </p:nvSpPr>
-        <p:spPr>
-          <a:xfrm>
-            <a:off x="914400" y="5212080"/>
-            <a:ext cx="6400800" cy="1554480"/>
+            <a:endParaRPr lang="en-US" sz="3000" dirty="0"/>
+          </a:p>
+        </p:txBody>
+      </p:sp>
+      <p:sp>
+        <p:nvSpPr>
+          <p:cNvPr id="10" name="Text 6"/>
+          <p:cNvSpPr/>
+          <p:nvPr/>
+        </p:nvSpPr>
+        <p:spPr>
+          <a:xfrm>
+            <a:off x="640080" y="2606040"/>
+            <a:ext cx="6949440" cy="822960"/>
           </a:xfrm>
           <a:prstGeom prst="rect">
             <a:avLst/>
@@ -4904,7 +4788,7 @@
               <a:buNone/>
             </a:pPr>
             <a:r>
-              <a:rPr lang="en-US" sz="2200" b="1" dirty="0">
+              <a:rPr lang="en-US" sz="1500" b="1" dirty="0">
                 <a:solidFill>
                   <a:srgbClr val="000000"/>
                 </a:solidFill>
@@ -4914,20 +4798,20 @@
               </a:rPr>
               <a:t>Beber menos virou parte da experiência — não o fim dela.</a:t>
             </a:r>
-            <a:endParaRPr lang="en-US" sz="2200" dirty="0"/>
-          </a:p>
-        </p:txBody>
-      </p:sp>
-      <p:sp>
-        <p:nvSpPr>
-          <p:cNvPr id="13" name="Text 9"/>
-          <p:cNvSpPr/>
-          <p:nvPr/>
-        </p:nvSpPr>
-        <p:spPr>
-          <a:xfrm>
-            <a:off x="914400" y="6858000"/>
-            <a:ext cx="6400800" cy="1005840"/>
+            <a:endParaRPr lang="en-US" sz="1500" dirty="0"/>
+          </a:p>
+        </p:txBody>
+      </p:sp>
+      <p:sp>
+        <p:nvSpPr>
+          <p:cNvPr id="11" name="Text 7"/>
+          <p:cNvSpPr/>
+          <p:nvPr/>
+        </p:nvSpPr>
+        <p:spPr>
+          <a:xfrm>
+            <a:off x="640080" y="3566160"/>
+            <a:ext cx="6492240" cy="594360"/>
           </a:xfrm>
           <a:prstGeom prst="rect">
             <a:avLst/>
@@ -4943,7 +4827,7 @@
               <a:buNone/>
             </a:pPr>
             <a:r>
-              <a:rPr lang="en-US" sz="1300" dirty="0">
+              <a:rPr lang="en-US" sz="1000" dirty="0">
                 <a:solidFill>
                   <a:srgbClr val="000000"/>
                 </a:solidFill>
@@ -4953,20 +4837,20 @@
               </a:rPr>
               <a:t>64% dos brasileiros declararam não consumir álcool em 2025.</a:t>
             </a:r>
-            <a:endParaRPr lang="en-US" sz="1300" dirty="0"/>
-          </a:p>
-        </p:txBody>
-      </p:sp>
-      <p:sp>
-        <p:nvSpPr>
-          <p:cNvPr id="14" name="Text 10"/>
-          <p:cNvSpPr/>
-          <p:nvPr/>
-        </p:nvSpPr>
-        <p:spPr>
-          <a:xfrm>
-            <a:off x="640080" y="9646920"/>
-            <a:ext cx="1828800" cy="365760"/>
+            <a:endParaRPr lang="en-US" sz="1000" dirty="0"/>
+          </a:p>
+        </p:txBody>
+      </p:sp>
+      <p:sp>
+        <p:nvSpPr>
+          <p:cNvPr id="12" name="Text 8"/>
+          <p:cNvSpPr/>
+          <p:nvPr/>
+        </p:nvSpPr>
+        <p:spPr>
+          <a:xfrm>
+            <a:off x="640080" y="4343400"/>
+            <a:ext cx="1828800" cy="320040"/>
           </a:xfrm>
           <a:prstGeom prst="rect">
             <a:avLst/>
@@ -4982,7 +4866,7 @@
               <a:buNone/>
             </a:pPr>
             <a:r>
-              <a:rPr lang="en-US" sz="1100" dirty="0">
+              <a:rPr lang="en-US" sz="1000" dirty="0">
                 <a:solidFill>
                   <a:srgbClr val="000000"/>
                 </a:solidFill>
@@ -4992,13 +4876,13 @@
               </a:rPr>
               <a:t>3 / 5</a:t>
             </a:r>
-            <a:endParaRPr lang="en-US" sz="1100" dirty="0"/>
+            <a:endParaRPr lang="en-US" sz="1000" dirty="0"/>
           </a:p>
         </p:txBody>
       </p:sp>
       <p:pic>
         <p:nvPicPr>
-          <p:cNvPr id="15" name="Image 2" descr="/home/user/data-manipulation-exercises/.claude/skills/brand-guidelines/assets/textures/arrow-lime.png">    </p:cNvPr>
+          <p:cNvPr id="13" name="Image 2" descr="/home/user/data-manipulation-exercises/.claude/skills/brand-guidelines/assets/textures/arrow-lime.png">    </p:cNvPr>
           <p:cNvPicPr>
             <a:picLocks noChangeAspect="1"/>
           </p:cNvPicPr>
@@ -5012,7 +4896,7 @@
         </p:blipFill>
         <p:spPr>
           <a:xfrm rot="5400000">
-            <a:off x="7223760" y="9281160"/>
+            <a:off x="7223760" y="4279392"/>
             <a:ext cx="292608" cy="292608"/>
           </a:xfrm>
           <a:prstGeom prst="rect">
@@ -5068,7 +4952,7 @@
         <p:spPr>
           <a:xfrm>
             <a:off x="0" y="0"/>
-            <a:ext cx="8229600" cy="10287000"/>
+            <a:ext cx="8229600" cy="5349240"/>
           </a:xfrm>
           <a:prstGeom prst="rect">
             <a:avLst/>
@@ -5077,35 +4961,13 @@
       </p:pic>
       <p:sp>
         <p:nvSpPr>
-          <p:cNvPr id="3" name="Shape 0"/>
-          <p:cNvSpPr/>
-          <p:nvPr/>
-        </p:nvSpPr>
-        <p:spPr>
-          <a:xfrm>
-            <a:off x="0" y="0"/>
-            <a:ext cx="8229600" cy="4937760"/>
-          </a:xfrm>
-          <a:prstGeom prst="rect">
-            <a:avLst/>
-          </a:prstGeom>
-          <a:solidFill>
-            <a:srgbClr val="000000">
-              <a:alpha val="68000"/>
-            </a:srgbClr>
-          </a:solidFill>
-          <a:ln/>
-        </p:spPr>
-      </p:sp>
-      <p:sp>
-        <p:nvSpPr>
-          <p:cNvPr id="4" name="Text 1"/>
-          <p:cNvSpPr/>
-          <p:nvPr/>
-        </p:nvSpPr>
-        <p:spPr>
-          <a:xfrm>
-            <a:off x="365760" y="228600"/>
+          <p:cNvPr id="3" name="Text 0"/>
+          <p:cNvSpPr/>
+          <p:nvPr/>
+        </p:nvSpPr>
+        <p:spPr>
+          <a:xfrm>
+            <a:off x="365760" y="5577840"/>
             <a:ext cx="1828800" cy="274320"/>
           </a:xfrm>
           <a:prstGeom prst="rect">
@@ -5138,13 +5000,13 @@
       </p:sp>
       <p:sp>
         <p:nvSpPr>
-          <p:cNvPr id="5" name="Text 2"/>
-          <p:cNvSpPr/>
-          <p:nvPr/>
-        </p:nvSpPr>
-        <p:spPr>
-          <a:xfrm>
-            <a:off x="3200400" y="228600"/>
+          <p:cNvPr id="4" name="Text 1"/>
+          <p:cNvSpPr/>
+          <p:nvPr/>
+        </p:nvSpPr>
+        <p:spPr>
+          <a:xfrm>
+            <a:off x="3200400" y="5577840"/>
             <a:ext cx="1828800" cy="274320"/>
           </a:xfrm>
           <a:prstGeom prst="rect">
@@ -5177,13 +5039,13 @@
       </p:sp>
       <p:sp>
         <p:nvSpPr>
-          <p:cNvPr id="6" name="Text 3"/>
-          <p:cNvSpPr/>
-          <p:nvPr/>
-        </p:nvSpPr>
-        <p:spPr>
-          <a:xfrm>
-            <a:off x="6035040" y="228600"/>
+          <p:cNvPr id="5" name="Text 2"/>
+          <p:cNvSpPr/>
+          <p:nvPr/>
+        </p:nvSpPr>
+        <p:spPr>
+          <a:xfrm>
+            <a:off x="6035040" y="5577840"/>
             <a:ext cx="1828800" cy="274320"/>
           </a:xfrm>
           <a:prstGeom prst="rect">
@@ -5216,14 +5078,14 @@
       </p:sp>
       <p:sp>
         <p:nvSpPr>
-          <p:cNvPr id="7" name="Shape 4"/>
-          <p:cNvSpPr/>
-          <p:nvPr/>
-        </p:nvSpPr>
-        <p:spPr>
-          <a:xfrm>
-            <a:off x="2651760" y="1188720"/>
-            <a:ext cx="2926080" cy="640080"/>
+          <p:cNvPr id="6" name="Shape 3"/>
+          <p:cNvSpPr/>
+          <p:nvPr/>
+        </p:nvSpPr>
+        <p:spPr>
+          <a:xfrm>
+            <a:off x="2651760" y="6035040"/>
+            <a:ext cx="2926080" cy="594360"/>
           </a:xfrm>
           <a:prstGeom prst="ellipse">
             <a:avLst/>
@@ -5238,30 +5100,30 @@
       </p:sp>
       <p:sp>
         <p:nvSpPr>
-          <p:cNvPr id="8" name="Text 5"/>
-          <p:cNvSpPr/>
-          <p:nvPr/>
-        </p:nvSpPr>
-        <p:spPr>
-          <a:xfrm>
-            <a:off x="2651760" y="1188720"/>
-            <a:ext cx="2926080" cy="640080"/>
-          </a:xfrm>
-          <a:prstGeom prst="rect">
-            <a:avLst/>
-          </a:prstGeom>
-          <a:noFill/>
-          <a:ln/>
-        </p:spPr>
-        <p:txBody>
-          <a:bodyPr wrap="square" lIns="0" tIns="0" rIns="0" bIns="0" rtlCol="0" anchor="ctr"/>
-          <a:lstStyle/>
-          <a:p>
-            <a:pPr algn="ctr" indent="0" marL="0">
-              <a:buNone/>
-            </a:pPr>
-            <a:r>
-              <a:rPr lang="en-US" sz="1600" i="1" dirty="0">
+          <p:cNvPr id="7" name="Text 4"/>
+          <p:cNvSpPr/>
+          <p:nvPr/>
+        </p:nvSpPr>
+        <p:spPr>
+          <a:xfrm>
+            <a:off x="2651760" y="6035040"/>
+            <a:ext cx="2926080" cy="594360"/>
+          </a:xfrm>
+          <a:prstGeom prst="rect">
+            <a:avLst/>
+          </a:prstGeom>
+          <a:noFill/>
+          <a:ln/>
+        </p:spPr>
+        <p:txBody>
+          <a:bodyPr wrap="square" lIns="0" tIns="0" rIns="0" bIns="0" rtlCol="0" anchor="ctr"/>
+          <a:lstStyle/>
+          <a:p>
+            <a:pPr algn="ctr" indent="0" marL="0">
+              <a:buNone/>
+            </a:pPr>
+            <a:r>
+              <a:rPr lang="en-US" sz="1500" i="1" dirty="0">
                 <a:solidFill>
                   <a:srgbClr val="DAFF94"/>
                 </a:solidFill>
@@ -5271,13 +5133,13 @@
               </a:rPr>
               <a:t>TRENDS</a:t>
             </a:r>
-            <a:endParaRPr lang="en-US" sz="1600" dirty="0"/>
+            <a:endParaRPr lang="en-US" sz="1500" dirty="0"/>
           </a:p>
         </p:txBody>
       </p:sp>
       <p:pic>
         <p:nvPicPr>
-          <p:cNvPr id="9" name="Image 1" descr="/home/user/data-manipulation-exercises/.claude/skills/brand-guidelines/assets/textures/globe-lime.png">    </p:cNvPr>
+          <p:cNvPr id="8" name="Image 1" descr="/home/user/data-manipulation-exercises/.claude/skills/brand-guidelines/assets/textures/globe-lime.png">    </p:cNvPr>
           <p:cNvPicPr>
             <a:picLocks noChangeAspect="1"/>
           </p:cNvPicPr>
@@ -5291,8 +5153,8 @@
         </p:blipFill>
         <p:spPr>
           <a:xfrm>
-            <a:off x="5389656" y="1374343"/>
-            <a:ext cx="268834" cy="268834"/>
+            <a:off x="5403098" y="6207404"/>
+            <a:ext cx="249631" cy="249631"/>
           </a:xfrm>
           <a:prstGeom prst="rect">
             <a:avLst/>
@@ -5301,30 +5163,30 @@
       </p:pic>
       <p:sp>
         <p:nvSpPr>
-          <p:cNvPr id="10" name="Text 6"/>
-          <p:cNvSpPr/>
-          <p:nvPr/>
-        </p:nvSpPr>
-        <p:spPr>
-          <a:xfrm>
-            <a:off x="640080" y="2194560"/>
-            <a:ext cx="6949440" cy="2377440"/>
-          </a:xfrm>
-          <a:prstGeom prst="rect">
-            <a:avLst/>
-          </a:prstGeom>
-          <a:noFill/>
-          <a:ln/>
-        </p:spPr>
-        <p:txBody>
-          <a:bodyPr wrap="square" lIns="0" tIns="0" rIns="0" bIns="0" rtlCol="0" anchor="ctr"/>
+          <p:cNvPr id="9" name="Text 5"/>
+          <p:cNvSpPr/>
+          <p:nvPr/>
+        </p:nvSpPr>
+        <p:spPr>
+          <a:xfrm>
+            <a:off x="640080" y="6720840"/>
+            <a:ext cx="6949440" cy="1097280"/>
+          </a:xfrm>
+          <a:prstGeom prst="rect">
+            <a:avLst/>
+          </a:prstGeom>
+          <a:noFill/>
+          <a:ln/>
+        </p:spPr>
+        <p:txBody>
+          <a:bodyPr wrap="square" lIns="0" tIns="0" rIns="0" bIns="0" rtlCol="0" anchor="t"/>
           <a:lstStyle/>
           <a:p>
             <a:pPr algn="l" indent="0" marL="0">
               <a:buNone/>
             </a:pPr>
             <a:r>
-              <a:rPr lang="en-US" sz="4000" b="1" i="1" dirty="0">
+              <a:rPr lang="en-US" sz="3000" b="1" i="1" dirty="0">
                 <a:solidFill>
                   <a:srgbClr val="DAFF94"/>
                 </a:solidFill>
@@ -5334,14 +5196,14 @@
               </a:rPr>
               <a:t>NEW-WAVE</a:t>
             </a:r>
-            <a:endParaRPr lang="en-US" sz="4000" dirty="0"/>
+            <a:endParaRPr lang="en-US" sz="3000" dirty="0"/>
           </a:p>
           <a:p>
             <a:pPr algn="l" indent="0" marL="0">
               <a:buNone/>
             </a:pPr>
             <a:r>
-              <a:rPr lang="en-US" sz="4000" b="1" i="1" dirty="0">
+              <a:rPr lang="en-US" sz="3000" b="1" i="1" dirty="0">
                 <a:solidFill>
                   <a:srgbClr val="DAFF94"/>
                 </a:solidFill>
@@ -5351,44 +5213,20 @@
               </a:rPr>
               <a:t>SPORT FANDOM</a:t>
             </a:r>
-            <a:endParaRPr lang="en-US" sz="4000" dirty="0"/>
-          </a:p>
-        </p:txBody>
-      </p:sp>
-      <p:sp>
-        <p:nvSpPr>
-          <p:cNvPr id="11" name="Shape 7"/>
-          <p:cNvSpPr/>
-          <p:nvPr/>
-        </p:nvSpPr>
-        <p:spPr>
-          <a:xfrm>
-            <a:off x="640080" y="4937760"/>
-            <a:ext cx="6949440" cy="3108960"/>
-          </a:xfrm>
-          <a:prstGeom prst="roundRect">
-            <a:avLst>
-              <a:gd name="adj" fmla="val 4412"/>
-            </a:avLst>
-          </a:prstGeom>
-          <a:solidFill>
-            <a:srgbClr val="000000">
-              <a:alpha val="78000"/>
-            </a:srgbClr>
-          </a:solidFill>
-          <a:ln/>
-        </p:spPr>
-      </p:sp>
-      <p:sp>
-        <p:nvSpPr>
-          <p:cNvPr id="12" name="Text 8"/>
-          <p:cNvSpPr/>
-          <p:nvPr/>
-        </p:nvSpPr>
-        <p:spPr>
-          <a:xfrm>
-            <a:off x="914400" y="5212080"/>
-            <a:ext cx="6400800" cy="1554480"/>
+            <a:endParaRPr lang="en-US" sz="3000" dirty="0"/>
+          </a:p>
+        </p:txBody>
+      </p:sp>
+      <p:sp>
+        <p:nvSpPr>
+          <p:cNvPr id="10" name="Text 6"/>
+          <p:cNvSpPr/>
+          <p:nvPr/>
+        </p:nvSpPr>
+        <p:spPr>
+          <a:xfrm>
+            <a:off x="640080" y="7955280"/>
+            <a:ext cx="6949440" cy="822960"/>
           </a:xfrm>
           <a:prstGeom prst="rect">
             <a:avLst/>
@@ -5404,7 +5242,7 @@
               <a:buNone/>
             </a:pPr>
             <a:r>
-              <a:rPr lang="en-US" sz="2200" b="1" dirty="0">
+              <a:rPr lang="en-US" sz="1500" b="1" dirty="0">
                 <a:solidFill>
                   <a:srgbClr val="DAFF94"/>
                 </a:solidFill>
@@ -5414,20 +5252,20 @@
               </a:rPr>
               <a:t>O esporte tem uma nova torcida: jovem, feminina e apaixonada por estilo.</a:t>
             </a:r>
-            <a:endParaRPr lang="en-US" sz="2200" dirty="0"/>
-          </a:p>
-        </p:txBody>
-      </p:sp>
-      <p:sp>
-        <p:nvSpPr>
-          <p:cNvPr id="13" name="Text 9"/>
-          <p:cNvSpPr/>
-          <p:nvPr/>
-        </p:nvSpPr>
-        <p:spPr>
-          <a:xfrm>
-            <a:off x="914400" y="6858000"/>
-            <a:ext cx="6400800" cy="1005840"/>
+            <a:endParaRPr lang="en-US" sz="1500" dirty="0"/>
+          </a:p>
+        </p:txBody>
+      </p:sp>
+      <p:sp>
+        <p:nvSpPr>
+          <p:cNvPr id="11" name="Text 7"/>
+          <p:cNvSpPr/>
+          <p:nvPr/>
+        </p:nvSpPr>
+        <p:spPr>
+          <a:xfrm>
+            <a:off x="640080" y="8915400"/>
+            <a:ext cx="6492240" cy="594360"/>
           </a:xfrm>
           <a:prstGeom prst="rect">
             <a:avLst/>
@@ -5443,7 +5281,7 @@
               <a:buNone/>
             </a:pPr>
             <a:r>
-              <a:rPr lang="en-US" sz="1300" dirty="0">
+              <a:rPr lang="en-US" sz="1000" dirty="0">
                 <a:solidFill>
                   <a:srgbClr val="DAFF94"/>
                 </a:solidFill>
@@ -5453,20 +5291,20 @@
               </a:rPr>
               <a:t>3 em cada 4 novos fãs de Fórmula 1 são mulheres.</a:t>
             </a:r>
-            <a:endParaRPr lang="en-US" sz="1300" dirty="0"/>
-          </a:p>
-        </p:txBody>
-      </p:sp>
-      <p:sp>
-        <p:nvSpPr>
-          <p:cNvPr id="14" name="Text 10"/>
-          <p:cNvSpPr/>
-          <p:nvPr/>
-        </p:nvSpPr>
-        <p:spPr>
-          <a:xfrm>
-            <a:off x="640080" y="9646920"/>
-            <a:ext cx="1828800" cy="365760"/>
+            <a:endParaRPr lang="en-US" sz="1000" dirty="0"/>
+          </a:p>
+        </p:txBody>
+      </p:sp>
+      <p:sp>
+        <p:nvSpPr>
+          <p:cNvPr id="12" name="Text 8"/>
+          <p:cNvSpPr/>
+          <p:nvPr/>
+        </p:nvSpPr>
+        <p:spPr>
+          <a:xfrm>
+            <a:off x="640080" y="9692640"/>
+            <a:ext cx="1828800" cy="320040"/>
           </a:xfrm>
           <a:prstGeom prst="rect">
             <a:avLst/>
@@ -5482,7 +5320,7 @@
               <a:buNone/>
             </a:pPr>
             <a:r>
-              <a:rPr lang="en-US" sz="1100" dirty="0">
+              <a:rPr lang="en-US" sz="1000" dirty="0">
                 <a:solidFill>
                   <a:srgbClr val="DAFF94"/>
                 </a:solidFill>
@@ -5492,13 +5330,13 @@
               </a:rPr>
               <a:t>4 / 5</a:t>
             </a:r>
-            <a:endParaRPr lang="en-US" sz="1100" dirty="0"/>
+            <a:endParaRPr lang="en-US" sz="1000" dirty="0"/>
           </a:p>
         </p:txBody>
       </p:sp>
       <p:pic>
         <p:nvPicPr>
-          <p:cNvPr id="15" name="Image 2" descr="/home/user/data-manipulation-exercises/.claude/skills/brand-guidelines/assets/textures/arrow-lime.png">    </p:cNvPr>
+          <p:cNvPr id="13" name="Image 2" descr="/home/user/data-manipulation-exercises/.claude/skills/brand-guidelines/assets/textures/arrow-lime.png">    </p:cNvPr>
           <p:cNvPicPr>
             <a:picLocks noChangeAspect="1"/>
           </p:cNvPicPr>
@@ -5512,7 +5350,7 @@
         </p:blipFill>
         <p:spPr>
           <a:xfrm rot="5400000">
-            <a:off x="7223760" y="9281160"/>
+            <a:off x="7223760" y="9628632"/>
             <a:ext cx="292608" cy="292608"/>
           </a:xfrm>
           <a:prstGeom prst="rect">
@@ -5567,8 +5405,8 @@
         </p:blipFill>
         <p:spPr>
           <a:xfrm>
-            <a:off x="0" y="0"/>
-            <a:ext cx="8229600" cy="10287000"/>
+            <a:off x="0" y="4937760"/>
+            <a:ext cx="8229600" cy="5349240"/>
           </a:xfrm>
           <a:prstGeom prst="rect">
             <a:avLst/>
@@ -5577,29 +5415,7 @@
       </p:pic>
       <p:sp>
         <p:nvSpPr>
-          <p:cNvPr id="3" name="Shape 0"/>
-          <p:cNvSpPr/>
-          <p:nvPr/>
-        </p:nvSpPr>
-        <p:spPr>
-          <a:xfrm>
-            <a:off x="0" y="0"/>
-            <a:ext cx="8229600" cy="4937760"/>
-          </a:xfrm>
-          <a:prstGeom prst="rect">
-            <a:avLst/>
-          </a:prstGeom>
-          <a:solidFill>
-            <a:srgbClr val="000000">
-              <a:alpha val="68000"/>
-            </a:srgbClr>
-          </a:solidFill>
-          <a:ln/>
-        </p:spPr>
-      </p:sp>
-      <p:sp>
-        <p:nvSpPr>
-          <p:cNvPr id="4" name="Text 1"/>
+          <p:cNvPr id="3" name="Text 0"/>
           <p:cNvSpPr/>
           <p:nvPr/>
         </p:nvSpPr>
@@ -5638,7 +5454,7 @@
       </p:sp>
       <p:sp>
         <p:nvSpPr>
-          <p:cNvPr id="5" name="Text 2"/>
+          <p:cNvPr id="4" name="Text 1"/>
           <p:cNvSpPr/>
           <p:nvPr/>
         </p:nvSpPr>
@@ -5677,7 +5493,7 @@
       </p:sp>
       <p:sp>
         <p:nvSpPr>
-          <p:cNvPr id="6" name="Text 3"/>
+          <p:cNvPr id="5" name="Text 2"/>
           <p:cNvSpPr/>
           <p:nvPr/>
         </p:nvSpPr>
@@ -5716,14 +5532,14 @@
       </p:sp>
       <p:sp>
         <p:nvSpPr>
-          <p:cNvPr id="7" name="Shape 4"/>
-          <p:cNvSpPr/>
-          <p:nvPr/>
-        </p:nvSpPr>
-        <p:spPr>
-          <a:xfrm>
-            <a:off x="2651760" y="1188720"/>
-            <a:ext cx="2926080" cy="640080"/>
+          <p:cNvPr id="6" name="Shape 3"/>
+          <p:cNvSpPr/>
+          <p:nvPr/>
+        </p:nvSpPr>
+        <p:spPr>
+          <a:xfrm>
+            <a:off x="2651760" y="685800"/>
+            <a:ext cx="2926080" cy="594360"/>
           </a:xfrm>
           <a:prstGeom prst="ellipse">
             <a:avLst/>
@@ -5738,30 +5554,30 @@
       </p:sp>
       <p:sp>
         <p:nvSpPr>
-          <p:cNvPr id="8" name="Text 5"/>
-          <p:cNvSpPr/>
-          <p:nvPr/>
-        </p:nvSpPr>
-        <p:spPr>
-          <a:xfrm>
-            <a:off x="2651760" y="1188720"/>
-            <a:ext cx="2926080" cy="640080"/>
-          </a:xfrm>
-          <a:prstGeom prst="rect">
-            <a:avLst/>
-          </a:prstGeom>
-          <a:noFill/>
-          <a:ln/>
-        </p:spPr>
-        <p:txBody>
-          <a:bodyPr wrap="square" lIns="0" tIns="0" rIns="0" bIns="0" rtlCol="0" anchor="ctr"/>
-          <a:lstStyle/>
-          <a:p>
-            <a:pPr algn="ctr" indent="0" marL="0">
-              <a:buNone/>
-            </a:pPr>
-            <a:r>
-              <a:rPr lang="en-US" sz="1600" i="1" dirty="0">
+          <p:cNvPr id="7" name="Text 4"/>
+          <p:cNvSpPr/>
+          <p:nvPr/>
+        </p:nvSpPr>
+        <p:spPr>
+          <a:xfrm>
+            <a:off x="2651760" y="685800"/>
+            <a:ext cx="2926080" cy="594360"/>
+          </a:xfrm>
+          <a:prstGeom prst="rect">
+            <a:avLst/>
+          </a:prstGeom>
+          <a:noFill/>
+          <a:ln/>
+        </p:spPr>
+        <p:txBody>
+          <a:bodyPr wrap="square" lIns="0" tIns="0" rIns="0" bIns="0" rtlCol="0" anchor="ctr"/>
+          <a:lstStyle/>
+          <a:p>
+            <a:pPr algn="ctr" indent="0" marL="0">
+              <a:buNone/>
+            </a:pPr>
+            <a:r>
+              <a:rPr lang="en-US" sz="1500" i="1" dirty="0">
                 <a:solidFill>
                   <a:srgbClr val="DAFF94"/>
                 </a:solidFill>
@@ -5771,13 +5587,13 @@
               </a:rPr>
               <a:t>TRENDS</a:t>
             </a:r>
-            <a:endParaRPr lang="en-US" sz="1600" dirty="0"/>
+            <a:endParaRPr lang="en-US" sz="1500" dirty="0"/>
           </a:p>
         </p:txBody>
       </p:sp>
       <p:pic>
         <p:nvPicPr>
-          <p:cNvPr id="9" name="Image 1" descr="/home/user/data-manipulation-exercises/.claude/skills/brand-guidelines/assets/textures/globe-lime.png">    </p:cNvPr>
+          <p:cNvPr id="8" name="Image 1" descr="/home/user/data-manipulation-exercises/.claude/skills/brand-guidelines/assets/textures/globe-lime.png">    </p:cNvPr>
           <p:cNvPicPr>
             <a:picLocks noChangeAspect="1"/>
           </p:cNvPicPr>
@@ -5791,8 +5607,8 @@
         </p:blipFill>
         <p:spPr>
           <a:xfrm>
-            <a:off x="5389656" y="1374343"/>
-            <a:ext cx="268834" cy="268834"/>
+            <a:off x="5403098" y="858164"/>
+            <a:ext cx="249631" cy="249631"/>
           </a:xfrm>
           <a:prstGeom prst="rect">
             <a:avLst/>
@@ -5801,30 +5617,30 @@
       </p:pic>
       <p:sp>
         <p:nvSpPr>
-          <p:cNvPr id="10" name="Text 6"/>
-          <p:cNvSpPr/>
-          <p:nvPr/>
-        </p:nvSpPr>
-        <p:spPr>
-          <a:xfrm>
-            <a:off x="640080" y="2194560"/>
-            <a:ext cx="6949440" cy="2377440"/>
-          </a:xfrm>
-          <a:prstGeom prst="rect">
-            <a:avLst/>
-          </a:prstGeom>
-          <a:noFill/>
-          <a:ln/>
-        </p:spPr>
-        <p:txBody>
-          <a:bodyPr wrap="square" lIns="0" tIns="0" rIns="0" bIns="0" rtlCol="0" anchor="ctr"/>
+          <p:cNvPr id="9" name="Text 5"/>
+          <p:cNvSpPr/>
+          <p:nvPr/>
+        </p:nvSpPr>
+        <p:spPr>
+          <a:xfrm>
+            <a:off x="640080" y="1371600"/>
+            <a:ext cx="6949440" cy="1097280"/>
+          </a:xfrm>
+          <a:prstGeom prst="rect">
+            <a:avLst/>
+          </a:prstGeom>
+          <a:noFill/>
+          <a:ln/>
+        </p:spPr>
+        <p:txBody>
+          <a:bodyPr wrap="square" lIns="0" tIns="0" rIns="0" bIns="0" rtlCol="0" anchor="t"/>
           <a:lstStyle/>
           <a:p>
             <a:pPr algn="l" indent="0" marL="0">
               <a:buNone/>
             </a:pPr>
             <a:r>
-              <a:rPr lang="en-US" sz="4000" b="1" i="1" dirty="0">
+              <a:rPr lang="en-US" sz="3000" b="1" i="1" dirty="0">
                 <a:solidFill>
                   <a:srgbClr val="DAFF94"/>
                 </a:solidFill>
@@ -5834,14 +5650,14 @@
               </a:rPr>
               <a:t>EXPERIÊNCIAS</a:t>
             </a:r>
-            <a:endParaRPr lang="en-US" sz="4000" dirty="0"/>
+            <a:endParaRPr lang="en-US" sz="3000" dirty="0"/>
           </a:p>
           <a:p>
             <a:pPr algn="l" indent="0" marL="0">
               <a:buNone/>
             </a:pPr>
             <a:r>
-              <a:rPr lang="en-US" sz="4000" b="1" i="1" dirty="0">
+              <a:rPr lang="en-US" sz="3000" b="1" i="1" dirty="0">
                 <a:solidFill>
                   <a:srgbClr val="DAFF94"/>
                 </a:solidFill>
@@ -5851,44 +5667,20 @@
               </a:rPr>
               <a:t>TRANSFORMADORAS</a:t>
             </a:r>
-            <a:endParaRPr lang="en-US" sz="4000" dirty="0"/>
-          </a:p>
-        </p:txBody>
-      </p:sp>
-      <p:sp>
-        <p:nvSpPr>
-          <p:cNvPr id="11" name="Shape 7"/>
-          <p:cNvSpPr/>
-          <p:nvPr/>
-        </p:nvSpPr>
-        <p:spPr>
-          <a:xfrm>
-            <a:off x="640080" y="4937760"/>
-            <a:ext cx="6949440" cy="3108960"/>
-          </a:xfrm>
-          <a:prstGeom prst="roundRect">
-            <a:avLst>
-              <a:gd name="adj" fmla="val 4412"/>
-            </a:avLst>
-          </a:prstGeom>
-          <a:solidFill>
-            <a:srgbClr val="000000">
-              <a:alpha val="78000"/>
-            </a:srgbClr>
-          </a:solidFill>
-          <a:ln/>
-        </p:spPr>
-      </p:sp>
-      <p:sp>
-        <p:nvSpPr>
-          <p:cNvPr id="12" name="Text 8"/>
-          <p:cNvSpPr/>
-          <p:nvPr/>
-        </p:nvSpPr>
-        <p:spPr>
-          <a:xfrm>
-            <a:off x="914400" y="5212080"/>
-            <a:ext cx="6400800" cy="1554480"/>
+            <a:endParaRPr lang="en-US" sz="3000" dirty="0"/>
+          </a:p>
+        </p:txBody>
+      </p:sp>
+      <p:sp>
+        <p:nvSpPr>
+          <p:cNvPr id="10" name="Text 6"/>
+          <p:cNvSpPr/>
+          <p:nvPr/>
+        </p:nvSpPr>
+        <p:spPr>
+          <a:xfrm>
+            <a:off x="640080" y="2606040"/>
+            <a:ext cx="6949440" cy="822960"/>
           </a:xfrm>
           <a:prstGeom prst="rect">
             <a:avLst/>
@@ -5904,7 +5696,7 @@
               <a:buNone/>
             </a:pPr>
             <a:r>
-              <a:rPr lang="en-US" sz="2200" b="1" dirty="0">
+              <a:rPr lang="en-US" sz="1500" b="1" dirty="0">
                 <a:solidFill>
                   <a:srgbClr val="DAFF94"/>
                 </a:solidFill>
@@ -5914,20 +5706,20 @@
               </a:rPr>
               <a:t>Marcas não vendem mais momentos. Vendem transformação.</a:t>
             </a:r>
-            <a:endParaRPr lang="en-US" sz="2200" dirty="0"/>
-          </a:p>
-        </p:txBody>
-      </p:sp>
-      <p:sp>
-        <p:nvSpPr>
-          <p:cNvPr id="13" name="Text 9"/>
-          <p:cNvSpPr/>
-          <p:nvPr/>
-        </p:nvSpPr>
-        <p:spPr>
-          <a:xfrm>
-            <a:off x="914400" y="6858000"/>
-            <a:ext cx="6400800" cy="1005840"/>
+            <a:endParaRPr lang="en-US" sz="1500" dirty="0"/>
+          </a:p>
+        </p:txBody>
+      </p:sp>
+      <p:sp>
+        <p:nvSpPr>
+          <p:cNvPr id="11" name="Text 7"/>
+          <p:cNvSpPr/>
+          <p:nvPr/>
+        </p:nvSpPr>
+        <p:spPr>
+          <a:xfrm>
+            <a:off x="640080" y="3566160"/>
+            <a:ext cx="6492240" cy="594360"/>
           </a:xfrm>
           <a:prstGeom prst="rect">
             <a:avLst/>
@@ -5943,7 +5735,7 @@
               <a:buNone/>
             </a:pPr>
             <a:r>
-              <a:rPr lang="en-US" sz="1300" dirty="0">
+              <a:rPr lang="en-US" sz="1000" dirty="0">
                 <a:solidFill>
                   <a:srgbClr val="DAFF94"/>
                 </a:solidFill>
@@ -5953,20 +5745,20 @@
               </a:rPr>
               <a:t>88% das pessoas buscam hoje vivências com propósito.</a:t>
             </a:r>
-            <a:endParaRPr lang="en-US" sz="1300" dirty="0"/>
-          </a:p>
-        </p:txBody>
-      </p:sp>
-      <p:sp>
-        <p:nvSpPr>
-          <p:cNvPr id="14" name="Text 10"/>
-          <p:cNvSpPr/>
-          <p:nvPr/>
-        </p:nvSpPr>
-        <p:spPr>
-          <a:xfrm>
-            <a:off x="640080" y="9646920"/>
-            <a:ext cx="1828800" cy="365760"/>
+            <a:endParaRPr lang="en-US" sz="1000" dirty="0"/>
+          </a:p>
+        </p:txBody>
+      </p:sp>
+      <p:sp>
+        <p:nvSpPr>
+          <p:cNvPr id="12" name="Text 8"/>
+          <p:cNvSpPr/>
+          <p:nvPr/>
+        </p:nvSpPr>
+        <p:spPr>
+          <a:xfrm>
+            <a:off x="640080" y="4343400"/>
+            <a:ext cx="1828800" cy="320040"/>
           </a:xfrm>
           <a:prstGeom prst="rect">
             <a:avLst/>
@@ -5982,7 +5774,7 @@
               <a:buNone/>
             </a:pPr>
             <a:r>
-              <a:rPr lang="en-US" sz="1100" dirty="0">
+              <a:rPr lang="en-US" sz="1000" dirty="0">
                 <a:solidFill>
                   <a:srgbClr val="DAFF94"/>
                 </a:solidFill>
@@ -5992,13 +5784,13 @@
               </a:rPr>
               <a:t>5 / 5</a:t>
             </a:r>
-            <a:endParaRPr lang="en-US" sz="1100" dirty="0"/>
+            <a:endParaRPr lang="en-US" sz="1000" dirty="0"/>
           </a:p>
         </p:txBody>
       </p:sp>
       <p:pic>
         <p:nvPicPr>
-          <p:cNvPr id="15" name="Image 2" descr="/home/user/data-manipulation-exercises/.claude/skills/brand-guidelines/assets/textures/arrow-lime.png">    </p:cNvPr>
+          <p:cNvPr id="13" name="Image 2" descr="/home/user/data-manipulation-exercises/.claude/skills/brand-guidelines/assets/textures/arrow-lime.png">    </p:cNvPr>
           <p:cNvPicPr>
             <a:picLocks noChangeAspect="1"/>
           </p:cNvPicPr>
@@ -6012,7 +5804,7 @@
         </p:blipFill>
         <p:spPr>
           <a:xfrm rot="5400000">
-            <a:off x="7223760" y="9281160"/>
+            <a:off x="7223760" y="4279392"/>
             <a:ext cx="292608" cy="292608"/>
           </a:xfrm>
           <a:prstGeom prst="rect">

--- a/entregas-agosto26/carrossel-instagram-agosto26.pptx
+++ b/entregas-agosto26/carrossel-instagram-agosto26.pptx
@@ -4051,15 +4051,38 @@
           <a:chExt cx="0" cy="0"/>
         </a:xfrm>
       </p:grpSpPr>
-      <p:sp>
-        <p:nvSpPr>
-          <p:cNvPr id="2" name="Text 0"/>
-          <p:cNvSpPr/>
-          <p:nvPr/>
-        </p:nvSpPr>
-        <p:spPr>
-          <a:xfrm>
-            <a:off x="365760" y="228600"/>
+      <p:pic>
+        <p:nvPicPr>
+          <p:cNvPr id="2" name="Image 0" descr="/tmp/claude-0/-home-user-data-manipulation-exercises/f19acac8-ccb4-5197-8e49-c3b6029ad477/scratchpad/report-images/final/ig-agentic-search.jpg">    </p:cNvPr>
+          <p:cNvPicPr>
+            <a:picLocks noChangeAspect="1"/>
+          </p:cNvPicPr>
+          <p:nvPr/>
+        </p:nvPicPr>
+        <p:blipFill>
+          <a:blip r:embed="rId1"/>
+          <a:srcRect l="0" r="0" t="0" b="0"/>
+          <a:stretch/>
+        </p:blipFill>
+        <p:spPr>
+          <a:xfrm>
+            <a:off x="0" y="0"/>
+            <a:ext cx="8229600" cy="5349240"/>
+          </a:xfrm>
+          <a:prstGeom prst="rect">
+            <a:avLst/>
+          </a:prstGeom>
+        </p:spPr>
+      </p:pic>
+      <p:sp>
+        <p:nvSpPr>
+          <p:cNvPr id="3" name="Text 0"/>
+          <p:cNvSpPr/>
+          <p:nvPr/>
+        </p:nvSpPr>
+        <p:spPr>
+          <a:xfrm>
+            <a:off x="365760" y="5577840"/>
             <a:ext cx="1828800" cy="274320"/>
           </a:xfrm>
           <a:prstGeom prst="rect">
@@ -4092,13 +4115,13 @@
       </p:sp>
       <p:sp>
         <p:nvSpPr>
-          <p:cNvPr id="3" name="Text 1"/>
-          <p:cNvSpPr/>
-          <p:nvPr/>
-        </p:nvSpPr>
-        <p:spPr>
-          <a:xfrm>
-            <a:off x="3200400" y="228600"/>
+          <p:cNvPr id="4" name="Text 1"/>
+          <p:cNvSpPr/>
+          <p:nvPr/>
+        </p:nvSpPr>
+        <p:spPr>
+          <a:xfrm>
+            <a:off x="3200400" y="5577840"/>
             <a:ext cx="1828800" cy="274320"/>
           </a:xfrm>
           <a:prstGeom prst="rect">
@@ -4131,13 +4154,13 @@
       </p:sp>
       <p:sp>
         <p:nvSpPr>
-          <p:cNvPr id="4" name="Text 2"/>
-          <p:cNvSpPr/>
-          <p:nvPr/>
-        </p:nvSpPr>
-        <p:spPr>
-          <a:xfrm>
-            <a:off x="6035040" y="228600"/>
+          <p:cNvPr id="5" name="Text 2"/>
+          <p:cNvSpPr/>
+          <p:nvPr/>
+        </p:nvSpPr>
+        <p:spPr>
+          <a:xfrm>
+            <a:off x="6035040" y="5577840"/>
             <a:ext cx="1828800" cy="274320"/>
           </a:xfrm>
           <a:prstGeom prst="rect">
@@ -4170,14 +4193,14 @@
       </p:sp>
       <p:sp>
         <p:nvSpPr>
-          <p:cNvPr id="5" name="Shape 3"/>
-          <p:cNvSpPr/>
-          <p:nvPr/>
-        </p:nvSpPr>
-        <p:spPr>
-          <a:xfrm>
-            <a:off x="2651760" y="1188720"/>
-            <a:ext cx="2926080" cy="640080"/>
+          <p:cNvPr id="6" name="Shape 3"/>
+          <p:cNvSpPr/>
+          <p:nvPr/>
+        </p:nvSpPr>
+        <p:spPr>
+          <a:xfrm>
+            <a:off x="2651760" y="6035040"/>
+            <a:ext cx="2926080" cy="594360"/>
           </a:xfrm>
           <a:prstGeom prst="ellipse">
             <a:avLst/>
@@ -4192,30 +4215,30 @@
       </p:sp>
       <p:sp>
         <p:nvSpPr>
-          <p:cNvPr id="6" name="Text 4"/>
-          <p:cNvSpPr/>
-          <p:nvPr/>
-        </p:nvSpPr>
-        <p:spPr>
-          <a:xfrm>
-            <a:off x="2651760" y="1188720"/>
-            <a:ext cx="2926080" cy="640080"/>
-          </a:xfrm>
-          <a:prstGeom prst="rect">
-            <a:avLst/>
-          </a:prstGeom>
-          <a:noFill/>
-          <a:ln/>
-        </p:spPr>
-        <p:txBody>
-          <a:bodyPr wrap="square" lIns="0" tIns="0" rIns="0" bIns="0" rtlCol="0" anchor="ctr"/>
-          <a:lstStyle/>
-          <a:p>
-            <a:pPr algn="ctr" indent="0" marL="0">
-              <a:buNone/>
-            </a:pPr>
-            <a:r>
-              <a:rPr lang="en-US" sz="1600" i="1" dirty="0">
+          <p:cNvPr id="7" name="Text 4"/>
+          <p:cNvSpPr/>
+          <p:nvPr/>
+        </p:nvSpPr>
+        <p:spPr>
+          <a:xfrm>
+            <a:off x="2651760" y="6035040"/>
+            <a:ext cx="2926080" cy="594360"/>
+          </a:xfrm>
+          <a:prstGeom prst="rect">
+            <a:avLst/>
+          </a:prstGeom>
+          <a:noFill/>
+          <a:ln/>
+        </p:spPr>
+        <p:txBody>
+          <a:bodyPr wrap="square" lIns="0" tIns="0" rIns="0" bIns="0" rtlCol="0" anchor="ctr"/>
+          <a:lstStyle/>
+          <a:p>
+            <a:pPr algn="ctr" indent="0" marL="0">
+              <a:buNone/>
+            </a:pPr>
+            <a:r>
+              <a:rPr lang="en-US" sz="1500" i="1" dirty="0">
                 <a:solidFill>
                   <a:srgbClr val="000000"/>
                 </a:solidFill>
@@ -4225,210 +4248,13 @@
               </a:rPr>
               <a:t>NEWS</a:t>
             </a:r>
-            <a:endParaRPr lang="en-US" sz="1600" dirty="0"/>
+            <a:endParaRPr lang="en-US" sz="1500" dirty="0"/>
           </a:p>
         </p:txBody>
       </p:sp>
       <p:pic>
         <p:nvPicPr>
-          <p:cNvPr id="7" name="Image 0" descr="/home/user/data-manipulation-exercises/.claude/skills/brand-guidelines/assets/textures/globe-black.png">    </p:cNvPr>
-          <p:cNvPicPr>
-            <a:picLocks noChangeAspect="1"/>
-          </p:cNvPicPr>
-          <p:nvPr/>
-        </p:nvPicPr>
-        <p:blipFill>
-          <a:blip r:embed="rId1"/>
-          <a:stretch>
-            <a:fillRect/>
-          </a:stretch>
-        </p:blipFill>
-        <p:spPr>
-          <a:xfrm>
-            <a:off x="5389656" y="1374343"/>
-            <a:ext cx="268834" cy="268834"/>
-          </a:xfrm>
-          <a:prstGeom prst="rect">
-            <a:avLst/>
-          </a:prstGeom>
-        </p:spPr>
-      </p:pic>
-      <p:sp>
-        <p:nvSpPr>
-          <p:cNvPr id="8" name="Text 5"/>
-          <p:cNvSpPr/>
-          <p:nvPr/>
-        </p:nvSpPr>
-        <p:spPr>
-          <a:xfrm>
-            <a:off x="640080" y="2194560"/>
-            <a:ext cx="6949440" cy="2377440"/>
-          </a:xfrm>
-          <a:prstGeom prst="rect">
-            <a:avLst/>
-          </a:prstGeom>
-          <a:noFill/>
-          <a:ln/>
-        </p:spPr>
-        <p:txBody>
-          <a:bodyPr wrap="square" lIns="0" tIns="0" rIns="0" bIns="0" rtlCol="0" anchor="ctr"/>
-          <a:lstStyle/>
-          <a:p>
-            <a:pPr algn="l" indent="0" marL="0">
-              <a:buNone/>
-            </a:pPr>
-            <a:r>
-              <a:rPr lang="en-US" sz="4000" b="1" i="1" dirty="0">
-                <a:solidFill>
-                  <a:srgbClr val="000000"/>
-                </a:solidFill>
-                <a:latin typeface="Libre Baskerville" pitchFamily="34" charset="0"/>
-                <a:ea typeface="Libre Baskerville" pitchFamily="34" charset="-122"/>
-                <a:cs typeface="Libre Baskerville" pitchFamily="34" charset="-120"/>
-              </a:rPr>
-              <a:t>AGENTIC</a:t>
-            </a:r>
-            <a:endParaRPr lang="en-US" sz="4000" dirty="0"/>
-          </a:p>
-          <a:p>
-            <a:pPr algn="l" indent="0" marL="0">
-              <a:buNone/>
-            </a:pPr>
-            <a:r>
-              <a:rPr lang="en-US" sz="4000" b="1" i="1" dirty="0">
-                <a:solidFill>
-                  <a:srgbClr val="000000"/>
-                </a:solidFill>
-                <a:latin typeface="Libre Baskerville" pitchFamily="34" charset="0"/>
-                <a:ea typeface="Libre Baskerville" pitchFamily="34" charset="-122"/>
-                <a:cs typeface="Libre Baskerville" pitchFamily="34" charset="-120"/>
-              </a:rPr>
-              <a:t>SEARCH</a:t>
-            </a:r>
-            <a:endParaRPr lang="en-US" sz="4000" dirty="0"/>
-          </a:p>
-        </p:txBody>
-      </p:sp>
-      <p:sp>
-        <p:nvSpPr>
-          <p:cNvPr id="9" name="Text 6"/>
-          <p:cNvSpPr/>
-          <p:nvPr/>
-        </p:nvSpPr>
-        <p:spPr>
-          <a:xfrm>
-            <a:off x="914400" y="4937760"/>
-            <a:ext cx="6400800" cy="1554480"/>
-          </a:xfrm>
-          <a:prstGeom prst="rect">
-            <a:avLst/>
-          </a:prstGeom>
-          <a:noFill/>
-          <a:ln/>
-        </p:spPr>
-        <p:txBody>
-          <a:bodyPr wrap="square" lIns="0" tIns="0" rIns="0" bIns="0" rtlCol="0" anchor="t"/>
-          <a:lstStyle/>
-          <a:p>
-            <a:pPr algn="l" indent="0" marL="0">
-              <a:buNone/>
-            </a:pPr>
-            <a:r>
-              <a:rPr lang="en-US" sz="2200" b="1" dirty="0">
-                <a:solidFill>
-                  <a:srgbClr val="000000"/>
-                </a:solidFill>
-                <a:latin typeface="Arial" pitchFamily="34" charset="0"/>
-                <a:ea typeface="Arial" pitchFamily="34" charset="-122"/>
-                <a:cs typeface="Arial" pitchFamily="34" charset="-120"/>
-              </a:rPr>
-              <a:t>Sua marca já apareceu numa resposta de IA hoje?</a:t>
-            </a:r>
-            <a:endParaRPr lang="en-US" sz="2200" dirty="0"/>
-          </a:p>
-        </p:txBody>
-      </p:sp>
-      <p:sp>
-        <p:nvSpPr>
-          <p:cNvPr id="10" name="Text 7"/>
-          <p:cNvSpPr/>
-          <p:nvPr/>
-        </p:nvSpPr>
-        <p:spPr>
-          <a:xfrm>
-            <a:off x="914400" y="6583680"/>
-            <a:ext cx="6400800" cy="1005840"/>
-          </a:xfrm>
-          <a:prstGeom prst="rect">
-            <a:avLst/>
-          </a:prstGeom>
-          <a:noFill/>
-          <a:ln/>
-        </p:spPr>
-        <p:txBody>
-          <a:bodyPr wrap="square" lIns="0" tIns="0" rIns="0" bIns="0" rtlCol="0" anchor="t"/>
-          <a:lstStyle/>
-          <a:p>
-            <a:pPr algn="l" indent="0" marL="0">
-              <a:buNone/>
-            </a:pPr>
-            <a:r>
-              <a:rPr lang="en-US" sz="1300" dirty="0">
-                <a:solidFill>
-                  <a:srgbClr val="000000"/>
-                </a:solidFill>
-                <a:latin typeface="JetBrains Mono" pitchFamily="34" charset="0"/>
-                <a:ea typeface="JetBrains Mono" pitchFamily="34" charset="-122"/>
-                <a:cs typeface="JetBrains Mono" pitchFamily="34" charset="-120"/>
-              </a:rPr>
-              <a:t>Buscas por IA para descobrir produtos cresceram 200% em 1 ano.</a:t>
-            </a:r>
-            <a:endParaRPr lang="en-US" sz="1300" dirty="0"/>
-          </a:p>
-        </p:txBody>
-      </p:sp>
-      <p:sp>
-        <p:nvSpPr>
-          <p:cNvPr id="11" name="Text 8"/>
-          <p:cNvSpPr/>
-          <p:nvPr/>
-        </p:nvSpPr>
-        <p:spPr>
-          <a:xfrm>
-            <a:off x="640080" y="9646920"/>
-            <a:ext cx="1828800" cy="365760"/>
-          </a:xfrm>
-          <a:prstGeom prst="rect">
-            <a:avLst/>
-          </a:prstGeom>
-          <a:noFill/>
-          <a:ln/>
-        </p:spPr>
-        <p:txBody>
-          <a:bodyPr wrap="square" lIns="0" tIns="0" rIns="0" bIns="0" rtlCol="0" anchor="ctr"/>
-          <a:lstStyle/>
-          <a:p>
-            <a:pPr indent="0" marL="0">
-              <a:buNone/>
-            </a:pPr>
-            <a:r>
-              <a:rPr lang="en-US" sz="1100" dirty="0">
-                <a:solidFill>
-                  <a:srgbClr val="000000"/>
-                </a:solidFill>
-                <a:latin typeface="JetBrains Mono" pitchFamily="34" charset="0"/>
-                <a:ea typeface="JetBrains Mono" pitchFamily="34" charset="-122"/>
-                <a:cs typeface="JetBrains Mono" pitchFamily="34" charset="-120"/>
-              </a:rPr>
-              <a:t>2 / 5</a:t>
-            </a:r>
-            <a:endParaRPr lang="en-US" sz="1100" dirty="0"/>
-          </a:p>
-        </p:txBody>
-      </p:sp>
-      <p:pic>
-        <p:nvPicPr>
-          <p:cNvPr id="12" name="Image 1" descr="/home/user/data-manipulation-exercises/.claude/skills/brand-guidelines/assets/textures/arrow-black.png">    </p:cNvPr>
+          <p:cNvPr id="8" name="Image 1" descr="/home/user/data-manipulation-exercises/.claude/skills/brand-guidelines/assets/textures/globe-black.png">    </p:cNvPr>
           <p:cNvPicPr>
             <a:picLocks noChangeAspect="1"/>
           </p:cNvPicPr>
@@ -4441,8 +4267,205 @@
           </a:stretch>
         </p:blipFill>
         <p:spPr>
+          <a:xfrm>
+            <a:off x="5403098" y="6207404"/>
+            <a:ext cx="249631" cy="249631"/>
+          </a:xfrm>
+          <a:prstGeom prst="rect">
+            <a:avLst/>
+          </a:prstGeom>
+        </p:spPr>
+      </p:pic>
+      <p:sp>
+        <p:nvSpPr>
+          <p:cNvPr id="9" name="Text 5"/>
+          <p:cNvSpPr/>
+          <p:nvPr/>
+        </p:nvSpPr>
+        <p:spPr>
+          <a:xfrm>
+            <a:off x="640080" y="6720840"/>
+            <a:ext cx="6949440" cy="1097280"/>
+          </a:xfrm>
+          <a:prstGeom prst="rect">
+            <a:avLst/>
+          </a:prstGeom>
+          <a:noFill/>
+          <a:ln/>
+        </p:spPr>
+        <p:txBody>
+          <a:bodyPr wrap="square" lIns="0" tIns="0" rIns="0" bIns="0" rtlCol="0" anchor="t"/>
+          <a:lstStyle/>
+          <a:p>
+            <a:pPr algn="l" indent="0" marL="0">
+              <a:buNone/>
+            </a:pPr>
+            <a:r>
+              <a:rPr lang="en-US" sz="3000" b="1" i="1" dirty="0">
+                <a:solidFill>
+                  <a:srgbClr val="000000"/>
+                </a:solidFill>
+                <a:latin typeface="Libre Baskerville" pitchFamily="34" charset="0"/>
+                <a:ea typeface="Libre Baskerville" pitchFamily="34" charset="-122"/>
+                <a:cs typeface="Libre Baskerville" pitchFamily="34" charset="-120"/>
+              </a:rPr>
+              <a:t>AGENTIC</a:t>
+            </a:r>
+            <a:endParaRPr lang="en-US" sz="3000" dirty="0"/>
+          </a:p>
+          <a:p>
+            <a:pPr algn="l" indent="0" marL="0">
+              <a:buNone/>
+            </a:pPr>
+            <a:r>
+              <a:rPr lang="en-US" sz="3000" b="1" i="1" dirty="0">
+                <a:solidFill>
+                  <a:srgbClr val="000000"/>
+                </a:solidFill>
+                <a:latin typeface="Libre Baskerville" pitchFamily="34" charset="0"/>
+                <a:ea typeface="Libre Baskerville" pitchFamily="34" charset="-122"/>
+                <a:cs typeface="Libre Baskerville" pitchFamily="34" charset="-120"/>
+              </a:rPr>
+              <a:t>SEARCH</a:t>
+            </a:r>
+            <a:endParaRPr lang="en-US" sz="3000" dirty="0"/>
+          </a:p>
+        </p:txBody>
+      </p:sp>
+      <p:sp>
+        <p:nvSpPr>
+          <p:cNvPr id="10" name="Text 6"/>
+          <p:cNvSpPr/>
+          <p:nvPr/>
+        </p:nvSpPr>
+        <p:spPr>
+          <a:xfrm>
+            <a:off x="640080" y="7955280"/>
+            <a:ext cx="6949440" cy="822960"/>
+          </a:xfrm>
+          <a:prstGeom prst="rect">
+            <a:avLst/>
+          </a:prstGeom>
+          <a:noFill/>
+          <a:ln/>
+        </p:spPr>
+        <p:txBody>
+          <a:bodyPr wrap="square" lIns="0" tIns="0" rIns="0" bIns="0" rtlCol="0" anchor="t"/>
+          <a:lstStyle/>
+          <a:p>
+            <a:pPr algn="l" indent="0" marL="0">
+              <a:buNone/>
+            </a:pPr>
+            <a:r>
+              <a:rPr lang="en-US" sz="1500" b="1" dirty="0">
+                <a:solidFill>
+                  <a:srgbClr val="000000"/>
+                </a:solidFill>
+                <a:latin typeface="Arial" pitchFamily="34" charset="0"/>
+                <a:ea typeface="Arial" pitchFamily="34" charset="-122"/>
+                <a:cs typeface="Arial" pitchFamily="34" charset="-120"/>
+              </a:rPr>
+              <a:t>Sua marca já apareceu numa resposta de IA hoje?</a:t>
+            </a:r>
+            <a:endParaRPr lang="en-US" sz="1500" dirty="0"/>
+          </a:p>
+        </p:txBody>
+      </p:sp>
+      <p:sp>
+        <p:nvSpPr>
+          <p:cNvPr id="11" name="Text 7"/>
+          <p:cNvSpPr/>
+          <p:nvPr/>
+        </p:nvSpPr>
+        <p:spPr>
+          <a:xfrm>
+            <a:off x="640080" y="8915400"/>
+            <a:ext cx="6492240" cy="594360"/>
+          </a:xfrm>
+          <a:prstGeom prst="rect">
+            <a:avLst/>
+          </a:prstGeom>
+          <a:noFill/>
+          <a:ln/>
+        </p:spPr>
+        <p:txBody>
+          <a:bodyPr wrap="square" lIns="0" tIns="0" rIns="0" bIns="0" rtlCol="0" anchor="t"/>
+          <a:lstStyle/>
+          <a:p>
+            <a:pPr algn="l" indent="0" marL="0">
+              <a:buNone/>
+            </a:pPr>
+            <a:r>
+              <a:rPr lang="en-US" sz="1000" dirty="0">
+                <a:solidFill>
+                  <a:srgbClr val="000000"/>
+                </a:solidFill>
+                <a:latin typeface="JetBrains Mono" pitchFamily="34" charset="0"/>
+                <a:ea typeface="JetBrains Mono" pitchFamily="34" charset="-122"/>
+                <a:cs typeface="JetBrains Mono" pitchFamily="34" charset="-120"/>
+              </a:rPr>
+              <a:t>Buscas por IA para descobrir produtos cresceram 200% em 1 ano.</a:t>
+            </a:r>
+            <a:endParaRPr lang="en-US" sz="1000" dirty="0"/>
+          </a:p>
+        </p:txBody>
+      </p:sp>
+      <p:sp>
+        <p:nvSpPr>
+          <p:cNvPr id="12" name="Text 8"/>
+          <p:cNvSpPr/>
+          <p:nvPr/>
+        </p:nvSpPr>
+        <p:spPr>
+          <a:xfrm>
+            <a:off x="640080" y="9692640"/>
+            <a:ext cx="1828800" cy="320040"/>
+          </a:xfrm>
+          <a:prstGeom prst="rect">
+            <a:avLst/>
+          </a:prstGeom>
+          <a:noFill/>
+          <a:ln/>
+        </p:spPr>
+        <p:txBody>
+          <a:bodyPr wrap="square" lIns="0" tIns="0" rIns="0" bIns="0" rtlCol="0" anchor="ctr"/>
+          <a:lstStyle/>
+          <a:p>
+            <a:pPr indent="0" marL="0">
+              <a:buNone/>
+            </a:pPr>
+            <a:r>
+              <a:rPr lang="en-US" sz="1000" dirty="0">
+                <a:solidFill>
+                  <a:srgbClr val="000000"/>
+                </a:solidFill>
+                <a:latin typeface="JetBrains Mono" pitchFamily="34" charset="0"/>
+                <a:ea typeface="JetBrains Mono" pitchFamily="34" charset="-122"/>
+                <a:cs typeface="JetBrains Mono" pitchFamily="34" charset="-120"/>
+              </a:rPr>
+              <a:t>2 / 5</a:t>
+            </a:r>
+            <a:endParaRPr lang="en-US" sz="1000" dirty="0"/>
+          </a:p>
+        </p:txBody>
+      </p:sp>
+      <p:pic>
+        <p:nvPicPr>
+          <p:cNvPr id="13" name="Image 2" descr="/home/user/data-manipulation-exercises/.claude/skills/brand-guidelines/assets/textures/arrow-black.png">    </p:cNvPr>
+          <p:cNvPicPr>
+            <a:picLocks noChangeAspect="1"/>
+          </p:cNvPicPr>
+          <p:nvPr/>
+        </p:nvPicPr>
+        <p:blipFill>
+          <a:blip r:embed="rId3"/>
+          <a:stretch>
+            <a:fillRect/>
+          </a:stretch>
+        </p:blipFill>
+        <p:spPr>
           <a:xfrm rot="5400000">
-            <a:off x="7223760" y="9281160"/>
+            <a:off x="7223760" y="9628632"/>
             <a:ext cx="292608" cy="292608"/>
           </a:xfrm>
           <a:prstGeom prst="rect">

--- a/entregas-agosto26/carrossel-instagram-agosto26.pptx
+++ b/entregas-agosto26/carrossel-instagram-agosto26.pptx
@@ -1421,7 +1421,7 @@
     <p:bg>
       <p:bgPr>
         <a:solidFill>
-          <a:srgbClr val="000000"/>
+          <a:srgbClr val="DAFF94"/>
         </a:solidFill>
       </p:bgPr>
     </p:bg>
@@ -1464,17 +1464,17 @@
               <a:buNone/>
             </a:pPr>
             <a:r>
-              <a:rPr lang="en-US" sz="1000" dirty="0">
-                <a:solidFill>
-                  <a:srgbClr val="333333"/>
-                </a:solidFill>
-                <a:latin typeface="Arial" pitchFamily="34" charset="0"/>
-                <a:ea typeface="Arial" pitchFamily="34" charset="-122"/>
-                <a:cs typeface="Arial" pitchFamily="34" charset="-120"/>
-              </a:rPr>
-              <a:t>+</a:t>
-            </a:r>
-            <a:endParaRPr lang="en-US" sz="1000" dirty="0"/>
+              <a:rPr lang="en-US" sz="1200" dirty="0">
+                <a:solidFill>
+                  <a:srgbClr val="000000"/>
+                </a:solidFill>
+                <a:latin typeface="Arial" pitchFamily="34" charset="0"/>
+                <a:ea typeface="Arial" pitchFamily="34" charset="-122"/>
+                <a:cs typeface="Arial" pitchFamily="34" charset="-120"/>
+              </a:rPr>
+              <a:t>+</a:t>
+            </a:r>
+            <a:endParaRPr lang="en-US" sz="1200" dirty="0"/>
           </a:p>
         </p:txBody>
       </p:sp>
@@ -1486,34 +1486,34 @@
         </p:nvSpPr>
         <p:spPr>
           <a:xfrm>
-            <a:off x="1874520" y="777240"/>
-            <a:ext cx="274320" cy="274320"/>
-          </a:xfrm>
-          <a:prstGeom prst="rect">
-            <a:avLst/>
-          </a:prstGeom>
-          <a:noFill/>
-          <a:ln/>
-        </p:spPr>
-        <p:txBody>
-          <a:bodyPr wrap="square" lIns="0" tIns="0" rIns="0" bIns="0" rtlCol="0" anchor="ctr"/>
-          <a:lstStyle/>
-          <a:p>
-            <a:pPr algn="ctr" indent="0" marL="0">
-              <a:buNone/>
-            </a:pPr>
-            <a:r>
-              <a:rPr lang="en-US" sz="1000" dirty="0">
-                <a:solidFill>
-                  <a:srgbClr val="333333"/>
-                </a:solidFill>
-                <a:latin typeface="Arial" pitchFamily="34" charset="0"/>
-                <a:ea typeface="Arial" pitchFamily="34" charset="-122"/>
-                <a:cs typeface="Arial" pitchFamily="34" charset="-120"/>
-              </a:rPr>
-              <a:t>+</a:t>
-            </a:r>
-            <a:endParaRPr lang="en-US" sz="1000" dirty="0"/>
+            <a:off x="2331720" y="777240"/>
+            <a:ext cx="274320" cy="274320"/>
+          </a:xfrm>
+          <a:prstGeom prst="rect">
+            <a:avLst/>
+          </a:prstGeom>
+          <a:noFill/>
+          <a:ln/>
+        </p:spPr>
+        <p:txBody>
+          <a:bodyPr wrap="square" lIns="0" tIns="0" rIns="0" bIns="0" rtlCol="0" anchor="ctr"/>
+          <a:lstStyle/>
+          <a:p>
+            <a:pPr algn="ctr" indent="0" marL="0">
+              <a:buNone/>
+            </a:pPr>
+            <a:r>
+              <a:rPr lang="en-US" sz="1200" dirty="0">
+                <a:solidFill>
+                  <a:srgbClr val="000000"/>
+                </a:solidFill>
+                <a:latin typeface="Arial" pitchFamily="34" charset="0"/>
+                <a:ea typeface="Arial" pitchFamily="34" charset="-122"/>
+                <a:cs typeface="Arial" pitchFamily="34" charset="-120"/>
+              </a:rPr>
+              <a:t>+</a:t>
+            </a:r>
+            <a:endParaRPr lang="en-US" sz="1200" dirty="0"/>
           </a:p>
         </p:txBody>
       </p:sp>
@@ -1525,34 +1525,34 @@
         </p:nvSpPr>
         <p:spPr>
           <a:xfrm>
-            <a:off x="2971800" y="777240"/>
-            <a:ext cx="274320" cy="274320"/>
-          </a:xfrm>
-          <a:prstGeom prst="rect">
-            <a:avLst/>
-          </a:prstGeom>
-          <a:noFill/>
-          <a:ln/>
-        </p:spPr>
-        <p:txBody>
-          <a:bodyPr wrap="square" lIns="0" tIns="0" rIns="0" bIns="0" rtlCol="0" anchor="ctr"/>
-          <a:lstStyle/>
-          <a:p>
-            <a:pPr algn="ctr" indent="0" marL="0">
-              <a:buNone/>
-            </a:pPr>
-            <a:r>
-              <a:rPr lang="en-US" sz="1000" dirty="0">
-                <a:solidFill>
-                  <a:srgbClr val="333333"/>
-                </a:solidFill>
-                <a:latin typeface="Arial" pitchFamily="34" charset="0"/>
-                <a:ea typeface="Arial" pitchFamily="34" charset="-122"/>
-                <a:cs typeface="Arial" pitchFamily="34" charset="-120"/>
-              </a:rPr>
-              <a:t>+</a:t>
-            </a:r>
-            <a:endParaRPr lang="en-US" sz="1000" dirty="0"/>
+            <a:off x="3886200" y="777240"/>
+            <a:ext cx="274320" cy="274320"/>
+          </a:xfrm>
+          <a:prstGeom prst="rect">
+            <a:avLst/>
+          </a:prstGeom>
+          <a:noFill/>
+          <a:ln/>
+        </p:spPr>
+        <p:txBody>
+          <a:bodyPr wrap="square" lIns="0" tIns="0" rIns="0" bIns="0" rtlCol="0" anchor="ctr"/>
+          <a:lstStyle/>
+          <a:p>
+            <a:pPr algn="ctr" indent="0" marL="0">
+              <a:buNone/>
+            </a:pPr>
+            <a:r>
+              <a:rPr lang="en-US" sz="1200" dirty="0">
+                <a:solidFill>
+                  <a:srgbClr val="000000"/>
+                </a:solidFill>
+                <a:latin typeface="Arial" pitchFamily="34" charset="0"/>
+                <a:ea typeface="Arial" pitchFamily="34" charset="-122"/>
+                <a:cs typeface="Arial" pitchFamily="34" charset="-120"/>
+              </a:rPr>
+              <a:t>+</a:t>
+            </a:r>
+            <a:endParaRPr lang="en-US" sz="1200" dirty="0"/>
           </a:p>
         </p:txBody>
       </p:sp>
@@ -1564,34 +1564,34 @@
         </p:nvSpPr>
         <p:spPr>
           <a:xfrm>
-            <a:off x="4069080" y="777240"/>
-            <a:ext cx="274320" cy="274320"/>
-          </a:xfrm>
-          <a:prstGeom prst="rect">
-            <a:avLst/>
-          </a:prstGeom>
-          <a:noFill/>
-          <a:ln/>
-        </p:spPr>
-        <p:txBody>
-          <a:bodyPr wrap="square" lIns="0" tIns="0" rIns="0" bIns="0" rtlCol="0" anchor="ctr"/>
-          <a:lstStyle/>
-          <a:p>
-            <a:pPr algn="ctr" indent="0" marL="0">
-              <a:buNone/>
-            </a:pPr>
-            <a:r>
-              <a:rPr lang="en-US" sz="1000" dirty="0">
-                <a:solidFill>
-                  <a:srgbClr val="333333"/>
-                </a:solidFill>
-                <a:latin typeface="Arial" pitchFamily="34" charset="0"/>
-                <a:ea typeface="Arial" pitchFamily="34" charset="-122"/>
-                <a:cs typeface="Arial" pitchFamily="34" charset="-120"/>
-              </a:rPr>
-              <a:t>+</a:t>
-            </a:r>
-            <a:endParaRPr lang="en-US" sz="1000" dirty="0"/>
+            <a:off x="5440680" y="777240"/>
+            <a:ext cx="274320" cy="274320"/>
+          </a:xfrm>
+          <a:prstGeom prst="rect">
+            <a:avLst/>
+          </a:prstGeom>
+          <a:noFill/>
+          <a:ln/>
+        </p:spPr>
+        <p:txBody>
+          <a:bodyPr wrap="square" lIns="0" tIns="0" rIns="0" bIns="0" rtlCol="0" anchor="ctr"/>
+          <a:lstStyle/>
+          <a:p>
+            <a:pPr algn="ctr" indent="0" marL="0">
+              <a:buNone/>
+            </a:pPr>
+            <a:r>
+              <a:rPr lang="en-US" sz="1200" dirty="0">
+                <a:solidFill>
+                  <a:srgbClr val="000000"/>
+                </a:solidFill>
+                <a:latin typeface="Arial" pitchFamily="34" charset="0"/>
+                <a:ea typeface="Arial" pitchFamily="34" charset="-122"/>
+                <a:cs typeface="Arial" pitchFamily="34" charset="-120"/>
+              </a:rPr>
+              <a:t>+</a:t>
+            </a:r>
+            <a:endParaRPr lang="en-US" sz="1200" dirty="0"/>
           </a:p>
         </p:txBody>
       </p:sp>
@@ -1603,34 +1603,34 @@
         </p:nvSpPr>
         <p:spPr>
           <a:xfrm>
-            <a:off x="5166360" y="777240"/>
-            <a:ext cx="274320" cy="274320"/>
-          </a:xfrm>
-          <a:prstGeom prst="rect">
-            <a:avLst/>
-          </a:prstGeom>
-          <a:noFill/>
-          <a:ln/>
-        </p:spPr>
-        <p:txBody>
-          <a:bodyPr wrap="square" lIns="0" tIns="0" rIns="0" bIns="0" rtlCol="0" anchor="ctr"/>
-          <a:lstStyle/>
-          <a:p>
-            <a:pPr algn="ctr" indent="0" marL="0">
-              <a:buNone/>
-            </a:pPr>
-            <a:r>
-              <a:rPr lang="en-US" sz="1000" dirty="0">
-                <a:solidFill>
-                  <a:srgbClr val="333333"/>
-                </a:solidFill>
-                <a:latin typeface="Arial" pitchFamily="34" charset="0"/>
-                <a:ea typeface="Arial" pitchFamily="34" charset="-122"/>
-                <a:cs typeface="Arial" pitchFamily="34" charset="-120"/>
-              </a:rPr>
-              <a:t>+</a:t>
-            </a:r>
-            <a:endParaRPr lang="en-US" sz="1000" dirty="0"/>
+            <a:off x="6995160" y="777240"/>
+            <a:ext cx="274320" cy="274320"/>
+          </a:xfrm>
+          <a:prstGeom prst="rect">
+            <a:avLst/>
+          </a:prstGeom>
+          <a:noFill/>
+          <a:ln/>
+        </p:spPr>
+        <p:txBody>
+          <a:bodyPr wrap="square" lIns="0" tIns="0" rIns="0" bIns="0" rtlCol="0" anchor="ctr"/>
+          <a:lstStyle/>
+          <a:p>
+            <a:pPr algn="ctr" indent="0" marL="0">
+              <a:buNone/>
+            </a:pPr>
+            <a:r>
+              <a:rPr lang="en-US" sz="1200" dirty="0">
+                <a:solidFill>
+                  <a:srgbClr val="000000"/>
+                </a:solidFill>
+                <a:latin typeface="Arial" pitchFamily="34" charset="0"/>
+                <a:ea typeface="Arial" pitchFamily="34" charset="-122"/>
+                <a:cs typeface="Arial" pitchFamily="34" charset="-120"/>
+              </a:rPr>
+              <a:t>+</a:t>
+            </a:r>
+            <a:endParaRPr lang="en-US" sz="1200" dirty="0"/>
           </a:p>
         </p:txBody>
       </p:sp>
@@ -1642,34 +1642,34 @@
         </p:nvSpPr>
         <p:spPr>
           <a:xfrm>
-            <a:off x="6263640" y="777240"/>
-            <a:ext cx="274320" cy="274320"/>
-          </a:xfrm>
-          <a:prstGeom prst="rect">
-            <a:avLst/>
-          </a:prstGeom>
-          <a:noFill/>
-          <a:ln/>
-        </p:spPr>
-        <p:txBody>
-          <a:bodyPr wrap="square" lIns="0" tIns="0" rIns="0" bIns="0" rtlCol="0" anchor="ctr"/>
-          <a:lstStyle/>
-          <a:p>
-            <a:pPr algn="ctr" indent="0" marL="0">
-              <a:buNone/>
-            </a:pPr>
-            <a:r>
-              <a:rPr lang="en-US" sz="1000" dirty="0">
-                <a:solidFill>
-                  <a:srgbClr val="333333"/>
-                </a:solidFill>
-                <a:latin typeface="Arial" pitchFamily="34" charset="0"/>
-                <a:ea typeface="Arial" pitchFamily="34" charset="-122"/>
-                <a:cs typeface="Arial" pitchFamily="34" charset="-120"/>
-              </a:rPr>
-              <a:t>+</a:t>
-            </a:r>
-            <a:endParaRPr lang="en-US" sz="1000" dirty="0"/>
+            <a:off x="777240" y="2011680"/>
+            <a:ext cx="274320" cy="274320"/>
+          </a:xfrm>
+          <a:prstGeom prst="rect">
+            <a:avLst/>
+          </a:prstGeom>
+          <a:noFill/>
+          <a:ln/>
+        </p:spPr>
+        <p:txBody>
+          <a:bodyPr wrap="square" lIns="0" tIns="0" rIns="0" bIns="0" rtlCol="0" anchor="ctr"/>
+          <a:lstStyle/>
+          <a:p>
+            <a:pPr algn="ctr" indent="0" marL="0">
+              <a:buNone/>
+            </a:pPr>
+            <a:r>
+              <a:rPr lang="en-US" sz="1200" dirty="0">
+                <a:solidFill>
+                  <a:srgbClr val="000000"/>
+                </a:solidFill>
+                <a:latin typeface="Arial" pitchFamily="34" charset="0"/>
+                <a:ea typeface="Arial" pitchFamily="34" charset="-122"/>
+                <a:cs typeface="Arial" pitchFamily="34" charset="-120"/>
+              </a:rPr>
+              <a:t>+</a:t>
+            </a:r>
+            <a:endParaRPr lang="en-US" sz="1200" dirty="0"/>
           </a:p>
         </p:txBody>
       </p:sp>
@@ -1681,34 +1681,34 @@
         </p:nvSpPr>
         <p:spPr>
           <a:xfrm>
-            <a:off x="777240" y="1874520"/>
-            <a:ext cx="274320" cy="274320"/>
-          </a:xfrm>
-          <a:prstGeom prst="rect">
-            <a:avLst/>
-          </a:prstGeom>
-          <a:noFill/>
-          <a:ln/>
-        </p:spPr>
-        <p:txBody>
-          <a:bodyPr wrap="square" lIns="0" tIns="0" rIns="0" bIns="0" rtlCol="0" anchor="ctr"/>
-          <a:lstStyle/>
-          <a:p>
-            <a:pPr algn="ctr" indent="0" marL="0">
-              <a:buNone/>
-            </a:pPr>
-            <a:r>
-              <a:rPr lang="en-US" sz="1000" dirty="0">
-                <a:solidFill>
-                  <a:srgbClr val="333333"/>
-                </a:solidFill>
-                <a:latin typeface="Arial" pitchFamily="34" charset="0"/>
-                <a:ea typeface="Arial" pitchFamily="34" charset="-122"/>
-                <a:cs typeface="Arial" pitchFamily="34" charset="-120"/>
-              </a:rPr>
-              <a:t>+</a:t>
-            </a:r>
-            <a:endParaRPr lang="en-US" sz="1000" dirty="0"/>
+            <a:off x="2331720" y="2011680"/>
+            <a:ext cx="274320" cy="274320"/>
+          </a:xfrm>
+          <a:prstGeom prst="rect">
+            <a:avLst/>
+          </a:prstGeom>
+          <a:noFill/>
+          <a:ln/>
+        </p:spPr>
+        <p:txBody>
+          <a:bodyPr wrap="square" lIns="0" tIns="0" rIns="0" bIns="0" rtlCol="0" anchor="ctr"/>
+          <a:lstStyle/>
+          <a:p>
+            <a:pPr algn="ctr" indent="0" marL="0">
+              <a:buNone/>
+            </a:pPr>
+            <a:r>
+              <a:rPr lang="en-US" sz="1200" dirty="0">
+                <a:solidFill>
+                  <a:srgbClr val="000000"/>
+                </a:solidFill>
+                <a:latin typeface="Arial" pitchFamily="34" charset="0"/>
+                <a:ea typeface="Arial" pitchFamily="34" charset="-122"/>
+                <a:cs typeface="Arial" pitchFamily="34" charset="-120"/>
+              </a:rPr>
+              <a:t>+</a:t>
+            </a:r>
+            <a:endParaRPr lang="en-US" sz="1200" dirty="0"/>
           </a:p>
         </p:txBody>
       </p:sp>
@@ -1720,34 +1720,34 @@
         </p:nvSpPr>
         <p:spPr>
           <a:xfrm>
-            <a:off x="1874520" y="1874520"/>
-            <a:ext cx="274320" cy="274320"/>
-          </a:xfrm>
-          <a:prstGeom prst="rect">
-            <a:avLst/>
-          </a:prstGeom>
-          <a:noFill/>
-          <a:ln/>
-        </p:spPr>
-        <p:txBody>
-          <a:bodyPr wrap="square" lIns="0" tIns="0" rIns="0" bIns="0" rtlCol="0" anchor="ctr"/>
-          <a:lstStyle/>
-          <a:p>
-            <a:pPr algn="ctr" indent="0" marL="0">
-              <a:buNone/>
-            </a:pPr>
-            <a:r>
-              <a:rPr lang="en-US" sz="1000" dirty="0">
-                <a:solidFill>
-                  <a:srgbClr val="333333"/>
-                </a:solidFill>
-                <a:latin typeface="Arial" pitchFamily="34" charset="0"/>
-                <a:ea typeface="Arial" pitchFamily="34" charset="-122"/>
-                <a:cs typeface="Arial" pitchFamily="34" charset="-120"/>
-              </a:rPr>
-              <a:t>+</a:t>
-            </a:r>
-            <a:endParaRPr lang="en-US" sz="1000" dirty="0"/>
+            <a:off x="3886200" y="2011680"/>
+            <a:ext cx="274320" cy="274320"/>
+          </a:xfrm>
+          <a:prstGeom prst="rect">
+            <a:avLst/>
+          </a:prstGeom>
+          <a:noFill/>
+          <a:ln/>
+        </p:spPr>
+        <p:txBody>
+          <a:bodyPr wrap="square" lIns="0" tIns="0" rIns="0" bIns="0" rtlCol="0" anchor="ctr"/>
+          <a:lstStyle/>
+          <a:p>
+            <a:pPr algn="ctr" indent="0" marL="0">
+              <a:buNone/>
+            </a:pPr>
+            <a:r>
+              <a:rPr lang="en-US" sz="1200" dirty="0">
+                <a:solidFill>
+                  <a:srgbClr val="000000"/>
+                </a:solidFill>
+                <a:latin typeface="Arial" pitchFamily="34" charset="0"/>
+                <a:ea typeface="Arial" pitchFamily="34" charset="-122"/>
+                <a:cs typeface="Arial" pitchFamily="34" charset="-120"/>
+              </a:rPr>
+              <a:t>+</a:t>
+            </a:r>
+            <a:endParaRPr lang="en-US" sz="1200" dirty="0"/>
           </a:p>
         </p:txBody>
       </p:sp>
@@ -1759,34 +1759,34 @@
         </p:nvSpPr>
         <p:spPr>
           <a:xfrm>
-            <a:off x="2971800" y="1874520"/>
-            <a:ext cx="274320" cy="274320"/>
-          </a:xfrm>
-          <a:prstGeom prst="rect">
-            <a:avLst/>
-          </a:prstGeom>
-          <a:noFill/>
-          <a:ln/>
-        </p:spPr>
-        <p:txBody>
-          <a:bodyPr wrap="square" lIns="0" tIns="0" rIns="0" bIns="0" rtlCol="0" anchor="ctr"/>
-          <a:lstStyle/>
-          <a:p>
-            <a:pPr algn="ctr" indent="0" marL="0">
-              <a:buNone/>
-            </a:pPr>
-            <a:r>
-              <a:rPr lang="en-US" sz="1000" dirty="0">
-                <a:solidFill>
-                  <a:srgbClr val="333333"/>
-                </a:solidFill>
-                <a:latin typeface="Arial" pitchFamily="34" charset="0"/>
-                <a:ea typeface="Arial" pitchFamily="34" charset="-122"/>
-                <a:cs typeface="Arial" pitchFamily="34" charset="-120"/>
-              </a:rPr>
-              <a:t>+</a:t>
-            </a:r>
-            <a:endParaRPr lang="en-US" sz="1000" dirty="0"/>
+            <a:off x="5440680" y="2011680"/>
+            <a:ext cx="274320" cy="274320"/>
+          </a:xfrm>
+          <a:prstGeom prst="rect">
+            <a:avLst/>
+          </a:prstGeom>
+          <a:noFill/>
+          <a:ln/>
+        </p:spPr>
+        <p:txBody>
+          <a:bodyPr wrap="square" lIns="0" tIns="0" rIns="0" bIns="0" rtlCol="0" anchor="ctr"/>
+          <a:lstStyle/>
+          <a:p>
+            <a:pPr algn="ctr" indent="0" marL="0">
+              <a:buNone/>
+            </a:pPr>
+            <a:r>
+              <a:rPr lang="en-US" sz="1200" dirty="0">
+                <a:solidFill>
+                  <a:srgbClr val="000000"/>
+                </a:solidFill>
+                <a:latin typeface="Arial" pitchFamily="34" charset="0"/>
+                <a:ea typeface="Arial" pitchFamily="34" charset="-122"/>
+                <a:cs typeface="Arial" pitchFamily="34" charset="-120"/>
+              </a:rPr>
+              <a:t>+</a:t>
+            </a:r>
+            <a:endParaRPr lang="en-US" sz="1200" dirty="0"/>
           </a:p>
         </p:txBody>
       </p:sp>
@@ -1798,34 +1798,34 @@
         </p:nvSpPr>
         <p:spPr>
           <a:xfrm>
-            <a:off x="4069080" y="1874520"/>
-            <a:ext cx="274320" cy="274320"/>
-          </a:xfrm>
-          <a:prstGeom prst="rect">
-            <a:avLst/>
-          </a:prstGeom>
-          <a:noFill/>
-          <a:ln/>
-        </p:spPr>
-        <p:txBody>
-          <a:bodyPr wrap="square" lIns="0" tIns="0" rIns="0" bIns="0" rtlCol="0" anchor="ctr"/>
-          <a:lstStyle/>
-          <a:p>
-            <a:pPr algn="ctr" indent="0" marL="0">
-              <a:buNone/>
-            </a:pPr>
-            <a:r>
-              <a:rPr lang="en-US" sz="1000" dirty="0">
-                <a:solidFill>
-                  <a:srgbClr val="333333"/>
-                </a:solidFill>
-                <a:latin typeface="Arial" pitchFamily="34" charset="0"/>
-                <a:ea typeface="Arial" pitchFamily="34" charset="-122"/>
-                <a:cs typeface="Arial" pitchFamily="34" charset="-120"/>
-              </a:rPr>
-              <a:t>+</a:t>
-            </a:r>
-            <a:endParaRPr lang="en-US" sz="1000" dirty="0"/>
+            <a:off x="6995160" y="2011680"/>
+            <a:ext cx="274320" cy="274320"/>
+          </a:xfrm>
+          <a:prstGeom prst="rect">
+            <a:avLst/>
+          </a:prstGeom>
+          <a:noFill/>
+          <a:ln/>
+        </p:spPr>
+        <p:txBody>
+          <a:bodyPr wrap="square" lIns="0" tIns="0" rIns="0" bIns="0" rtlCol="0" anchor="ctr"/>
+          <a:lstStyle/>
+          <a:p>
+            <a:pPr algn="ctr" indent="0" marL="0">
+              <a:buNone/>
+            </a:pPr>
+            <a:r>
+              <a:rPr lang="en-US" sz="1200" dirty="0">
+                <a:solidFill>
+                  <a:srgbClr val="000000"/>
+                </a:solidFill>
+                <a:latin typeface="Arial" pitchFamily="34" charset="0"/>
+                <a:ea typeface="Arial" pitchFamily="34" charset="-122"/>
+                <a:cs typeface="Arial" pitchFamily="34" charset="-120"/>
+              </a:rPr>
+              <a:t>+</a:t>
+            </a:r>
+            <a:endParaRPr lang="en-US" sz="1200" dirty="0"/>
           </a:p>
         </p:txBody>
       </p:sp>
@@ -1837,34 +1837,34 @@
         </p:nvSpPr>
         <p:spPr>
           <a:xfrm>
-            <a:off x="5166360" y="1874520"/>
-            <a:ext cx="274320" cy="274320"/>
-          </a:xfrm>
-          <a:prstGeom prst="rect">
-            <a:avLst/>
-          </a:prstGeom>
-          <a:noFill/>
-          <a:ln/>
-        </p:spPr>
-        <p:txBody>
-          <a:bodyPr wrap="square" lIns="0" tIns="0" rIns="0" bIns="0" rtlCol="0" anchor="ctr"/>
-          <a:lstStyle/>
-          <a:p>
-            <a:pPr algn="ctr" indent="0" marL="0">
-              <a:buNone/>
-            </a:pPr>
-            <a:r>
-              <a:rPr lang="en-US" sz="1000" dirty="0">
-                <a:solidFill>
-                  <a:srgbClr val="333333"/>
-                </a:solidFill>
-                <a:latin typeface="Arial" pitchFamily="34" charset="0"/>
-                <a:ea typeface="Arial" pitchFamily="34" charset="-122"/>
-                <a:cs typeface="Arial" pitchFamily="34" charset="-120"/>
-              </a:rPr>
-              <a:t>+</a:t>
-            </a:r>
-            <a:endParaRPr lang="en-US" sz="1000" dirty="0"/>
+            <a:off x="777240" y="3246120"/>
+            <a:ext cx="274320" cy="274320"/>
+          </a:xfrm>
+          <a:prstGeom prst="rect">
+            <a:avLst/>
+          </a:prstGeom>
+          <a:noFill/>
+          <a:ln/>
+        </p:spPr>
+        <p:txBody>
+          <a:bodyPr wrap="square" lIns="0" tIns="0" rIns="0" bIns="0" rtlCol="0" anchor="ctr"/>
+          <a:lstStyle/>
+          <a:p>
+            <a:pPr algn="ctr" indent="0" marL="0">
+              <a:buNone/>
+            </a:pPr>
+            <a:r>
+              <a:rPr lang="en-US" sz="1200" dirty="0">
+                <a:solidFill>
+                  <a:srgbClr val="000000"/>
+                </a:solidFill>
+                <a:latin typeface="Arial" pitchFamily="34" charset="0"/>
+                <a:ea typeface="Arial" pitchFamily="34" charset="-122"/>
+                <a:cs typeface="Arial" pitchFamily="34" charset="-120"/>
+              </a:rPr>
+              <a:t>+</a:t>
+            </a:r>
+            <a:endParaRPr lang="en-US" sz="1200" dirty="0"/>
           </a:p>
         </p:txBody>
       </p:sp>
@@ -1876,34 +1876,34 @@
         </p:nvSpPr>
         <p:spPr>
           <a:xfrm>
-            <a:off x="6263640" y="1874520"/>
-            <a:ext cx="274320" cy="274320"/>
-          </a:xfrm>
-          <a:prstGeom prst="rect">
-            <a:avLst/>
-          </a:prstGeom>
-          <a:noFill/>
-          <a:ln/>
-        </p:spPr>
-        <p:txBody>
-          <a:bodyPr wrap="square" lIns="0" tIns="0" rIns="0" bIns="0" rtlCol="0" anchor="ctr"/>
-          <a:lstStyle/>
-          <a:p>
-            <a:pPr algn="ctr" indent="0" marL="0">
-              <a:buNone/>
-            </a:pPr>
-            <a:r>
-              <a:rPr lang="en-US" sz="1000" dirty="0">
-                <a:solidFill>
-                  <a:srgbClr val="333333"/>
-                </a:solidFill>
-                <a:latin typeface="Arial" pitchFamily="34" charset="0"/>
-                <a:ea typeface="Arial" pitchFamily="34" charset="-122"/>
-                <a:cs typeface="Arial" pitchFamily="34" charset="-120"/>
-              </a:rPr>
-              <a:t>+</a:t>
-            </a:r>
-            <a:endParaRPr lang="en-US" sz="1000" dirty="0"/>
+            <a:off x="2331720" y="3246120"/>
+            <a:ext cx="274320" cy="274320"/>
+          </a:xfrm>
+          <a:prstGeom prst="rect">
+            <a:avLst/>
+          </a:prstGeom>
+          <a:noFill/>
+          <a:ln/>
+        </p:spPr>
+        <p:txBody>
+          <a:bodyPr wrap="square" lIns="0" tIns="0" rIns="0" bIns="0" rtlCol="0" anchor="ctr"/>
+          <a:lstStyle/>
+          <a:p>
+            <a:pPr algn="ctr" indent="0" marL="0">
+              <a:buNone/>
+            </a:pPr>
+            <a:r>
+              <a:rPr lang="en-US" sz="1200" dirty="0">
+                <a:solidFill>
+                  <a:srgbClr val="000000"/>
+                </a:solidFill>
+                <a:latin typeface="Arial" pitchFamily="34" charset="0"/>
+                <a:ea typeface="Arial" pitchFamily="34" charset="-122"/>
+                <a:cs typeface="Arial" pitchFamily="34" charset="-120"/>
+              </a:rPr>
+              <a:t>+</a:t>
+            </a:r>
+            <a:endParaRPr lang="en-US" sz="1200" dirty="0"/>
           </a:p>
         </p:txBody>
       </p:sp>
@@ -1915,34 +1915,34 @@
         </p:nvSpPr>
         <p:spPr>
           <a:xfrm>
-            <a:off x="777240" y="2971800"/>
-            <a:ext cx="274320" cy="274320"/>
-          </a:xfrm>
-          <a:prstGeom prst="rect">
-            <a:avLst/>
-          </a:prstGeom>
-          <a:noFill/>
-          <a:ln/>
-        </p:spPr>
-        <p:txBody>
-          <a:bodyPr wrap="square" lIns="0" tIns="0" rIns="0" bIns="0" rtlCol="0" anchor="ctr"/>
-          <a:lstStyle/>
-          <a:p>
-            <a:pPr algn="ctr" indent="0" marL="0">
-              <a:buNone/>
-            </a:pPr>
-            <a:r>
-              <a:rPr lang="en-US" sz="1000" dirty="0">
-                <a:solidFill>
-                  <a:srgbClr val="333333"/>
-                </a:solidFill>
-                <a:latin typeface="Arial" pitchFamily="34" charset="0"/>
-                <a:ea typeface="Arial" pitchFamily="34" charset="-122"/>
-                <a:cs typeface="Arial" pitchFamily="34" charset="-120"/>
-              </a:rPr>
-              <a:t>+</a:t>
-            </a:r>
-            <a:endParaRPr lang="en-US" sz="1000" dirty="0"/>
+            <a:off x="3886200" y="3246120"/>
+            <a:ext cx="274320" cy="274320"/>
+          </a:xfrm>
+          <a:prstGeom prst="rect">
+            <a:avLst/>
+          </a:prstGeom>
+          <a:noFill/>
+          <a:ln/>
+        </p:spPr>
+        <p:txBody>
+          <a:bodyPr wrap="square" lIns="0" tIns="0" rIns="0" bIns="0" rtlCol="0" anchor="ctr"/>
+          <a:lstStyle/>
+          <a:p>
+            <a:pPr algn="ctr" indent="0" marL="0">
+              <a:buNone/>
+            </a:pPr>
+            <a:r>
+              <a:rPr lang="en-US" sz="1200" dirty="0">
+                <a:solidFill>
+                  <a:srgbClr val="000000"/>
+                </a:solidFill>
+                <a:latin typeface="Arial" pitchFamily="34" charset="0"/>
+                <a:ea typeface="Arial" pitchFamily="34" charset="-122"/>
+                <a:cs typeface="Arial" pitchFamily="34" charset="-120"/>
+              </a:rPr>
+              <a:t>+</a:t>
+            </a:r>
+            <a:endParaRPr lang="en-US" sz="1200" dirty="0"/>
           </a:p>
         </p:txBody>
       </p:sp>
@@ -1954,34 +1954,34 @@
         </p:nvSpPr>
         <p:spPr>
           <a:xfrm>
-            <a:off x="1874520" y="2971800"/>
-            <a:ext cx="274320" cy="274320"/>
-          </a:xfrm>
-          <a:prstGeom prst="rect">
-            <a:avLst/>
-          </a:prstGeom>
-          <a:noFill/>
-          <a:ln/>
-        </p:spPr>
-        <p:txBody>
-          <a:bodyPr wrap="square" lIns="0" tIns="0" rIns="0" bIns="0" rtlCol="0" anchor="ctr"/>
-          <a:lstStyle/>
-          <a:p>
-            <a:pPr algn="ctr" indent="0" marL="0">
-              <a:buNone/>
-            </a:pPr>
-            <a:r>
-              <a:rPr lang="en-US" sz="1000" dirty="0">
-                <a:solidFill>
-                  <a:srgbClr val="333333"/>
-                </a:solidFill>
-                <a:latin typeface="Arial" pitchFamily="34" charset="0"/>
-                <a:ea typeface="Arial" pitchFamily="34" charset="-122"/>
-                <a:cs typeface="Arial" pitchFamily="34" charset="-120"/>
-              </a:rPr>
-              <a:t>+</a:t>
-            </a:r>
-            <a:endParaRPr lang="en-US" sz="1000" dirty="0"/>
+            <a:off x="5440680" y="3246120"/>
+            <a:ext cx="274320" cy="274320"/>
+          </a:xfrm>
+          <a:prstGeom prst="rect">
+            <a:avLst/>
+          </a:prstGeom>
+          <a:noFill/>
+          <a:ln/>
+        </p:spPr>
+        <p:txBody>
+          <a:bodyPr wrap="square" lIns="0" tIns="0" rIns="0" bIns="0" rtlCol="0" anchor="ctr"/>
+          <a:lstStyle/>
+          <a:p>
+            <a:pPr algn="ctr" indent="0" marL="0">
+              <a:buNone/>
+            </a:pPr>
+            <a:r>
+              <a:rPr lang="en-US" sz="1200" dirty="0">
+                <a:solidFill>
+                  <a:srgbClr val="000000"/>
+                </a:solidFill>
+                <a:latin typeface="Arial" pitchFamily="34" charset="0"/>
+                <a:ea typeface="Arial" pitchFamily="34" charset="-122"/>
+                <a:cs typeface="Arial" pitchFamily="34" charset="-120"/>
+              </a:rPr>
+              <a:t>+</a:t>
+            </a:r>
+            <a:endParaRPr lang="en-US" sz="1200" dirty="0"/>
           </a:p>
         </p:txBody>
       </p:sp>
@@ -1993,34 +1993,34 @@
         </p:nvSpPr>
         <p:spPr>
           <a:xfrm>
-            <a:off x="2971800" y="2971800"/>
-            <a:ext cx="274320" cy="274320"/>
-          </a:xfrm>
-          <a:prstGeom prst="rect">
-            <a:avLst/>
-          </a:prstGeom>
-          <a:noFill/>
-          <a:ln/>
-        </p:spPr>
-        <p:txBody>
-          <a:bodyPr wrap="square" lIns="0" tIns="0" rIns="0" bIns="0" rtlCol="0" anchor="ctr"/>
-          <a:lstStyle/>
-          <a:p>
-            <a:pPr algn="ctr" indent="0" marL="0">
-              <a:buNone/>
-            </a:pPr>
-            <a:r>
-              <a:rPr lang="en-US" sz="1000" dirty="0">
-                <a:solidFill>
-                  <a:srgbClr val="333333"/>
-                </a:solidFill>
-                <a:latin typeface="Arial" pitchFamily="34" charset="0"/>
-                <a:ea typeface="Arial" pitchFamily="34" charset="-122"/>
-                <a:cs typeface="Arial" pitchFamily="34" charset="-120"/>
-              </a:rPr>
-              <a:t>+</a:t>
-            </a:r>
-            <a:endParaRPr lang="en-US" sz="1000" dirty="0"/>
+            <a:off x="6995160" y="3246120"/>
+            <a:ext cx="274320" cy="274320"/>
+          </a:xfrm>
+          <a:prstGeom prst="rect">
+            <a:avLst/>
+          </a:prstGeom>
+          <a:noFill/>
+          <a:ln/>
+        </p:spPr>
+        <p:txBody>
+          <a:bodyPr wrap="square" lIns="0" tIns="0" rIns="0" bIns="0" rtlCol="0" anchor="ctr"/>
+          <a:lstStyle/>
+          <a:p>
+            <a:pPr algn="ctr" indent="0" marL="0">
+              <a:buNone/>
+            </a:pPr>
+            <a:r>
+              <a:rPr lang="en-US" sz="1200" dirty="0">
+                <a:solidFill>
+                  <a:srgbClr val="000000"/>
+                </a:solidFill>
+                <a:latin typeface="Arial" pitchFamily="34" charset="0"/>
+                <a:ea typeface="Arial" pitchFamily="34" charset="-122"/>
+                <a:cs typeface="Arial" pitchFamily="34" charset="-120"/>
+              </a:rPr>
+              <a:t>+</a:t>
+            </a:r>
+            <a:endParaRPr lang="en-US" sz="1200" dirty="0"/>
           </a:p>
         </p:txBody>
       </p:sp>
@@ -2032,34 +2032,34 @@
         </p:nvSpPr>
         <p:spPr>
           <a:xfrm>
-            <a:off x="4069080" y="2971800"/>
-            <a:ext cx="274320" cy="274320"/>
-          </a:xfrm>
-          <a:prstGeom prst="rect">
-            <a:avLst/>
-          </a:prstGeom>
-          <a:noFill/>
-          <a:ln/>
-        </p:spPr>
-        <p:txBody>
-          <a:bodyPr wrap="square" lIns="0" tIns="0" rIns="0" bIns="0" rtlCol="0" anchor="ctr"/>
-          <a:lstStyle/>
-          <a:p>
-            <a:pPr algn="ctr" indent="0" marL="0">
-              <a:buNone/>
-            </a:pPr>
-            <a:r>
-              <a:rPr lang="en-US" sz="1000" dirty="0">
-                <a:solidFill>
-                  <a:srgbClr val="333333"/>
-                </a:solidFill>
-                <a:latin typeface="Arial" pitchFamily="34" charset="0"/>
-                <a:ea typeface="Arial" pitchFamily="34" charset="-122"/>
-                <a:cs typeface="Arial" pitchFamily="34" charset="-120"/>
-              </a:rPr>
-              <a:t>+</a:t>
-            </a:r>
-            <a:endParaRPr lang="en-US" sz="1000" dirty="0"/>
+            <a:off x="777240" y="4480560"/>
+            <a:ext cx="274320" cy="274320"/>
+          </a:xfrm>
+          <a:prstGeom prst="rect">
+            <a:avLst/>
+          </a:prstGeom>
+          <a:noFill/>
+          <a:ln/>
+        </p:spPr>
+        <p:txBody>
+          <a:bodyPr wrap="square" lIns="0" tIns="0" rIns="0" bIns="0" rtlCol="0" anchor="ctr"/>
+          <a:lstStyle/>
+          <a:p>
+            <a:pPr algn="ctr" indent="0" marL="0">
+              <a:buNone/>
+            </a:pPr>
+            <a:r>
+              <a:rPr lang="en-US" sz="1200" dirty="0">
+                <a:solidFill>
+                  <a:srgbClr val="000000"/>
+                </a:solidFill>
+                <a:latin typeface="Arial" pitchFamily="34" charset="0"/>
+                <a:ea typeface="Arial" pitchFamily="34" charset="-122"/>
+                <a:cs typeface="Arial" pitchFamily="34" charset="-120"/>
+              </a:rPr>
+              <a:t>+</a:t>
+            </a:r>
+            <a:endParaRPr lang="en-US" sz="1200" dirty="0"/>
           </a:p>
         </p:txBody>
       </p:sp>
@@ -2071,34 +2071,34 @@
         </p:nvSpPr>
         <p:spPr>
           <a:xfrm>
-            <a:off x="5166360" y="2971800"/>
-            <a:ext cx="274320" cy="274320"/>
-          </a:xfrm>
-          <a:prstGeom prst="rect">
-            <a:avLst/>
-          </a:prstGeom>
-          <a:noFill/>
-          <a:ln/>
-        </p:spPr>
-        <p:txBody>
-          <a:bodyPr wrap="square" lIns="0" tIns="0" rIns="0" bIns="0" rtlCol="0" anchor="ctr"/>
-          <a:lstStyle/>
-          <a:p>
-            <a:pPr algn="ctr" indent="0" marL="0">
-              <a:buNone/>
-            </a:pPr>
-            <a:r>
-              <a:rPr lang="en-US" sz="1000" dirty="0">
-                <a:solidFill>
-                  <a:srgbClr val="333333"/>
-                </a:solidFill>
-                <a:latin typeface="Arial" pitchFamily="34" charset="0"/>
-                <a:ea typeface="Arial" pitchFamily="34" charset="-122"/>
-                <a:cs typeface="Arial" pitchFamily="34" charset="-120"/>
-              </a:rPr>
-              <a:t>+</a:t>
-            </a:r>
-            <a:endParaRPr lang="en-US" sz="1000" dirty="0"/>
+            <a:off x="2331720" y="4480560"/>
+            <a:ext cx="274320" cy="274320"/>
+          </a:xfrm>
+          <a:prstGeom prst="rect">
+            <a:avLst/>
+          </a:prstGeom>
+          <a:noFill/>
+          <a:ln/>
+        </p:spPr>
+        <p:txBody>
+          <a:bodyPr wrap="square" lIns="0" tIns="0" rIns="0" bIns="0" rtlCol="0" anchor="ctr"/>
+          <a:lstStyle/>
+          <a:p>
+            <a:pPr algn="ctr" indent="0" marL="0">
+              <a:buNone/>
+            </a:pPr>
+            <a:r>
+              <a:rPr lang="en-US" sz="1200" dirty="0">
+                <a:solidFill>
+                  <a:srgbClr val="000000"/>
+                </a:solidFill>
+                <a:latin typeface="Arial" pitchFamily="34" charset="0"/>
+                <a:ea typeface="Arial" pitchFamily="34" charset="-122"/>
+                <a:cs typeface="Arial" pitchFamily="34" charset="-120"/>
+              </a:rPr>
+              <a:t>+</a:t>
+            </a:r>
+            <a:endParaRPr lang="en-US" sz="1200" dirty="0"/>
           </a:p>
         </p:txBody>
       </p:sp>
@@ -2110,34 +2110,34 @@
         </p:nvSpPr>
         <p:spPr>
           <a:xfrm>
-            <a:off x="6263640" y="2971800"/>
-            <a:ext cx="274320" cy="274320"/>
-          </a:xfrm>
-          <a:prstGeom prst="rect">
-            <a:avLst/>
-          </a:prstGeom>
-          <a:noFill/>
-          <a:ln/>
-        </p:spPr>
-        <p:txBody>
-          <a:bodyPr wrap="square" lIns="0" tIns="0" rIns="0" bIns="0" rtlCol="0" anchor="ctr"/>
-          <a:lstStyle/>
-          <a:p>
-            <a:pPr algn="ctr" indent="0" marL="0">
-              <a:buNone/>
-            </a:pPr>
-            <a:r>
-              <a:rPr lang="en-US" sz="1000" dirty="0">
-                <a:solidFill>
-                  <a:srgbClr val="333333"/>
-                </a:solidFill>
-                <a:latin typeface="Arial" pitchFamily="34" charset="0"/>
-                <a:ea typeface="Arial" pitchFamily="34" charset="-122"/>
-                <a:cs typeface="Arial" pitchFamily="34" charset="-120"/>
-              </a:rPr>
-              <a:t>+</a:t>
-            </a:r>
-            <a:endParaRPr lang="en-US" sz="1000" dirty="0"/>
+            <a:off x="3886200" y="4480560"/>
+            <a:ext cx="274320" cy="274320"/>
+          </a:xfrm>
+          <a:prstGeom prst="rect">
+            <a:avLst/>
+          </a:prstGeom>
+          <a:noFill/>
+          <a:ln/>
+        </p:spPr>
+        <p:txBody>
+          <a:bodyPr wrap="square" lIns="0" tIns="0" rIns="0" bIns="0" rtlCol="0" anchor="ctr"/>
+          <a:lstStyle/>
+          <a:p>
+            <a:pPr algn="ctr" indent="0" marL="0">
+              <a:buNone/>
+            </a:pPr>
+            <a:r>
+              <a:rPr lang="en-US" sz="1200" dirty="0">
+                <a:solidFill>
+                  <a:srgbClr val="000000"/>
+                </a:solidFill>
+                <a:latin typeface="Arial" pitchFamily="34" charset="0"/>
+                <a:ea typeface="Arial" pitchFamily="34" charset="-122"/>
+                <a:cs typeface="Arial" pitchFamily="34" charset="-120"/>
+              </a:rPr>
+              <a:t>+</a:t>
+            </a:r>
+            <a:endParaRPr lang="en-US" sz="1200" dirty="0"/>
           </a:p>
         </p:txBody>
       </p:sp>
@@ -2149,34 +2149,34 @@
         </p:nvSpPr>
         <p:spPr>
           <a:xfrm>
-            <a:off x="777240" y="4069080"/>
-            <a:ext cx="274320" cy="274320"/>
-          </a:xfrm>
-          <a:prstGeom prst="rect">
-            <a:avLst/>
-          </a:prstGeom>
-          <a:noFill/>
-          <a:ln/>
-        </p:spPr>
-        <p:txBody>
-          <a:bodyPr wrap="square" lIns="0" tIns="0" rIns="0" bIns="0" rtlCol="0" anchor="ctr"/>
-          <a:lstStyle/>
-          <a:p>
-            <a:pPr algn="ctr" indent="0" marL="0">
-              <a:buNone/>
-            </a:pPr>
-            <a:r>
-              <a:rPr lang="en-US" sz="1000" dirty="0">
-                <a:solidFill>
-                  <a:srgbClr val="333333"/>
-                </a:solidFill>
-                <a:latin typeface="Arial" pitchFamily="34" charset="0"/>
-                <a:ea typeface="Arial" pitchFamily="34" charset="-122"/>
-                <a:cs typeface="Arial" pitchFamily="34" charset="-120"/>
-              </a:rPr>
-              <a:t>+</a:t>
-            </a:r>
-            <a:endParaRPr lang="en-US" sz="1000" dirty="0"/>
+            <a:off x="5440680" y="4480560"/>
+            <a:ext cx="274320" cy="274320"/>
+          </a:xfrm>
+          <a:prstGeom prst="rect">
+            <a:avLst/>
+          </a:prstGeom>
+          <a:noFill/>
+          <a:ln/>
+        </p:spPr>
+        <p:txBody>
+          <a:bodyPr wrap="square" lIns="0" tIns="0" rIns="0" bIns="0" rtlCol="0" anchor="ctr"/>
+          <a:lstStyle/>
+          <a:p>
+            <a:pPr algn="ctr" indent="0" marL="0">
+              <a:buNone/>
+            </a:pPr>
+            <a:r>
+              <a:rPr lang="en-US" sz="1200" dirty="0">
+                <a:solidFill>
+                  <a:srgbClr val="000000"/>
+                </a:solidFill>
+                <a:latin typeface="Arial" pitchFamily="34" charset="0"/>
+                <a:ea typeface="Arial" pitchFamily="34" charset="-122"/>
+                <a:cs typeface="Arial" pitchFamily="34" charset="-120"/>
+              </a:rPr>
+              <a:t>+</a:t>
+            </a:r>
+            <a:endParaRPr lang="en-US" sz="1200" dirty="0"/>
           </a:p>
         </p:txBody>
       </p:sp>
@@ -2188,34 +2188,34 @@
         </p:nvSpPr>
         <p:spPr>
           <a:xfrm>
-            <a:off x="1874520" y="4069080"/>
-            <a:ext cx="274320" cy="274320"/>
-          </a:xfrm>
-          <a:prstGeom prst="rect">
-            <a:avLst/>
-          </a:prstGeom>
-          <a:noFill/>
-          <a:ln/>
-        </p:spPr>
-        <p:txBody>
-          <a:bodyPr wrap="square" lIns="0" tIns="0" rIns="0" bIns="0" rtlCol="0" anchor="ctr"/>
-          <a:lstStyle/>
-          <a:p>
-            <a:pPr algn="ctr" indent="0" marL="0">
-              <a:buNone/>
-            </a:pPr>
-            <a:r>
-              <a:rPr lang="en-US" sz="1000" dirty="0">
-                <a:solidFill>
-                  <a:srgbClr val="333333"/>
-                </a:solidFill>
-                <a:latin typeface="Arial" pitchFamily="34" charset="0"/>
-                <a:ea typeface="Arial" pitchFamily="34" charset="-122"/>
-                <a:cs typeface="Arial" pitchFamily="34" charset="-120"/>
-              </a:rPr>
-              <a:t>+</a:t>
-            </a:r>
-            <a:endParaRPr lang="en-US" sz="1000" dirty="0"/>
+            <a:off x="6995160" y="4480560"/>
+            <a:ext cx="274320" cy="274320"/>
+          </a:xfrm>
+          <a:prstGeom prst="rect">
+            <a:avLst/>
+          </a:prstGeom>
+          <a:noFill/>
+          <a:ln/>
+        </p:spPr>
+        <p:txBody>
+          <a:bodyPr wrap="square" lIns="0" tIns="0" rIns="0" bIns="0" rtlCol="0" anchor="ctr"/>
+          <a:lstStyle/>
+          <a:p>
+            <a:pPr algn="ctr" indent="0" marL="0">
+              <a:buNone/>
+            </a:pPr>
+            <a:r>
+              <a:rPr lang="en-US" sz="1200" dirty="0">
+                <a:solidFill>
+                  <a:srgbClr val="000000"/>
+                </a:solidFill>
+                <a:latin typeface="Arial" pitchFamily="34" charset="0"/>
+                <a:ea typeface="Arial" pitchFamily="34" charset="-122"/>
+                <a:cs typeface="Arial" pitchFamily="34" charset="-120"/>
+              </a:rPr>
+              <a:t>+</a:t>
+            </a:r>
+            <a:endParaRPr lang="en-US" sz="1200" dirty="0"/>
           </a:p>
         </p:txBody>
       </p:sp>
@@ -2227,34 +2227,34 @@
         </p:nvSpPr>
         <p:spPr>
           <a:xfrm>
-            <a:off x="2971800" y="4069080"/>
-            <a:ext cx="274320" cy="274320"/>
-          </a:xfrm>
-          <a:prstGeom prst="rect">
-            <a:avLst/>
-          </a:prstGeom>
-          <a:noFill/>
-          <a:ln/>
-        </p:spPr>
-        <p:txBody>
-          <a:bodyPr wrap="square" lIns="0" tIns="0" rIns="0" bIns="0" rtlCol="0" anchor="ctr"/>
-          <a:lstStyle/>
-          <a:p>
-            <a:pPr algn="ctr" indent="0" marL="0">
-              <a:buNone/>
-            </a:pPr>
-            <a:r>
-              <a:rPr lang="en-US" sz="1000" dirty="0">
-                <a:solidFill>
-                  <a:srgbClr val="333333"/>
-                </a:solidFill>
-                <a:latin typeface="Arial" pitchFamily="34" charset="0"/>
-                <a:ea typeface="Arial" pitchFamily="34" charset="-122"/>
-                <a:cs typeface="Arial" pitchFamily="34" charset="-120"/>
-              </a:rPr>
-              <a:t>+</a:t>
-            </a:r>
-            <a:endParaRPr lang="en-US" sz="1000" dirty="0"/>
+            <a:off x="777240" y="5715000"/>
+            <a:ext cx="274320" cy="274320"/>
+          </a:xfrm>
+          <a:prstGeom prst="rect">
+            <a:avLst/>
+          </a:prstGeom>
+          <a:noFill/>
+          <a:ln/>
+        </p:spPr>
+        <p:txBody>
+          <a:bodyPr wrap="square" lIns="0" tIns="0" rIns="0" bIns="0" rtlCol="0" anchor="ctr"/>
+          <a:lstStyle/>
+          <a:p>
+            <a:pPr algn="ctr" indent="0" marL="0">
+              <a:buNone/>
+            </a:pPr>
+            <a:r>
+              <a:rPr lang="en-US" sz="1200" dirty="0">
+                <a:solidFill>
+                  <a:srgbClr val="000000"/>
+                </a:solidFill>
+                <a:latin typeface="Arial" pitchFamily="34" charset="0"/>
+                <a:ea typeface="Arial" pitchFamily="34" charset="-122"/>
+                <a:cs typeface="Arial" pitchFamily="34" charset="-120"/>
+              </a:rPr>
+              <a:t>+</a:t>
+            </a:r>
+            <a:endParaRPr lang="en-US" sz="1200" dirty="0"/>
           </a:p>
         </p:txBody>
       </p:sp>
@@ -2266,34 +2266,34 @@
         </p:nvSpPr>
         <p:spPr>
           <a:xfrm>
-            <a:off x="4069080" y="4069080"/>
-            <a:ext cx="274320" cy="274320"/>
-          </a:xfrm>
-          <a:prstGeom prst="rect">
-            <a:avLst/>
-          </a:prstGeom>
-          <a:noFill/>
-          <a:ln/>
-        </p:spPr>
-        <p:txBody>
-          <a:bodyPr wrap="square" lIns="0" tIns="0" rIns="0" bIns="0" rtlCol="0" anchor="ctr"/>
-          <a:lstStyle/>
-          <a:p>
-            <a:pPr algn="ctr" indent="0" marL="0">
-              <a:buNone/>
-            </a:pPr>
-            <a:r>
-              <a:rPr lang="en-US" sz="1000" dirty="0">
-                <a:solidFill>
-                  <a:srgbClr val="333333"/>
-                </a:solidFill>
-                <a:latin typeface="Arial" pitchFamily="34" charset="0"/>
-                <a:ea typeface="Arial" pitchFamily="34" charset="-122"/>
-                <a:cs typeface="Arial" pitchFamily="34" charset="-120"/>
-              </a:rPr>
-              <a:t>+</a:t>
-            </a:r>
-            <a:endParaRPr lang="en-US" sz="1000" dirty="0"/>
+            <a:off x="2331720" y="5715000"/>
+            <a:ext cx="274320" cy="274320"/>
+          </a:xfrm>
+          <a:prstGeom prst="rect">
+            <a:avLst/>
+          </a:prstGeom>
+          <a:noFill/>
+          <a:ln/>
+        </p:spPr>
+        <p:txBody>
+          <a:bodyPr wrap="square" lIns="0" tIns="0" rIns="0" bIns="0" rtlCol="0" anchor="ctr"/>
+          <a:lstStyle/>
+          <a:p>
+            <a:pPr algn="ctr" indent="0" marL="0">
+              <a:buNone/>
+            </a:pPr>
+            <a:r>
+              <a:rPr lang="en-US" sz="1200" dirty="0">
+                <a:solidFill>
+                  <a:srgbClr val="000000"/>
+                </a:solidFill>
+                <a:latin typeface="Arial" pitchFamily="34" charset="0"/>
+                <a:ea typeface="Arial" pitchFamily="34" charset="-122"/>
+                <a:cs typeface="Arial" pitchFamily="34" charset="-120"/>
+              </a:rPr>
+              <a:t>+</a:t>
+            </a:r>
+            <a:endParaRPr lang="en-US" sz="1200" dirty="0"/>
           </a:p>
         </p:txBody>
       </p:sp>
@@ -2305,34 +2305,34 @@
         </p:nvSpPr>
         <p:spPr>
           <a:xfrm>
-            <a:off x="5166360" y="4069080"/>
-            <a:ext cx="274320" cy="274320"/>
-          </a:xfrm>
-          <a:prstGeom prst="rect">
-            <a:avLst/>
-          </a:prstGeom>
-          <a:noFill/>
-          <a:ln/>
-        </p:spPr>
-        <p:txBody>
-          <a:bodyPr wrap="square" lIns="0" tIns="0" rIns="0" bIns="0" rtlCol="0" anchor="ctr"/>
-          <a:lstStyle/>
-          <a:p>
-            <a:pPr algn="ctr" indent="0" marL="0">
-              <a:buNone/>
-            </a:pPr>
-            <a:r>
-              <a:rPr lang="en-US" sz="1000" dirty="0">
-                <a:solidFill>
-                  <a:srgbClr val="333333"/>
-                </a:solidFill>
-                <a:latin typeface="Arial" pitchFamily="34" charset="0"/>
-                <a:ea typeface="Arial" pitchFamily="34" charset="-122"/>
-                <a:cs typeface="Arial" pitchFamily="34" charset="-120"/>
-              </a:rPr>
-              <a:t>+</a:t>
-            </a:r>
-            <a:endParaRPr lang="en-US" sz="1000" dirty="0"/>
+            <a:off x="3886200" y="5715000"/>
+            <a:ext cx="274320" cy="274320"/>
+          </a:xfrm>
+          <a:prstGeom prst="rect">
+            <a:avLst/>
+          </a:prstGeom>
+          <a:noFill/>
+          <a:ln/>
+        </p:spPr>
+        <p:txBody>
+          <a:bodyPr wrap="square" lIns="0" tIns="0" rIns="0" bIns="0" rtlCol="0" anchor="ctr"/>
+          <a:lstStyle/>
+          <a:p>
+            <a:pPr algn="ctr" indent="0" marL="0">
+              <a:buNone/>
+            </a:pPr>
+            <a:r>
+              <a:rPr lang="en-US" sz="1200" dirty="0">
+                <a:solidFill>
+                  <a:srgbClr val="000000"/>
+                </a:solidFill>
+                <a:latin typeface="Arial" pitchFamily="34" charset="0"/>
+                <a:ea typeface="Arial" pitchFamily="34" charset="-122"/>
+                <a:cs typeface="Arial" pitchFamily="34" charset="-120"/>
+              </a:rPr>
+              <a:t>+</a:t>
+            </a:r>
+            <a:endParaRPr lang="en-US" sz="1200" dirty="0"/>
           </a:p>
         </p:txBody>
       </p:sp>
@@ -2344,34 +2344,34 @@
         </p:nvSpPr>
         <p:spPr>
           <a:xfrm>
-            <a:off x="6263640" y="4069080"/>
-            <a:ext cx="274320" cy="274320"/>
-          </a:xfrm>
-          <a:prstGeom prst="rect">
-            <a:avLst/>
-          </a:prstGeom>
-          <a:noFill/>
-          <a:ln/>
-        </p:spPr>
-        <p:txBody>
-          <a:bodyPr wrap="square" lIns="0" tIns="0" rIns="0" bIns="0" rtlCol="0" anchor="ctr"/>
-          <a:lstStyle/>
-          <a:p>
-            <a:pPr algn="ctr" indent="0" marL="0">
-              <a:buNone/>
-            </a:pPr>
-            <a:r>
-              <a:rPr lang="en-US" sz="1000" dirty="0">
-                <a:solidFill>
-                  <a:srgbClr val="333333"/>
-                </a:solidFill>
-                <a:latin typeface="Arial" pitchFamily="34" charset="0"/>
-                <a:ea typeface="Arial" pitchFamily="34" charset="-122"/>
-                <a:cs typeface="Arial" pitchFamily="34" charset="-120"/>
-              </a:rPr>
-              <a:t>+</a:t>
-            </a:r>
-            <a:endParaRPr lang="en-US" sz="1000" dirty="0"/>
+            <a:off x="5440680" y="5715000"/>
+            <a:ext cx="274320" cy="274320"/>
+          </a:xfrm>
+          <a:prstGeom prst="rect">
+            <a:avLst/>
+          </a:prstGeom>
+          <a:noFill/>
+          <a:ln/>
+        </p:spPr>
+        <p:txBody>
+          <a:bodyPr wrap="square" lIns="0" tIns="0" rIns="0" bIns="0" rtlCol="0" anchor="ctr"/>
+          <a:lstStyle/>
+          <a:p>
+            <a:pPr algn="ctr" indent="0" marL="0">
+              <a:buNone/>
+            </a:pPr>
+            <a:r>
+              <a:rPr lang="en-US" sz="1200" dirty="0">
+                <a:solidFill>
+                  <a:srgbClr val="000000"/>
+                </a:solidFill>
+                <a:latin typeface="Arial" pitchFamily="34" charset="0"/>
+                <a:ea typeface="Arial" pitchFamily="34" charset="-122"/>
+                <a:cs typeface="Arial" pitchFamily="34" charset="-120"/>
+              </a:rPr>
+              <a:t>+</a:t>
+            </a:r>
+            <a:endParaRPr lang="en-US" sz="1200" dirty="0"/>
           </a:p>
         </p:txBody>
       </p:sp>
@@ -2383,34 +2383,34 @@
         </p:nvSpPr>
         <p:spPr>
           <a:xfrm>
-            <a:off x="777240" y="5166360"/>
-            <a:ext cx="274320" cy="274320"/>
-          </a:xfrm>
-          <a:prstGeom prst="rect">
-            <a:avLst/>
-          </a:prstGeom>
-          <a:noFill/>
-          <a:ln/>
-        </p:spPr>
-        <p:txBody>
-          <a:bodyPr wrap="square" lIns="0" tIns="0" rIns="0" bIns="0" rtlCol="0" anchor="ctr"/>
-          <a:lstStyle/>
-          <a:p>
-            <a:pPr algn="ctr" indent="0" marL="0">
-              <a:buNone/>
-            </a:pPr>
-            <a:r>
-              <a:rPr lang="en-US" sz="1000" dirty="0">
-                <a:solidFill>
-                  <a:srgbClr val="333333"/>
-                </a:solidFill>
-                <a:latin typeface="Arial" pitchFamily="34" charset="0"/>
-                <a:ea typeface="Arial" pitchFamily="34" charset="-122"/>
-                <a:cs typeface="Arial" pitchFamily="34" charset="-120"/>
-              </a:rPr>
-              <a:t>+</a:t>
-            </a:r>
-            <a:endParaRPr lang="en-US" sz="1000" dirty="0"/>
+            <a:off x="6995160" y="5715000"/>
+            <a:ext cx="274320" cy="274320"/>
+          </a:xfrm>
+          <a:prstGeom prst="rect">
+            <a:avLst/>
+          </a:prstGeom>
+          <a:noFill/>
+          <a:ln/>
+        </p:spPr>
+        <p:txBody>
+          <a:bodyPr wrap="square" lIns="0" tIns="0" rIns="0" bIns="0" rtlCol="0" anchor="ctr"/>
+          <a:lstStyle/>
+          <a:p>
+            <a:pPr algn="ctr" indent="0" marL="0">
+              <a:buNone/>
+            </a:pPr>
+            <a:r>
+              <a:rPr lang="en-US" sz="1200" dirty="0">
+                <a:solidFill>
+                  <a:srgbClr val="000000"/>
+                </a:solidFill>
+                <a:latin typeface="Arial" pitchFamily="34" charset="0"/>
+                <a:ea typeface="Arial" pitchFamily="34" charset="-122"/>
+                <a:cs typeface="Arial" pitchFamily="34" charset="-120"/>
+              </a:rPr>
+              <a:t>+</a:t>
+            </a:r>
+            <a:endParaRPr lang="en-US" sz="1200" dirty="0"/>
           </a:p>
         </p:txBody>
       </p:sp>
@@ -2422,34 +2422,34 @@
         </p:nvSpPr>
         <p:spPr>
           <a:xfrm>
-            <a:off x="1874520" y="5166360"/>
-            <a:ext cx="274320" cy="274320"/>
-          </a:xfrm>
-          <a:prstGeom prst="rect">
-            <a:avLst/>
-          </a:prstGeom>
-          <a:noFill/>
-          <a:ln/>
-        </p:spPr>
-        <p:txBody>
-          <a:bodyPr wrap="square" lIns="0" tIns="0" rIns="0" bIns="0" rtlCol="0" anchor="ctr"/>
-          <a:lstStyle/>
-          <a:p>
-            <a:pPr algn="ctr" indent="0" marL="0">
-              <a:buNone/>
-            </a:pPr>
-            <a:r>
-              <a:rPr lang="en-US" sz="1000" dirty="0">
-                <a:solidFill>
-                  <a:srgbClr val="333333"/>
-                </a:solidFill>
-                <a:latin typeface="Arial" pitchFamily="34" charset="0"/>
-                <a:ea typeface="Arial" pitchFamily="34" charset="-122"/>
-                <a:cs typeface="Arial" pitchFamily="34" charset="-120"/>
-              </a:rPr>
-              <a:t>+</a:t>
-            </a:r>
-            <a:endParaRPr lang="en-US" sz="1000" dirty="0"/>
+            <a:off x="777240" y="6949440"/>
+            <a:ext cx="274320" cy="274320"/>
+          </a:xfrm>
+          <a:prstGeom prst="rect">
+            <a:avLst/>
+          </a:prstGeom>
+          <a:noFill/>
+          <a:ln/>
+        </p:spPr>
+        <p:txBody>
+          <a:bodyPr wrap="square" lIns="0" tIns="0" rIns="0" bIns="0" rtlCol="0" anchor="ctr"/>
+          <a:lstStyle/>
+          <a:p>
+            <a:pPr algn="ctr" indent="0" marL="0">
+              <a:buNone/>
+            </a:pPr>
+            <a:r>
+              <a:rPr lang="en-US" sz="1200" dirty="0">
+                <a:solidFill>
+                  <a:srgbClr val="000000"/>
+                </a:solidFill>
+                <a:latin typeface="Arial" pitchFamily="34" charset="0"/>
+                <a:ea typeface="Arial" pitchFamily="34" charset="-122"/>
+                <a:cs typeface="Arial" pitchFamily="34" charset="-120"/>
+              </a:rPr>
+              <a:t>+</a:t>
+            </a:r>
+            <a:endParaRPr lang="en-US" sz="1200" dirty="0"/>
           </a:p>
         </p:txBody>
       </p:sp>
@@ -2461,34 +2461,34 @@
         </p:nvSpPr>
         <p:spPr>
           <a:xfrm>
-            <a:off x="2971800" y="5166360"/>
-            <a:ext cx="274320" cy="274320"/>
-          </a:xfrm>
-          <a:prstGeom prst="rect">
-            <a:avLst/>
-          </a:prstGeom>
-          <a:noFill/>
-          <a:ln/>
-        </p:spPr>
-        <p:txBody>
-          <a:bodyPr wrap="square" lIns="0" tIns="0" rIns="0" bIns="0" rtlCol="0" anchor="ctr"/>
-          <a:lstStyle/>
-          <a:p>
-            <a:pPr algn="ctr" indent="0" marL="0">
-              <a:buNone/>
-            </a:pPr>
-            <a:r>
-              <a:rPr lang="en-US" sz="1000" dirty="0">
-                <a:solidFill>
-                  <a:srgbClr val="333333"/>
-                </a:solidFill>
-                <a:latin typeface="Arial" pitchFamily="34" charset="0"/>
-                <a:ea typeface="Arial" pitchFamily="34" charset="-122"/>
-                <a:cs typeface="Arial" pitchFamily="34" charset="-120"/>
-              </a:rPr>
-              <a:t>+</a:t>
-            </a:r>
-            <a:endParaRPr lang="en-US" sz="1000" dirty="0"/>
+            <a:off x="2331720" y="6949440"/>
+            <a:ext cx="274320" cy="274320"/>
+          </a:xfrm>
+          <a:prstGeom prst="rect">
+            <a:avLst/>
+          </a:prstGeom>
+          <a:noFill/>
+          <a:ln/>
+        </p:spPr>
+        <p:txBody>
+          <a:bodyPr wrap="square" lIns="0" tIns="0" rIns="0" bIns="0" rtlCol="0" anchor="ctr"/>
+          <a:lstStyle/>
+          <a:p>
+            <a:pPr algn="ctr" indent="0" marL="0">
+              <a:buNone/>
+            </a:pPr>
+            <a:r>
+              <a:rPr lang="en-US" sz="1200" dirty="0">
+                <a:solidFill>
+                  <a:srgbClr val="000000"/>
+                </a:solidFill>
+                <a:latin typeface="Arial" pitchFamily="34" charset="0"/>
+                <a:ea typeface="Arial" pitchFamily="34" charset="-122"/>
+                <a:cs typeface="Arial" pitchFamily="34" charset="-120"/>
+              </a:rPr>
+              <a:t>+</a:t>
+            </a:r>
+            <a:endParaRPr lang="en-US" sz="1200" dirty="0"/>
           </a:p>
         </p:txBody>
       </p:sp>
@@ -2500,34 +2500,34 @@
         </p:nvSpPr>
         <p:spPr>
           <a:xfrm>
-            <a:off x="4069080" y="5166360"/>
-            <a:ext cx="274320" cy="274320"/>
-          </a:xfrm>
-          <a:prstGeom prst="rect">
-            <a:avLst/>
-          </a:prstGeom>
-          <a:noFill/>
-          <a:ln/>
-        </p:spPr>
-        <p:txBody>
-          <a:bodyPr wrap="square" lIns="0" tIns="0" rIns="0" bIns="0" rtlCol="0" anchor="ctr"/>
-          <a:lstStyle/>
-          <a:p>
-            <a:pPr algn="ctr" indent="0" marL="0">
-              <a:buNone/>
-            </a:pPr>
-            <a:r>
-              <a:rPr lang="en-US" sz="1000" dirty="0">
-                <a:solidFill>
-                  <a:srgbClr val="333333"/>
-                </a:solidFill>
-                <a:latin typeface="Arial" pitchFamily="34" charset="0"/>
-                <a:ea typeface="Arial" pitchFamily="34" charset="-122"/>
-                <a:cs typeface="Arial" pitchFamily="34" charset="-120"/>
-              </a:rPr>
-              <a:t>+</a:t>
-            </a:r>
-            <a:endParaRPr lang="en-US" sz="1000" dirty="0"/>
+            <a:off x="3886200" y="6949440"/>
+            <a:ext cx="274320" cy="274320"/>
+          </a:xfrm>
+          <a:prstGeom prst="rect">
+            <a:avLst/>
+          </a:prstGeom>
+          <a:noFill/>
+          <a:ln/>
+        </p:spPr>
+        <p:txBody>
+          <a:bodyPr wrap="square" lIns="0" tIns="0" rIns="0" bIns="0" rtlCol="0" anchor="ctr"/>
+          <a:lstStyle/>
+          <a:p>
+            <a:pPr algn="ctr" indent="0" marL="0">
+              <a:buNone/>
+            </a:pPr>
+            <a:r>
+              <a:rPr lang="en-US" sz="1200" dirty="0">
+                <a:solidFill>
+                  <a:srgbClr val="000000"/>
+                </a:solidFill>
+                <a:latin typeface="Arial" pitchFamily="34" charset="0"/>
+                <a:ea typeface="Arial" pitchFamily="34" charset="-122"/>
+                <a:cs typeface="Arial" pitchFamily="34" charset="-120"/>
+              </a:rPr>
+              <a:t>+</a:t>
+            </a:r>
+            <a:endParaRPr lang="en-US" sz="1200" dirty="0"/>
           </a:p>
         </p:txBody>
       </p:sp>
@@ -2539,34 +2539,34 @@
         </p:nvSpPr>
         <p:spPr>
           <a:xfrm>
-            <a:off x="5166360" y="5166360"/>
-            <a:ext cx="274320" cy="274320"/>
-          </a:xfrm>
-          <a:prstGeom prst="rect">
-            <a:avLst/>
-          </a:prstGeom>
-          <a:noFill/>
-          <a:ln/>
-        </p:spPr>
-        <p:txBody>
-          <a:bodyPr wrap="square" lIns="0" tIns="0" rIns="0" bIns="0" rtlCol="0" anchor="ctr"/>
-          <a:lstStyle/>
-          <a:p>
-            <a:pPr algn="ctr" indent="0" marL="0">
-              <a:buNone/>
-            </a:pPr>
-            <a:r>
-              <a:rPr lang="en-US" sz="1000" dirty="0">
-                <a:solidFill>
-                  <a:srgbClr val="333333"/>
-                </a:solidFill>
-                <a:latin typeface="Arial" pitchFamily="34" charset="0"/>
-                <a:ea typeface="Arial" pitchFamily="34" charset="-122"/>
-                <a:cs typeface="Arial" pitchFamily="34" charset="-120"/>
-              </a:rPr>
-              <a:t>+</a:t>
-            </a:r>
-            <a:endParaRPr lang="en-US" sz="1000" dirty="0"/>
+            <a:off x="5440680" y="6949440"/>
+            <a:ext cx="274320" cy="274320"/>
+          </a:xfrm>
+          <a:prstGeom prst="rect">
+            <a:avLst/>
+          </a:prstGeom>
+          <a:noFill/>
+          <a:ln/>
+        </p:spPr>
+        <p:txBody>
+          <a:bodyPr wrap="square" lIns="0" tIns="0" rIns="0" bIns="0" rtlCol="0" anchor="ctr"/>
+          <a:lstStyle/>
+          <a:p>
+            <a:pPr algn="ctr" indent="0" marL="0">
+              <a:buNone/>
+            </a:pPr>
+            <a:r>
+              <a:rPr lang="en-US" sz="1200" dirty="0">
+                <a:solidFill>
+                  <a:srgbClr val="000000"/>
+                </a:solidFill>
+                <a:latin typeface="Arial" pitchFamily="34" charset="0"/>
+                <a:ea typeface="Arial" pitchFamily="34" charset="-122"/>
+                <a:cs typeface="Arial" pitchFamily="34" charset="-120"/>
+              </a:rPr>
+              <a:t>+</a:t>
+            </a:r>
+            <a:endParaRPr lang="en-US" sz="1200" dirty="0"/>
           </a:p>
         </p:txBody>
       </p:sp>
@@ -2578,34 +2578,34 @@
         </p:nvSpPr>
         <p:spPr>
           <a:xfrm>
-            <a:off x="6263640" y="5166360"/>
-            <a:ext cx="274320" cy="274320"/>
-          </a:xfrm>
-          <a:prstGeom prst="rect">
-            <a:avLst/>
-          </a:prstGeom>
-          <a:noFill/>
-          <a:ln/>
-        </p:spPr>
-        <p:txBody>
-          <a:bodyPr wrap="square" lIns="0" tIns="0" rIns="0" bIns="0" rtlCol="0" anchor="ctr"/>
-          <a:lstStyle/>
-          <a:p>
-            <a:pPr algn="ctr" indent="0" marL="0">
-              <a:buNone/>
-            </a:pPr>
-            <a:r>
-              <a:rPr lang="en-US" sz="1000" dirty="0">
-                <a:solidFill>
-                  <a:srgbClr val="333333"/>
-                </a:solidFill>
-                <a:latin typeface="Arial" pitchFamily="34" charset="0"/>
-                <a:ea typeface="Arial" pitchFamily="34" charset="-122"/>
-                <a:cs typeface="Arial" pitchFamily="34" charset="-120"/>
-              </a:rPr>
-              <a:t>+</a:t>
-            </a:r>
-            <a:endParaRPr lang="en-US" sz="1000" dirty="0"/>
+            <a:off x="6995160" y="6949440"/>
+            <a:ext cx="274320" cy="274320"/>
+          </a:xfrm>
+          <a:prstGeom prst="rect">
+            <a:avLst/>
+          </a:prstGeom>
+          <a:noFill/>
+          <a:ln/>
+        </p:spPr>
+        <p:txBody>
+          <a:bodyPr wrap="square" lIns="0" tIns="0" rIns="0" bIns="0" rtlCol="0" anchor="ctr"/>
+          <a:lstStyle/>
+          <a:p>
+            <a:pPr algn="ctr" indent="0" marL="0">
+              <a:buNone/>
+            </a:pPr>
+            <a:r>
+              <a:rPr lang="en-US" sz="1200" dirty="0">
+                <a:solidFill>
+                  <a:srgbClr val="000000"/>
+                </a:solidFill>
+                <a:latin typeface="Arial" pitchFamily="34" charset="0"/>
+                <a:ea typeface="Arial" pitchFamily="34" charset="-122"/>
+                <a:cs typeface="Arial" pitchFamily="34" charset="-120"/>
+              </a:rPr>
+              <a:t>+</a:t>
+            </a:r>
+            <a:endParaRPr lang="en-US" sz="1200" dirty="0"/>
           </a:p>
         </p:txBody>
       </p:sp>
@@ -2617,34 +2617,34 @@
         </p:nvSpPr>
         <p:spPr>
           <a:xfrm>
-            <a:off x="777240" y="6263640"/>
-            <a:ext cx="274320" cy="274320"/>
-          </a:xfrm>
-          <a:prstGeom prst="rect">
-            <a:avLst/>
-          </a:prstGeom>
-          <a:noFill/>
-          <a:ln/>
-        </p:spPr>
-        <p:txBody>
-          <a:bodyPr wrap="square" lIns="0" tIns="0" rIns="0" bIns="0" rtlCol="0" anchor="ctr"/>
-          <a:lstStyle/>
-          <a:p>
-            <a:pPr algn="ctr" indent="0" marL="0">
-              <a:buNone/>
-            </a:pPr>
-            <a:r>
-              <a:rPr lang="en-US" sz="1000" dirty="0">
-                <a:solidFill>
-                  <a:srgbClr val="333333"/>
-                </a:solidFill>
-                <a:latin typeface="Arial" pitchFamily="34" charset="0"/>
-                <a:ea typeface="Arial" pitchFamily="34" charset="-122"/>
-                <a:cs typeface="Arial" pitchFamily="34" charset="-120"/>
-              </a:rPr>
-              <a:t>+</a:t>
-            </a:r>
-            <a:endParaRPr lang="en-US" sz="1000" dirty="0"/>
+            <a:off x="777240" y="8183880"/>
+            <a:ext cx="274320" cy="274320"/>
+          </a:xfrm>
+          <a:prstGeom prst="rect">
+            <a:avLst/>
+          </a:prstGeom>
+          <a:noFill/>
+          <a:ln/>
+        </p:spPr>
+        <p:txBody>
+          <a:bodyPr wrap="square" lIns="0" tIns="0" rIns="0" bIns="0" rtlCol="0" anchor="ctr"/>
+          <a:lstStyle/>
+          <a:p>
+            <a:pPr algn="ctr" indent="0" marL="0">
+              <a:buNone/>
+            </a:pPr>
+            <a:r>
+              <a:rPr lang="en-US" sz="1200" dirty="0">
+                <a:solidFill>
+                  <a:srgbClr val="000000"/>
+                </a:solidFill>
+                <a:latin typeface="Arial" pitchFamily="34" charset="0"/>
+                <a:ea typeface="Arial" pitchFamily="34" charset="-122"/>
+                <a:cs typeface="Arial" pitchFamily="34" charset="-120"/>
+              </a:rPr>
+              <a:t>+</a:t>
+            </a:r>
+            <a:endParaRPr lang="en-US" sz="1200" dirty="0"/>
           </a:p>
         </p:txBody>
       </p:sp>
@@ -2656,34 +2656,34 @@
         </p:nvSpPr>
         <p:spPr>
           <a:xfrm>
-            <a:off x="1874520" y="6263640"/>
-            <a:ext cx="274320" cy="274320"/>
-          </a:xfrm>
-          <a:prstGeom prst="rect">
-            <a:avLst/>
-          </a:prstGeom>
-          <a:noFill/>
-          <a:ln/>
-        </p:spPr>
-        <p:txBody>
-          <a:bodyPr wrap="square" lIns="0" tIns="0" rIns="0" bIns="0" rtlCol="0" anchor="ctr"/>
-          <a:lstStyle/>
-          <a:p>
-            <a:pPr algn="ctr" indent="0" marL="0">
-              <a:buNone/>
-            </a:pPr>
-            <a:r>
-              <a:rPr lang="en-US" sz="1000" dirty="0">
-                <a:solidFill>
-                  <a:srgbClr val="333333"/>
-                </a:solidFill>
-                <a:latin typeface="Arial" pitchFamily="34" charset="0"/>
-                <a:ea typeface="Arial" pitchFamily="34" charset="-122"/>
-                <a:cs typeface="Arial" pitchFamily="34" charset="-120"/>
-              </a:rPr>
-              <a:t>+</a:t>
-            </a:r>
-            <a:endParaRPr lang="en-US" sz="1000" dirty="0"/>
+            <a:off x="2331720" y="8183880"/>
+            <a:ext cx="274320" cy="274320"/>
+          </a:xfrm>
+          <a:prstGeom prst="rect">
+            <a:avLst/>
+          </a:prstGeom>
+          <a:noFill/>
+          <a:ln/>
+        </p:spPr>
+        <p:txBody>
+          <a:bodyPr wrap="square" lIns="0" tIns="0" rIns="0" bIns="0" rtlCol="0" anchor="ctr"/>
+          <a:lstStyle/>
+          <a:p>
+            <a:pPr algn="ctr" indent="0" marL="0">
+              <a:buNone/>
+            </a:pPr>
+            <a:r>
+              <a:rPr lang="en-US" sz="1200" dirty="0">
+                <a:solidFill>
+                  <a:srgbClr val="000000"/>
+                </a:solidFill>
+                <a:latin typeface="Arial" pitchFamily="34" charset="0"/>
+                <a:ea typeface="Arial" pitchFamily="34" charset="-122"/>
+                <a:cs typeface="Arial" pitchFamily="34" charset="-120"/>
+              </a:rPr>
+              <a:t>+</a:t>
+            </a:r>
+            <a:endParaRPr lang="en-US" sz="1200" dirty="0"/>
           </a:p>
         </p:txBody>
       </p:sp>
@@ -2695,34 +2695,34 @@
         </p:nvSpPr>
         <p:spPr>
           <a:xfrm>
-            <a:off x="2971800" y="6263640"/>
-            <a:ext cx="274320" cy="274320"/>
-          </a:xfrm>
-          <a:prstGeom prst="rect">
-            <a:avLst/>
-          </a:prstGeom>
-          <a:noFill/>
-          <a:ln/>
-        </p:spPr>
-        <p:txBody>
-          <a:bodyPr wrap="square" lIns="0" tIns="0" rIns="0" bIns="0" rtlCol="0" anchor="ctr"/>
-          <a:lstStyle/>
-          <a:p>
-            <a:pPr algn="ctr" indent="0" marL="0">
-              <a:buNone/>
-            </a:pPr>
-            <a:r>
-              <a:rPr lang="en-US" sz="1000" dirty="0">
-                <a:solidFill>
-                  <a:srgbClr val="333333"/>
-                </a:solidFill>
-                <a:latin typeface="Arial" pitchFamily="34" charset="0"/>
-                <a:ea typeface="Arial" pitchFamily="34" charset="-122"/>
-                <a:cs typeface="Arial" pitchFamily="34" charset="-120"/>
-              </a:rPr>
-              <a:t>+</a:t>
-            </a:r>
-            <a:endParaRPr lang="en-US" sz="1000" dirty="0"/>
+            <a:off x="3886200" y="8183880"/>
+            <a:ext cx="274320" cy="274320"/>
+          </a:xfrm>
+          <a:prstGeom prst="rect">
+            <a:avLst/>
+          </a:prstGeom>
+          <a:noFill/>
+          <a:ln/>
+        </p:spPr>
+        <p:txBody>
+          <a:bodyPr wrap="square" lIns="0" tIns="0" rIns="0" bIns="0" rtlCol="0" anchor="ctr"/>
+          <a:lstStyle/>
+          <a:p>
+            <a:pPr algn="ctr" indent="0" marL="0">
+              <a:buNone/>
+            </a:pPr>
+            <a:r>
+              <a:rPr lang="en-US" sz="1200" dirty="0">
+                <a:solidFill>
+                  <a:srgbClr val="000000"/>
+                </a:solidFill>
+                <a:latin typeface="Arial" pitchFamily="34" charset="0"/>
+                <a:ea typeface="Arial" pitchFamily="34" charset="-122"/>
+                <a:cs typeface="Arial" pitchFamily="34" charset="-120"/>
+              </a:rPr>
+              <a:t>+</a:t>
+            </a:r>
+            <a:endParaRPr lang="en-US" sz="1200" dirty="0"/>
           </a:p>
         </p:txBody>
       </p:sp>
@@ -2734,34 +2734,34 @@
         </p:nvSpPr>
         <p:spPr>
           <a:xfrm>
-            <a:off x="4069080" y="6263640"/>
-            <a:ext cx="274320" cy="274320"/>
-          </a:xfrm>
-          <a:prstGeom prst="rect">
-            <a:avLst/>
-          </a:prstGeom>
-          <a:noFill/>
-          <a:ln/>
-        </p:spPr>
-        <p:txBody>
-          <a:bodyPr wrap="square" lIns="0" tIns="0" rIns="0" bIns="0" rtlCol="0" anchor="ctr"/>
-          <a:lstStyle/>
-          <a:p>
-            <a:pPr algn="ctr" indent="0" marL="0">
-              <a:buNone/>
-            </a:pPr>
-            <a:r>
-              <a:rPr lang="en-US" sz="1000" dirty="0">
-                <a:solidFill>
-                  <a:srgbClr val="333333"/>
-                </a:solidFill>
-                <a:latin typeface="Arial" pitchFamily="34" charset="0"/>
-                <a:ea typeface="Arial" pitchFamily="34" charset="-122"/>
-                <a:cs typeface="Arial" pitchFamily="34" charset="-120"/>
-              </a:rPr>
-              <a:t>+</a:t>
-            </a:r>
-            <a:endParaRPr lang="en-US" sz="1000" dirty="0"/>
+            <a:off x="5440680" y="8183880"/>
+            <a:ext cx="274320" cy="274320"/>
+          </a:xfrm>
+          <a:prstGeom prst="rect">
+            <a:avLst/>
+          </a:prstGeom>
+          <a:noFill/>
+          <a:ln/>
+        </p:spPr>
+        <p:txBody>
+          <a:bodyPr wrap="square" lIns="0" tIns="0" rIns="0" bIns="0" rtlCol="0" anchor="ctr"/>
+          <a:lstStyle/>
+          <a:p>
+            <a:pPr algn="ctr" indent="0" marL="0">
+              <a:buNone/>
+            </a:pPr>
+            <a:r>
+              <a:rPr lang="en-US" sz="1200" dirty="0">
+                <a:solidFill>
+                  <a:srgbClr val="000000"/>
+                </a:solidFill>
+                <a:latin typeface="Arial" pitchFamily="34" charset="0"/>
+                <a:ea typeface="Arial" pitchFamily="34" charset="-122"/>
+                <a:cs typeface="Arial" pitchFamily="34" charset="-120"/>
+              </a:rPr>
+              <a:t>+</a:t>
+            </a:r>
+            <a:endParaRPr lang="en-US" sz="1200" dirty="0"/>
           </a:p>
         </p:txBody>
       </p:sp>
@@ -2773,34 +2773,34 @@
         </p:nvSpPr>
         <p:spPr>
           <a:xfrm>
-            <a:off x="5166360" y="6263640"/>
-            <a:ext cx="274320" cy="274320"/>
-          </a:xfrm>
-          <a:prstGeom prst="rect">
-            <a:avLst/>
-          </a:prstGeom>
-          <a:noFill/>
-          <a:ln/>
-        </p:spPr>
-        <p:txBody>
-          <a:bodyPr wrap="square" lIns="0" tIns="0" rIns="0" bIns="0" rtlCol="0" anchor="ctr"/>
-          <a:lstStyle/>
-          <a:p>
-            <a:pPr algn="ctr" indent="0" marL="0">
-              <a:buNone/>
-            </a:pPr>
-            <a:r>
-              <a:rPr lang="en-US" sz="1000" dirty="0">
-                <a:solidFill>
-                  <a:srgbClr val="333333"/>
-                </a:solidFill>
-                <a:latin typeface="Arial" pitchFamily="34" charset="0"/>
-                <a:ea typeface="Arial" pitchFamily="34" charset="-122"/>
-                <a:cs typeface="Arial" pitchFamily="34" charset="-120"/>
-              </a:rPr>
-              <a:t>+</a:t>
-            </a:r>
-            <a:endParaRPr lang="en-US" sz="1000" dirty="0"/>
+            <a:off x="6995160" y="8183880"/>
+            <a:ext cx="274320" cy="274320"/>
+          </a:xfrm>
+          <a:prstGeom prst="rect">
+            <a:avLst/>
+          </a:prstGeom>
+          <a:noFill/>
+          <a:ln/>
+        </p:spPr>
+        <p:txBody>
+          <a:bodyPr wrap="square" lIns="0" tIns="0" rIns="0" bIns="0" rtlCol="0" anchor="ctr"/>
+          <a:lstStyle/>
+          <a:p>
+            <a:pPr algn="ctr" indent="0" marL="0">
+              <a:buNone/>
+            </a:pPr>
+            <a:r>
+              <a:rPr lang="en-US" sz="1200" dirty="0">
+                <a:solidFill>
+                  <a:srgbClr val="000000"/>
+                </a:solidFill>
+                <a:latin typeface="Arial" pitchFamily="34" charset="0"/>
+                <a:ea typeface="Arial" pitchFamily="34" charset="-122"/>
+                <a:cs typeface="Arial" pitchFamily="34" charset="-120"/>
+              </a:rPr>
+              <a:t>+</a:t>
+            </a:r>
+            <a:endParaRPr lang="en-US" sz="1200" dirty="0"/>
           </a:p>
         </p:txBody>
       </p:sp>
@@ -2812,34 +2812,34 @@
         </p:nvSpPr>
         <p:spPr>
           <a:xfrm>
-            <a:off x="6263640" y="6263640"/>
-            <a:ext cx="274320" cy="274320"/>
-          </a:xfrm>
-          <a:prstGeom prst="rect">
-            <a:avLst/>
-          </a:prstGeom>
-          <a:noFill/>
-          <a:ln/>
-        </p:spPr>
-        <p:txBody>
-          <a:bodyPr wrap="square" lIns="0" tIns="0" rIns="0" bIns="0" rtlCol="0" anchor="ctr"/>
-          <a:lstStyle/>
-          <a:p>
-            <a:pPr algn="ctr" indent="0" marL="0">
-              <a:buNone/>
-            </a:pPr>
-            <a:r>
-              <a:rPr lang="en-US" sz="1000" dirty="0">
-                <a:solidFill>
-                  <a:srgbClr val="333333"/>
-                </a:solidFill>
-                <a:latin typeface="Arial" pitchFamily="34" charset="0"/>
-                <a:ea typeface="Arial" pitchFamily="34" charset="-122"/>
-                <a:cs typeface="Arial" pitchFamily="34" charset="-120"/>
-              </a:rPr>
-              <a:t>+</a:t>
-            </a:r>
-            <a:endParaRPr lang="en-US" sz="1000" dirty="0"/>
+            <a:off x="777240" y="9418320"/>
+            <a:ext cx="274320" cy="274320"/>
+          </a:xfrm>
+          <a:prstGeom prst="rect">
+            <a:avLst/>
+          </a:prstGeom>
+          <a:noFill/>
+          <a:ln/>
+        </p:spPr>
+        <p:txBody>
+          <a:bodyPr wrap="square" lIns="0" tIns="0" rIns="0" bIns="0" rtlCol="0" anchor="ctr"/>
+          <a:lstStyle/>
+          <a:p>
+            <a:pPr algn="ctr" indent="0" marL="0">
+              <a:buNone/>
+            </a:pPr>
+            <a:r>
+              <a:rPr lang="en-US" sz="1200" dirty="0">
+                <a:solidFill>
+                  <a:srgbClr val="000000"/>
+                </a:solidFill>
+                <a:latin typeface="Arial" pitchFamily="34" charset="0"/>
+                <a:ea typeface="Arial" pitchFamily="34" charset="-122"/>
+                <a:cs typeface="Arial" pitchFamily="34" charset="-120"/>
+              </a:rPr>
+              <a:t>+</a:t>
+            </a:r>
+            <a:endParaRPr lang="en-US" sz="1200" dirty="0"/>
           </a:p>
         </p:txBody>
       </p:sp>
@@ -2851,34 +2851,34 @@
         </p:nvSpPr>
         <p:spPr>
           <a:xfrm>
-            <a:off x="777240" y="7360920"/>
-            <a:ext cx="274320" cy="274320"/>
-          </a:xfrm>
-          <a:prstGeom prst="rect">
-            <a:avLst/>
-          </a:prstGeom>
-          <a:noFill/>
-          <a:ln/>
-        </p:spPr>
-        <p:txBody>
-          <a:bodyPr wrap="square" lIns="0" tIns="0" rIns="0" bIns="0" rtlCol="0" anchor="ctr"/>
-          <a:lstStyle/>
-          <a:p>
-            <a:pPr algn="ctr" indent="0" marL="0">
-              <a:buNone/>
-            </a:pPr>
-            <a:r>
-              <a:rPr lang="en-US" sz="1000" dirty="0">
-                <a:solidFill>
-                  <a:srgbClr val="333333"/>
-                </a:solidFill>
-                <a:latin typeface="Arial" pitchFamily="34" charset="0"/>
-                <a:ea typeface="Arial" pitchFamily="34" charset="-122"/>
-                <a:cs typeface="Arial" pitchFamily="34" charset="-120"/>
-              </a:rPr>
-              <a:t>+</a:t>
-            </a:r>
-            <a:endParaRPr lang="en-US" sz="1000" dirty="0"/>
+            <a:off x="2331720" y="9418320"/>
+            <a:ext cx="274320" cy="274320"/>
+          </a:xfrm>
+          <a:prstGeom prst="rect">
+            <a:avLst/>
+          </a:prstGeom>
+          <a:noFill/>
+          <a:ln/>
+        </p:spPr>
+        <p:txBody>
+          <a:bodyPr wrap="square" lIns="0" tIns="0" rIns="0" bIns="0" rtlCol="0" anchor="ctr"/>
+          <a:lstStyle/>
+          <a:p>
+            <a:pPr algn="ctr" indent="0" marL="0">
+              <a:buNone/>
+            </a:pPr>
+            <a:r>
+              <a:rPr lang="en-US" sz="1200" dirty="0">
+                <a:solidFill>
+                  <a:srgbClr val="000000"/>
+                </a:solidFill>
+                <a:latin typeface="Arial" pitchFamily="34" charset="0"/>
+                <a:ea typeface="Arial" pitchFamily="34" charset="-122"/>
+                <a:cs typeface="Arial" pitchFamily="34" charset="-120"/>
+              </a:rPr>
+              <a:t>+</a:t>
+            </a:r>
+            <a:endParaRPr lang="en-US" sz="1200" dirty="0"/>
           </a:p>
         </p:txBody>
       </p:sp>
@@ -2890,34 +2890,34 @@
         </p:nvSpPr>
         <p:spPr>
           <a:xfrm>
-            <a:off x="1874520" y="7360920"/>
-            <a:ext cx="274320" cy="274320"/>
-          </a:xfrm>
-          <a:prstGeom prst="rect">
-            <a:avLst/>
-          </a:prstGeom>
-          <a:noFill/>
-          <a:ln/>
-        </p:spPr>
-        <p:txBody>
-          <a:bodyPr wrap="square" lIns="0" tIns="0" rIns="0" bIns="0" rtlCol="0" anchor="ctr"/>
-          <a:lstStyle/>
-          <a:p>
-            <a:pPr algn="ctr" indent="0" marL="0">
-              <a:buNone/>
-            </a:pPr>
-            <a:r>
-              <a:rPr lang="en-US" sz="1000" dirty="0">
-                <a:solidFill>
-                  <a:srgbClr val="333333"/>
-                </a:solidFill>
-                <a:latin typeface="Arial" pitchFamily="34" charset="0"/>
-                <a:ea typeface="Arial" pitchFamily="34" charset="-122"/>
-                <a:cs typeface="Arial" pitchFamily="34" charset="-120"/>
-              </a:rPr>
-              <a:t>+</a:t>
-            </a:r>
-            <a:endParaRPr lang="en-US" sz="1000" dirty="0"/>
+            <a:off x="3886200" y="9418320"/>
+            <a:ext cx="274320" cy="274320"/>
+          </a:xfrm>
+          <a:prstGeom prst="rect">
+            <a:avLst/>
+          </a:prstGeom>
+          <a:noFill/>
+          <a:ln/>
+        </p:spPr>
+        <p:txBody>
+          <a:bodyPr wrap="square" lIns="0" tIns="0" rIns="0" bIns="0" rtlCol="0" anchor="ctr"/>
+          <a:lstStyle/>
+          <a:p>
+            <a:pPr algn="ctr" indent="0" marL="0">
+              <a:buNone/>
+            </a:pPr>
+            <a:r>
+              <a:rPr lang="en-US" sz="1200" dirty="0">
+                <a:solidFill>
+                  <a:srgbClr val="000000"/>
+                </a:solidFill>
+                <a:latin typeface="Arial" pitchFamily="34" charset="0"/>
+                <a:ea typeface="Arial" pitchFamily="34" charset="-122"/>
+                <a:cs typeface="Arial" pitchFamily="34" charset="-120"/>
+              </a:rPr>
+              <a:t>+</a:t>
+            </a:r>
+            <a:endParaRPr lang="en-US" sz="1200" dirty="0"/>
           </a:p>
         </p:txBody>
       </p:sp>
@@ -2929,34 +2929,34 @@
         </p:nvSpPr>
         <p:spPr>
           <a:xfrm>
-            <a:off x="2971800" y="7360920"/>
-            <a:ext cx="274320" cy="274320"/>
-          </a:xfrm>
-          <a:prstGeom prst="rect">
-            <a:avLst/>
-          </a:prstGeom>
-          <a:noFill/>
-          <a:ln/>
-        </p:spPr>
-        <p:txBody>
-          <a:bodyPr wrap="square" lIns="0" tIns="0" rIns="0" bIns="0" rtlCol="0" anchor="ctr"/>
-          <a:lstStyle/>
-          <a:p>
-            <a:pPr algn="ctr" indent="0" marL="0">
-              <a:buNone/>
-            </a:pPr>
-            <a:r>
-              <a:rPr lang="en-US" sz="1000" dirty="0">
-                <a:solidFill>
-                  <a:srgbClr val="333333"/>
-                </a:solidFill>
-                <a:latin typeface="Arial" pitchFamily="34" charset="0"/>
-                <a:ea typeface="Arial" pitchFamily="34" charset="-122"/>
-                <a:cs typeface="Arial" pitchFamily="34" charset="-120"/>
-              </a:rPr>
-              <a:t>+</a:t>
-            </a:r>
-            <a:endParaRPr lang="en-US" sz="1000" dirty="0"/>
+            <a:off x="5440680" y="9418320"/>
+            <a:ext cx="274320" cy="274320"/>
+          </a:xfrm>
+          <a:prstGeom prst="rect">
+            <a:avLst/>
+          </a:prstGeom>
+          <a:noFill/>
+          <a:ln/>
+        </p:spPr>
+        <p:txBody>
+          <a:bodyPr wrap="square" lIns="0" tIns="0" rIns="0" bIns="0" rtlCol="0" anchor="ctr"/>
+          <a:lstStyle/>
+          <a:p>
+            <a:pPr algn="ctr" indent="0" marL="0">
+              <a:buNone/>
+            </a:pPr>
+            <a:r>
+              <a:rPr lang="en-US" sz="1200" dirty="0">
+                <a:solidFill>
+                  <a:srgbClr val="000000"/>
+                </a:solidFill>
+                <a:latin typeface="Arial" pitchFamily="34" charset="0"/>
+                <a:ea typeface="Arial" pitchFamily="34" charset="-122"/>
+                <a:cs typeface="Arial" pitchFamily="34" charset="-120"/>
+              </a:rPr>
+              <a:t>+</a:t>
+            </a:r>
+            <a:endParaRPr lang="en-US" sz="1200" dirty="0"/>
           </a:p>
         </p:txBody>
       </p:sp>
@@ -2968,352 +2968,40 @@
         </p:nvSpPr>
         <p:spPr>
           <a:xfrm>
-            <a:off x="4069080" y="7360920"/>
-            <a:ext cx="274320" cy="274320"/>
-          </a:xfrm>
-          <a:prstGeom prst="rect">
-            <a:avLst/>
-          </a:prstGeom>
-          <a:noFill/>
-          <a:ln/>
-        </p:spPr>
-        <p:txBody>
-          <a:bodyPr wrap="square" lIns="0" tIns="0" rIns="0" bIns="0" rtlCol="0" anchor="ctr"/>
-          <a:lstStyle/>
-          <a:p>
-            <a:pPr algn="ctr" indent="0" marL="0">
-              <a:buNone/>
-            </a:pPr>
-            <a:r>
-              <a:rPr lang="en-US" sz="1000" dirty="0">
-                <a:solidFill>
-                  <a:srgbClr val="333333"/>
-                </a:solidFill>
-                <a:latin typeface="Arial" pitchFamily="34" charset="0"/>
-                <a:ea typeface="Arial" pitchFamily="34" charset="-122"/>
-                <a:cs typeface="Arial" pitchFamily="34" charset="-120"/>
-              </a:rPr>
-              <a:t>+</a:t>
-            </a:r>
-            <a:endParaRPr lang="en-US" sz="1000" dirty="0"/>
-          </a:p>
-        </p:txBody>
-      </p:sp>
-      <p:sp>
-        <p:nvSpPr>
-          <p:cNvPr id="42" name="Text 40"/>
-          <p:cNvSpPr/>
-          <p:nvPr/>
-        </p:nvSpPr>
-        <p:spPr>
-          <a:xfrm>
-            <a:off x="5166360" y="7360920"/>
-            <a:ext cx="274320" cy="274320"/>
-          </a:xfrm>
-          <a:prstGeom prst="rect">
-            <a:avLst/>
-          </a:prstGeom>
-          <a:noFill/>
-          <a:ln/>
-        </p:spPr>
-        <p:txBody>
-          <a:bodyPr wrap="square" lIns="0" tIns="0" rIns="0" bIns="0" rtlCol="0" anchor="ctr"/>
-          <a:lstStyle/>
-          <a:p>
-            <a:pPr algn="ctr" indent="0" marL="0">
-              <a:buNone/>
-            </a:pPr>
-            <a:r>
-              <a:rPr lang="en-US" sz="1000" dirty="0">
-                <a:solidFill>
-                  <a:srgbClr val="333333"/>
-                </a:solidFill>
-                <a:latin typeface="Arial" pitchFamily="34" charset="0"/>
-                <a:ea typeface="Arial" pitchFamily="34" charset="-122"/>
-                <a:cs typeface="Arial" pitchFamily="34" charset="-120"/>
-              </a:rPr>
-              <a:t>+</a:t>
-            </a:r>
-            <a:endParaRPr lang="en-US" sz="1000" dirty="0"/>
-          </a:p>
-        </p:txBody>
-      </p:sp>
-      <p:sp>
-        <p:nvSpPr>
-          <p:cNvPr id="43" name="Text 41"/>
-          <p:cNvSpPr/>
-          <p:nvPr/>
-        </p:nvSpPr>
-        <p:spPr>
-          <a:xfrm>
-            <a:off x="6263640" y="7360920"/>
-            <a:ext cx="274320" cy="274320"/>
-          </a:xfrm>
-          <a:prstGeom prst="rect">
-            <a:avLst/>
-          </a:prstGeom>
-          <a:noFill/>
-          <a:ln/>
-        </p:spPr>
-        <p:txBody>
-          <a:bodyPr wrap="square" lIns="0" tIns="0" rIns="0" bIns="0" rtlCol="0" anchor="ctr"/>
-          <a:lstStyle/>
-          <a:p>
-            <a:pPr algn="ctr" indent="0" marL="0">
-              <a:buNone/>
-            </a:pPr>
-            <a:r>
-              <a:rPr lang="en-US" sz="1000" dirty="0">
-                <a:solidFill>
-                  <a:srgbClr val="333333"/>
-                </a:solidFill>
-                <a:latin typeface="Arial" pitchFamily="34" charset="0"/>
-                <a:ea typeface="Arial" pitchFamily="34" charset="-122"/>
-                <a:cs typeface="Arial" pitchFamily="34" charset="-120"/>
-              </a:rPr>
-              <a:t>+</a:t>
-            </a:r>
-            <a:endParaRPr lang="en-US" sz="1000" dirty="0"/>
-          </a:p>
-        </p:txBody>
-      </p:sp>
-      <p:sp>
-        <p:nvSpPr>
-          <p:cNvPr id="44" name="Text 42"/>
-          <p:cNvSpPr/>
-          <p:nvPr/>
-        </p:nvSpPr>
-        <p:spPr>
-          <a:xfrm>
-            <a:off x="777240" y="8458200"/>
-            <a:ext cx="274320" cy="274320"/>
-          </a:xfrm>
-          <a:prstGeom prst="rect">
-            <a:avLst/>
-          </a:prstGeom>
-          <a:noFill/>
-          <a:ln/>
-        </p:spPr>
-        <p:txBody>
-          <a:bodyPr wrap="square" lIns="0" tIns="0" rIns="0" bIns="0" rtlCol="0" anchor="ctr"/>
-          <a:lstStyle/>
-          <a:p>
-            <a:pPr algn="ctr" indent="0" marL="0">
-              <a:buNone/>
-            </a:pPr>
-            <a:r>
-              <a:rPr lang="en-US" sz="1000" dirty="0">
-                <a:solidFill>
-                  <a:srgbClr val="333333"/>
-                </a:solidFill>
-                <a:latin typeface="Arial" pitchFamily="34" charset="0"/>
-                <a:ea typeface="Arial" pitchFamily="34" charset="-122"/>
-                <a:cs typeface="Arial" pitchFamily="34" charset="-120"/>
-              </a:rPr>
-              <a:t>+</a:t>
-            </a:r>
-            <a:endParaRPr lang="en-US" sz="1000" dirty="0"/>
-          </a:p>
-        </p:txBody>
-      </p:sp>
-      <p:sp>
-        <p:nvSpPr>
-          <p:cNvPr id="45" name="Text 43"/>
-          <p:cNvSpPr/>
-          <p:nvPr/>
-        </p:nvSpPr>
-        <p:spPr>
-          <a:xfrm>
-            <a:off x="1874520" y="8458200"/>
-            <a:ext cx="274320" cy="274320"/>
-          </a:xfrm>
-          <a:prstGeom prst="rect">
-            <a:avLst/>
-          </a:prstGeom>
-          <a:noFill/>
-          <a:ln/>
-        </p:spPr>
-        <p:txBody>
-          <a:bodyPr wrap="square" lIns="0" tIns="0" rIns="0" bIns="0" rtlCol="0" anchor="ctr"/>
-          <a:lstStyle/>
-          <a:p>
-            <a:pPr algn="ctr" indent="0" marL="0">
-              <a:buNone/>
-            </a:pPr>
-            <a:r>
-              <a:rPr lang="en-US" sz="1000" dirty="0">
-                <a:solidFill>
-                  <a:srgbClr val="333333"/>
-                </a:solidFill>
-                <a:latin typeface="Arial" pitchFamily="34" charset="0"/>
-                <a:ea typeface="Arial" pitchFamily="34" charset="-122"/>
-                <a:cs typeface="Arial" pitchFamily="34" charset="-120"/>
-              </a:rPr>
-              <a:t>+</a:t>
-            </a:r>
-            <a:endParaRPr lang="en-US" sz="1000" dirty="0"/>
-          </a:p>
-        </p:txBody>
-      </p:sp>
-      <p:sp>
-        <p:nvSpPr>
-          <p:cNvPr id="46" name="Text 44"/>
-          <p:cNvSpPr/>
-          <p:nvPr/>
-        </p:nvSpPr>
-        <p:spPr>
-          <a:xfrm>
-            <a:off x="2971800" y="8458200"/>
-            <a:ext cx="274320" cy="274320"/>
-          </a:xfrm>
-          <a:prstGeom prst="rect">
-            <a:avLst/>
-          </a:prstGeom>
-          <a:noFill/>
-          <a:ln/>
-        </p:spPr>
-        <p:txBody>
-          <a:bodyPr wrap="square" lIns="0" tIns="0" rIns="0" bIns="0" rtlCol="0" anchor="ctr"/>
-          <a:lstStyle/>
-          <a:p>
-            <a:pPr algn="ctr" indent="0" marL="0">
-              <a:buNone/>
-            </a:pPr>
-            <a:r>
-              <a:rPr lang="en-US" sz="1000" dirty="0">
-                <a:solidFill>
-                  <a:srgbClr val="333333"/>
-                </a:solidFill>
-                <a:latin typeface="Arial" pitchFamily="34" charset="0"/>
-                <a:ea typeface="Arial" pitchFamily="34" charset="-122"/>
-                <a:cs typeface="Arial" pitchFamily="34" charset="-120"/>
-              </a:rPr>
-              <a:t>+</a:t>
-            </a:r>
-            <a:endParaRPr lang="en-US" sz="1000" dirty="0"/>
-          </a:p>
-        </p:txBody>
-      </p:sp>
-      <p:sp>
-        <p:nvSpPr>
-          <p:cNvPr id="47" name="Text 45"/>
-          <p:cNvSpPr/>
-          <p:nvPr/>
-        </p:nvSpPr>
-        <p:spPr>
-          <a:xfrm>
-            <a:off x="4069080" y="8458200"/>
-            <a:ext cx="274320" cy="274320"/>
-          </a:xfrm>
-          <a:prstGeom prst="rect">
-            <a:avLst/>
-          </a:prstGeom>
-          <a:noFill/>
-          <a:ln/>
-        </p:spPr>
-        <p:txBody>
-          <a:bodyPr wrap="square" lIns="0" tIns="0" rIns="0" bIns="0" rtlCol="0" anchor="ctr"/>
-          <a:lstStyle/>
-          <a:p>
-            <a:pPr algn="ctr" indent="0" marL="0">
-              <a:buNone/>
-            </a:pPr>
-            <a:r>
-              <a:rPr lang="en-US" sz="1000" dirty="0">
-                <a:solidFill>
-                  <a:srgbClr val="333333"/>
-                </a:solidFill>
-                <a:latin typeface="Arial" pitchFamily="34" charset="0"/>
-                <a:ea typeface="Arial" pitchFamily="34" charset="-122"/>
-                <a:cs typeface="Arial" pitchFamily="34" charset="-120"/>
-              </a:rPr>
-              <a:t>+</a:t>
-            </a:r>
-            <a:endParaRPr lang="en-US" sz="1000" dirty="0"/>
-          </a:p>
-        </p:txBody>
-      </p:sp>
-      <p:sp>
-        <p:nvSpPr>
-          <p:cNvPr id="48" name="Text 46"/>
-          <p:cNvSpPr/>
-          <p:nvPr/>
-        </p:nvSpPr>
-        <p:spPr>
-          <a:xfrm>
-            <a:off x="5166360" y="8458200"/>
-            <a:ext cx="274320" cy="274320"/>
-          </a:xfrm>
-          <a:prstGeom prst="rect">
-            <a:avLst/>
-          </a:prstGeom>
-          <a:noFill/>
-          <a:ln/>
-        </p:spPr>
-        <p:txBody>
-          <a:bodyPr wrap="square" lIns="0" tIns="0" rIns="0" bIns="0" rtlCol="0" anchor="ctr"/>
-          <a:lstStyle/>
-          <a:p>
-            <a:pPr algn="ctr" indent="0" marL="0">
-              <a:buNone/>
-            </a:pPr>
-            <a:r>
-              <a:rPr lang="en-US" sz="1000" dirty="0">
-                <a:solidFill>
-                  <a:srgbClr val="333333"/>
-                </a:solidFill>
-                <a:latin typeface="Arial" pitchFamily="34" charset="0"/>
-                <a:ea typeface="Arial" pitchFamily="34" charset="-122"/>
-                <a:cs typeface="Arial" pitchFamily="34" charset="-120"/>
-              </a:rPr>
-              <a:t>+</a:t>
-            </a:r>
-            <a:endParaRPr lang="en-US" sz="1000" dirty="0"/>
-          </a:p>
-        </p:txBody>
-      </p:sp>
-      <p:sp>
-        <p:nvSpPr>
-          <p:cNvPr id="49" name="Text 47"/>
-          <p:cNvSpPr/>
-          <p:nvPr/>
-        </p:nvSpPr>
-        <p:spPr>
-          <a:xfrm>
-            <a:off x="6263640" y="8458200"/>
-            <a:ext cx="274320" cy="274320"/>
-          </a:xfrm>
-          <a:prstGeom prst="rect">
-            <a:avLst/>
-          </a:prstGeom>
-          <a:noFill/>
-          <a:ln/>
-        </p:spPr>
-        <p:txBody>
-          <a:bodyPr wrap="square" lIns="0" tIns="0" rIns="0" bIns="0" rtlCol="0" anchor="ctr"/>
-          <a:lstStyle/>
-          <a:p>
-            <a:pPr algn="ctr" indent="0" marL="0">
-              <a:buNone/>
-            </a:pPr>
-            <a:r>
-              <a:rPr lang="en-US" sz="1000" dirty="0">
-                <a:solidFill>
-                  <a:srgbClr val="333333"/>
-                </a:solidFill>
-                <a:latin typeface="Arial" pitchFamily="34" charset="0"/>
-                <a:ea typeface="Arial" pitchFamily="34" charset="-122"/>
-                <a:cs typeface="Arial" pitchFamily="34" charset="-120"/>
-              </a:rPr>
-              <a:t>+</a:t>
-            </a:r>
-            <a:endParaRPr lang="en-US" sz="1000" dirty="0"/>
+            <a:off x="6995160" y="9418320"/>
+            <a:ext cx="274320" cy="274320"/>
+          </a:xfrm>
+          <a:prstGeom prst="rect">
+            <a:avLst/>
+          </a:prstGeom>
+          <a:noFill/>
+          <a:ln/>
+        </p:spPr>
+        <p:txBody>
+          <a:bodyPr wrap="square" lIns="0" tIns="0" rIns="0" bIns="0" rtlCol="0" anchor="ctr"/>
+          <a:lstStyle/>
+          <a:p>
+            <a:pPr algn="ctr" indent="0" marL="0">
+              <a:buNone/>
+            </a:pPr>
+            <a:r>
+              <a:rPr lang="en-US" sz="1200" dirty="0">
+                <a:solidFill>
+                  <a:srgbClr val="000000"/>
+                </a:solidFill>
+                <a:latin typeface="Arial" pitchFamily="34" charset="0"/>
+                <a:ea typeface="Arial" pitchFamily="34" charset="-122"/>
+                <a:cs typeface="Arial" pitchFamily="34" charset="-120"/>
+              </a:rPr>
+              <a:t>+</a:t>
+            </a:r>
+            <a:endParaRPr lang="en-US" sz="1200" dirty="0"/>
           </a:p>
         </p:txBody>
       </p:sp>
       <p:pic>
         <p:nvPicPr>
-          <p:cNvPr id="50" name="Image 0" descr="/home/user/data-manipulation-exercises/.claude/skills/brand-guidelines/assets/textures/arrow-lime.png">    </p:cNvPr>
+          <p:cNvPr id="42" name="Image 0" descr="/home/user/data-manipulation-exercises/.claude/skills/brand-guidelines/assets/textures/globe-black.png">    </p:cNvPr>
           <p:cNvPicPr>
             <a:picLocks noChangeAspect="1"/>
           </p:cNvPicPr>
@@ -3326,18 +3014,74 @@
           </a:stretch>
         </p:blipFill>
         <p:spPr>
-          <a:xfrm rot="16200000">
-            <a:off x="320040" y="320040"/>
-            <a:ext cx="292608" cy="292608"/>
+          <a:xfrm>
+            <a:off x="6995160" y="685800"/>
+            <a:ext cx="502920" cy="502920"/>
           </a:xfrm>
           <a:prstGeom prst="rect">
             <a:avLst/>
           </a:prstGeom>
         </p:spPr>
       </p:pic>
+      <p:sp>
+        <p:nvSpPr>
+          <p:cNvPr id="43" name="Text 40"/>
+          <p:cNvSpPr/>
+          <p:nvPr/>
+        </p:nvSpPr>
+        <p:spPr>
+          <a:xfrm>
+            <a:off x="731520" y="640080"/>
+            <a:ext cx="5486400" cy="1463040"/>
+          </a:xfrm>
+          <a:prstGeom prst="rect">
+            <a:avLst/>
+          </a:prstGeom>
+          <a:noFill/>
+          <a:ln/>
+        </p:spPr>
+        <p:txBody>
+          <a:bodyPr wrap="square" lIns="0" tIns="0" rIns="0" bIns="0" rtlCol="0" anchor="ctr"/>
+          <a:lstStyle/>
+          <a:p>
+            <a:pPr algn="l" indent="0" marL="0">
+              <a:buNone/>
+            </a:pPr>
+            <a:r>
+              <a:rPr lang="en-US" sz="3200" b="1" i="1" dirty="0">
+                <a:solidFill>
+                  <a:srgbClr val="000000"/>
+                </a:solidFill>
+                <a:latin typeface="Libre Baskerville" pitchFamily="34" charset="0"/>
+                <a:ea typeface="Libre Baskerville" pitchFamily="34" charset="-122"/>
+                <a:cs typeface="Libre Baskerville" pitchFamily="34" charset="-120"/>
+              </a:rPr>
+              <a:t>CONSUMER</a:t>
+            </a:r>
+            <a:endParaRPr lang="en-US" sz="3200" dirty="0"/>
+          </a:p>
+          <a:p>
+            <a:pPr algn="l" indent="0" marL="0">
+              <a:buNone/>
+            </a:pPr>
+            <a:r>
+              <a:rPr lang="en-US" sz="3200" b="1" i="1" dirty="0">
+                <a:solidFill>
+                  <a:srgbClr val="000000"/>
+                </a:solidFill>
+                <a:latin typeface="Libre Baskerville" pitchFamily="34" charset="0"/>
+                <a:ea typeface="Libre Baskerville" pitchFamily="34" charset="-122"/>
+                <a:cs typeface="Libre Baskerville" pitchFamily="34" charset="-120"/>
+              </a:rPr>
+              <a:t>TRENDS</a:t>
+            </a:r>
+            <a:endParaRPr lang="en-US" sz="3200" dirty="0"/>
+          </a:p>
+        </p:txBody>
+      </p:sp>
       <p:pic>
         <p:nvPicPr>
-          <p:cNvPr id="51" name="Image 1" descr="/home/user/data-manipulation-exercises/.claude/skills/brand-guidelines/assets/textures/arrow-lime.png">    </p:cNvPr>
+          <p:cNvPr id="44" name="Image 1" descr="/home/user/data-manipulation-exercises/.claude/skills/arpejo-report-desdobramento/assets/arpejo-report-logo-all-black.png">    </p:cNvPr>
           <p:cNvPicPr>
             <a:picLocks noChangeAspect="1"/>
           </p:cNvPicPr>
@@ -3351,8 +3095,8 @@
         </p:blipFill>
         <p:spPr>
           <a:xfrm>
-            <a:off x="7616952" y="320040"/>
-            <a:ext cx="292608" cy="292608"/>
+            <a:off x="1417320" y="4206240"/>
+            <a:ext cx="5394960" cy="1617194"/>
           </a:xfrm>
           <a:prstGeom prst="rect">
             <a:avLst/>
@@ -3361,7 +3105,7 @@
       </p:pic>
       <p:pic>
         <p:nvPicPr>
-          <p:cNvPr id="52" name="Image 2" descr="/home/user/data-manipulation-exercises/.claude/skills/brand-guidelines/assets/textures/arrow-lime.png">    </p:cNvPr>
+          <p:cNvPr id="45" name="Image 2" descr="/home/user/data-manipulation-exercises/.claude/skills/brand-guidelines/assets/textures/arrow-black.png">    </p:cNvPr>
           <p:cNvPicPr>
             <a:picLocks noChangeAspect="1"/>
           </p:cNvPicPr>
@@ -3374,8 +3118,8 @@
           </a:stretch>
         </p:blipFill>
         <p:spPr>
-          <a:xfrm rot="10800000">
-            <a:off x="320040" y="9674352"/>
+          <a:xfrm>
+            <a:off x="731520" y="8805672"/>
             <a:ext cx="292608" cy="292608"/>
           </a:xfrm>
           <a:prstGeom prst="rect">
@@ -3383,188 +3127,62 @@
           </a:prstGeom>
         </p:spPr>
       </p:pic>
-      <p:pic>
-        <p:nvPicPr>
-          <p:cNvPr id="53" name="Image 3" descr="/home/user/data-manipulation-exercises/.claude/skills/brand-guidelines/assets/textures/arrow-lime.png">    </p:cNvPr>
-          <p:cNvPicPr>
-            <a:picLocks noChangeAspect="1"/>
-          </p:cNvPicPr>
-          <p:nvPr/>
-        </p:nvPicPr>
-        <p:blipFill>
-          <a:blip r:embed="rId4"/>
-          <a:stretch>
-            <a:fillRect/>
-          </a:stretch>
-        </p:blipFill>
-        <p:spPr>
-          <a:xfrm rot="5400000">
-            <a:off x="7616952" y="9674352"/>
-            <a:ext cx="292608" cy="292608"/>
-          </a:xfrm>
-          <a:prstGeom prst="rect">
-            <a:avLst/>
-          </a:prstGeom>
-        </p:spPr>
-      </p:pic>
-      <p:sp>
-        <p:nvSpPr>
-          <p:cNvPr id="54" name="Text 48"/>
-          <p:cNvSpPr/>
-          <p:nvPr/>
-        </p:nvSpPr>
-        <p:spPr>
-          <a:xfrm>
-            <a:off x="731520" y="3291840"/>
-            <a:ext cx="6766560" cy="2011680"/>
-          </a:xfrm>
-          <a:prstGeom prst="rect">
-            <a:avLst/>
-          </a:prstGeom>
-          <a:noFill/>
-          <a:ln/>
-        </p:spPr>
-        <p:txBody>
-          <a:bodyPr wrap="square" lIns="0" tIns="0" rIns="0" bIns="0" rtlCol="0" anchor="ctr"/>
+      <p:sp>
+        <p:nvSpPr>
+          <p:cNvPr id="46" name="Text 41"/>
+          <p:cNvSpPr/>
+          <p:nvPr/>
+        </p:nvSpPr>
+        <p:spPr>
+          <a:xfrm>
+            <a:off x="1234440" y="8732520"/>
+            <a:ext cx="6217920" cy="822960"/>
+          </a:xfrm>
+          <a:prstGeom prst="rect">
+            <a:avLst/>
+          </a:prstGeom>
+          <a:noFill/>
+          <a:ln/>
+        </p:spPr>
+        <p:txBody>
+          <a:bodyPr wrap="square" lIns="0" tIns="0" rIns="0" bIns="0" rtlCol="0" anchor="t"/>
           <a:lstStyle/>
           <a:p>
             <a:pPr algn="l" indent="0" marL="0">
               <a:buNone/>
             </a:pPr>
             <a:r>
-              <a:rPr lang="en-US" sz="4400" b="1" i="1" dirty="0">
-                <a:solidFill>
-                  <a:srgbClr val="FFFFFF"/>
-                </a:solidFill>
-                <a:latin typeface="Libre Baskerville" pitchFamily="34" charset="0"/>
-                <a:ea typeface="Libre Baskerville" pitchFamily="34" charset="-122"/>
-                <a:cs typeface="Libre Baskerville" pitchFamily="34" charset="-120"/>
-              </a:rPr>
-              <a:t>CONSUMER</a:t>
-            </a:r>
-            <a:endParaRPr lang="en-US" sz="4400" dirty="0"/>
+              <a:rPr lang="en-US" sz="1300" dirty="0">
+                <a:solidFill>
+                  <a:srgbClr val="000000"/>
+                </a:solidFill>
+                <a:latin typeface="JetBrains Mono" pitchFamily="34" charset="0"/>
+                <a:ea typeface="JetBrains Mono" pitchFamily="34" charset="-122"/>
+                <a:cs typeface="JetBrains Mono" pitchFamily="34" charset="-120"/>
+              </a:rPr>
+              <a:t>As principais tendências</a:t>
+            </a:r>
+            <a:endParaRPr lang="en-US" sz="1300" dirty="0"/>
           </a:p>
           <a:p>
             <a:pPr algn="l" indent="0" marL="0">
               <a:buNone/>
             </a:pPr>
             <a:r>
-              <a:rPr lang="en-US" sz="4400" b="1" i="1" dirty="0">
-                <a:solidFill>
-                  <a:srgbClr val="FFFFFF"/>
-                </a:solidFill>
-                <a:latin typeface="Libre Baskerville" pitchFamily="34" charset="0"/>
-                <a:ea typeface="Libre Baskerville" pitchFamily="34" charset="-122"/>
-                <a:cs typeface="Libre Baskerville" pitchFamily="34" charset="-120"/>
-              </a:rPr>
-              <a:t>TRENDS</a:t>
-            </a:r>
-            <a:endParaRPr lang="en-US" sz="4400" dirty="0"/>
-          </a:p>
-        </p:txBody>
-      </p:sp>
-      <p:sp>
-        <p:nvSpPr>
-          <p:cNvPr id="55" name="Text 49"/>
-          <p:cNvSpPr/>
-          <p:nvPr/>
-        </p:nvSpPr>
-        <p:spPr>
-          <a:xfrm>
-            <a:off x="731520" y="5577840"/>
-            <a:ext cx="3657600" cy="365760"/>
-          </a:xfrm>
-          <a:prstGeom prst="rect">
-            <a:avLst/>
-          </a:prstGeom>
-          <a:noFill/>
-          <a:ln/>
-        </p:spPr>
-        <p:txBody>
-          <a:bodyPr wrap="square" lIns="0" tIns="0" rIns="0" bIns="0" rtlCol="0" anchor="ctr"/>
-          <a:lstStyle/>
-          <a:p>
-            <a:pPr indent="0" marL="0">
-              <a:buNone/>
-            </a:pPr>
-            <a:r>
-              <a:rPr lang="en-US" sz="1600" i="1" dirty="0">
-                <a:solidFill>
-                  <a:srgbClr val="DAFF94"/>
-                </a:solidFill>
-                <a:latin typeface="Libre Baskerville" pitchFamily="34" charset="0"/>
-                <a:ea typeface="Libre Baskerville" pitchFamily="34" charset="-122"/>
-                <a:cs typeface="Libre Baskerville" pitchFamily="34" charset="-120"/>
-              </a:rPr>
-              <a:t>edição</a:t>
-            </a:r>
-            <a:endParaRPr lang="en-US" sz="1600" dirty="0"/>
-          </a:p>
-        </p:txBody>
-      </p:sp>
-      <p:sp>
-        <p:nvSpPr>
-          <p:cNvPr id="56" name="Text 50"/>
-          <p:cNvSpPr/>
-          <p:nvPr/>
-        </p:nvSpPr>
-        <p:spPr>
-          <a:xfrm>
-            <a:off x="731520" y="5943600"/>
-            <a:ext cx="5486400" cy="640080"/>
-          </a:xfrm>
-          <a:prstGeom prst="rect">
-            <a:avLst/>
-          </a:prstGeom>
-          <a:noFill/>
-          <a:ln/>
-        </p:spPr>
-        <p:txBody>
-          <a:bodyPr wrap="square" lIns="0" tIns="0" rIns="0" bIns="0" rtlCol="0" anchor="ctr"/>
-          <a:lstStyle/>
-          <a:p>
-            <a:pPr indent="0" marL="0">
-              <a:buNone/>
-            </a:pPr>
-            <a:r>
-              <a:rPr lang="en-US" sz="3000" b="1" i="1" dirty="0">
-                <a:solidFill>
-                  <a:srgbClr val="DAFF94"/>
-                </a:solidFill>
-                <a:latin typeface="Libre Baskerville" pitchFamily="34" charset="0"/>
-                <a:ea typeface="Libre Baskerville" pitchFamily="34" charset="-122"/>
-                <a:cs typeface="Libre Baskerville" pitchFamily="34" charset="-120"/>
-              </a:rPr>
-              <a:t>AGOSTO_26</a:t>
-            </a:r>
-            <a:endParaRPr lang="en-US" sz="3000" dirty="0"/>
-          </a:p>
-        </p:txBody>
-      </p:sp>
-      <p:pic>
-        <p:nvPicPr>
-          <p:cNvPr id="57" name="Image 4" descr="/home/user/data-manipulation-exercises/.claude/skills/arpejo-report-desdobramento/assets/arpejo-report-logo.png">    </p:cNvPr>
-          <p:cNvPicPr>
-            <a:picLocks noChangeAspect="1"/>
-          </p:cNvPicPr>
-          <p:nvPr/>
-        </p:nvPicPr>
-        <p:blipFill>
-          <a:blip r:embed="rId5"/>
-          <a:stretch>
-            <a:fillRect/>
-          </a:stretch>
-        </p:blipFill>
-        <p:spPr>
-          <a:xfrm>
-            <a:off x="731520" y="8915400"/>
-            <a:ext cx="2377440" cy="712662"/>
-          </a:xfrm>
-          <a:prstGeom prst="rect">
-            <a:avLst/>
-          </a:prstGeom>
-        </p:spPr>
-      </p:pic>
+              <a:rPr lang="en-US" sz="1300" dirty="0">
+                <a:solidFill>
+                  <a:srgbClr val="000000"/>
+                </a:solidFill>
+                <a:latin typeface="JetBrains Mono" pitchFamily="34" charset="0"/>
+                <a:ea typeface="JetBrains Mono" pitchFamily="34" charset="-122"/>
+                <a:cs typeface="JetBrains Mono" pitchFamily="34" charset="-120"/>
+              </a:rPr>
+              <a:t>de agosto, no Report.</a:t>
+            </a:r>
+            <a:endParaRPr lang="en-US" sz="1300" dirty="0"/>
+          </a:p>
+        </p:txBody>
+      </p:sp>
     </p:spTree>
   </p:cSld>
   <p:clrMapOvr>
@@ -3597,9 +3215,165 @@
           <a:chExt cx="0" cy="0"/>
         </a:xfrm>
       </p:grpSpPr>
+      <p:sp>
+        <p:nvSpPr>
+          <p:cNvPr id="2" name="Text 0"/>
+          <p:cNvSpPr/>
+          <p:nvPr/>
+        </p:nvSpPr>
+        <p:spPr>
+          <a:xfrm>
+            <a:off x="411480" y="9349740"/>
+            <a:ext cx="274320" cy="274320"/>
+          </a:xfrm>
+          <a:prstGeom prst="rect">
+            <a:avLst/>
+          </a:prstGeom>
+          <a:noFill/>
+          <a:ln/>
+        </p:spPr>
+        <p:txBody>
+          <a:bodyPr wrap="square" lIns="0" tIns="0" rIns="0" bIns="0" rtlCol="0" anchor="ctr"/>
+          <a:lstStyle/>
+          <a:p>
+            <a:pPr algn="ctr" indent="0" marL="0">
+              <a:buNone/>
+            </a:pPr>
+            <a:r>
+              <a:rPr lang="en-US" sz="1300" dirty="0">
+                <a:solidFill>
+                  <a:srgbClr val="333333"/>
+                </a:solidFill>
+                <a:latin typeface="Arial" pitchFamily="34" charset="0"/>
+                <a:ea typeface="Arial" pitchFamily="34" charset="-122"/>
+                <a:cs typeface="Arial" pitchFamily="34" charset="-120"/>
+              </a:rPr>
+              <a:t>+</a:t>
+            </a:r>
+            <a:endParaRPr lang="en-US" sz="1300" dirty="0"/>
+          </a:p>
+        </p:txBody>
+      </p:sp>
+      <p:sp>
+        <p:nvSpPr>
+          <p:cNvPr id="3" name="Text 1"/>
+          <p:cNvSpPr/>
+          <p:nvPr/>
+        </p:nvSpPr>
+        <p:spPr>
+          <a:xfrm>
+            <a:off x="2011680" y="9349740"/>
+            <a:ext cx="274320" cy="274320"/>
+          </a:xfrm>
+          <a:prstGeom prst="rect">
+            <a:avLst/>
+          </a:prstGeom>
+          <a:noFill/>
+          <a:ln/>
+        </p:spPr>
+        <p:txBody>
+          <a:bodyPr wrap="square" lIns="0" tIns="0" rIns="0" bIns="0" rtlCol="0" anchor="ctr"/>
+          <a:lstStyle/>
+          <a:p>
+            <a:pPr algn="ctr" indent="0" marL="0">
+              <a:buNone/>
+            </a:pPr>
+            <a:r>
+              <a:rPr lang="en-US" sz="1300" dirty="0">
+                <a:solidFill>
+                  <a:srgbClr val="333333"/>
+                </a:solidFill>
+                <a:latin typeface="Arial" pitchFamily="34" charset="0"/>
+                <a:ea typeface="Arial" pitchFamily="34" charset="-122"/>
+                <a:cs typeface="Arial" pitchFamily="34" charset="-120"/>
+              </a:rPr>
+              <a:t>+</a:t>
+            </a:r>
+            <a:endParaRPr lang="en-US" sz="1300" dirty="0"/>
+          </a:p>
+        </p:txBody>
+      </p:sp>
+      <p:sp>
+        <p:nvSpPr>
+          <p:cNvPr id="4" name="Text 2"/>
+          <p:cNvSpPr/>
+          <p:nvPr/>
+        </p:nvSpPr>
+        <p:spPr>
+          <a:xfrm>
+            <a:off x="3611880" y="9349740"/>
+            <a:ext cx="274320" cy="274320"/>
+          </a:xfrm>
+          <a:prstGeom prst="rect">
+            <a:avLst/>
+          </a:prstGeom>
+          <a:noFill/>
+          <a:ln/>
+        </p:spPr>
+        <p:txBody>
+          <a:bodyPr wrap="square" lIns="0" tIns="0" rIns="0" bIns="0" rtlCol="0" anchor="ctr"/>
+          <a:lstStyle/>
+          <a:p>
+            <a:pPr algn="ctr" indent="0" marL="0">
+              <a:buNone/>
+            </a:pPr>
+            <a:r>
+              <a:rPr lang="en-US" sz="1300" dirty="0">
+                <a:solidFill>
+                  <a:srgbClr val="333333"/>
+                </a:solidFill>
+                <a:latin typeface="Arial" pitchFamily="34" charset="0"/>
+                <a:ea typeface="Arial" pitchFamily="34" charset="-122"/>
+                <a:cs typeface="Arial" pitchFamily="34" charset="-120"/>
+              </a:rPr>
+              <a:t>+</a:t>
+            </a:r>
+            <a:endParaRPr lang="en-US" sz="1300" dirty="0"/>
+          </a:p>
+        </p:txBody>
+      </p:sp>
+      <p:sp>
+        <p:nvSpPr>
+          <p:cNvPr id="5" name="Text 3"/>
+          <p:cNvSpPr/>
+          <p:nvPr/>
+        </p:nvSpPr>
+        <p:spPr>
+          <a:xfrm>
+            <a:off x="5212080" y="9349740"/>
+            <a:ext cx="274320" cy="274320"/>
+          </a:xfrm>
+          <a:prstGeom prst="rect">
+            <a:avLst/>
+          </a:prstGeom>
+          <a:noFill/>
+          <a:ln/>
+        </p:spPr>
+        <p:txBody>
+          <a:bodyPr wrap="square" lIns="0" tIns="0" rIns="0" bIns="0" rtlCol="0" anchor="ctr"/>
+          <a:lstStyle/>
+          <a:p>
+            <a:pPr algn="ctr" indent="0" marL="0">
+              <a:buNone/>
+            </a:pPr>
+            <a:r>
+              <a:rPr lang="en-US" sz="1300" dirty="0">
+                <a:solidFill>
+                  <a:srgbClr val="333333"/>
+                </a:solidFill>
+                <a:latin typeface="Arial" pitchFamily="34" charset="0"/>
+                <a:ea typeface="Arial" pitchFamily="34" charset="-122"/>
+                <a:cs typeface="Arial" pitchFamily="34" charset="-120"/>
+              </a:rPr>
+              <a:t>+</a:t>
+            </a:r>
+            <a:endParaRPr lang="en-US" sz="1300" dirty="0"/>
+          </a:p>
+        </p:txBody>
+      </p:sp>
       <p:pic>
         <p:nvPicPr>
-          <p:cNvPr id="2" name="Image 0" descr="/tmp/claude-0/-home-user-data-manipulation-exercises/f19acac8-ccb4-5197-8e49-c3b6029ad477/scratchpad/report-images/final/ig-hiper-realidade.jpg">    </p:cNvPr>
+          <p:cNvPr id="6" name="Image 0" descr="/home/user/data-manipulation-exercises/.claude/skills/brand-guidelines/assets/textures/globe-lime.png">    </p:cNvPr>
           <p:cNvPicPr>
             <a:picLocks noChangeAspect="1"/>
           </p:cNvPicPr>
@@ -3607,13 +3381,14 @@
         </p:nvPicPr>
         <p:blipFill>
           <a:blip r:embed="rId1"/>
-          <a:srcRect l="0" r="0" t="0" b="0"/>
-          <a:stretch/>
+          <a:stretch>
+            <a:fillRect/>
+          </a:stretch>
         </p:blipFill>
         <p:spPr>
           <a:xfrm>
-            <a:off x="0" y="4937760"/>
-            <a:ext cx="8229600" cy="5349240"/>
+            <a:off x="7315200" y="9235440"/>
+            <a:ext cx="502920" cy="502920"/>
           </a:xfrm>
           <a:prstGeom prst="rect">
             <a:avLst/>
@@ -3622,14 +3397,36 @@
       </p:pic>
       <p:sp>
         <p:nvSpPr>
-          <p:cNvPr id="3" name="Text 0"/>
-          <p:cNvSpPr/>
-          <p:nvPr/>
-        </p:nvSpPr>
-        <p:spPr>
-          <a:xfrm>
-            <a:off x="365760" y="228600"/>
-            <a:ext cx="1828800" cy="274320"/>
+          <p:cNvPr id="7" name="Shape 4"/>
+          <p:cNvSpPr/>
+          <p:nvPr/>
+        </p:nvSpPr>
+        <p:spPr>
+          <a:xfrm>
+            <a:off x="411480" y="365760"/>
+            <a:ext cx="7406640" cy="8293608"/>
+          </a:xfrm>
+          <a:prstGeom prst="roundRect">
+            <a:avLst>
+              <a:gd name="adj" fmla="val 3086"/>
+            </a:avLst>
+          </a:prstGeom>
+          <a:solidFill>
+            <a:srgbClr val="000000"/>
+          </a:solidFill>
+          <a:ln/>
+        </p:spPr>
+      </p:sp>
+      <p:sp>
+        <p:nvSpPr>
+          <p:cNvPr id="8" name="Text 5"/>
+          <p:cNvSpPr/>
+          <p:nvPr/>
+        </p:nvSpPr>
+        <p:spPr>
+          <a:xfrm>
+            <a:off x="731520" y="640080"/>
+            <a:ext cx="6766560" cy="502920"/>
           </a:xfrm>
           <a:prstGeom prst="rect">
             <a:avLst/>
@@ -3645,46 +3442,7 @@
               <a:buNone/>
             </a:pPr>
             <a:r>
-              <a:rPr lang="en-US" sz="1000" b="1" dirty="0">
-                <a:solidFill>
-                  <a:srgbClr val="DAFF94"/>
-                </a:solidFill>
-                <a:latin typeface="JetBrains Mono" pitchFamily="34" charset="0"/>
-                <a:ea typeface="JetBrains Mono" pitchFamily="34" charset="-122"/>
-                <a:cs typeface="JetBrains Mono" pitchFamily="34" charset="-120"/>
-              </a:rPr>
-              <a:t>report↗</a:t>
-            </a:r>
-            <a:endParaRPr lang="en-US" sz="1000" dirty="0"/>
-          </a:p>
-        </p:txBody>
-      </p:sp>
-      <p:sp>
-        <p:nvSpPr>
-          <p:cNvPr id="4" name="Text 1"/>
-          <p:cNvSpPr/>
-          <p:nvPr/>
-        </p:nvSpPr>
-        <p:spPr>
-          <a:xfrm>
-            <a:off x="3200400" y="228600"/>
-            <a:ext cx="1828800" cy="274320"/>
-          </a:xfrm>
-          <a:prstGeom prst="rect">
-            <a:avLst/>
-          </a:prstGeom>
-          <a:noFill/>
-          <a:ln/>
-        </p:spPr>
-        <p:txBody>
-          <a:bodyPr wrap="square" lIns="0" tIns="0" rIns="0" bIns="0" rtlCol="0" anchor="ctr"/>
-          <a:lstStyle/>
-          <a:p>
-            <a:pPr algn="ctr" indent="0" marL="0">
-              <a:buNone/>
-            </a:pPr>
-            <a:r>
-              <a:rPr lang="en-US" sz="1000" i="1" dirty="0">
+              <a:rPr lang="en-US" sz="2600" b="1" i="1" dirty="0">
                 <a:solidFill>
                   <a:srgbClr val="DAFF94"/>
                 </a:solidFill>
@@ -3692,61 +3450,22 @@
                 <a:ea typeface="Libre Baskerville" pitchFamily="34" charset="-122"/>
                 <a:cs typeface="Libre Baskerville" pitchFamily="34" charset="-120"/>
               </a:rPr>
-              <a:t>arpejo</a:t>
-            </a:r>
-            <a:endParaRPr lang="en-US" sz="1000" dirty="0"/>
-          </a:p>
-        </p:txBody>
-      </p:sp>
-      <p:sp>
-        <p:nvSpPr>
-          <p:cNvPr id="5" name="Text 2"/>
-          <p:cNvSpPr/>
-          <p:nvPr/>
-        </p:nvSpPr>
-        <p:spPr>
-          <a:xfrm>
-            <a:off x="6035040" y="228600"/>
-            <a:ext cx="1828800" cy="274320"/>
-          </a:xfrm>
-          <a:prstGeom prst="rect">
-            <a:avLst/>
-          </a:prstGeom>
-          <a:noFill/>
-          <a:ln/>
-        </p:spPr>
-        <p:txBody>
-          <a:bodyPr wrap="square" lIns="0" tIns="0" rIns="0" bIns="0" rtlCol="0" anchor="ctr"/>
-          <a:lstStyle/>
-          <a:p>
-            <a:pPr algn="r" indent="0" marL="0">
-              <a:buNone/>
-            </a:pPr>
-            <a:r>
-              <a:rPr lang="en-US" sz="1000" dirty="0">
-                <a:solidFill>
-                  <a:srgbClr val="DAFF94"/>
-                </a:solidFill>
-                <a:latin typeface="JetBrains Mono" pitchFamily="34" charset="0"/>
-                <a:ea typeface="JetBrains Mono" pitchFamily="34" charset="-122"/>
-                <a:cs typeface="JetBrains Mono" pitchFamily="34" charset="-120"/>
-              </a:rPr>
-              <a:t>agosto_26</a:t>
-            </a:r>
-            <a:endParaRPr lang="en-US" sz="1000" dirty="0"/>
-          </a:p>
-        </p:txBody>
-      </p:sp>
-      <p:sp>
-        <p:nvSpPr>
-          <p:cNvPr id="6" name="Shape 3"/>
-          <p:cNvSpPr/>
-          <p:nvPr/>
-        </p:nvSpPr>
-        <p:spPr>
-          <a:xfrm>
-            <a:off x="2651760" y="685800"/>
-            <a:ext cx="2926080" cy="594360"/>
+              <a:t>HIPER-</a:t>
+            </a:r>
+            <a:endParaRPr lang="en-US" sz="2600" dirty="0"/>
+          </a:p>
+        </p:txBody>
+      </p:sp>
+      <p:sp>
+        <p:nvSpPr>
+          <p:cNvPr id="9" name="Shape 6"/>
+          <p:cNvSpPr/>
+          <p:nvPr/>
+        </p:nvSpPr>
+        <p:spPr>
+          <a:xfrm>
+            <a:off x="548640" y="1143000"/>
+            <a:ext cx="7132320" cy="566928"/>
           </a:xfrm>
           <a:prstGeom prst="ellipse">
             <a:avLst/>
@@ -3761,30 +3480,30 @@
       </p:sp>
       <p:sp>
         <p:nvSpPr>
-          <p:cNvPr id="7" name="Text 4"/>
-          <p:cNvSpPr/>
-          <p:nvPr/>
-        </p:nvSpPr>
-        <p:spPr>
-          <a:xfrm>
-            <a:off x="2651760" y="685800"/>
-            <a:ext cx="2926080" cy="594360"/>
-          </a:xfrm>
-          <a:prstGeom prst="rect">
-            <a:avLst/>
-          </a:prstGeom>
-          <a:noFill/>
-          <a:ln/>
-        </p:spPr>
-        <p:txBody>
-          <a:bodyPr wrap="square" lIns="0" tIns="0" rIns="0" bIns="0" rtlCol="0" anchor="ctr"/>
-          <a:lstStyle/>
-          <a:p>
-            <a:pPr algn="ctr" indent="0" marL="0">
-              <a:buNone/>
-            </a:pPr>
-            <a:r>
-              <a:rPr lang="en-US" sz="1500" i="1" dirty="0">
+          <p:cNvPr id="10" name="Text 7"/>
+          <p:cNvSpPr/>
+          <p:nvPr/>
+        </p:nvSpPr>
+        <p:spPr>
+          <a:xfrm>
+            <a:off x="548640" y="1143000"/>
+            <a:ext cx="7132320" cy="566928"/>
+          </a:xfrm>
+          <a:prstGeom prst="rect">
+            <a:avLst/>
+          </a:prstGeom>
+          <a:noFill/>
+          <a:ln/>
+        </p:spPr>
+        <p:txBody>
+          <a:bodyPr wrap="square" lIns="0" tIns="0" rIns="0" bIns="0" rtlCol="0" anchor="ctr"/>
+          <a:lstStyle/>
+          <a:p>
+            <a:pPr algn="ctr" indent="0" marL="0">
+              <a:buNone/>
+            </a:pPr>
+            <a:r>
+              <a:rPr lang="en-US" sz="2000" b="1" i="1" dirty="0">
                 <a:solidFill>
                   <a:srgbClr val="DAFF94"/>
                 </a:solidFill>
@@ -3792,15 +3511,15 @@
                 <a:ea typeface="Libre Baskerville" pitchFamily="34" charset="-122"/>
                 <a:cs typeface="Libre Baskerville" pitchFamily="34" charset="-120"/>
               </a:rPr>
-              <a:t>TRENDS</a:t>
-            </a:r>
-            <a:endParaRPr lang="en-US" sz="1500" dirty="0"/>
+              <a:t>REALIDADE</a:t>
+            </a:r>
+            <a:endParaRPr lang="en-US" sz="2000" dirty="0"/>
           </a:p>
         </p:txBody>
       </p:sp>
       <p:pic>
         <p:nvPicPr>
-          <p:cNvPr id="8" name="Image 1" descr="/home/user/data-manipulation-exercises/.claude/skills/brand-guidelines/assets/textures/globe-lime.png">    </p:cNvPr>
+          <p:cNvPr id="11" name="Image 1" descr="/tmp/claude-0/-home-user-data-manipulation-exercises/f19acac8-ccb4-5197-8e49-c3b6029ad477/scratchpad/report-images/final/ig-hiper-realidade.jpg">    </p:cNvPr>
           <p:cNvPicPr>
             <a:picLocks noChangeAspect="1"/>
           </p:cNvPicPr>
@@ -3808,14 +3527,13 @@
         </p:nvPicPr>
         <p:blipFill>
           <a:blip r:embed="rId2"/>
-          <a:stretch>
-            <a:fillRect/>
-          </a:stretch>
+          <a:srcRect l="0" r="0" t="0" b="0"/>
+          <a:stretch/>
         </p:blipFill>
         <p:spPr>
           <a:xfrm>
-            <a:off x="5403098" y="858164"/>
-            <a:ext cx="249631" cy="249631"/>
+            <a:off x="731520" y="1938528"/>
+            <a:ext cx="6766560" cy="5029200"/>
           </a:xfrm>
           <a:prstGeom prst="rect">
             <a:avLst/>
@@ -3824,14 +3542,14 @@
       </p:pic>
       <p:sp>
         <p:nvSpPr>
-          <p:cNvPr id="9" name="Text 5"/>
-          <p:cNvSpPr/>
-          <p:nvPr/>
-        </p:nvSpPr>
-        <p:spPr>
-          <a:xfrm>
-            <a:off x="640080" y="1371600"/>
-            <a:ext cx="6949440" cy="1097280"/>
+          <p:cNvPr id="12" name="Text 8"/>
+          <p:cNvSpPr/>
+          <p:nvPr/>
+        </p:nvSpPr>
+        <p:spPr>
+          <a:xfrm>
+            <a:off x="731520" y="7242048"/>
+            <a:ext cx="6766560" cy="777240"/>
           </a:xfrm>
           <a:prstGeom prst="rect">
             <a:avLst/>
@@ -3847,86 +3565,30 @@
               <a:buNone/>
             </a:pPr>
             <a:r>
-              <a:rPr lang="en-US" sz="3000" b="1" i="1" dirty="0">
+              <a:rPr lang="en-US" sz="1400" b="1" dirty="0">
                 <a:solidFill>
                   <a:srgbClr val="DAFF94"/>
                 </a:solidFill>
-                <a:latin typeface="Libre Baskerville" pitchFamily="34" charset="0"/>
-                <a:ea typeface="Libre Baskerville" pitchFamily="34" charset="-122"/>
-                <a:cs typeface="Libre Baskerville" pitchFamily="34" charset="-120"/>
-              </a:rPr>
-              <a:t>HIPER-</a:t>
-            </a:r>
-            <a:endParaRPr lang="en-US" sz="3000" dirty="0"/>
-          </a:p>
-          <a:p>
-            <a:pPr algn="l" indent="0" marL="0">
-              <a:buNone/>
-            </a:pPr>
-            <a:r>
-              <a:rPr lang="en-US" sz="3000" b="1" i="1" dirty="0">
-                <a:solidFill>
-                  <a:srgbClr val="DAFF94"/>
-                </a:solidFill>
-                <a:latin typeface="Libre Baskerville" pitchFamily="34" charset="0"/>
-                <a:ea typeface="Libre Baskerville" pitchFamily="34" charset="-122"/>
-                <a:cs typeface="Libre Baskerville" pitchFamily="34" charset="-120"/>
-              </a:rPr>
-              <a:t>REALIDADE</a:t>
-            </a:r>
-            <a:endParaRPr lang="en-US" sz="3000" dirty="0"/>
-          </a:p>
-        </p:txBody>
-      </p:sp>
-      <p:sp>
-        <p:nvSpPr>
-          <p:cNvPr id="10" name="Text 6"/>
-          <p:cNvSpPr/>
-          <p:nvPr/>
-        </p:nvSpPr>
-        <p:spPr>
-          <a:xfrm>
-            <a:off x="640080" y="2606040"/>
-            <a:ext cx="6949440" cy="822960"/>
-          </a:xfrm>
-          <a:prstGeom prst="rect">
-            <a:avLst/>
-          </a:prstGeom>
-          <a:noFill/>
-          <a:ln/>
-        </p:spPr>
-        <p:txBody>
-          <a:bodyPr wrap="square" lIns="0" tIns="0" rIns="0" bIns="0" rtlCol="0" anchor="t"/>
-          <a:lstStyle/>
-          <a:p>
-            <a:pPr algn="l" indent="0" marL="0">
-              <a:buNone/>
-            </a:pPr>
-            <a:r>
-              <a:rPr lang="en-US" sz="1500" b="1" dirty="0">
-                <a:solidFill>
-                  <a:srgbClr val="DAFF94"/>
-                </a:solidFill>
                 <a:latin typeface="Arial" pitchFamily="34" charset="0"/>
                 <a:ea typeface="Arial" pitchFamily="34" charset="-122"/>
                 <a:cs typeface="Arial" pitchFamily="34" charset="-120"/>
               </a:rPr>
               <a:t>Online ou offline? Pra Geração Z, já não faz diferença.</a:t>
             </a:r>
-            <a:endParaRPr lang="en-US" sz="1500" dirty="0"/>
-          </a:p>
-        </p:txBody>
-      </p:sp>
-      <p:sp>
-        <p:nvSpPr>
-          <p:cNvPr id="11" name="Text 7"/>
-          <p:cNvSpPr/>
-          <p:nvPr/>
-        </p:nvSpPr>
-        <p:spPr>
-          <a:xfrm>
-            <a:off x="640080" y="3566160"/>
-            <a:ext cx="6492240" cy="594360"/>
+            <a:endParaRPr lang="en-US" sz="1400" dirty="0"/>
+          </a:p>
+        </p:txBody>
+      </p:sp>
+      <p:sp>
+        <p:nvSpPr>
+          <p:cNvPr id="13" name="Text 9"/>
+          <p:cNvSpPr/>
+          <p:nvPr/>
+        </p:nvSpPr>
+        <p:spPr>
+          <a:xfrm>
+            <a:off x="731520" y="7927848"/>
+            <a:ext cx="6766560" cy="594360"/>
           </a:xfrm>
           <a:prstGeom prst="rect">
             <a:avLst/>
@@ -3956,69 +3618,6 @@
           </a:p>
         </p:txBody>
       </p:sp>
-      <p:sp>
-        <p:nvSpPr>
-          <p:cNvPr id="12" name="Text 8"/>
-          <p:cNvSpPr/>
-          <p:nvPr/>
-        </p:nvSpPr>
-        <p:spPr>
-          <a:xfrm>
-            <a:off x="640080" y="4343400"/>
-            <a:ext cx="1828800" cy="320040"/>
-          </a:xfrm>
-          <a:prstGeom prst="rect">
-            <a:avLst/>
-          </a:prstGeom>
-          <a:noFill/>
-          <a:ln/>
-        </p:spPr>
-        <p:txBody>
-          <a:bodyPr wrap="square" lIns="0" tIns="0" rIns="0" bIns="0" rtlCol="0" anchor="ctr"/>
-          <a:lstStyle/>
-          <a:p>
-            <a:pPr indent="0" marL="0">
-              <a:buNone/>
-            </a:pPr>
-            <a:r>
-              <a:rPr lang="en-US" sz="1000" dirty="0">
-                <a:solidFill>
-                  <a:srgbClr val="DAFF94"/>
-                </a:solidFill>
-                <a:latin typeface="JetBrains Mono" pitchFamily="34" charset="0"/>
-                <a:ea typeface="JetBrains Mono" pitchFamily="34" charset="-122"/>
-                <a:cs typeface="JetBrains Mono" pitchFamily="34" charset="-120"/>
-              </a:rPr>
-              <a:t>1 / 5</a:t>
-            </a:r>
-            <a:endParaRPr lang="en-US" sz="1000" dirty="0"/>
-          </a:p>
-        </p:txBody>
-      </p:sp>
-      <p:pic>
-        <p:nvPicPr>
-          <p:cNvPr id="13" name="Image 2" descr="/home/user/data-manipulation-exercises/.claude/skills/brand-guidelines/assets/textures/arrow-lime.png">    </p:cNvPr>
-          <p:cNvPicPr>
-            <a:picLocks noChangeAspect="1"/>
-          </p:cNvPicPr>
-          <p:nvPr/>
-        </p:nvPicPr>
-        <p:blipFill>
-          <a:blip r:embed="rId3"/>
-          <a:stretch>
-            <a:fillRect/>
-          </a:stretch>
-        </p:blipFill>
-        <p:spPr>
-          <a:xfrm rot="5400000">
-            <a:off x="7223760" y="4279392"/>
-            <a:ext cx="292608" cy="292608"/>
-          </a:xfrm>
-          <a:prstGeom prst="rect">
-            <a:avLst/>
-          </a:prstGeom>
-        </p:spPr>
-      </p:pic>
     </p:spTree>
   </p:cSld>
   <p:clrMapOvr>
@@ -4051,9 +3650,165 @@
           <a:chExt cx="0" cy="0"/>
         </a:xfrm>
       </p:grpSpPr>
+      <p:sp>
+        <p:nvSpPr>
+          <p:cNvPr id="2" name="Text 0"/>
+          <p:cNvSpPr/>
+          <p:nvPr/>
+        </p:nvSpPr>
+        <p:spPr>
+          <a:xfrm>
+            <a:off x="411480" y="662940"/>
+            <a:ext cx="274320" cy="274320"/>
+          </a:xfrm>
+          <a:prstGeom prst="rect">
+            <a:avLst/>
+          </a:prstGeom>
+          <a:noFill/>
+          <a:ln/>
+        </p:spPr>
+        <p:txBody>
+          <a:bodyPr wrap="square" lIns="0" tIns="0" rIns="0" bIns="0" rtlCol="0" anchor="ctr"/>
+          <a:lstStyle/>
+          <a:p>
+            <a:pPr algn="ctr" indent="0" marL="0">
+              <a:buNone/>
+            </a:pPr>
+            <a:r>
+              <a:rPr lang="en-US" sz="1300" dirty="0">
+                <a:solidFill>
+                  <a:srgbClr val="000000"/>
+                </a:solidFill>
+                <a:latin typeface="Arial" pitchFamily="34" charset="0"/>
+                <a:ea typeface="Arial" pitchFamily="34" charset="-122"/>
+                <a:cs typeface="Arial" pitchFamily="34" charset="-120"/>
+              </a:rPr>
+              <a:t>+</a:t>
+            </a:r>
+            <a:endParaRPr lang="en-US" sz="1300" dirty="0"/>
+          </a:p>
+        </p:txBody>
+      </p:sp>
+      <p:sp>
+        <p:nvSpPr>
+          <p:cNvPr id="3" name="Text 1"/>
+          <p:cNvSpPr/>
+          <p:nvPr/>
+        </p:nvSpPr>
+        <p:spPr>
+          <a:xfrm>
+            <a:off x="2011680" y="662940"/>
+            <a:ext cx="274320" cy="274320"/>
+          </a:xfrm>
+          <a:prstGeom prst="rect">
+            <a:avLst/>
+          </a:prstGeom>
+          <a:noFill/>
+          <a:ln/>
+        </p:spPr>
+        <p:txBody>
+          <a:bodyPr wrap="square" lIns="0" tIns="0" rIns="0" bIns="0" rtlCol="0" anchor="ctr"/>
+          <a:lstStyle/>
+          <a:p>
+            <a:pPr algn="ctr" indent="0" marL="0">
+              <a:buNone/>
+            </a:pPr>
+            <a:r>
+              <a:rPr lang="en-US" sz="1300" dirty="0">
+                <a:solidFill>
+                  <a:srgbClr val="000000"/>
+                </a:solidFill>
+                <a:latin typeface="Arial" pitchFamily="34" charset="0"/>
+                <a:ea typeface="Arial" pitchFamily="34" charset="-122"/>
+                <a:cs typeface="Arial" pitchFamily="34" charset="-120"/>
+              </a:rPr>
+              <a:t>+</a:t>
+            </a:r>
+            <a:endParaRPr lang="en-US" sz="1300" dirty="0"/>
+          </a:p>
+        </p:txBody>
+      </p:sp>
+      <p:sp>
+        <p:nvSpPr>
+          <p:cNvPr id="4" name="Text 2"/>
+          <p:cNvSpPr/>
+          <p:nvPr/>
+        </p:nvSpPr>
+        <p:spPr>
+          <a:xfrm>
+            <a:off x="3611880" y="662940"/>
+            <a:ext cx="274320" cy="274320"/>
+          </a:xfrm>
+          <a:prstGeom prst="rect">
+            <a:avLst/>
+          </a:prstGeom>
+          <a:noFill/>
+          <a:ln/>
+        </p:spPr>
+        <p:txBody>
+          <a:bodyPr wrap="square" lIns="0" tIns="0" rIns="0" bIns="0" rtlCol="0" anchor="ctr"/>
+          <a:lstStyle/>
+          <a:p>
+            <a:pPr algn="ctr" indent="0" marL="0">
+              <a:buNone/>
+            </a:pPr>
+            <a:r>
+              <a:rPr lang="en-US" sz="1300" dirty="0">
+                <a:solidFill>
+                  <a:srgbClr val="000000"/>
+                </a:solidFill>
+                <a:latin typeface="Arial" pitchFamily="34" charset="0"/>
+                <a:ea typeface="Arial" pitchFamily="34" charset="-122"/>
+                <a:cs typeface="Arial" pitchFamily="34" charset="-120"/>
+              </a:rPr>
+              <a:t>+</a:t>
+            </a:r>
+            <a:endParaRPr lang="en-US" sz="1300" dirty="0"/>
+          </a:p>
+        </p:txBody>
+      </p:sp>
+      <p:sp>
+        <p:nvSpPr>
+          <p:cNvPr id="5" name="Text 3"/>
+          <p:cNvSpPr/>
+          <p:nvPr/>
+        </p:nvSpPr>
+        <p:spPr>
+          <a:xfrm>
+            <a:off x="5212080" y="662940"/>
+            <a:ext cx="274320" cy="274320"/>
+          </a:xfrm>
+          <a:prstGeom prst="rect">
+            <a:avLst/>
+          </a:prstGeom>
+          <a:noFill/>
+          <a:ln/>
+        </p:spPr>
+        <p:txBody>
+          <a:bodyPr wrap="square" lIns="0" tIns="0" rIns="0" bIns="0" rtlCol="0" anchor="ctr"/>
+          <a:lstStyle/>
+          <a:p>
+            <a:pPr algn="ctr" indent="0" marL="0">
+              <a:buNone/>
+            </a:pPr>
+            <a:r>
+              <a:rPr lang="en-US" sz="1300" dirty="0">
+                <a:solidFill>
+                  <a:srgbClr val="000000"/>
+                </a:solidFill>
+                <a:latin typeface="Arial" pitchFamily="34" charset="0"/>
+                <a:ea typeface="Arial" pitchFamily="34" charset="-122"/>
+                <a:cs typeface="Arial" pitchFamily="34" charset="-120"/>
+              </a:rPr>
+              <a:t>+</a:t>
+            </a:r>
+            <a:endParaRPr lang="en-US" sz="1300" dirty="0"/>
+          </a:p>
+        </p:txBody>
+      </p:sp>
       <p:pic>
         <p:nvPicPr>
-          <p:cNvPr id="2" name="Image 0" descr="/tmp/claude-0/-home-user-data-manipulation-exercises/f19acac8-ccb4-5197-8e49-c3b6029ad477/scratchpad/report-images/final/ig-agentic-search.jpg">    </p:cNvPr>
+          <p:cNvPr id="6" name="Image 0" descr="/home/user/data-manipulation-exercises/.claude/skills/brand-guidelines/assets/textures/globe-black.png">    </p:cNvPr>
           <p:cNvPicPr>
             <a:picLocks noChangeAspect="1"/>
           </p:cNvPicPr>
@@ -4061,215 +3816,14 @@
         </p:nvPicPr>
         <p:blipFill>
           <a:blip r:embed="rId1"/>
-          <a:srcRect l="0" r="0" t="0" b="0"/>
-          <a:stretch/>
-        </p:blipFill>
-        <p:spPr>
-          <a:xfrm>
-            <a:off x="0" y="0"/>
-            <a:ext cx="8229600" cy="5349240"/>
-          </a:xfrm>
-          <a:prstGeom prst="rect">
-            <a:avLst/>
-          </a:prstGeom>
-        </p:spPr>
-      </p:pic>
-      <p:sp>
-        <p:nvSpPr>
-          <p:cNvPr id="3" name="Text 0"/>
-          <p:cNvSpPr/>
-          <p:nvPr/>
-        </p:nvSpPr>
-        <p:spPr>
-          <a:xfrm>
-            <a:off x="365760" y="5577840"/>
-            <a:ext cx="1828800" cy="274320"/>
-          </a:xfrm>
-          <a:prstGeom prst="rect">
-            <a:avLst/>
-          </a:prstGeom>
-          <a:noFill/>
-          <a:ln/>
-        </p:spPr>
-        <p:txBody>
-          <a:bodyPr wrap="square" lIns="0" tIns="0" rIns="0" bIns="0" rtlCol="0" anchor="ctr"/>
-          <a:lstStyle/>
-          <a:p>
-            <a:pPr algn="l" indent="0" marL="0">
-              <a:buNone/>
-            </a:pPr>
-            <a:r>
-              <a:rPr lang="en-US" sz="1000" b="1" dirty="0">
-                <a:solidFill>
-                  <a:srgbClr val="000000"/>
-                </a:solidFill>
-                <a:latin typeface="JetBrains Mono" pitchFamily="34" charset="0"/>
-                <a:ea typeface="JetBrains Mono" pitchFamily="34" charset="-122"/>
-                <a:cs typeface="JetBrains Mono" pitchFamily="34" charset="-120"/>
-              </a:rPr>
-              <a:t>report↗</a:t>
-            </a:r>
-            <a:endParaRPr lang="en-US" sz="1000" dirty="0"/>
-          </a:p>
-        </p:txBody>
-      </p:sp>
-      <p:sp>
-        <p:nvSpPr>
-          <p:cNvPr id="4" name="Text 1"/>
-          <p:cNvSpPr/>
-          <p:nvPr/>
-        </p:nvSpPr>
-        <p:spPr>
-          <a:xfrm>
-            <a:off x="3200400" y="5577840"/>
-            <a:ext cx="1828800" cy="274320"/>
-          </a:xfrm>
-          <a:prstGeom prst="rect">
-            <a:avLst/>
-          </a:prstGeom>
-          <a:noFill/>
-          <a:ln/>
-        </p:spPr>
-        <p:txBody>
-          <a:bodyPr wrap="square" lIns="0" tIns="0" rIns="0" bIns="0" rtlCol="0" anchor="ctr"/>
-          <a:lstStyle/>
-          <a:p>
-            <a:pPr algn="ctr" indent="0" marL="0">
-              <a:buNone/>
-            </a:pPr>
-            <a:r>
-              <a:rPr lang="en-US" sz="1000" i="1" dirty="0">
-                <a:solidFill>
-                  <a:srgbClr val="000000"/>
-                </a:solidFill>
-                <a:latin typeface="Libre Baskerville" pitchFamily="34" charset="0"/>
-                <a:ea typeface="Libre Baskerville" pitchFamily="34" charset="-122"/>
-                <a:cs typeface="Libre Baskerville" pitchFamily="34" charset="-120"/>
-              </a:rPr>
-              <a:t>arpejo</a:t>
-            </a:r>
-            <a:endParaRPr lang="en-US" sz="1000" dirty="0"/>
-          </a:p>
-        </p:txBody>
-      </p:sp>
-      <p:sp>
-        <p:nvSpPr>
-          <p:cNvPr id="5" name="Text 2"/>
-          <p:cNvSpPr/>
-          <p:nvPr/>
-        </p:nvSpPr>
-        <p:spPr>
-          <a:xfrm>
-            <a:off x="6035040" y="5577840"/>
-            <a:ext cx="1828800" cy="274320"/>
-          </a:xfrm>
-          <a:prstGeom prst="rect">
-            <a:avLst/>
-          </a:prstGeom>
-          <a:noFill/>
-          <a:ln/>
-        </p:spPr>
-        <p:txBody>
-          <a:bodyPr wrap="square" lIns="0" tIns="0" rIns="0" bIns="0" rtlCol="0" anchor="ctr"/>
-          <a:lstStyle/>
-          <a:p>
-            <a:pPr algn="r" indent="0" marL="0">
-              <a:buNone/>
-            </a:pPr>
-            <a:r>
-              <a:rPr lang="en-US" sz="1000" dirty="0">
-                <a:solidFill>
-                  <a:srgbClr val="000000"/>
-                </a:solidFill>
-                <a:latin typeface="JetBrains Mono" pitchFamily="34" charset="0"/>
-                <a:ea typeface="JetBrains Mono" pitchFamily="34" charset="-122"/>
-                <a:cs typeface="JetBrains Mono" pitchFamily="34" charset="-120"/>
-              </a:rPr>
-              <a:t>agosto_26</a:t>
-            </a:r>
-            <a:endParaRPr lang="en-US" sz="1000" dirty="0"/>
-          </a:p>
-        </p:txBody>
-      </p:sp>
-      <p:sp>
-        <p:nvSpPr>
-          <p:cNvPr id="6" name="Shape 3"/>
-          <p:cNvSpPr/>
-          <p:nvPr/>
-        </p:nvSpPr>
-        <p:spPr>
-          <a:xfrm>
-            <a:off x="2651760" y="6035040"/>
-            <a:ext cx="2926080" cy="594360"/>
-          </a:xfrm>
-          <a:prstGeom prst="ellipse">
-            <a:avLst/>
-          </a:prstGeom>
-          <a:ln w="19050">
-            <a:solidFill>
-              <a:srgbClr val="000000"/>
-            </a:solidFill>
-            <a:prstDash val="solid"/>
-          </a:ln>
-        </p:spPr>
-      </p:sp>
-      <p:sp>
-        <p:nvSpPr>
-          <p:cNvPr id="7" name="Text 4"/>
-          <p:cNvSpPr/>
-          <p:nvPr/>
-        </p:nvSpPr>
-        <p:spPr>
-          <a:xfrm>
-            <a:off x="2651760" y="6035040"/>
-            <a:ext cx="2926080" cy="594360"/>
-          </a:xfrm>
-          <a:prstGeom prst="rect">
-            <a:avLst/>
-          </a:prstGeom>
-          <a:noFill/>
-          <a:ln/>
-        </p:spPr>
-        <p:txBody>
-          <a:bodyPr wrap="square" lIns="0" tIns="0" rIns="0" bIns="0" rtlCol="0" anchor="ctr"/>
-          <a:lstStyle/>
-          <a:p>
-            <a:pPr algn="ctr" indent="0" marL="0">
-              <a:buNone/>
-            </a:pPr>
-            <a:r>
-              <a:rPr lang="en-US" sz="1500" i="1" dirty="0">
-                <a:solidFill>
-                  <a:srgbClr val="000000"/>
-                </a:solidFill>
-                <a:latin typeface="Libre Baskerville" pitchFamily="34" charset="0"/>
-                <a:ea typeface="Libre Baskerville" pitchFamily="34" charset="-122"/>
-                <a:cs typeface="Libre Baskerville" pitchFamily="34" charset="-120"/>
-              </a:rPr>
-              <a:t>NEWS</a:t>
-            </a:r>
-            <a:endParaRPr lang="en-US" sz="1500" dirty="0"/>
-          </a:p>
-        </p:txBody>
-      </p:sp>
-      <p:pic>
-        <p:nvPicPr>
-          <p:cNvPr id="8" name="Image 1" descr="/home/user/data-manipulation-exercises/.claude/skills/brand-guidelines/assets/textures/globe-black.png">    </p:cNvPr>
-          <p:cNvPicPr>
-            <a:picLocks noChangeAspect="1"/>
-          </p:cNvPicPr>
-          <p:nvPr/>
-        </p:nvPicPr>
-        <p:blipFill>
-          <a:blip r:embed="rId2"/>
           <a:stretch>
             <a:fillRect/>
           </a:stretch>
         </p:blipFill>
         <p:spPr>
           <a:xfrm>
-            <a:off x="5403098" y="6207404"/>
-            <a:ext cx="249631" cy="249631"/>
+            <a:off x="7315200" y="548640"/>
+            <a:ext cx="502920" cy="502920"/>
           </a:xfrm>
           <a:prstGeom prst="rect">
             <a:avLst/>
@@ -4278,32 +3832,54 @@
       </p:pic>
       <p:sp>
         <p:nvSpPr>
-          <p:cNvPr id="9" name="Text 5"/>
-          <p:cNvSpPr/>
-          <p:nvPr/>
-        </p:nvSpPr>
-        <p:spPr>
-          <a:xfrm>
-            <a:off x="640080" y="6720840"/>
-            <a:ext cx="6949440" cy="1097280"/>
-          </a:xfrm>
-          <a:prstGeom prst="rect">
-            <a:avLst/>
-          </a:prstGeom>
-          <a:noFill/>
-          <a:ln/>
-        </p:spPr>
-        <p:txBody>
-          <a:bodyPr wrap="square" lIns="0" tIns="0" rIns="0" bIns="0" rtlCol="0" anchor="t"/>
+          <p:cNvPr id="7" name="Shape 4"/>
+          <p:cNvSpPr/>
+          <p:nvPr/>
+        </p:nvSpPr>
+        <p:spPr>
+          <a:xfrm>
+            <a:off x="411480" y="1444752"/>
+            <a:ext cx="7406640" cy="2990088"/>
+          </a:xfrm>
+          <a:prstGeom prst="roundRect">
+            <a:avLst>
+              <a:gd name="adj" fmla="val 7645"/>
+            </a:avLst>
+          </a:prstGeom>
+          <a:solidFill>
+            <a:srgbClr val="000000"/>
+          </a:solidFill>
+          <a:ln/>
+        </p:spPr>
+      </p:sp>
+      <p:sp>
+        <p:nvSpPr>
+          <p:cNvPr id="8" name="Text 5"/>
+          <p:cNvSpPr/>
+          <p:nvPr/>
+        </p:nvSpPr>
+        <p:spPr>
+          <a:xfrm>
+            <a:off x="731520" y="1719072"/>
+            <a:ext cx="6766560" cy="502920"/>
+          </a:xfrm>
+          <a:prstGeom prst="rect">
+            <a:avLst/>
+          </a:prstGeom>
+          <a:noFill/>
+          <a:ln/>
+        </p:spPr>
+        <p:txBody>
+          <a:bodyPr wrap="square" lIns="0" tIns="0" rIns="0" bIns="0" rtlCol="0" anchor="ctr"/>
           <a:lstStyle/>
           <a:p>
             <a:pPr algn="l" indent="0" marL="0">
               <a:buNone/>
             </a:pPr>
             <a:r>
-              <a:rPr lang="en-US" sz="3000" b="1" i="1" dirty="0">
-                <a:solidFill>
-                  <a:srgbClr val="000000"/>
+              <a:rPr lang="en-US" sz="2600" b="1" i="1" dirty="0">
+                <a:solidFill>
+                  <a:srgbClr val="FF7C51"/>
                 </a:solidFill>
                 <a:latin typeface="Libre Baskerville" pitchFamily="34" charset="0"/>
                 <a:ea typeface="Libre Baskerville" pitchFamily="34" charset="-122"/>
@@ -4311,16 +3887,60 @@
               </a:rPr>
               <a:t>AGENTIC</a:t>
             </a:r>
-            <a:endParaRPr lang="en-US" sz="3000" dirty="0"/>
-          </a:p>
-          <a:p>
-            <a:pPr algn="l" indent="0" marL="0">
-              <a:buNone/>
-            </a:pPr>
-            <a:r>
-              <a:rPr lang="en-US" sz="3000" b="1" i="1" dirty="0">
-                <a:solidFill>
-                  <a:srgbClr val="000000"/>
+            <a:endParaRPr lang="en-US" sz="2600" dirty="0"/>
+          </a:p>
+        </p:txBody>
+      </p:sp>
+      <p:sp>
+        <p:nvSpPr>
+          <p:cNvPr id="9" name="Shape 6"/>
+          <p:cNvSpPr/>
+          <p:nvPr/>
+        </p:nvSpPr>
+        <p:spPr>
+          <a:xfrm>
+            <a:off x="548640" y="2221992"/>
+            <a:ext cx="7132320" cy="566928"/>
+          </a:xfrm>
+          <a:prstGeom prst="ellipse">
+            <a:avLst/>
+          </a:prstGeom>
+          <a:ln w="19050">
+            <a:solidFill>
+              <a:srgbClr val="FF7C51"/>
+            </a:solidFill>
+            <a:prstDash val="solid"/>
+          </a:ln>
+        </p:spPr>
+      </p:sp>
+      <p:sp>
+        <p:nvSpPr>
+          <p:cNvPr id="10" name="Text 7"/>
+          <p:cNvSpPr/>
+          <p:nvPr/>
+        </p:nvSpPr>
+        <p:spPr>
+          <a:xfrm>
+            <a:off x="548640" y="2221992"/>
+            <a:ext cx="7132320" cy="566928"/>
+          </a:xfrm>
+          <a:prstGeom prst="rect">
+            <a:avLst/>
+          </a:prstGeom>
+          <a:noFill/>
+          <a:ln/>
+        </p:spPr>
+        <p:txBody>
+          <a:bodyPr wrap="square" lIns="0" tIns="0" rIns="0" bIns="0" rtlCol="0" anchor="ctr"/>
+          <a:lstStyle/>
+          <a:p>
+            <a:pPr algn="ctr" indent="0" marL="0">
+              <a:buNone/>
+            </a:pPr>
+            <a:r>
+              <a:rPr lang="en-US" sz="2400" b="1" i="1" dirty="0">
+                <a:solidFill>
+                  <a:srgbClr val="FF7C51"/>
                 </a:solidFill>
                 <a:latin typeface="Libre Baskerville" pitchFamily="34" charset="0"/>
                 <a:ea typeface="Libre Baskerville" pitchFamily="34" charset="-122"/>
@@ -4328,20 +3948,20 @@
               </a:rPr>
               <a:t>SEARCH</a:t>
             </a:r>
-            <a:endParaRPr lang="en-US" sz="3000" dirty="0"/>
-          </a:p>
-        </p:txBody>
-      </p:sp>
-      <p:sp>
-        <p:nvSpPr>
-          <p:cNvPr id="10" name="Text 6"/>
-          <p:cNvSpPr/>
-          <p:nvPr/>
-        </p:nvSpPr>
-        <p:spPr>
-          <a:xfrm>
-            <a:off x="640080" y="7955280"/>
-            <a:ext cx="6949440" cy="822960"/>
+            <a:endParaRPr lang="en-US" sz="2400" dirty="0"/>
+          </a:p>
+        </p:txBody>
+      </p:sp>
+      <p:sp>
+        <p:nvSpPr>
+          <p:cNvPr id="11" name="Text 8"/>
+          <p:cNvSpPr/>
+          <p:nvPr/>
+        </p:nvSpPr>
+        <p:spPr>
+          <a:xfrm>
+            <a:off x="731520" y="3017520"/>
+            <a:ext cx="6766560" cy="777240"/>
           </a:xfrm>
           <a:prstGeom prst="rect">
             <a:avLst/>
@@ -4357,9 +3977,9 @@
               <a:buNone/>
             </a:pPr>
             <a:r>
-              <a:rPr lang="en-US" sz="1500" b="1" dirty="0">
-                <a:solidFill>
-                  <a:srgbClr val="000000"/>
+              <a:rPr lang="en-US" sz="1400" b="1" dirty="0">
+                <a:solidFill>
+                  <a:srgbClr val="FF7C51"/>
                 </a:solidFill>
                 <a:latin typeface="Arial" pitchFamily="34" charset="0"/>
                 <a:ea typeface="Arial" pitchFamily="34" charset="-122"/>
@@ -4367,20 +3987,20 @@
               </a:rPr>
               <a:t>Sua marca já apareceu numa resposta de IA hoje?</a:t>
             </a:r>
-            <a:endParaRPr lang="en-US" sz="1500" dirty="0"/>
-          </a:p>
-        </p:txBody>
-      </p:sp>
-      <p:sp>
-        <p:nvSpPr>
-          <p:cNvPr id="11" name="Text 7"/>
-          <p:cNvSpPr/>
-          <p:nvPr/>
-        </p:nvSpPr>
-        <p:spPr>
-          <a:xfrm>
-            <a:off x="640080" y="8915400"/>
-            <a:ext cx="6492240" cy="594360"/>
+            <a:endParaRPr lang="en-US" sz="1400" dirty="0"/>
+          </a:p>
+        </p:txBody>
+      </p:sp>
+      <p:sp>
+        <p:nvSpPr>
+          <p:cNvPr id="12" name="Text 9"/>
+          <p:cNvSpPr/>
+          <p:nvPr/>
+        </p:nvSpPr>
+        <p:spPr>
+          <a:xfrm>
+            <a:off x="731520" y="3703320"/>
+            <a:ext cx="6766560" cy="594360"/>
           </a:xfrm>
           <a:prstGeom prst="rect">
             <a:avLst/>
@@ -4398,7 +4018,7 @@
             <a:r>
               <a:rPr lang="en-US" sz="1000" dirty="0">
                 <a:solidFill>
-                  <a:srgbClr val="000000"/>
+                  <a:srgbClr val="FF7C51"/>
                 </a:solidFill>
                 <a:latin typeface="JetBrains Mono" pitchFamily="34" charset="0"/>
                 <a:ea typeface="JetBrains Mono" pitchFamily="34" charset="-122"/>
@@ -4410,63 +4030,23 @@
           </a:p>
         </p:txBody>
       </p:sp>
-      <p:sp>
-        <p:nvSpPr>
-          <p:cNvPr id="12" name="Text 8"/>
-          <p:cNvSpPr/>
-          <p:nvPr/>
-        </p:nvSpPr>
-        <p:spPr>
-          <a:xfrm>
-            <a:off x="640080" y="9692640"/>
-            <a:ext cx="1828800" cy="320040"/>
-          </a:xfrm>
-          <a:prstGeom prst="rect">
-            <a:avLst/>
-          </a:prstGeom>
-          <a:noFill/>
-          <a:ln/>
-        </p:spPr>
-        <p:txBody>
-          <a:bodyPr wrap="square" lIns="0" tIns="0" rIns="0" bIns="0" rtlCol="0" anchor="ctr"/>
-          <a:lstStyle/>
-          <a:p>
-            <a:pPr indent="0" marL="0">
-              <a:buNone/>
-            </a:pPr>
-            <a:r>
-              <a:rPr lang="en-US" sz="1000" dirty="0">
-                <a:solidFill>
-                  <a:srgbClr val="000000"/>
-                </a:solidFill>
-                <a:latin typeface="JetBrains Mono" pitchFamily="34" charset="0"/>
-                <a:ea typeface="JetBrains Mono" pitchFamily="34" charset="-122"/>
-                <a:cs typeface="JetBrains Mono" pitchFamily="34" charset="-120"/>
-              </a:rPr>
-              <a:t>2 / 5</a:t>
-            </a:r>
-            <a:endParaRPr lang="en-US" sz="1000" dirty="0"/>
-          </a:p>
-        </p:txBody>
-      </p:sp>
       <p:pic>
         <p:nvPicPr>
-          <p:cNvPr id="13" name="Image 2" descr="/home/user/data-manipulation-exercises/.claude/skills/brand-guidelines/assets/textures/arrow-black.png">    </p:cNvPr>
+          <p:cNvPr id="13" name="Image 1" descr="/tmp/claude-0/-home-user-data-manipulation-exercises/f19acac8-ccb4-5197-8e49-c3b6029ad477/scratchpad/report-images/final/ig-agentic-search.jpg">    </p:cNvPr>
           <p:cNvPicPr>
             <a:picLocks noChangeAspect="1"/>
           </p:cNvPicPr>
           <p:nvPr/>
         </p:nvPicPr>
         <p:blipFill>
-          <a:blip r:embed="rId3"/>
-          <a:stretch>
-            <a:fillRect/>
-          </a:stretch>
+          <a:blip r:embed="rId2"/>
+          <a:srcRect l="0" r="0" t="0" b="0"/>
+          <a:stretch/>
         </p:blipFill>
         <p:spPr>
-          <a:xfrm rot="5400000">
-            <a:off x="7223760" y="9628632"/>
-            <a:ext cx="292608" cy="292608"/>
+          <a:xfrm>
+            <a:off x="0" y="4389120"/>
+            <a:ext cx="8229600" cy="5897880"/>
           </a:xfrm>
           <a:prstGeom prst="rect">
             <a:avLst/>
@@ -4505,9 +4085,165 @@
           <a:chExt cx="0" cy="0"/>
         </a:xfrm>
       </p:grpSpPr>
+      <p:sp>
+        <p:nvSpPr>
+          <p:cNvPr id="2" name="Text 0"/>
+          <p:cNvSpPr/>
+          <p:nvPr/>
+        </p:nvSpPr>
+        <p:spPr>
+          <a:xfrm>
+            <a:off x="411480" y="9349740"/>
+            <a:ext cx="274320" cy="274320"/>
+          </a:xfrm>
+          <a:prstGeom prst="rect">
+            <a:avLst/>
+          </a:prstGeom>
+          <a:noFill/>
+          <a:ln/>
+        </p:spPr>
+        <p:txBody>
+          <a:bodyPr wrap="square" lIns="0" tIns="0" rIns="0" bIns="0" rtlCol="0" anchor="ctr"/>
+          <a:lstStyle/>
+          <a:p>
+            <a:pPr algn="ctr" indent="0" marL="0">
+              <a:buNone/>
+            </a:pPr>
+            <a:r>
+              <a:rPr lang="en-US" sz="1300" dirty="0">
+                <a:solidFill>
+                  <a:srgbClr val="000000"/>
+                </a:solidFill>
+                <a:latin typeface="Arial" pitchFamily="34" charset="0"/>
+                <a:ea typeface="Arial" pitchFamily="34" charset="-122"/>
+                <a:cs typeface="Arial" pitchFamily="34" charset="-120"/>
+              </a:rPr>
+              <a:t>+</a:t>
+            </a:r>
+            <a:endParaRPr lang="en-US" sz="1300" dirty="0"/>
+          </a:p>
+        </p:txBody>
+      </p:sp>
+      <p:sp>
+        <p:nvSpPr>
+          <p:cNvPr id="3" name="Text 1"/>
+          <p:cNvSpPr/>
+          <p:nvPr/>
+        </p:nvSpPr>
+        <p:spPr>
+          <a:xfrm>
+            <a:off x="2011680" y="9349740"/>
+            <a:ext cx="274320" cy="274320"/>
+          </a:xfrm>
+          <a:prstGeom prst="rect">
+            <a:avLst/>
+          </a:prstGeom>
+          <a:noFill/>
+          <a:ln/>
+        </p:spPr>
+        <p:txBody>
+          <a:bodyPr wrap="square" lIns="0" tIns="0" rIns="0" bIns="0" rtlCol="0" anchor="ctr"/>
+          <a:lstStyle/>
+          <a:p>
+            <a:pPr algn="ctr" indent="0" marL="0">
+              <a:buNone/>
+            </a:pPr>
+            <a:r>
+              <a:rPr lang="en-US" sz="1300" dirty="0">
+                <a:solidFill>
+                  <a:srgbClr val="000000"/>
+                </a:solidFill>
+                <a:latin typeface="Arial" pitchFamily="34" charset="0"/>
+                <a:ea typeface="Arial" pitchFamily="34" charset="-122"/>
+                <a:cs typeface="Arial" pitchFamily="34" charset="-120"/>
+              </a:rPr>
+              <a:t>+</a:t>
+            </a:r>
+            <a:endParaRPr lang="en-US" sz="1300" dirty="0"/>
+          </a:p>
+        </p:txBody>
+      </p:sp>
+      <p:sp>
+        <p:nvSpPr>
+          <p:cNvPr id="4" name="Text 2"/>
+          <p:cNvSpPr/>
+          <p:nvPr/>
+        </p:nvSpPr>
+        <p:spPr>
+          <a:xfrm>
+            <a:off x="3611880" y="9349740"/>
+            <a:ext cx="274320" cy="274320"/>
+          </a:xfrm>
+          <a:prstGeom prst="rect">
+            <a:avLst/>
+          </a:prstGeom>
+          <a:noFill/>
+          <a:ln/>
+        </p:spPr>
+        <p:txBody>
+          <a:bodyPr wrap="square" lIns="0" tIns="0" rIns="0" bIns="0" rtlCol="0" anchor="ctr"/>
+          <a:lstStyle/>
+          <a:p>
+            <a:pPr algn="ctr" indent="0" marL="0">
+              <a:buNone/>
+            </a:pPr>
+            <a:r>
+              <a:rPr lang="en-US" sz="1300" dirty="0">
+                <a:solidFill>
+                  <a:srgbClr val="000000"/>
+                </a:solidFill>
+                <a:latin typeface="Arial" pitchFamily="34" charset="0"/>
+                <a:ea typeface="Arial" pitchFamily="34" charset="-122"/>
+                <a:cs typeface="Arial" pitchFamily="34" charset="-120"/>
+              </a:rPr>
+              <a:t>+</a:t>
+            </a:r>
+            <a:endParaRPr lang="en-US" sz="1300" dirty="0"/>
+          </a:p>
+        </p:txBody>
+      </p:sp>
+      <p:sp>
+        <p:nvSpPr>
+          <p:cNvPr id="5" name="Text 3"/>
+          <p:cNvSpPr/>
+          <p:nvPr/>
+        </p:nvSpPr>
+        <p:spPr>
+          <a:xfrm>
+            <a:off x="5212080" y="9349740"/>
+            <a:ext cx="274320" cy="274320"/>
+          </a:xfrm>
+          <a:prstGeom prst="rect">
+            <a:avLst/>
+          </a:prstGeom>
+          <a:noFill/>
+          <a:ln/>
+        </p:spPr>
+        <p:txBody>
+          <a:bodyPr wrap="square" lIns="0" tIns="0" rIns="0" bIns="0" rtlCol="0" anchor="ctr"/>
+          <a:lstStyle/>
+          <a:p>
+            <a:pPr algn="ctr" indent="0" marL="0">
+              <a:buNone/>
+            </a:pPr>
+            <a:r>
+              <a:rPr lang="en-US" sz="1300" dirty="0">
+                <a:solidFill>
+                  <a:srgbClr val="000000"/>
+                </a:solidFill>
+                <a:latin typeface="Arial" pitchFamily="34" charset="0"/>
+                <a:ea typeface="Arial" pitchFamily="34" charset="-122"/>
+                <a:cs typeface="Arial" pitchFamily="34" charset="-120"/>
+              </a:rPr>
+              <a:t>+</a:t>
+            </a:r>
+            <a:endParaRPr lang="en-US" sz="1300" dirty="0"/>
+          </a:p>
+        </p:txBody>
+      </p:sp>
       <p:pic>
         <p:nvPicPr>
-          <p:cNvPr id="2" name="Image 0" descr="/tmp/claude-0/-home-user-data-manipulation-exercises/f19acac8-ccb4-5197-8e49-c3b6029ad477/scratchpad/report-images/final/ig-sem-ressaca.jpg">    </p:cNvPr>
+          <p:cNvPr id="6" name="Image 0" descr="/home/user/data-manipulation-exercises/.claude/skills/brand-guidelines/assets/textures/globe-black.png">    </p:cNvPr>
           <p:cNvPicPr>
             <a:picLocks noChangeAspect="1"/>
           </p:cNvPicPr>
@@ -4515,215 +4251,14 @@
         </p:nvPicPr>
         <p:blipFill>
           <a:blip r:embed="rId1"/>
-          <a:srcRect l="0" r="0" t="0" b="0"/>
-          <a:stretch/>
-        </p:blipFill>
-        <p:spPr>
-          <a:xfrm>
-            <a:off x="0" y="4937760"/>
-            <a:ext cx="8229600" cy="5349240"/>
-          </a:xfrm>
-          <a:prstGeom prst="rect">
-            <a:avLst/>
-          </a:prstGeom>
-        </p:spPr>
-      </p:pic>
-      <p:sp>
-        <p:nvSpPr>
-          <p:cNvPr id="3" name="Text 0"/>
-          <p:cNvSpPr/>
-          <p:nvPr/>
-        </p:nvSpPr>
-        <p:spPr>
-          <a:xfrm>
-            <a:off x="365760" y="228600"/>
-            <a:ext cx="1828800" cy="274320"/>
-          </a:xfrm>
-          <a:prstGeom prst="rect">
-            <a:avLst/>
-          </a:prstGeom>
-          <a:noFill/>
-          <a:ln/>
-        </p:spPr>
-        <p:txBody>
-          <a:bodyPr wrap="square" lIns="0" tIns="0" rIns="0" bIns="0" rtlCol="0" anchor="ctr"/>
-          <a:lstStyle/>
-          <a:p>
-            <a:pPr algn="l" indent="0" marL="0">
-              <a:buNone/>
-            </a:pPr>
-            <a:r>
-              <a:rPr lang="en-US" sz="1000" b="1" dirty="0">
-                <a:solidFill>
-                  <a:srgbClr val="000000"/>
-                </a:solidFill>
-                <a:latin typeface="JetBrains Mono" pitchFamily="34" charset="0"/>
-                <a:ea typeface="JetBrains Mono" pitchFamily="34" charset="-122"/>
-                <a:cs typeface="JetBrains Mono" pitchFamily="34" charset="-120"/>
-              </a:rPr>
-              <a:t>report↗</a:t>
-            </a:r>
-            <a:endParaRPr lang="en-US" sz="1000" dirty="0"/>
-          </a:p>
-        </p:txBody>
-      </p:sp>
-      <p:sp>
-        <p:nvSpPr>
-          <p:cNvPr id="4" name="Text 1"/>
-          <p:cNvSpPr/>
-          <p:nvPr/>
-        </p:nvSpPr>
-        <p:spPr>
-          <a:xfrm>
-            <a:off x="3200400" y="228600"/>
-            <a:ext cx="1828800" cy="274320"/>
-          </a:xfrm>
-          <a:prstGeom prst="rect">
-            <a:avLst/>
-          </a:prstGeom>
-          <a:noFill/>
-          <a:ln/>
-        </p:spPr>
-        <p:txBody>
-          <a:bodyPr wrap="square" lIns="0" tIns="0" rIns="0" bIns="0" rtlCol="0" anchor="ctr"/>
-          <a:lstStyle/>
-          <a:p>
-            <a:pPr algn="ctr" indent="0" marL="0">
-              <a:buNone/>
-            </a:pPr>
-            <a:r>
-              <a:rPr lang="en-US" sz="1000" i="1" dirty="0">
-                <a:solidFill>
-                  <a:srgbClr val="000000"/>
-                </a:solidFill>
-                <a:latin typeface="Libre Baskerville" pitchFamily="34" charset="0"/>
-                <a:ea typeface="Libre Baskerville" pitchFamily="34" charset="-122"/>
-                <a:cs typeface="Libre Baskerville" pitchFamily="34" charset="-120"/>
-              </a:rPr>
-              <a:t>arpejo</a:t>
-            </a:r>
-            <a:endParaRPr lang="en-US" sz="1000" dirty="0"/>
-          </a:p>
-        </p:txBody>
-      </p:sp>
-      <p:sp>
-        <p:nvSpPr>
-          <p:cNvPr id="5" name="Text 2"/>
-          <p:cNvSpPr/>
-          <p:nvPr/>
-        </p:nvSpPr>
-        <p:spPr>
-          <a:xfrm>
-            <a:off x="6035040" y="228600"/>
-            <a:ext cx="1828800" cy="274320"/>
-          </a:xfrm>
-          <a:prstGeom prst="rect">
-            <a:avLst/>
-          </a:prstGeom>
-          <a:noFill/>
-          <a:ln/>
-        </p:spPr>
-        <p:txBody>
-          <a:bodyPr wrap="square" lIns="0" tIns="0" rIns="0" bIns="0" rtlCol="0" anchor="ctr"/>
-          <a:lstStyle/>
-          <a:p>
-            <a:pPr algn="r" indent="0" marL="0">
-              <a:buNone/>
-            </a:pPr>
-            <a:r>
-              <a:rPr lang="en-US" sz="1000" dirty="0">
-                <a:solidFill>
-                  <a:srgbClr val="000000"/>
-                </a:solidFill>
-                <a:latin typeface="JetBrains Mono" pitchFamily="34" charset="0"/>
-                <a:ea typeface="JetBrains Mono" pitchFamily="34" charset="-122"/>
-                <a:cs typeface="JetBrains Mono" pitchFamily="34" charset="-120"/>
-              </a:rPr>
-              <a:t>agosto_26</a:t>
-            </a:r>
-            <a:endParaRPr lang="en-US" sz="1000" dirty="0"/>
-          </a:p>
-        </p:txBody>
-      </p:sp>
-      <p:sp>
-        <p:nvSpPr>
-          <p:cNvPr id="6" name="Shape 3"/>
-          <p:cNvSpPr/>
-          <p:nvPr/>
-        </p:nvSpPr>
-        <p:spPr>
-          <a:xfrm>
-            <a:off x="2651760" y="685800"/>
-            <a:ext cx="2926080" cy="594360"/>
-          </a:xfrm>
-          <a:prstGeom prst="ellipse">
-            <a:avLst/>
-          </a:prstGeom>
-          <a:ln w="19050">
-            <a:solidFill>
-              <a:srgbClr val="000000"/>
-            </a:solidFill>
-            <a:prstDash val="solid"/>
-          </a:ln>
-        </p:spPr>
-      </p:sp>
-      <p:sp>
-        <p:nvSpPr>
-          <p:cNvPr id="7" name="Text 4"/>
-          <p:cNvSpPr/>
-          <p:nvPr/>
-        </p:nvSpPr>
-        <p:spPr>
-          <a:xfrm>
-            <a:off x="2651760" y="685800"/>
-            <a:ext cx="2926080" cy="594360"/>
-          </a:xfrm>
-          <a:prstGeom prst="rect">
-            <a:avLst/>
-          </a:prstGeom>
-          <a:noFill/>
-          <a:ln/>
-        </p:spPr>
-        <p:txBody>
-          <a:bodyPr wrap="square" lIns="0" tIns="0" rIns="0" bIns="0" rtlCol="0" anchor="ctr"/>
-          <a:lstStyle/>
-          <a:p>
-            <a:pPr algn="ctr" indent="0" marL="0">
-              <a:buNone/>
-            </a:pPr>
-            <a:r>
-              <a:rPr lang="en-US" sz="1500" i="1" dirty="0">
-                <a:solidFill>
-                  <a:srgbClr val="000000"/>
-                </a:solidFill>
-                <a:latin typeface="Libre Baskerville" pitchFamily="34" charset="0"/>
-                <a:ea typeface="Libre Baskerville" pitchFamily="34" charset="-122"/>
-                <a:cs typeface="Libre Baskerville" pitchFamily="34" charset="-120"/>
-              </a:rPr>
-              <a:t>TRENDS</a:t>
-            </a:r>
-            <a:endParaRPr lang="en-US" sz="1500" dirty="0"/>
-          </a:p>
-        </p:txBody>
-      </p:sp>
-      <p:pic>
-        <p:nvPicPr>
-          <p:cNvPr id="8" name="Image 1" descr="/home/user/data-manipulation-exercises/.claude/skills/brand-guidelines/assets/textures/globe-lime.png">    </p:cNvPr>
-          <p:cNvPicPr>
-            <a:picLocks noChangeAspect="1"/>
-          </p:cNvPicPr>
-          <p:nvPr/>
-        </p:nvPicPr>
-        <p:blipFill>
-          <a:blip r:embed="rId2"/>
           <a:stretch>
             <a:fillRect/>
           </a:stretch>
         </p:blipFill>
         <p:spPr>
           <a:xfrm>
-            <a:off x="5403098" y="858164"/>
-            <a:ext cx="249631" cy="249631"/>
+            <a:off x="7315200" y="9235440"/>
+            <a:ext cx="502920" cy="502920"/>
           </a:xfrm>
           <a:prstGeom prst="rect">
             <a:avLst/>
@@ -4732,32 +4267,54 @@
       </p:pic>
       <p:sp>
         <p:nvSpPr>
-          <p:cNvPr id="9" name="Text 5"/>
-          <p:cNvSpPr/>
-          <p:nvPr/>
-        </p:nvSpPr>
-        <p:spPr>
-          <a:xfrm>
-            <a:off x="640080" y="1371600"/>
-            <a:ext cx="6949440" cy="1097280"/>
-          </a:xfrm>
-          <a:prstGeom prst="rect">
-            <a:avLst/>
-          </a:prstGeom>
-          <a:noFill/>
-          <a:ln/>
-        </p:spPr>
-        <p:txBody>
-          <a:bodyPr wrap="square" lIns="0" tIns="0" rIns="0" bIns="0" rtlCol="0" anchor="t"/>
+          <p:cNvPr id="7" name="Shape 4"/>
+          <p:cNvSpPr/>
+          <p:nvPr/>
+        </p:nvSpPr>
+        <p:spPr>
+          <a:xfrm>
+            <a:off x="411480" y="365760"/>
+            <a:ext cx="7406640" cy="8293608"/>
+          </a:xfrm>
+          <a:prstGeom prst="roundRect">
+            <a:avLst>
+              <a:gd name="adj" fmla="val 3086"/>
+            </a:avLst>
+          </a:prstGeom>
+          <a:solidFill>
+            <a:srgbClr val="000000"/>
+          </a:solidFill>
+          <a:ln/>
+        </p:spPr>
+      </p:sp>
+      <p:sp>
+        <p:nvSpPr>
+          <p:cNvPr id="8" name="Text 5"/>
+          <p:cNvSpPr/>
+          <p:nvPr/>
+        </p:nvSpPr>
+        <p:spPr>
+          <a:xfrm>
+            <a:off x="731520" y="640080"/>
+            <a:ext cx="6766560" cy="502920"/>
+          </a:xfrm>
+          <a:prstGeom prst="rect">
+            <a:avLst/>
+          </a:prstGeom>
+          <a:noFill/>
+          <a:ln/>
+        </p:spPr>
+        <p:txBody>
+          <a:bodyPr wrap="square" lIns="0" tIns="0" rIns="0" bIns="0" rtlCol="0" anchor="ctr"/>
           <a:lstStyle/>
           <a:p>
             <a:pPr algn="l" indent="0" marL="0">
               <a:buNone/>
             </a:pPr>
             <a:r>
-              <a:rPr lang="en-US" sz="3000" b="1" i="1" dirty="0">
-                <a:solidFill>
-                  <a:srgbClr val="000000"/>
+              <a:rPr lang="en-US" sz="2600" b="1" i="1" dirty="0">
+                <a:solidFill>
+                  <a:srgbClr val="DAFF94"/>
                 </a:solidFill>
                 <a:latin typeface="Libre Baskerville" pitchFamily="34" charset="0"/>
                 <a:ea typeface="Libre Baskerville" pitchFamily="34" charset="-122"/>
@@ -4765,16 +4322,60 @@
               </a:rPr>
               <a:t>GERAÇÃO</a:t>
             </a:r>
-            <a:endParaRPr lang="en-US" sz="3000" dirty="0"/>
-          </a:p>
-          <a:p>
-            <a:pPr algn="l" indent="0" marL="0">
-              <a:buNone/>
-            </a:pPr>
-            <a:r>
-              <a:rPr lang="en-US" sz="3000" b="1" i="1" dirty="0">
-                <a:solidFill>
-                  <a:srgbClr val="000000"/>
+            <a:endParaRPr lang="en-US" sz="2600" dirty="0"/>
+          </a:p>
+        </p:txBody>
+      </p:sp>
+      <p:sp>
+        <p:nvSpPr>
+          <p:cNvPr id="9" name="Shape 6"/>
+          <p:cNvSpPr/>
+          <p:nvPr/>
+        </p:nvSpPr>
+        <p:spPr>
+          <a:xfrm>
+            <a:off x="548640" y="1143000"/>
+            <a:ext cx="7132320" cy="566928"/>
+          </a:xfrm>
+          <a:prstGeom prst="ellipse">
+            <a:avLst/>
+          </a:prstGeom>
+          <a:ln w="19050">
+            <a:solidFill>
+              <a:srgbClr val="DAFF94"/>
+            </a:solidFill>
+            <a:prstDash val="solid"/>
+          </a:ln>
+        </p:spPr>
+      </p:sp>
+      <p:sp>
+        <p:nvSpPr>
+          <p:cNvPr id="10" name="Text 7"/>
+          <p:cNvSpPr/>
+          <p:nvPr/>
+        </p:nvSpPr>
+        <p:spPr>
+          <a:xfrm>
+            <a:off x="548640" y="1143000"/>
+            <a:ext cx="7132320" cy="566928"/>
+          </a:xfrm>
+          <a:prstGeom prst="rect">
+            <a:avLst/>
+          </a:prstGeom>
+          <a:noFill/>
+          <a:ln/>
+        </p:spPr>
+        <p:txBody>
+          <a:bodyPr wrap="square" lIns="0" tIns="0" rIns="0" bIns="0" rtlCol="0" anchor="ctr"/>
+          <a:lstStyle/>
+          <a:p>
+            <a:pPr algn="ctr" indent="0" marL="0">
+              <a:buNone/>
+            </a:pPr>
+            <a:r>
+              <a:rPr lang="en-US" sz="2000" b="1" i="1" dirty="0">
+                <a:solidFill>
+                  <a:srgbClr val="DAFF94"/>
                 </a:solidFill>
                 <a:latin typeface="Libre Baskerville" pitchFamily="34" charset="0"/>
                 <a:ea typeface="Libre Baskerville" pitchFamily="34" charset="-122"/>
@@ -4782,20 +4383,43 @@
               </a:rPr>
               <a:t>SEM RESSACA</a:t>
             </a:r>
-            <a:endParaRPr lang="en-US" sz="3000" dirty="0"/>
-          </a:p>
-        </p:txBody>
-      </p:sp>
-      <p:sp>
-        <p:nvSpPr>
-          <p:cNvPr id="10" name="Text 6"/>
-          <p:cNvSpPr/>
-          <p:nvPr/>
-        </p:nvSpPr>
-        <p:spPr>
-          <a:xfrm>
-            <a:off x="640080" y="2606040"/>
-            <a:ext cx="6949440" cy="822960"/>
+            <a:endParaRPr lang="en-US" sz="2000" dirty="0"/>
+          </a:p>
+        </p:txBody>
+      </p:sp>
+      <p:pic>
+        <p:nvPicPr>
+          <p:cNvPr id="11" name="Image 1" descr="/tmp/claude-0/-home-user-data-manipulation-exercises/f19acac8-ccb4-5197-8e49-c3b6029ad477/scratchpad/report-images/final/ig-sem-ressaca.jpg">    </p:cNvPr>
+          <p:cNvPicPr>
+            <a:picLocks noChangeAspect="1"/>
+          </p:cNvPicPr>
+          <p:nvPr/>
+        </p:nvPicPr>
+        <p:blipFill>
+          <a:blip r:embed="rId2"/>
+          <a:srcRect l="0" r="0" t="0" b="0"/>
+          <a:stretch/>
+        </p:blipFill>
+        <p:spPr>
+          <a:xfrm>
+            <a:off x="731520" y="1938528"/>
+            <a:ext cx="6766560" cy="5029200"/>
+          </a:xfrm>
+          <a:prstGeom prst="rect">
+            <a:avLst/>
+          </a:prstGeom>
+        </p:spPr>
+      </p:pic>
+      <p:sp>
+        <p:nvSpPr>
+          <p:cNvPr id="12" name="Text 8"/>
+          <p:cNvSpPr/>
+          <p:nvPr/>
+        </p:nvSpPr>
+        <p:spPr>
+          <a:xfrm>
+            <a:off x="731520" y="7242048"/>
+            <a:ext cx="6766560" cy="777240"/>
           </a:xfrm>
           <a:prstGeom prst="rect">
             <a:avLst/>
@@ -4811,9 +4435,9 @@
               <a:buNone/>
             </a:pPr>
             <a:r>
-              <a:rPr lang="en-US" sz="1500" b="1" dirty="0">
-                <a:solidFill>
-                  <a:srgbClr val="000000"/>
+              <a:rPr lang="en-US" sz="1400" b="1" dirty="0">
+                <a:solidFill>
+                  <a:srgbClr val="DAFF94"/>
                 </a:solidFill>
                 <a:latin typeface="Arial" pitchFamily="34" charset="0"/>
                 <a:ea typeface="Arial" pitchFamily="34" charset="-122"/>
@@ -4821,20 +4445,20 @@
               </a:rPr>
               <a:t>Beber menos virou parte da experiência — não o fim dela.</a:t>
             </a:r>
-            <a:endParaRPr lang="en-US" sz="1500" dirty="0"/>
-          </a:p>
-        </p:txBody>
-      </p:sp>
-      <p:sp>
-        <p:nvSpPr>
-          <p:cNvPr id="11" name="Text 7"/>
-          <p:cNvSpPr/>
-          <p:nvPr/>
-        </p:nvSpPr>
-        <p:spPr>
-          <a:xfrm>
-            <a:off x="640080" y="3566160"/>
-            <a:ext cx="6492240" cy="594360"/>
+            <a:endParaRPr lang="en-US" sz="1400" dirty="0"/>
+          </a:p>
+        </p:txBody>
+      </p:sp>
+      <p:sp>
+        <p:nvSpPr>
+          <p:cNvPr id="13" name="Text 9"/>
+          <p:cNvSpPr/>
+          <p:nvPr/>
+        </p:nvSpPr>
+        <p:spPr>
+          <a:xfrm>
+            <a:off x="731520" y="7927848"/>
+            <a:ext cx="6766560" cy="594360"/>
           </a:xfrm>
           <a:prstGeom prst="rect">
             <a:avLst/>
@@ -4852,7 +4476,7 @@
             <a:r>
               <a:rPr lang="en-US" sz="1000" dirty="0">
                 <a:solidFill>
-                  <a:srgbClr val="000000"/>
+                  <a:srgbClr val="DAFF94"/>
                 </a:solidFill>
                 <a:latin typeface="JetBrains Mono" pitchFamily="34" charset="0"/>
                 <a:ea typeface="JetBrains Mono" pitchFamily="34" charset="-122"/>
@@ -4864,69 +4488,6 @@
           </a:p>
         </p:txBody>
       </p:sp>
-      <p:sp>
-        <p:nvSpPr>
-          <p:cNvPr id="12" name="Text 8"/>
-          <p:cNvSpPr/>
-          <p:nvPr/>
-        </p:nvSpPr>
-        <p:spPr>
-          <a:xfrm>
-            <a:off x="640080" y="4343400"/>
-            <a:ext cx="1828800" cy="320040"/>
-          </a:xfrm>
-          <a:prstGeom prst="rect">
-            <a:avLst/>
-          </a:prstGeom>
-          <a:noFill/>
-          <a:ln/>
-        </p:spPr>
-        <p:txBody>
-          <a:bodyPr wrap="square" lIns="0" tIns="0" rIns="0" bIns="0" rtlCol="0" anchor="ctr"/>
-          <a:lstStyle/>
-          <a:p>
-            <a:pPr indent="0" marL="0">
-              <a:buNone/>
-            </a:pPr>
-            <a:r>
-              <a:rPr lang="en-US" sz="1000" dirty="0">
-                <a:solidFill>
-                  <a:srgbClr val="000000"/>
-                </a:solidFill>
-                <a:latin typeface="JetBrains Mono" pitchFamily="34" charset="0"/>
-                <a:ea typeface="JetBrains Mono" pitchFamily="34" charset="-122"/>
-                <a:cs typeface="JetBrains Mono" pitchFamily="34" charset="-120"/>
-              </a:rPr>
-              <a:t>3 / 5</a:t>
-            </a:r>
-            <a:endParaRPr lang="en-US" sz="1000" dirty="0"/>
-          </a:p>
-        </p:txBody>
-      </p:sp>
-      <p:pic>
-        <p:nvPicPr>
-          <p:cNvPr id="13" name="Image 2" descr="/home/user/data-manipulation-exercises/.claude/skills/brand-guidelines/assets/textures/arrow-lime.png">    </p:cNvPr>
-          <p:cNvPicPr>
-            <a:picLocks noChangeAspect="1"/>
-          </p:cNvPicPr>
-          <p:nvPr/>
-        </p:nvPicPr>
-        <p:blipFill>
-          <a:blip r:embed="rId3"/>
-          <a:stretch>
-            <a:fillRect/>
-          </a:stretch>
-        </p:blipFill>
-        <p:spPr>
-          <a:xfrm rot="5400000">
-            <a:off x="7223760" y="4279392"/>
-            <a:ext cx="292608" cy="292608"/>
-          </a:xfrm>
-          <a:prstGeom prst="rect">
-            <a:avLst/>
-          </a:prstGeom>
-        </p:spPr>
-      </p:pic>
     </p:spTree>
   </p:cSld>
   <p:clrMapOvr>
@@ -4959,9 +4520,165 @@
           <a:chExt cx="0" cy="0"/>
         </a:xfrm>
       </p:grpSpPr>
+      <p:sp>
+        <p:nvSpPr>
+          <p:cNvPr id="2" name="Text 0"/>
+          <p:cNvSpPr/>
+          <p:nvPr/>
+        </p:nvSpPr>
+        <p:spPr>
+          <a:xfrm>
+            <a:off x="411480" y="662940"/>
+            <a:ext cx="274320" cy="274320"/>
+          </a:xfrm>
+          <a:prstGeom prst="rect">
+            <a:avLst/>
+          </a:prstGeom>
+          <a:noFill/>
+          <a:ln/>
+        </p:spPr>
+        <p:txBody>
+          <a:bodyPr wrap="square" lIns="0" tIns="0" rIns="0" bIns="0" rtlCol="0" anchor="ctr"/>
+          <a:lstStyle/>
+          <a:p>
+            <a:pPr algn="ctr" indent="0" marL="0">
+              <a:buNone/>
+            </a:pPr>
+            <a:r>
+              <a:rPr lang="en-US" sz="1300" dirty="0">
+                <a:solidFill>
+                  <a:srgbClr val="333333"/>
+                </a:solidFill>
+                <a:latin typeface="Arial" pitchFamily="34" charset="0"/>
+                <a:ea typeface="Arial" pitchFamily="34" charset="-122"/>
+                <a:cs typeface="Arial" pitchFamily="34" charset="-120"/>
+              </a:rPr>
+              <a:t>+</a:t>
+            </a:r>
+            <a:endParaRPr lang="en-US" sz="1300" dirty="0"/>
+          </a:p>
+        </p:txBody>
+      </p:sp>
+      <p:sp>
+        <p:nvSpPr>
+          <p:cNvPr id="3" name="Text 1"/>
+          <p:cNvSpPr/>
+          <p:nvPr/>
+        </p:nvSpPr>
+        <p:spPr>
+          <a:xfrm>
+            <a:off x="2011680" y="662940"/>
+            <a:ext cx="274320" cy="274320"/>
+          </a:xfrm>
+          <a:prstGeom prst="rect">
+            <a:avLst/>
+          </a:prstGeom>
+          <a:noFill/>
+          <a:ln/>
+        </p:spPr>
+        <p:txBody>
+          <a:bodyPr wrap="square" lIns="0" tIns="0" rIns="0" bIns="0" rtlCol="0" anchor="ctr"/>
+          <a:lstStyle/>
+          <a:p>
+            <a:pPr algn="ctr" indent="0" marL="0">
+              <a:buNone/>
+            </a:pPr>
+            <a:r>
+              <a:rPr lang="en-US" sz="1300" dirty="0">
+                <a:solidFill>
+                  <a:srgbClr val="333333"/>
+                </a:solidFill>
+                <a:latin typeface="Arial" pitchFamily="34" charset="0"/>
+                <a:ea typeface="Arial" pitchFamily="34" charset="-122"/>
+                <a:cs typeface="Arial" pitchFamily="34" charset="-120"/>
+              </a:rPr>
+              <a:t>+</a:t>
+            </a:r>
+            <a:endParaRPr lang="en-US" sz="1300" dirty="0"/>
+          </a:p>
+        </p:txBody>
+      </p:sp>
+      <p:sp>
+        <p:nvSpPr>
+          <p:cNvPr id="4" name="Text 2"/>
+          <p:cNvSpPr/>
+          <p:nvPr/>
+        </p:nvSpPr>
+        <p:spPr>
+          <a:xfrm>
+            <a:off x="3611880" y="662940"/>
+            <a:ext cx="274320" cy="274320"/>
+          </a:xfrm>
+          <a:prstGeom prst="rect">
+            <a:avLst/>
+          </a:prstGeom>
+          <a:noFill/>
+          <a:ln/>
+        </p:spPr>
+        <p:txBody>
+          <a:bodyPr wrap="square" lIns="0" tIns="0" rIns="0" bIns="0" rtlCol="0" anchor="ctr"/>
+          <a:lstStyle/>
+          <a:p>
+            <a:pPr algn="ctr" indent="0" marL="0">
+              <a:buNone/>
+            </a:pPr>
+            <a:r>
+              <a:rPr lang="en-US" sz="1300" dirty="0">
+                <a:solidFill>
+                  <a:srgbClr val="333333"/>
+                </a:solidFill>
+                <a:latin typeface="Arial" pitchFamily="34" charset="0"/>
+                <a:ea typeface="Arial" pitchFamily="34" charset="-122"/>
+                <a:cs typeface="Arial" pitchFamily="34" charset="-120"/>
+              </a:rPr>
+              <a:t>+</a:t>
+            </a:r>
+            <a:endParaRPr lang="en-US" sz="1300" dirty="0"/>
+          </a:p>
+        </p:txBody>
+      </p:sp>
+      <p:sp>
+        <p:nvSpPr>
+          <p:cNvPr id="5" name="Text 3"/>
+          <p:cNvSpPr/>
+          <p:nvPr/>
+        </p:nvSpPr>
+        <p:spPr>
+          <a:xfrm>
+            <a:off x="5212080" y="662940"/>
+            <a:ext cx="274320" cy="274320"/>
+          </a:xfrm>
+          <a:prstGeom prst="rect">
+            <a:avLst/>
+          </a:prstGeom>
+          <a:noFill/>
+          <a:ln/>
+        </p:spPr>
+        <p:txBody>
+          <a:bodyPr wrap="square" lIns="0" tIns="0" rIns="0" bIns="0" rtlCol="0" anchor="ctr"/>
+          <a:lstStyle/>
+          <a:p>
+            <a:pPr algn="ctr" indent="0" marL="0">
+              <a:buNone/>
+            </a:pPr>
+            <a:r>
+              <a:rPr lang="en-US" sz="1300" dirty="0">
+                <a:solidFill>
+                  <a:srgbClr val="333333"/>
+                </a:solidFill>
+                <a:latin typeface="Arial" pitchFamily="34" charset="0"/>
+                <a:ea typeface="Arial" pitchFamily="34" charset="-122"/>
+                <a:cs typeface="Arial" pitchFamily="34" charset="-120"/>
+              </a:rPr>
+              <a:t>+</a:t>
+            </a:r>
+            <a:endParaRPr lang="en-US" sz="1300" dirty="0"/>
+          </a:p>
+        </p:txBody>
+      </p:sp>
       <p:pic>
         <p:nvPicPr>
-          <p:cNvPr id="2" name="Image 0" descr="/tmp/claude-0/-home-user-data-manipulation-exercises/f19acac8-ccb4-5197-8e49-c3b6029ad477/scratchpad/report-images/final/ig-sport-fandom.jpg">    </p:cNvPr>
+          <p:cNvPr id="6" name="Image 0" descr="/home/user/data-manipulation-exercises/.claude/skills/brand-guidelines/assets/textures/globe-lime.png">    </p:cNvPr>
           <p:cNvPicPr>
             <a:picLocks noChangeAspect="1"/>
           </p:cNvPicPr>
@@ -4969,13 +4686,14 @@
         </p:nvPicPr>
         <p:blipFill>
           <a:blip r:embed="rId1"/>
-          <a:srcRect l="0" r="0" t="0" b="0"/>
-          <a:stretch/>
+          <a:stretch>
+            <a:fillRect/>
+          </a:stretch>
         </p:blipFill>
         <p:spPr>
           <a:xfrm>
-            <a:off x="0" y="0"/>
-            <a:ext cx="8229600" cy="5349240"/>
+            <a:off x="7315200" y="548640"/>
+            <a:ext cx="502920" cy="502920"/>
           </a:xfrm>
           <a:prstGeom prst="rect">
             <a:avLst/>
@@ -4984,14 +4702,36 @@
       </p:pic>
       <p:sp>
         <p:nvSpPr>
-          <p:cNvPr id="3" name="Text 0"/>
-          <p:cNvSpPr/>
-          <p:nvPr/>
-        </p:nvSpPr>
-        <p:spPr>
-          <a:xfrm>
-            <a:off x="365760" y="5577840"/>
-            <a:ext cx="1828800" cy="274320"/>
+          <p:cNvPr id="7" name="Shape 4"/>
+          <p:cNvSpPr/>
+          <p:nvPr/>
+        </p:nvSpPr>
+        <p:spPr>
+          <a:xfrm>
+            <a:off x="411480" y="1444752"/>
+            <a:ext cx="7406640" cy="2990088"/>
+          </a:xfrm>
+          <a:prstGeom prst="roundRect">
+            <a:avLst>
+              <a:gd name="adj" fmla="val 7645"/>
+            </a:avLst>
+          </a:prstGeom>
+          <a:solidFill>
+            <a:srgbClr val="000000"/>
+          </a:solidFill>
+          <a:ln/>
+        </p:spPr>
+      </p:sp>
+      <p:sp>
+        <p:nvSpPr>
+          <p:cNvPr id="8" name="Text 5"/>
+          <p:cNvSpPr/>
+          <p:nvPr/>
+        </p:nvSpPr>
+        <p:spPr>
+          <a:xfrm>
+            <a:off x="731520" y="1719072"/>
+            <a:ext cx="6766560" cy="502920"/>
           </a:xfrm>
           <a:prstGeom prst="rect">
             <a:avLst/>
@@ -5007,46 +4747,7 @@
               <a:buNone/>
             </a:pPr>
             <a:r>
-              <a:rPr lang="en-US" sz="1000" b="1" dirty="0">
-                <a:solidFill>
-                  <a:srgbClr val="DAFF94"/>
-                </a:solidFill>
-                <a:latin typeface="JetBrains Mono" pitchFamily="34" charset="0"/>
-                <a:ea typeface="JetBrains Mono" pitchFamily="34" charset="-122"/>
-                <a:cs typeface="JetBrains Mono" pitchFamily="34" charset="-120"/>
-              </a:rPr>
-              <a:t>report↗</a:t>
-            </a:r>
-            <a:endParaRPr lang="en-US" sz="1000" dirty="0"/>
-          </a:p>
-        </p:txBody>
-      </p:sp>
-      <p:sp>
-        <p:nvSpPr>
-          <p:cNvPr id="4" name="Text 1"/>
-          <p:cNvSpPr/>
-          <p:nvPr/>
-        </p:nvSpPr>
-        <p:spPr>
-          <a:xfrm>
-            <a:off x="3200400" y="5577840"/>
-            <a:ext cx="1828800" cy="274320"/>
-          </a:xfrm>
-          <a:prstGeom prst="rect">
-            <a:avLst/>
-          </a:prstGeom>
-          <a:noFill/>
-          <a:ln/>
-        </p:spPr>
-        <p:txBody>
-          <a:bodyPr wrap="square" lIns="0" tIns="0" rIns="0" bIns="0" rtlCol="0" anchor="ctr"/>
-          <a:lstStyle/>
-          <a:p>
-            <a:pPr algn="ctr" indent="0" marL="0">
-              <a:buNone/>
-            </a:pPr>
-            <a:r>
-              <a:rPr lang="en-US" sz="1000" i="1" dirty="0">
+              <a:rPr lang="en-US" sz="2600" b="1" i="1" dirty="0">
                 <a:solidFill>
                   <a:srgbClr val="DAFF94"/>
                 </a:solidFill>
@@ -5054,61 +4755,22 @@
                 <a:ea typeface="Libre Baskerville" pitchFamily="34" charset="-122"/>
                 <a:cs typeface="Libre Baskerville" pitchFamily="34" charset="-120"/>
               </a:rPr>
-              <a:t>arpejo</a:t>
-            </a:r>
-            <a:endParaRPr lang="en-US" sz="1000" dirty="0"/>
-          </a:p>
-        </p:txBody>
-      </p:sp>
-      <p:sp>
-        <p:nvSpPr>
-          <p:cNvPr id="5" name="Text 2"/>
-          <p:cNvSpPr/>
-          <p:nvPr/>
-        </p:nvSpPr>
-        <p:spPr>
-          <a:xfrm>
-            <a:off x="6035040" y="5577840"/>
-            <a:ext cx="1828800" cy="274320"/>
-          </a:xfrm>
-          <a:prstGeom prst="rect">
-            <a:avLst/>
-          </a:prstGeom>
-          <a:noFill/>
-          <a:ln/>
-        </p:spPr>
-        <p:txBody>
-          <a:bodyPr wrap="square" lIns="0" tIns="0" rIns="0" bIns="0" rtlCol="0" anchor="ctr"/>
-          <a:lstStyle/>
-          <a:p>
-            <a:pPr algn="r" indent="0" marL="0">
-              <a:buNone/>
-            </a:pPr>
-            <a:r>
-              <a:rPr lang="en-US" sz="1000" dirty="0">
-                <a:solidFill>
-                  <a:srgbClr val="DAFF94"/>
-                </a:solidFill>
-                <a:latin typeface="JetBrains Mono" pitchFamily="34" charset="0"/>
-                <a:ea typeface="JetBrains Mono" pitchFamily="34" charset="-122"/>
-                <a:cs typeface="JetBrains Mono" pitchFamily="34" charset="-120"/>
-              </a:rPr>
-              <a:t>agosto_26</a:t>
-            </a:r>
-            <a:endParaRPr lang="en-US" sz="1000" dirty="0"/>
-          </a:p>
-        </p:txBody>
-      </p:sp>
-      <p:sp>
-        <p:nvSpPr>
-          <p:cNvPr id="6" name="Shape 3"/>
-          <p:cNvSpPr/>
-          <p:nvPr/>
-        </p:nvSpPr>
-        <p:spPr>
-          <a:xfrm>
-            <a:off x="2651760" y="6035040"/>
-            <a:ext cx="2926080" cy="594360"/>
+              <a:t>NEW-WAVE</a:t>
+            </a:r>
+            <a:endParaRPr lang="en-US" sz="2600" dirty="0"/>
+          </a:p>
+        </p:txBody>
+      </p:sp>
+      <p:sp>
+        <p:nvSpPr>
+          <p:cNvPr id="9" name="Shape 6"/>
+          <p:cNvSpPr/>
+          <p:nvPr/>
+        </p:nvSpPr>
+        <p:spPr>
+          <a:xfrm>
+            <a:off x="548640" y="2221992"/>
+            <a:ext cx="7132320" cy="566928"/>
           </a:xfrm>
           <a:prstGeom prst="ellipse">
             <a:avLst/>
@@ -5123,30 +4785,30 @@
       </p:sp>
       <p:sp>
         <p:nvSpPr>
-          <p:cNvPr id="7" name="Text 4"/>
-          <p:cNvSpPr/>
-          <p:nvPr/>
-        </p:nvSpPr>
-        <p:spPr>
-          <a:xfrm>
-            <a:off x="2651760" y="6035040"/>
-            <a:ext cx="2926080" cy="594360"/>
-          </a:xfrm>
-          <a:prstGeom prst="rect">
-            <a:avLst/>
-          </a:prstGeom>
-          <a:noFill/>
-          <a:ln/>
-        </p:spPr>
-        <p:txBody>
-          <a:bodyPr wrap="square" lIns="0" tIns="0" rIns="0" bIns="0" rtlCol="0" anchor="ctr"/>
-          <a:lstStyle/>
-          <a:p>
-            <a:pPr algn="ctr" indent="0" marL="0">
-              <a:buNone/>
-            </a:pPr>
-            <a:r>
-              <a:rPr lang="en-US" sz="1500" i="1" dirty="0">
+          <p:cNvPr id="10" name="Text 7"/>
+          <p:cNvSpPr/>
+          <p:nvPr/>
+        </p:nvSpPr>
+        <p:spPr>
+          <a:xfrm>
+            <a:off x="548640" y="2221992"/>
+            <a:ext cx="7132320" cy="566928"/>
+          </a:xfrm>
+          <a:prstGeom prst="rect">
+            <a:avLst/>
+          </a:prstGeom>
+          <a:noFill/>
+          <a:ln/>
+        </p:spPr>
+        <p:txBody>
+          <a:bodyPr wrap="square" lIns="0" tIns="0" rIns="0" bIns="0" rtlCol="0" anchor="ctr"/>
+          <a:lstStyle/>
+          <a:p>
+            <a:pPr algn="ctr" indent="0" marL="0">
+              <a:buNone/>
+            </a:pPr>
+            <a:r>
+              <a:rPr lang="en-US" sz="2000" b="1" i="1" dirty="0">
                 <a:solidFill>
                   <a:srgbClr val="DAFF94"/>
                 </a:solidFill>
@@ -5154,15 +4816,93 @@
                 <a:ea typeface="Libre Baskerville" pitchFamily="34" charset="-122"/>
                 <a:cs typeface="Libre Baskerville" pitchFamily="34" charset="-120"/>
               </a:rPr>
-              <a:t>TRENDS</a:t>
-            </a:r>
-            <a:endParaRPr lang="en-US" sz="1500" dirty="0"/>
+              <a:t>SPORT FANDOM</a:t>
+            </a:r>
+            <a:endParaRPr lang="en-US" sz="2000" dirty="0"/>
+          </a:p>
+        </p:txBody>
+      </p:sp>
+      <p:sp>
+        <p:nvSpPr>
+          <p:cNvPr id="11" name="Text 8"/>
+          <p:cNvSpPr/>
+          <p:nvPr/>
+        </p:nvSpPr>
+        <p:spPr>
+          <a:xfrm>
+            <a:off x="731520" y="3017520"/>
+            <a:ext cx="6766560" cy="777240"/>
+          </a:xfrm>
+          <a:prstGeom prst="rect">
+            <a:avLst/>
+          </a:prstGeom>
+          <a:noFill/>
+          <a:ln/>
+        </p:spPr>
+        <p:txBody>
+          <a:bodyPr wrap="square" lIns="0" tIns="0" rIns="0" bIns="0" rtlCol="0" anchor="t"/>
+          <a:lstStyle/>
+          <a:p>
+            <a:pPr algn="l" indent="0" marL="0">
+              <a:buNone/>
+            </a:pPr>
+            <a:r>
+              <a:rPr lang="en-US" sz="1400" b="1" dirty="0">
+                <a:solidFill>
+                  <a:srgbClr val="DAFF94"/>
+                </a:solidFill>
+                <a:latin typeface="Arial" pitchFamily="34" charset="0"/>
+                <a:ea typeface="Arial" pitchFamily="34" charset="-122"/>
+                <a:cs typeface="Arial" pitchFamily="34" charset="-120"/>
+              </a:rPr>
+              <a:t>O esporte tem uma nova torcida: jovem, feminina e apaixonada por estilo.</a:t>
+            </a:r>
+            <a:endParaRPr lang="en-US" sz="1400" dirty="0"/>
+          </a:p>
+        </p:txBody>
+      </p:sp>
+      <p:sp>
+        <p:nvSpPr>
+          <p:cNvPr id="12" name="Text 9"/>
+          <p:cNvSpPr/>
+          <p:nvPr/>
+        </p:nvSpPr>
+        <p:spPr>
+          <a:xfrm>
+            <a:off x="731520" y="3703320"/>
+            <a:ext cx="6766560" cy="594360"/>
+          </a:xfrm>
+          <a:prstGeom prst="rect">
+            <a:avLst/>
+          </a:prstGeom>
+          <a:noFill/>
+          <a:ln/>
+        </p:spPr>
+        <p:txBody>
+          <a:bodyPr wrap="square" lIns="0" tIns="0" rIns="0" bIns="0" rtlCol="0" anchor="t"/>
+          <a:lstStyle/>
+          <a:p>
+            <a:pPr algn="l" indent="0" marL="0">
+              <a:buNone/>
+            </a:pPr>
+            <a:r>
+              <a:rPr lang="en-US" sz="1000" dirty="0">
+                <a:solidFill>
+                  <a:srgbClr val="DAFF94"/>
+                </a:solidFill>
+                <a:latin typeface="JetBrains Mono" pitchFamily="34" charset="0"/>
+                <a:ea typeface="JetBrains Mono" pitchFamily="34" charset="-122"/>
+                <a:cs typeface="JetBrains Mono" pitchFamily="34" charset="-120"/>
+              </a:rPr>
+              <a:t>3 em cada 4 novos fãs de Fórmula 1 são mulheres.</a:t>
+            </a:r>
+            <a:endParaRPr lang="en-US" sz="1000" dirty="0"/>
           </a:p>
         </p:txBody>
       </p:sp>
       <p:pic>
         <p:nvPicPr>
-          <p:cNvPr id="8" name="Image 1" descr="/home/user/data-manipulation-exercises/.claude/skills/brand-guidelines/assets/textures/globe-lime.png">    </p:cNvPr>
+          <p:cNvPr id="13" name="Image 1" descr="/tmp/claude-0/-home-user-data-manipulation-exercises/f19acac8-ccb4-5197-8e49-c3b6029ad477/scratchpad/report-images/final/ig-sport-fandom.jpg">    </p:cNvPr>
           <p:cNvPicPr>
             <a:picLocks noChangeAspect="1"/>
           </p:cNvPicPr>
@@ -5170,211 +4910,13 @@
         </p:nvPicPr>
         <p:blipFill>
           <a:blip r:embed="rId2"/>
-          <a:stretch>
-            <a:fillRect/>
-          </a:stretch>
+          <a:srcRect l="0" r="0" t="0" b="0"/>
+          <a:stretch/>
         </p:blipFill>
         <p:spPr>
           <a:xfrm>
-            <a:off x="5403098" y="6207404"/>
-            <a:ext cx="249631" cy="249631"/>
-          </a:xfrm>
-          <a:prstGeom prst="rect">
-            <a:avLst/>
-          </a:prstGeom>
-        </p:spPr>
-      </p:pic>
-      <p:sp>
-        <p:nvSpPr>
-          <p:cNvPr id="9" name="Text 5"/>
-          <p:cNvSpPr/>
-          <p:nvPr/>
-        </p:nvSpPr>
-        <p:spPr>
-          <a:xfrm>
-            <a:off x="640080" y="6720840"/>
-            <a:ext cx="6949440" cy="1097280"/>
-          </a:xfrm>
-          <a:prstGeom prst="rect">
-            <a:avLst/>
-          </a:prstGeom>
-          <a:noFill/>
-          <a:ln/>
-        </p:spPr>
-        <p:txBody>
-          <a:bodyPr wrap="square" lIns="0" tIns="0" rIns="0" bIns="0" rtlCol="0" anchor="t"/>
-          <a:lstStyle/>
-          <a:p>
-            <a:pPr algn="l" indent="0" marL="0">
-              <a:buNone/>
-            </a:pPr>
-            <a:r>
-              <a:rPr lang="en-US" sz="3000" b="1" i="1" dirty="0">
-                <a:solidFill>
-                  <a:srgbClr val="DAFF94"/>
-                </a:solidFill>
-                <a:latin typeface="Libre Baskerville" pitchFamily="34" charset="0"/>
-                <a:ea typeface="Libre Baskerville" pitchFamily="34" charset="-122"/>
-                <a:cs typeface="Libre Baskerville" pitchFamily="34" charset="-120"/>
-              </a:rPr>
-              <a:t>NEW-WAVE</a:t>
-            </a:r>
-            <a:endParaRPr lang="en-US" sz="3000" dirty="0"/>
-          </a:p>
-          <a:p>
-            <a:pPr algn="l" indent="0" marL="0">
-              <a:buNone/>
-            </a:pPr>
-            <a:r>
-              <a:rPr lang="en-US" sz="3000" b="1" i="1" dirty="0">
-                <a:solidFill>
-                  <a:srgbClr val="DAFF94"/>
-                </a:solidFill>
-                <a:latin typeface="Libre Baskerville" pitchFamily="34" charset="0"/>
-                <a:ea typeface="Libre Baskerville" pitchFamily="34" charset="-122"/>
-                <a:cs typeface="Libre Baskerville" pitchFamily="34" charset="-120"/>
-              </a:rPr>
-              <a:t>SPORT FANDOM</a:t>
-            </a:r>
-            <a:endParaRPr lang="en-US" sz="3000" dirty="0"/>
-          </a:p>
-        </p:txBody>
-      </p:sp>
-      <p:sp>
-        <p:nvSpPr>
-          <p:cNvPr id="10" name="Text 6"/>
-          <p:cNvSpPr/>
-          <p:nvPr/>
-        </p:nvSpPr>
-        <p:spPr>
-          <a:xfrm>
-            <a:off x="640080" y="7955280"/>
-            <a:ext cx="6949440" cy="822960"/>
-          </a:xfrm>
-          <a:prstGeom prst="rect">
-            <a:avLst/>
-          </a:prstGeom>
-          <a:noFill/>
-          <a:ln/>
-        </p:spPr>
-        <p:txBody>
-          <a:bodyPr wrap="square" lIns="0" tIns="0" rIns="0" bIns="0" rtlCol="0" anchor="t"/>
-          <a:lstStyle/>
-          <a:p>
-            <a:pPr algn="l" indent="0" marL="0">
-              <a:buNone/>
-            </a:pPr>
-            <a:r>
-              <a:rPr lang="en-US" sz="1500" b="1" dirty="0">
-                <a:solidFill>
-                  <a:srgbClr val="DAFF94"/>
-                </a:solidFill>
-                <a:latin typeface="Arial" pitchFamily="34" charset="0"/>
-                <a:ea typeface="Arial" pitchFamily="34" charset="-122"/>
-                <a:cs typeface="Arial" pitchFamily="34" charset="-120"/>
-              </a:rPr>
-              <a:t>O esporte tem uma nova torcida: jovem, feminina e apaixonada por estilo.</a:t>
-            </a:r>
-            <a:endParaRPr lang="en-US" sz="1500" dirty="0"/>
-          </a:p>
-        </p:txBody>
-      </p:sp>
-      <p:sp>
-        <p:nvSpPr>
-          <p:cNvPr id="11" name="Text 7"/>
-          <p:cNvSpPr/>
-          <p:nvPr/>
-        </p:nvSpPr>
-        <p:spPr>
-          <a:xfrm>
-            <a:off x="640080" y="8915400"/>
-            <a:ext cx="6492240" cy="594360"/>
-          </a:xfrm>
-          <a:prstGeom prst="rect">
-            <a:avLst/>
-          </a:prstGeom>
-          <a:noFill/>
-          <a:ln/>
-        </p:spPr>
-        <p:txBody>
-          <a:bodyPr wrap="square" lIns="0" tIns="0" rIns="0" bIns="0" rtlCol="0" anchor="t"/>
-          <a:lstStyle/>
-          <a:p>
-            <a:pPr algn="l" indent="0" marL="0">
-              <a:buNone/>
-            </a:pPr>
-            <a:r>
-              <a:rPr lang="en-US" sz="1000" dirty="0">
-                <a:solidFill>
-                  <a:srgbClr val="DAFF94"/>
-                </a:solidFill>
-                <a:latin typeface="JetBrains Mono" pitchFamily="34" charset="0"/>
-                <a:ea typeface="JetBrains Mono" pitchFamily="34" charset="-122"/>
-                <a:cs typeface="JetBrains Mono" pitchFamily="34" charset="-120"/>
-              </a:rPr>
-              <a:t>3 em cada 4 novos fãs de Fórmula 1 são mulheres.</a:t>
-            </a:r>
-            <a:endParaRPr lang="en-US" sz="1000" dirty="0"/>
-          </a:p>
-        </p:txBody>
-      </p:sp>
-      <p:sp>
-        <p:nvSpPr>
-          <p:cNvPr id="12" name="Text 8"/>
-          <p:cNvSpPr/>
-          <p:nvPr/>
-        </p:nvSpPr>
-        <p:spPr>
-          <a:xfrm>
-            <a:off x="640080" y="9692640"/>
-            <a:ext cx="1828800" cy="320040"/>
-          </a:xfrm>
-          <a:prstGeom prst="rect">
-            <a:avLst/>
-          </a:prstGeom>
-          <a:noFill/>
-          <a:ln/>
-        </p:spPr>
-        <p:txBody>
-          <a:bodyPr wrap="square" lIns="0" tIns="0" rIns="0" bIns="0" rtlCol="0" anchor="ctr"/>
-          <a:lstStyle/>
-          <a:p>
-            <a:pPr indent="0" marL="0">
-              <a:buNone/>
-            </a:pPr>
-            <a:r>
-              <a:rPr lang="en-US" sz="1000" dirty="0">
-                <a:solidFill>
-                  <a:srgbClr val="DAFF94"/>
-                </a:solidFill>
-                <a:latin typeface="JetBrains Mono" pitchFamily="34" charset="0"/>
-                <a:ea typeface="JetBrains Mono" pitchFamily="34" charset="-122"/>
-                <a:cs typeface="JetBrains Mono" pitchFamily="34" charset="-120"/>
-              </a:rPr>
-              <a:t>4 / 5</a:t>
-            </a:r>
-            <a:endParaRPr lang="en-US" sz="1000" dirty="0"/>
-          </a:p>
-        </p:txBody>
-      </p:sp>
-      <p:pic>
-        <p:nvPicPr>
-          <p:cNvPr id="13" name="Image 2" descr="/home/user/data-manipulation-exercises/.claude/skills/brand-guidelines/assets/textures/arrow-lime.png">    </p:cNvPr>
-          <p:cNvPicPr>
-            <a:picLocks noChangeAspect="1"/>
-          </p:cNvPicPr>
-          <p:nvPr/>
-        </p:nvPicPr>
-        <p:blipFill>
-          <a:blip r:embed="rId3"/>
-          <a:stretch>
-            <a:fillRect/>
-          </a:stretch>
-        </p:blipFill>
-        <p:spPr>
-          <a:xfrm rot="5400000">
-            <a:off x="7223760" y="9628632"/>
-            <a:ext cx="292608" cy="292608"/>
+            <a:off x="0" y="4389120"/>
+            <a:ext cx="8229600" cy="5897880"/>
           </a:xfrm>
           <a:prstGeom prst="rect">
             <a:avLst/>
@@ -5413,9 +4955,165 @@
           <a:chExt cx="0" cy="0"/>
         </a:xfrm>
       </p:grpSpPr>
+      <p:sp>
+        <p:nvSpPr>
+          <p:cNvPr id="2" name="Text 0"/>
+          <p:cNvSpPr/>
+          <p:nvPr/>
+        </p:nvSpPr>
+        <p:spPr>
+          <a:xfrm>
+            <a:off x="411480" y="9349740"/>
+            <a:ext cx="274320" cy="274320"/>
+          </a:xfrm>
+          <a:prstGeom prst="rect">
+            <a:avLst/>
+          </a:prstGeom>
+          <a:noFill/>
+          <a:ln/>
+        </p:spPr>
+        <p:txBody>
+          <a:bodyPr wrap="square" lIns="0" tIns="0" rIns="0" bIns="0" rtlCol="0" anchor="ctr"/>
+          <a:lstStyle/>
+          <a:p>
+            <a:pPr algn="ctr" indent="0" marL="0">
+              <a:buNone/>
+            </a:pPr>
+            <a:r>
+              <a:rPr lang="en-US" sz="1300" dirty="0">
+                <a:solidFill>
+                  <a:srgbClr val="000000"/>
+                </a:solidFill>
+                <a:latin typeface="Arial" pitchFamily="34" charset="0"/>
+                <a:ea typeface="Arial" pitchFamily="34" charset="-122"/>
+                <a:cs typeface="Arial" pitchFamily="34" charset="-120"/>
+              </a:rPr>
+              <a:t>+</a:t>
+            </a:r>
+            <a:endParaRPr lang="en-US" sz="1300" dirty="0"/>
+          </a:p>
+        </p:txBody>
+      </p:sp>
+      <p:sp>
+        <p:nvSpPr>
+          <p:cNvPr id="3" name="Text 1"/>
+          <p:cNvSpPr/>
+          <p:nvPr/>
+        </p:nvSpPr>
+        <p:spPr>
+          <a:xfrm>
+            <a:off x="2011680" y="9349740"/>
+            <a:ext cx="274320" cy="274320"/>
+          </a:xfrm>
+          <a:prstGeom prst="rect">
+            <a:avLst/>
+          </a:prstGeom>
+          <a:noFill/>
+          <a:ln/>
+        </p:spPr>
+        <p:txBody>
+          <a:bodyPr wrap="square" lIns="0" tIns="0" rIns="0" bIns="0" rtlCol="0" anchor="ctr"/>
+          <a:lstStyle/>
+          <a:p>
+            <a:pPr algn="ctr" indent="0" marL="0">
+              <a:buNone/>
+            </a:pPr>
+            <a:r>
+              <a:rPr lang="en-US" sz="1300" dirty="0">
+                <a:solidFill>
+                  <a:srgbClr val="000000"/>
+                </a:solidFill>
+                <a:latin typeface="Arial" pitchFamily="34" charset="0"/>
+                <a:ea typeface="Arial" pitchFamily="34" charset="-122"/>
+                <a:cs typeface="Arial" pitchFamily="34" charset="-120"/>
+              </a:rPr>
+              <a:t>+</a:t>
+            </a:r>
+            <a:endParaRPr lang="en-US" sz="1300" dirty="0"/>
+          </a:p>
+        </p:txBody>
+      </p:sp>
+      <p:sp>
+        <p:nvSpPr>
+          <p:cNvPr id="4" name="Text 2"/>
+          <p:cNvSpPr/>
+          <p:nvPr/>
+        </p:nvSpPr>
+        <p:spPr>
+          <a:xfrm>
+            <a:off x="3611880" y="9349740"/>
+            <a:ext cx="274320" cy="274320"/>
+          </a:xfrm>
+          <a:prstGeom prst="rect">
+            <a:avLst/>
+          </a:prstGeom>
+          <a:noFill/>
+          <a:ln/>
+        </p:spPr>
+        <p:txBody>
+          <a:bodyPr wrap="square" lIns="0" tIns="0" rIns="0" bIns="0" rtlCol="0" anchor="ctr"/>
+          <a:lstStyle/>
+          <a:p>
+            <a:pPr algn="ctr" indent="0" marL="0">
+              <a:buNone/>
+            </a:pPr>
+            <a:r>
+              <a:rPr lang="en-US" sz="1300" dirty="0">
+                <a:solidFill>
+                  <a:srgbClr val="000000"/>
+                </a:solidFill>
+                <a:latin typeface="Arial" pitchFamily="34" charset="0"/>
+                <a:ea typeface="Arial" pitchFamily="34" charset="-122"/>
+                <a:cs typeface="Arial" pitchFamily="34" charset="-120"/>
+              </a:rPr>
+              <a:t>+</a:t>
+            </a:r>
+            <a:endParaRPr lang="en-US" sz="1300" dirty="0"/>
+          </a:p>
+        </p:txBody>
+      </p:sp>
+      <p:sp>
+        <p:nvSpPr>
+          <p:cNvPr id="5" name="Text 3"/>
+          <p:cNvSpPr/>
+          <p:nvPr/>
+        </p:nvSpPr>
+        <p:spPr>
+          <a:xfrm>
+            <a:off x="5212080" y="9349740"/>
+            <a:ext cx="274320" cy="274320"/>
+          </a:xfrm>
+          <a:prstGeom prst="rect">
+            <a:avLst/>
+          </a:prstGeom>
+          <a:noFill/>
+          <a:ln/>
+        </p:spPr>
+        <p:txBody>
+          <a:bodyPr wrap="square" lIns="0" tIns="0" rIns="0" bIns="0" rtlCol="0" anchor="ctr"/>
+          <a:lstStyle/>
+          <a:p>
+            <a:pPr algn="ctr" indent="0" marL="0">
+              <a:buNone/>
+            </a:pPr>
+            <a:r>
+              <a:rPr lang="en-US" sz="1300" dirty="0">
+                <a:solidFill>
+                  <a:srgbClr val="000000"/>
+                </a:solidFill>
+                <a:latin typeface="Arial" pitchFamily="34" charset="0"/>
+                <a:ea typeface="Arial" pitchFamily="34" charset="-122"/>
+                <a:cs typeface="Arial" pitchFamily="34" charset="-120"/>
+              </a:rPr>
+              <a:t>+</a:t>
+            </a:r>
+            <a:endParaRPr lang="en-US" sz="1300" dirty="0"/>
+          </a:p>
+        </p:txBody>
+      </p:sp>
       <p:pic>
         <p:nvPicPr>
-          <p:cNvPr id="2" name="Image 0" descr="/tmp/claude-0/-home-user-data-manipulation-exercises/f19acac8-ccb4-5197-8e49-c3b6029ad477/scratchpad/report-images/final/ig-experiencias-transformadoras.jpg">    </p:cNvPr>
+          <p:cNvPr id="6" name="Image 0" descr="/home/user/data-manipulation-exercises/.claude/skills/brand-guidelines/assets/textures/globe-black.png">    </p:cNvPr>
           <p:cNvPicPr>
             <a:picLocks noChangeAspect="1"/>
           </p:cNvPicPr>
@@ -5423,215 +5121,14 @@
         </p:nvPicPr>
         <p:blipFill>
           <a:blip r:embed="rId1"/>
-          <a:srcRect l="0" r="0" t="0" b="0"/>
-          <a:stretch/>
-        </p:blipFill>
-        <p:spPr>
-          <a:xfrm>
-            <a:off x="0" y="4937760"/>
-            <a:ext cx="8229600" cy="5349240"/>
-          </a:xfrm>
-          <a:prstGeom prst="rect">
-            <a:avLst/>
-          </a:prstGeom>
-        </p:spPr>
-      </p:pic>
-      <p:sp>
-        <p:nvSpPr>
-          <p:cNvPr id="3" name="Text 0"/>
-          <p:cNvSpPr/>
-          <p:nvPr/>
-        </p:nvSpPr>
-        <p:spPr>
-          <a:xfrm>
-            <a:off x="365760" y="228600"/>
-            <a:ext cx="1828800" cy="274320"/>
-          </a:xfrm>
-          <a:prstGeom prst="rect">
-            <a:avLst/>
-          </a:prstGeom>
-          <a:noFill/>
-          <a:ln/>
-        </p:spPr>
-        <p:txBody>
-          <a:bodyPr wrap="square" lIns="0" tIns="0" rIns="0" bIns="0" rtlCol="0" anchor="ctr"/>
-          <a:lstStyle/>
-          <a:p>
-            <a:pPr algn="l" indent="0" marL="0">
-              <a:buNone/>
-            </a:pPr>
-            <a:r>
-              <a:rPr lang="en-US" sz="1000" b="1" dirty="0">
-                <a:solidFill>
-                  <a:srgbClr val="DAFF94"/>
-                </a:solidFill>
-                <a:latin typeface="JetBrains Mono" pitchFamily="34" charset="0"/>
-                <a:ea typeface="JetBrains Mono" pitchFamily="34" charset="-122"/>
-                <a:cs typeface="JetBrains Mono" pitchFamily="34" charset="-120"/>
-              </a:rPr>
-              <a:t>report↗</a:t>
-            </a:r>
-            <a:endParaRPr lang="en-US" sz="1000" dirty="0"/>
-          </a:p>
-        </p:txBody>
-      </p:sp>
-      <p:sp>
-        <p:nvSpPr>
-          <p:cNvPr id="4" name="Text 1"/>
-          <p:cNvSpPr/>
-          <p:nvPr/>
-        </p:nvSpPr>
-        <p:spPr>
-          <a:xfrm>
-            <a:off x="3200400" y="228600"/>
-            <a:ext cx="1828800" cy="274320"/>
-          </a:xfrm>
-          <a:prstGeom prst="rect">
-            <a:avLst/>
-          </a:prstGeom>
-          <a:noFill/>
-          <a:ln/>
-        </p:spPr>
-        <p:txBody>
-          <a:bodyPr wrap="square" lIns="0" tIns="0" rIns="0" bIns="0" rtlCol="0" anchor="ctr"/>
-          <a:lstStyle/>
-          <a:p>
-            <a:pPr algn="ctr" indent="0" marL="0">
-              <a:buNone/>
-            </a:pPr>
-            <a:r>
-              <a:rPr lang="en-US" sz="1000" i="1" dirty="0">
-                <a:solidFill>
-                  <a:srgbClr val="DAFF94"/>
-                </a:solidFill>
-                <a:latin typeface="Libre Baskerville" pitchFamily="34" charset="0"/>
-                <a:ea typeface="Libre Baskerville" pitchFamily="34" charset="-122"/>
-                <a:cs typeface="Libre Baskerville" pitchFamily="34" charset="-120"/>
-              </a:rPr>
-              <a:t>arpejo</a:t>
-            </a:r>
-            <a:endParaRPr lang="en-US" sz="1000" dirty="0"/>
-          </a:p>
-        </p:txBody>
-      </p:sp>
-      <p:sp>
-        <p:nvSpPr>
-          <p:cNvPr id="5" name="Text 2"/>
-          <p:cNvSpPr/>
-          <p:nvPr/>
-        </p:nvSpPr>
-        <p:spPr>
-          <a:xfrm>
-            <a:off x="6035040" y="228600"/>
-            <a:ext cx="1828800" cy="274320"/>
-          </a:xfrm>
-          <a:prstGeom prst="rect">
-            <a:avLst/>
-          </a:prstGeom>
-          <a:noFill/>
-          <a:ln/>
-        </p:spPr>
-        <p:txBody>
-          <a:bodyPr wrap="square" lIns="0" tIns="0" rIns="0" bIns="0" rtlCol="0" anchor="ctr"/>
-          <a:lstStyle/>
-          <a:p>
-            <a:pPr algn="r" indent="0" marL="0">
-              <a:buNone/>
-            </a:pPr>
-            <a:r>
-              <a:rPr lang="en-US" sz="1000" dirty="0">
-                <a:solidFill>
-                  <a:srgbClr val="DAFF94"/>
-                </a:solidFill>
-                <a:latin typeface="JetBrains Mono" pitchFamily="34" charset="0"/>
-                <a:ea typeface="JetBrains Mono" pitchFamily="34" charset="-122"/>
-                <a:cs typeface="JetBrains Mono" pitchFamily="34" charset="-120"/>
-              </a:rPr>
-              <a:t>agosto_26</a:t>
-            </a:r>
-            <a:endParaRPr lang="en-US" sz="1000" dirty="0"/>
-          </a:p>
-        </p:txBody>
-      </p:sp>
-      <p:sp>
-        <p:nvSpPr>
-          <p:cNvPr id="6" name="Shape 3"/>
-          <p:cNvSpPr/>
-          <p:nvPr/>
-        </p:nvSpPr>
-        <p:spPr>
-          <a:xfrm>
-            <a:off x="2651760" y="685800"/>
-            <a:ext cx="2926080" cy="594360"/>
-          </a:xfrm>
-          <a:prstGeom prst="ellipse">
-            <a:avLst/>
-          </a:prstGeom>
-          <a:ln w="19050">
-            <a:solidFill>
-              <a:srgbClr val="DAFF94"/>
-            </a:solidFill>
-            <a:prstDash val="solid"/>
-          </a:ln>
-        </p:spPr>
-      </p:sp>
-      <p:sp>
-        <p:nvSpPr>
-          <p:cNvPr id="7" name="Text 4"/>
-          <p:cNvSpPr/>
-          <p:nvPr/>
-        </p:nvSpPr>
-        <p:spPr>
-          <a:xfrm>
-            <a:off x="2651760" y="685800"/>
-            <a:ext cx="2926080" cy="594360"/>
-          </a:xfrm>
-          <a:prstGeom prst="rect">
-            <a:avLst/>
-          </a:prstGeom>
-          <a:noFill/>
-          <a:ln/>
-        </p:spPr>
-        <p:txBody>
-          <a:bodyPr wrap="square" lIns="0" tIns="0" rIns="0" bIns="0" rtlCol="0" anchor="ctr"/>
-          <a:lstStyle/>
-          <a:p>
-            <a:pPr algn="ctr" indent="0" marL="0">
-              <a:buNone/>
-            </a:pPr>
-            <a:r>
-              <a:rPr lang="en-US" sz="1500" i="1" dirty="0">
-                <a:solidFill>
-                  <a:srgbClr val="DAFF94"/>
-                </a:solidFill>
-                <a:latin typeface="Libre Baskerville" pitchFamily="34" charset="0"/>
-                <a:ea typeface="Libre Baskerville" pitchFamily="34" charset="-122"/>
-                <a:cs typeface="Libre Baskerville" pitchFamily="34" charset="-120"/>
-              </a:rPr>
-              <a:t>TRENDS</a:t>
-            </a:r>
-            <a:endParaRPr lang="en-US" sz="1500" dirty="0"/>
-          </a:p>
-        </p:txBody>
-      </p:sp>
-      <p:pic>
-        <p:nvPicPr>
-          <p:cNvPr id="8" name="Image 1" descr="/home/user/data-manipulation-exercises/.claude/skills/brand-guidelines/assets/textures/globe-lime.png">    </p:cNvPr>
-          <p:cNvPicPr>
-            <a:picLocks noChangeAspect="1"/>
-          </p:cNvPicPr>
-          <p:nvPr/>
-        </p:nvPicPr>
-        <p:blipFill>
-          <a:blip r:embed="rId2"/>
           <a:stretch>
             <a:fillRect/>
           </a:stretch>
         </p:blipFill>
         <p:spPr>
           <a:xfrm>
-            <a:off x="5403098" y="858164"/>
-            <a:ext cx="249631" cy="249631"/>
+            <a:off x="7315200" y="9235440"/>
+            <a:ext cx="502920" cy="502920"/>
           </a:xfrm>
           <a:prstGeom prst="rect">
             <a:avLst/>
@@ -5640,32 +5137,54 @@
       </p:pic>
       <p:sp>
         <p:nvSpPr>
-          <p:cNvPr id="9" name="Text 5"/>
-          <p:cNvSpPr/>
-          <p:nvPr/>
-        </p:nvSpPr>
-        <p:spPr>
-          <a:xfrm>
-            <a:off x="640080" y="1371600"/>
-            <a:ext cx="6949440" cy="1097280"/>
-          </a:xfrm>
-          <a:prstGeom prst="rect">
-            <a:avLst/>
-          </a:prstGeom>
-          <a:noFill/>
-          <a:ln/>
-        </p:spPr>
-        <p:txBody>
-          <a:bodyPr wrap="square" lIns="0" tIns="0" rIns="0" bIns="0" rtlCol="0" anchor="t"/>
+          <p:cNvPr id="7" name="Shape 4"/>
+          <p:cNvSpPr/>
+          <p:nvPr/>
+        </p:nvSpPr>
+        <p:spPr>
+          <a:xfrm>
+            <a:off x="411480" y="365760"/>
+            <a:ext cx="7406640" cy="8293608"/>
+          </a:xfrm>
+          <a:prstGeom prst="roundRect">
+            <a:avLst>
+              <a:gd name="adj" fmla="val 3086"/>
+            </a:avLst>
+          </a:prstGeom>
+          <a:solidFill>
+            <a:srgbClr val="000000"/>
+          </a:solidFill>
+          <a:ln/>
+        </p:spPr>
+      </p:sp>
+      <p:sp>
+        <p:nvSpPr>
+          <p:cNvPr id="8" name="Text 5"/>
+          <p:cNvSpPr/>
+          <p:nvPr/>
+        </p:nvSpPr>
+        <p:spPr>
+          <a:xfrm>
+            <a:off x="731520" y="640080"/>
+            <a:ext cx="6766560" cy="502920"/>
+          </a:xfrm>
+          <a:prstGeom prst="rect">
+            <a:avLst/>
+          </a:prstGeom>
+          <a:noFill/>
+          <a:ln/>
+        </p:spPr>
+        <p:txBody>
+          <a:bodyPr wrap="square" lIns="0" tIns="0" rIns="0" bIns="0" rtlCol="0" anchor="ctr"/>
           <a:lstStyle/>
           <a:p>
             <a:pPr algn="l" indent="0" marL="0">
               <a:buNone/>
             </a:pPr>
             <a:r>
-              <a:rPr lang="en-US" sz="3000" b="1" i="1" dirty="0">
-                <a:solidFill>
-                  <a:srgbClr val="DAFF94"/>
+              <a:rPr lang="en-US" sz="2600" b="1" i="1" dirty="0">
+                <a:solidFill>
+                  <a:srgbClr val="FF7C51"/>
                 </a:solidFill>
                 <a:latin typeface="Libre Baskerville" pitchFamily="34" charset="0"/>
                 <a:ea typeface="Libre Baskerville" pitchFamily="34" charset="-122"/>
@@ -5673,16 +5192,60 @@
               </a:rPr>
               <a:t>EXPERIÊNCIAS</a:t>
             </a:r>
-            <a:endParaRPr lang="en-US" sz="3000" dirty="0"/>
-          </a:p>
-          <a:p>
-            <a:pPr algn="l" indent="0" marL="0">
-              <a:buNone/>
-            </a:pPr>
-            <a:r>
-              <a:rPr lang="en-US" sz="3000" b="1" i="1" dirty="0">
-                <a:solidFill>
-                  <a:srgbClr val="DAFF94"/>
+            <a:endParaRPr lang="en-US" sz="2600" dirty="0"/>
+          </a:p>
+        </p:txBody>
+      </p:sp>
+      <p:sp>
+        <p:nvSpPr>
+          <p:cNvPr id="9" name="Shape 6"/>
+          <p:cNvSpPr/>
+          <p:nvPr/>
+        </p:nvSpPr>
+        <p:spPr>
+          <a:xfrm>
+            <a:off x="548640" y="1143000"/>
+            <a:ext cx="7132320" cy="566928"/>
+          </a:xfrm>
+          <a:prstGeom prst="ellipse">
+            <a:avLst/>
+          </a:prstGeom>
+          <a:ln w="19050">
+            <a:solidFill>
+              <a:srgbClr val="FF7C51"/>
+            </a:solidFill>
+            <a:prstDash val="solid"/>
+          </a:ln>
+        </p:spPr>
+      </p:sp>
+      <p:sp>
+        <p:nvSpPr>
+          <p:cNvPr id="10" name="Text 7"/>
+          <p:cNvSpPr/>
+          <p:nvPr/>
+        </p:nvSpPr>
+        <p:spPr>
+          <a:xfrm>
+            <a:off x="548640" y="1143000"/>
+            <a:ext cx="7132320" cy="566928"/>
+          </a:xfrm>
+          <a:prstGeom prst="rect">
+            <a:avLst/>
+          </a:prstGeom>
+          <a:noFill/>
+          <a:ln/>
+        </p:spPr>
+        <p:txBody>
+          <a:bodyPr wrap="square" lIns="0" tIns="0" rIns="0" bIns="0" rtlCol="0" anchor="ctr"/>
+          <a:lstStyle/>
+          <a:p>
+            <a:pPr algn="ctr" indent="0" marL="0">
+              <a:buNone/>
+            </a:pPr>
+            <a:r>
+              <a:rPr lang="en-US" sz="1700" b="1" i="1" dirty="0">
+                <a:solidFill>
+                  <a:srgbClr val="FF7C51"/>
                 </a:solidFill>
                 <a:latin typeface="Libre Baskerville" pitchFamily="34" charset="0"/>
                 <a:ea typeface="Libre Baskerville" pitchFamily="34" charset="-122"/>
@@ -5690,20 +5253,43 @@
               </a:rPr>
               <a:t>TRANSFORMADORAS</a:t>
             </a:r>
-            <a:endParaRPr lang="en-US" sz="3000" dirty="0"/>
-          </a:p>
-        </p:txBody>
-      </p:sp>
-      <p:sp>
-        <p:nvSpPr>
-          <p:cNvPr id="10" name="Text 6"/>
-          <p:cNvSpPr/>
-          <p:nvPr/>
-        </p:nvSpPr>
-        <p:spPr>
-          <a:xfrm>
-            <a:off x="640080" y="2606040"/>
-            <a:ext cx="6949440" cy="822960"/>
+            <a:endParaRPr lang="en-US" sz="1700" dirty="0"/>
+          </a:p>
+        </p:txBody>
+      </p:sp>
+      <p:pic>
+        <p:nvPicPr>
+          <p:cNvPr id="11" name="Image 1" descr="/tmp/claude-0/-home-user-data-manipulation-exercises/f19acac8-ccb4-5197-8e49-c3b6029ad477/scratchpad/report-images/final/ig-experiencias-transformadoras.jpg">    </p:cNvPr>
+          <p:cNvPicPr>
+            <a:picLocks noChangeAspect="1"/>
+          </p:cNvPicPr>
+          <p:nvPr/>
+        </p:nvPicPr>
+        <p:blipFill>
+          <a:blip r:embed="rId2"/>
+          <a:srcRect l="0" r="0" t="0" b="0"/>
+          <a:stretch/>
+        </p:blipFill>
+        <p:spPr>
+          <a:xfrm>
+            <a:off x="731520" y="1938528"/>
+            <a:ext cx="6766560" cy="5029200"/>
+          </a:xfrm>
+          <a:prstGeom prst="rect">
+            <a:avLst/>
+          </a:prstGeom>
+        </p:spPr>
+      </p:pic>
+      <p:sp>
+        <p:nvSpPr>
+          <p:cNvPr id="12" name="Text 8"/>
+          <p:cNvSpPr/>
+          <p:nvPr/>
+        </p:nvSpPr>
+        <p:spPr>
+          <a:xfrm>
+            <a:off x="731520" y="7242048"/>
+            <a:ext cx="6766560" cy="777240"/>
           </a:xfrm>
           <a:prstGeom prst="rect">
             <a:avLst/>
@@ -5719,9 +5305,9 @@
               <a:buNone/>
             </a:pPr>
             <a:r>
-              <a:rPr lang="en-US" sz="1500" b="1" dirty="0">
-                <a:solidFill>
-                  <a:srgbClr val="DAFF94"/>
+              <a:rPr lang="en-US" sz="1400" b="1" dirty="0">
+                <a:solidFill>
+                  <a:srgbClr val="FF7C51"/>
                 </a:solidFill>
                 <a:latin typeface="Arial" pitchFamily="34" charset="0"/>
                 <a:ea typeface="Arial" pitchFamily="34" charset="-122"/>
@@ -5729,20 +5315,20 @@
               </a:rPr>
               <a:t>Marcas não vendem mais momentos. Vendem transformação.</a:t>
             </a:r>
-            <a:endParaRPr lang="en-US" sz="1500" dirty="0"/>
-          </a:p>
-        </p:txBody>
-      </p:sp>
-      <p:sp>
-        <p:nvSpPr>
-          <p:cNvPr id="11" name="Text 7"/>
-          <p:cNvSpPr/>
-          <p:nvPr/>
-        </p:nvSpPr>
-        <p:spPr>
-          <a:xfrm>
-            <a:off x="640080" y="3566160"/>
-            <a:ext cx="6492240" cy="594360"/>
+            <a:endParaRPr lang="en-US" sz="1400" dirty="0"/>
+          </a:p>
+        </p:txBody>
+      </p:sp>
+      <p:sp>
+        <p:nvSpPr>
+          <p:cNvPr id="13" name="Text 9"/>
+          <p:cNvSpPr/>
+          <p:nvPr/>
+        </p:nvSpPr>
+        <p:spPr>
+          <a:xfrm>
+            <a:off x="731520" y="7927848"/>
+            <a:ext cx="6766560" cy="594360"/>
           </a:xfrm>
           <a:prstGeom prst="rect">
             <a:avLst/>
@@ -5760,7 +5346,7 @@
             <a:r>
               <a:rPr lang="en-US" sz="1000" dirty="0">
                 <a:solidFill>
-                  <a:srgbClr val="DAFF94"/>
+                  <a:srgbClr val="FF7C51"/>
                 </a:solidFill>
                 <a:latin typeface="JetBrains Mono" pitchFamily="34" charset="0"/>
                 <a:ea typeface="JetBrains Mono" pitchFamily="34" charset="-122"/>
@@ -5772,69 +5358,6 @@
           </a:p>
         </p:txBody>
       </p:sp>
-      <p:sp>
-        <p:nvSpPr>
-          <p:cNvPr id="12" name="Text 8"/>
-          <p:cNvSpPr/>
-          <p:nvPr/>
-        </p:nvSpPr>
-        <p:spPr>
-          <a:xfrm>
-            <a:off x="640080" y="4343400"/>
-            <a:ext cx="1828800" cy="320040"/>
-          </a:xfrm>
-          <a:prstGeom prst="rect">
-            <a:avLst/>
-          </a:prstGeom>
-          <a:noFill/>
-          <a:ln/>
-        </p:spPr>
-        <p:txBody>
-          <a:bodyPr wrap="square" lIns="0" tIns="0" rIns="0" bIns="0" rtlCol="0" anchor="ctr"/>
-          <a:lstStyle/>
-          <a:p>
-            <a:pPr indent="0" marL="0">
-              <a:buNone/>
-            </a:pPr>
-            <a:r>
-              <a:rPr lang="en-US" sz="1000" dirty="0">
-                <a:solidFill>
-                  <a:srgbClr val="DAFF94"/>
-                </a:solidFill>
-                <a:latin typeface="JetBrains Mono" pitchFamily="34" charset="0"/>
-                <a:ea typeface="JetBrains Mono" pitchFamily="34" charset="-122"/>
-                <a:cs typeface="JetBrains Mono" pitchFamily="34" charset="-120"/>
-              </a:rPr>
-              <a:t>5 / 5</a:t>
-            </a:r>
-            <a:endParaRPr lang="en-US" sz="1000" dirty="0"/>
-          </a:p>
-        </p:txBody>
-      </p:sp>
-      <p:pic>
-        <p:nvPicPr>
-          <p:cNvPr id="13" name="Image 2" descr="/home/user/data-manipulation-exercises/.claude/skills/brand-guidelines/assets/textures/arrow-lime.png">    </p:cNvPr>
-          <p:cNvPicPr>
-            <a:picLocks noChangeAspect="1"/>
-          </p:cNvPicPr>
-          <p:nvPr/>
-        </p:nvPicPr>
-        <p:blipFill>
-          <a:blip r:embed="rId3"/>
-          <a:stretch>
-            <a:fillRect/>
-          </a:stretch>
-        </p:blipFill>
-        <p:spPr>
-          <a:xfrm rot="5400000">
-            <a:off x="7223760" y="4279392"/>
-            <a:ext cx="292608" cy="292608"/>
-          </a:xfrm>
-          <a:prstGeom prst="rect">
-            <a:avLst/>
-          </a:prstGeom>
-        </p:spPr>
-      </p:pic>
     </p:spTree>
   </p:cSld>
   <p:clrMapOvr>

--- a/entregas-agosto26/carrossel-instagram-agosto26.pptx
+++ b/entregas-agosto26/carrossel-instagram-agosto26.pptx
@@ -3658,7 +3658,7 @@
         </p:nvSpPr>
         <p:spPr>
           <a:xfrm>
-            <a:off x="411480" y="662940"/>
+            <a:off x="411480" y="9349740"/>
             <a:ext cx="274320" cy="274320"/>
           </a:xfrm>
           <a:prstGeom prst="rect">
@@ -3697,7 +3697,7 @@
         </p:nvSpPr>
         <p:spPr>
           <a:xfrm>
-            <a:off x="2011680" y="662940"/>
+            <a:off x="2011680" y="9349740"/>
             <a:ext cx="274320" cy="274320"/>
           </a:xfrm>
           <a:prstGeom prst="rect">
@@ -3736,7 +3736,7 @@
         </p:nvSpPr>
         <p:spPr>
           <a:xfrm>
-            <a:off x="3611880" y="662940"/>
+            <a:off x="3611880" y="9349740"/>
             <a:ext cx="274320" cy="274320"/>
           </a:xfrm>
           <a:prstGeom prst="rect">
@@ -3775,7 +3775,7 @@
         </p:nvSpPr>
         <p:spPr>
           <a:xfrm>
-            <a:off x="5212080" y="662940"/>
+            <a:off x="5212080" y="9349740"/>
             <a:ext cx="274320" cy="274320"/>
           </a:xfrm>
           <a:prstGeom prst="rect">
@@ -3822,7 +3822,7 @@
         </p:blipFill>
         <p:spPr>
           <a:xfrm>
-            <a:off x="7315200" y="548640"/>
+            <a:off x="7315200" y="9235440"/>
             <a:ext cx="502920" cy="502920"/>
           </a:xfrm>
           <a:prstGeom prst="rect">
@@ -3838,12 +3838,12 @@
         </p:nvSpPr>
         <p:spPr>
           <a:xfrm>
-            <a:off x="411480" y="1444752"/>
-            <a:ext cx="7406640" cy="2990088"/>
+            <a:off x="411480" y="365760"/>
+            <a:ext cx="7406640" cy="8293608"/>
           </a:xfrm>
           <a:prstGeom prst="roundRect">
             <a:avLst>
-              <a:gd name="adj" fmla="val 7645"/>
+              <a:gd name="adj" fmla="val 3086"/>
             </a:avLst>
           </a:prstGeom>
           <a:solidFill>
@@ -3860,7 +3860,7 @@
         </p:nvSpPr>
         <p:spPr>
           <a:xfrm>
-            <a:off x="731520" y="1719072"/>
+            <a:off x="731520" y="640080"/>
             <a:ext cx="6766560" cy="502920"/>
           </a:xfrm>
           <a:prstGeom prst="rect">
@@ -3899,7 +3899,7 @@
         </p:nvSpPr>
         <p:spPr>
           <a:xfrm>
-            <a:off x="548640" y="2221992"/>
+            <a:off x="548640" y="1143000"/>
             <a:ext cx="7132320" cy="566928"/>
           </a:xfrm>
           <a:prstGeom prst="ellipse">
@@ -3921,7 +3921,7 @@
         </p:nvSpPr>
         <p:spPr>
           <a:xfrm>
-            <a:off x="548640" y="2221992"/>
+            <a:off x="548640" y="1143000"/>
             <a:ext cx="7132320" cy="566928"/>
           </a:xfrm>
           <a:prstGeom prst="rect">
@@ -3952,87 +3952,9 @@
           </a:p>
         </p:txBody>
       </p:sp>
-      <p:sp>
-        <p:nvSpPr>
-          <p:cNvPr id="11" name="Text 8"/>
-          <p:cNvSpPr/>
-          <p:nvPr/>
-        </p:nvSpPr>
-        <p:spPr>
-          <a:xfrm>
-            <a:off x="731520" y="3017520"/>
-            <a:ext cx="6766560" cy="777240"/>
-          </a:xfrm>
-          <a:prstGeom prst="rect">
-            <a:avLst/>
-          </a:prstGeom>
-          <a:noFill/>
-          <a:ln/>
-        </p:spPr>
-        <p:txBody>
-          <a:bodyPr wrap="square" lIns="0" tIns="0" rIns="0" bIns="0" rtlCol="0" anchor="t"/>
-          <a:lstStyle/>
-          <a:p>
-            <a:pPr algn="l" indent="0" marL="0">
-              <a:buNone/>
-            </a:pPr>
-            <a:r>
-              <a:rPr lang="en-US" sz="1400" b="1" dirty="0">
-                <a:solidFill>
-                  <a:srgbClr val="FF7C51"/>
-                </a:solidFill>
-                <a:latin typeface="Arial" pitchFamily="34" charset="0"/>
-                <a:ea typeface="Arial" pitchFamily="34" charset="-122"/>
-                <a:cs typeface="Arial" pitchFamily="34" charset="-120"/>
-              </a:rPr>
-              <a:t>Sua marca já apareceu numa resposta de IA hoje?</a:t>
-            </a:r>
-            <a:endParaRPr lang="en-US" sz="1400" dirty="0"/>
-          </a:p>
-        </p:txBody>
-      </p:sp>
-      <p:sp>
-        <p:nvSpPr>
-          <p:cNvPr id="12" name="Text 9"/>
-          <p:cNvSpPr/>
-          <p:nvPr/>
-        </p:nvSpPr>
-        <p:spPr>
-          <a:xfrm>
-            <a:off x="731520" y="3703320"/>
-            <a:ext cx="6766560" cy="594360"/>
-          </a:xfrm>
-          <a:prstGeom prst="rect">
-            <a:avLst/>
-          </a:prstGeom>
-          <a:noFill/>
-          <a:ln/>
-        </p:spPr>
-        <p:txBody>
-          <a:bodyPr wrap="square" lIns="0" tIns="0" rIns="0" bIns="0" rtlCol="0" anchor="t"/>
-          <a:lstStyle/>
-          <a:p>
-            <a:pPr algn="l" indent="0" marL="0">
-              <a:buNone/>
-            </a:pPr>
-            <a:r>
-              <a:rPr lang="en-US" sz="1000" dirty="0">
-                <a:solidFill>
-                  <a:srgbClr val="FF7C51"/>
-                </a:solidFill>
-                <a:latin typeface="JetBrains Mono" pitchFamily="34" charset="0"/>
-                <a:ea typeface="JetBrains Mono" pitchFamily="34" charset="-122"/>
-                <a:cs typeface="JetBrains Mono" pitchFamily="34" charset="-120"/>
-              </a:rPr>
-              <a:t>Buscas por IA para descobrir produtos cresceram 200% em 1 ano.</a:t>
-            </a:r>
-            <a:endParaRPr lang="en-US" sz="1000" dirty="0"/>
-          </a:p>
-        </p:txBody>
-      </p:sp>
       <p:pic>
         <p:nvPicPr>
-          <p:cNvPr id="13" name="Image 1" descr="/tmp/claude-0/-home-user-data-manipulation-exercises/f19acac8-ccb4-5197-8e49-c3b6029ad477/scratchpad/report-images/final/ig-agentic-search.jpg">    </p:cNvPr>
+          <p:cNvPr id="11" name="Image 1" descr="/tmp/claude-0/-home-user-data-manipulation-exercises/f19acac8-ccb4-5197-8e49-c3b6029ad477/scratchpad/report-images/final/ig-agentic-search.jpg">    </p:cNvPr>
           <p:cNvPicPr>
             <a:picLocks noChangeAspect="1"/>
           </p:cNvPicPr>
@@ -4045,14 +3967,92 @@
         </p:blipFill>
         <p:spPr>
           <a:xfrm>
-            <a:off x="0" y="4389120"/>
-            <a:ext cx="8229600" cy="5897880"/>
+            <a:off x="731520" y="1938528"/>
+            <a:ext cx="6766560" cy="5029200"/>
           </a:xfrm>
           <a:prstGeom prst="rect">
             <a:avLst/>
           </a:prstGeom>
         </p:spPr>
       </p:pic>
+      <p:sp>
+        <p:nvSpPr>
+          <p:cNvPr id="12" name="Text 8"/>
+          <p:cNvSpPr/>
+          <p:nvPr/>
+        </p:nvSpPr>
+        <p:spPr>
+          <a:xfrm>
+            <a:off x="731520" y="7242048"/>
+            <a:ext cx="6766560" cy="777240"/>
+          </a:xfrm>
+          <a:prstGeom prst="rect">
+            <a:avLst/>
+          </a:prstGeom>
+          <a:noFill/>
+          <a:ln/>
+        </p:spPr>
+        <p:txBody>
+          <a:bodyPr wrap="square" lIns="0" tIns="0" rIns="0" bIns="0" rtlCol="0" anchor="t"/>
+          <a:lstStyle/>
+          <a:p>
+            <a:pPr algn="l" indent="0" marL="0">
+              <a:buNone/>
+            </a:pPr>
+            <a:r>
+              <a:rPr lang="en-US" sz="1400" b="1" dirty="0">
+                <a:solidFill>
+                  <a:srgbClr val="FF7C51"/>
+                </a:solidFill>
+                <a:latin typeface="Arial" pitchFamily="34" charset="0"/>
+                <a:ea typeface="Arial" pitchFamily="34" charset="-122"/>
+                <a:cs typeface="Arial" pitchFamily="34" charset="-120"/>
+              </a:rPr>
+              <a:t>Sua marca já apareceu numa resposta de IA hoje?</a:t>
+            </a:r>
+            <a:endParaRPr lang="en-US" sz="1400" dirty="0"/>
+          </a:p>
+        </p:txBody>
+      </p:sp>
+      <p:sp>
+        <p:nvSpPr>
+          <p:cNvPr id="13" name="Text 9"/>
+          <p:cNvSpPr/>
+          <p:nvPr/>
+        </p:nvSpPr>
+        <p:spPr>
+          <a:xfrm>
+            <a:off x="731520" y="7927848"/>
+            <a:ext cx="6766560" cy="594360"/>
+          </a:xfrm>
+          <a:prstGeom prst="rect">
+            <a:avLst/>
+          </a:prstGeom>
+          <a:noFill/>
+          <a:ln/>
+        </p:spPr>
+        <p:txBody>
+          <a:bodyPr wrap="square" lIns="0" tIns="0" rIns="0" bIns="0" rtlCol="0" anchor="t"/>
+          <a:lstStyle/>
+          <a:p>
+            <a:pPr algn="l" indent="0" marL="0">
+              <a:buNone/>
+            </a:pPr>
+            <a:r>
+              <a:rPr lang="en-US" sz="1000" dirty="0">
+                <a:solidFill>
+                  <a:srgbClr val="FF7C51"/>
+                </a:solidFill>
+                <a:latin typeface="JetBrains Mono" pitchFamily="34" charset="0"/>
+                <a:ea typeface="JetBrains Mono" pitchFamily="34" charset="-122"/>
+                <a:cs typeface="JetBrains Mono" pitchFamily="34" charset="-120"/>
+              </a:rPr>
+              <a:t>Buscas por IA para descobrir produtos cresceram 200% em 1 ano.</a:t>
+            </a:r>
+            <a:endParaRPr lang="en-US" sz="1000" dirty="0"/>
+          </a:p>
+        </p:txBody>
+      </p:sp>
     </p:spTree>
   </p:cSld>
   <p:clrMapOvr>

--- a/entregas-agosto26/carrossel-instagram-agosto26.pptx
+++ b/entregas-agosto26/carrossel-instagram-agosto26.pptx
@@ -3404,7 +3404,7 @@
         <p:spPr>
           <a:xfrm>
             <a:off x="411480" y="365760"/>
-            <a:ext cx="7406640" cy="8293608"/>
+            <a:ext cx="7406640" cy="8247888"/>
           </a:xfrm>
           <a:prstGeom prst="roundRect">
             <a:avLst>
@@ -3533,7 +3533,7 @@
         <p:spPr>
           <a:xfrm>
             <a:off x="731520" y="1938528"/>
-            <a:ext cx="6766560" cy="5029200"/>
+            <a:ext cx="6766560" cy="4114800"/>
           </a:xfrm>
           <a:prstGeom prst="rect">
             <a:avLst/>
@@ -3548,8 +3548,8 @@
         </p:nvSpPr>
         <p:spPr>
           <a:xfrm>
-            <a:off x="731520" y="7242048"/>
-            <a:ext cx="6766560" cy="777240"/>
+            <a:off x="731520" y="6327648"/>
+            <a:ext cx="6766560" cy="731520"/>
           </a:xfrm>
           <a:prstGeom prst="rect">
             <a:avLst/>
@@ -3587,8 +3587,47 @@
         </p:nvSpPr>
         <p:spPr>
           <a:xfrm>
-            <a:off x="731520" y="7927848"/>
-            <a:ext cx="6766560" cy="594360"/>
+            <a:off x="731520" y="7059168"/>
+            <a:ext cx="6766560" cy="914400"/>
+          </a:xfrm>
+          <a:prstGeom prst="rect">
+            <a:avLst/>
+          </a:prstGeom>
+          <a:noFill/>
+          <a:ln/>
+        </p:spPr>
+        <p:txBody>
+          <a:bodyPr wrap="square" lIns="0" tIns="0" rIns="0" bIns="0" rtlCol="0" anchor="t"/>
+          <a:lstStyle/>
+          <a:p>
+            <a:pPr algn="l" indent="0" marL="0">
+              <a:buNone/>
+            </a:pPr>
+            <a:r>
+              <a:rPr lang="en-US" sz="1100" dirty="0">
+                <a:solidFill>
+                  <a:srgbClr val="DAFF94"/>
+                </a:solidFill>
+                <a:latin typeface="Arial" pitchFamily="34" charset="0"/>
+                <a:ea typeface="Arial" pitchFamily="34" charset="-122"/>
+                <a:cs typeface="Arial" pitchFamily="34" charset="-120"/>
+              </a:rPr>
+              <a:t>Filtros, avatares e IA generativa já fazem parte de como essa geração se relaciona, compra e se expressa — sem hierarquia entre o que é “real” e o que é digital.</a:t>
+            </a:r>
+            <a:endParaRPr lang="en-US" sz="1100" dirty="0"/>
+          </a:p>
+        </p:txBody>
+      </p:sp>
+      <p:sp>
+        <p:nvSpPr>
+          <p:cNvPr id="14" name="Text 10"/>
+          <p:cNvSpPr/>
+          <p:nvPr/>
+        </p:nvSpPr>
+        <p:spPr>
+          <a:xfrm>
+            <a:off x="731520" y="7973568"/>
+            <a:ext cx="6766560" cy="548640"/>
           </a:xfrm>
           <a:prstGeom prst="rect">
             <a:avLst/>
@@ -3839,7 +3878,7 @@
         <p:spPr>
           <a:xfrm>
             <a:off x="411480" y="365760"/>
-            <a:ext cx="7406640" cy="8293608"/>
+            <a:ext cx="7406640" cy="8247888"/>
           </a:xfrm>
           <a:prstGeom prst="roundRect">
             <a:avLst>
@@ -3968,7 +4007,7 @@
         <p:spPr>
           <a:xfrm>
             <a:off x="731520" y="1938528"/>
-            <a:ext cx="6766560" cy="5029200"/>
+            <a:ext cx="6766560" cy="4114800"/>
           </a:xfrm>
           <a:prstGeom prst="rect">
             <a:avLst/>
@@ -3983,8 +4022,8 @@
         </p:nvSpPr>
         <p:spPr>
           <a:xfrm>
-            <a:off x="731520" y="7242048"/>
-            <a:ext cx="6766560" cy="777240"/>
+            <a:off x="731520" y="6327648"/>
+            <a:ext cx="6766560" cy="731520"/>
           </a:xfrm>
           <a:prstGeom prst="rect">
             <a:avLst/>
@@ -4022,8 +4061,47 @@
         </p:nvSpPr>
         <p:spPr>
           <a:xfrm>
-            <a:off x="731520" y="7927848"/>
-            <a:ext cx="6766560" cy="594360"/>
+            <a:off x="731520" y="7059168"/>
+            <a:ext cx="6766560" cy="914400"/>
+          </a:xfrm>
+          <a:prstGeom prst="rect">
+            <a:avLst/>
+          </a:prstGeom>
+          <a:noFill/>
+          <a:ln/>
+        </p:spPr>
+        <p:txBody>
+          <a:bodyPr wrap="square" lIns="0" tIns="0" rIns="0" bIns="0" rtlCol="0" anchor="t"/>
+          <a:lstStyle/>
+          <a:p>
+            <a:pPr algn="l" indent="0" marL="0">
+              <a:buNone/>
+            </a:pPr>
+            <a:r>
+              <a:rPr lang="en-US" sz="1100" dirty="0">
+                <a:solidFill>
+                  <a:srgbClr val="FF7C51"/>
+                </a:solidFill>
+                <a:latin typeface="Arial" pitchFamily="34" charset="0"/>
+                <a:ea typeface="Arial" pitchFamily="34" charset="-122"/>
+                <a:cs typeface="Arial" pitchFamily="34" charset="-120"/>
+              </a:rPr>
+              <a:t>Ferramentas como ChatGPT e Perplexity viraram ponto de partida de pesquisa antes da compra — estar bem descrito nelas já pesa tanto quanto estar bem posicionado no Google.</a:t>
+            </a:r>
+            <a:endParaRPr lang="en-US" sz="1100" dirty="0"/>
+          </a:p>
+        </p:txBody>
+      </p:sp>
+      <p:sp>
+        <p:nvSpPr>
+          <p:cNvPr id="14" name="Text 10"/>
+          <p:cNvSpPr/>
+          <p:nvPr/>
+        </p:nvSpPr>
+        <p:spPr>
+          <a:xfrm>
+            <a:off x="731520" y="7973568"/>
+            <a:ext cx="6766560" cy="548640"/>
           </a:xfrm>
           <a:prstGeom prst="rect">
             <a:avLst/>
@@ -4274,7 +4352,7 @@
         <p:spPr>
           <a:xfrm>
             <a:off x="411480" y="365760"/>
-            <a:ext cx="7406640" cy="8293608"/>
+            <a:ext cx="7406640" cy="8247888"/>
           </a:xfrm>
           <a:prstGeom prst="roundRect">
             <a:avLst>
@@ -4403,7 +4481,7 @@
         <p:spPr>
           <a:xfrm>
             <a:off x="731520" y="1938528"/>
-            <a:ext cx="6766560" cy="5029200"/>
+            <a:ext cx="6766560" cy="4114800"/>
           </a:xfrm>
           <a:prstGeom prst="rect">
             <a:avLst/>
@@ -4418,8 +4496,8 @@
         </p:nvSpPr>
         <p:spPr>
           <a:xfrm>
-            <a:off x="731520" y="7242048"/>
-            <a:ext cx="6766560" cy="777240"/>
+            <a:off x="731520" y="6327648"/>
+            <a:ext cx="6766560" cy="731520"/>
           </a:xfrm>
           <a:prstGeom prst="rect">
             <a:avLst/>
@@ -4457,8 +4535,47 @@
         </p:nvSpPr>
         <p:spPr>
           <a:xfrm>
-            <a:off x="731520" y="7927848"/>
-            <a:ext cx="6766560" cy="594360"/>
+            <a:off x="731520" y="7059168"/>
+            <a:ext cx="6766560" cy="914400"/>
+          </a:xfrm>
+          <a:prstGeom prst="rect">
+            <a:avLst/>
+          </a:prstGeom>
+          <a:noFill/>
+          <a:ln/>
+        </p:spPr>
+        <p:txBody>
+          <a:bodyPr wrap="square" lIns="0" tIns="0" rIns="0" bIns="0" rtlCol="0" anchor="t"/>
+          <a:lstStyle/>
+          <a:p>
+            <a:pPr algn="l" indent="0" marL="0">
+              <a:buNone/>
+            </a:pPr>
+            <a:r>
+              <a:rPr lang="en-US" sz="1100" dirty="0">
+                <a:solidFill>
+                  <a:srgbClr val="DAFF94"/>
+                </a:solidFill>
+                <a:latin typeface="Arial" pitchFamily="34" charset="0"/>
+                <a:ea typeface="Arial" pitchFamily="34" charset="-122"/>
+                <a:cs typeface="Arial" pitchFamily="34" charset="-120"/>
+              </a:rPr>
+              <a:t>Drinks sem álcool, cervejas 0% e rótulos funcionais deixaram de ser exceção em bares e festas pra virar parte do cardápio padrão.</a:t>
+            </a:r>
+            <a:endParaRPr lang="en-US" sz="1100" dirty="0"/>
+          </a:p>
+        </p:txBody>
+      </p:sp>
+      <p:sp>
+        <p:nvSpPr>
+          <p:cNvPr id="14" name="Text 10"/>
+          <p:cNvSpPr/>
+          <p:nvPr/>
+        </p:nvSpPr>
+        <p:spPr>
+          <a:xfrm>
+            <a:off x="731520" y="7973568"/>
+            <a:ext cx="6766560" cy="548640"/>
           </a:xfrm>
           <a:prstGeom prst="rect">
             <a:avLst/>
@@ -4709,11 +4826,11 @@
         <p:spPr>
           <a:xfrm>
             <a:off x="411480" y="1444752"/>
-            <a:ext cx="7406640" cy="2990088"/>
+            <a:ext cx="7406640" cy="3858768"/>
           </a:xfrm>
           <a:prstGeom prst="roundRect">
             <a:avLst>
-              <a:gd name="adj" fmla="val 7645"/>
+              <a:gd name="adj" fmla="val 5924"/>
             </a:avLst>
           </a:prstGeom>
           <a:solidFill>
@@ -4831,7 +4948,7 @@
         <p:spPr>
           <a:xfrm>
             <a:off x="731520" y="3017520"/>
-            <a:ext cx="6766560" cy="777240"/>
+            <a:ext cx="6766560" cy="731520"/>
           </a:xfrm>
           <a:prstGeom prst="rect">
             <a:avLst/>
@@ -4869,8 +4986,47 @@
         </p:nvSpPr>
         <p:spPr>
           <a:xfrm>
-            <a:off x="731520" y="3703320"/>
-            <a:ext cx="6766560" cy="594360"/>
+            <a:off x="731520" y="3749040"/>
+            <a:ext cx="6766560" cy="914400"/>
+          </a:xfrm>
+          <a:prstGeom prst="rect">
+            <a:avLst/>
+          </a:prstGeom>
+          <a:noFill/>
+          <a:ln/>
+        </p:spPr>
+        <p:txBody>
+          <a:bodyPr wrap="square" lIns="0" tIns="0" rIns="0" bIns="0" rtlCol="0" anchor="t"/>
+          <a:lstStyle/>
+          <a:p>
+            <a:pPr algn="l" indent="0" marL="0">
+              <a:buNone/>
+            </a:pPr>
+            <a:r>
+              <a:rPr lang="en-US" sz="1100" dirty="0">
+                <a:solidFill>
+                  <a:srgbClr val="DAFF94"/>
+                </a:solidFill>
+                <a:latin typeface="Arial" pitchFamily="34" charset="0"/>
+                <a:ea typeface="Arial" pitchFamily="34" charset="-122"/>
+                <a:cs typeface="Arial" pitchFamily="34" charset="-120"/>
+              </a:rPr>
+              <a:t>Ela chega pela moda, pelos bastidores e pelas redes — e está redesenhando como marcas de esporte se comunicam e com quem.</a:t>
+            </a:r>
+            <a:endParaRPr lang="en-US" sz="1100" dirty="0"/>
+          </a:p>
+        </p:txBody>
+      </p:sp>
+      <p:sp>
+        <p:nvSpPr>
+          <p:cNvPr id="13" name="Text 10"/>
+          <p:cNvSpPr/>
+          <p:nvPr/>
+        </p:nvSpPr>
+        <p:spPr>
+          <a:xfrm>
+            <a:off x="731520" y="4663440"/>
+            <a:ext cx="6766560" cy="548640"/>
           </a:xfrm>
           <a:prstGeom prst="rect">
             <a:avLst/>
@@ -4902,7 +5058,7 @@
       </p:sp>
       <p:pic>
         <p:nvPicPr>
-          <p:cNvPr id="13" name="Image 1" descr="/tmp/claude-0/-home-user-data-manipulation-exercises/f19acac8-ccb4-5197-8e49-c3b6029ad477/scratchpad/report-images/final/ig-sport-fandom.jpg">    </p:cNvPr>
+          <p:cNvPr id="14" name="Image 1" descr="/tmp/claude-0/-home-user-data-manipulation-exercises/f19acac8-ccb4-5197-8e49-c3b6029ad477/scratchpad/report-images/final/ig-sport-fandom.jpg">    </p:cNvPr>
           <p:cNvPicPr>
             <a:picLocks noChangeAspect="1"/>
           </p:cNvPicPr>
@@ -4915,8 +5071,8 @@
         </p:blipFill>
         <p:spPr>
           <a:xfrm>
-            <a:off x="0" y="4389120"/>
-            <a:ext cx="8229600" cy="5897880"/>
+            <a:off x="0" y="5257800"/>
+            <a:ext cx="8229600" cy="5029200"/>
           </a:xfrm>
           <a:prstGeom prst="rect">
             <a:avLst/>
@@ -5144,7 +5300,7 @@
         <p:spPr>
           <a:xfrm>
             <a:off x="411480" y="365760"/>
-            <a:ext cx="7406640" cy="8293608"/>
+            <a:ext cx="7406640" cy="8247888"/>
           </a:xfrm>
           <a:prstGeom prst="roundRect">
             <a:avLst>
@@ -5273,7 +5429,7 @@
         <p:spPr>
           <a:xfrm>
             <a:off x="731520" y="1938528"/>
-            <a:ext cx="6766560" cy="5029200"/>
+            <a:ext cx="6766560" cy="4114800"/>
           </a:xfrm>
           <a:prstGeom prst="rect">
             <a:avLst/>
@@ -5288,8 +5444,8 @@
         </p:nvSpPr>
         <p:spPr>
           <a:xfrm>
-            <a:off x="731520" y="7242048"/>
-            <a:ext cx="6766560" cy="777240"/>
+            <a:off x="731520" y="6327648"/>
+            <a:ext cx="6766560" cy="731520"/>
           </a:xfrm>
           <a:prstGeom prst="rect">
             <a:avLst/>
@@ -5327,8 +5483,47 @@
         </p:nvSpPr>
         <p:spPr>
           <a:xfrm>
-            <a:off x="731520" y="7927848"/>
-            <a:ext cx="6766560" cy="594360"/>
+            <a:off x="731520" y="7059168"/>
+            <a:ext cx="6766560" cy="914400"/>
+          </a:xfrm>
+          <a:prstGeom prst="rect">
+            <a:avLst/>
+          </a:prstGeom>
+          <a:noFill/>
+          <a:ln/>
+        </p:spPr>
+        <p:txBody>
+          <a:bodyPr wrap="square" lIns="0" tIns="0" rIns="0" bIns="0" rtlCol="0" anchor="t"/>
+          <a:lstStyle/>
+          <a:p>
+            <a:pPr algn="l" indent="0" marL="0">
+              <a:buNone/>
+            </a:pPr>
+            <a:r>
+              <a:rPr lang="en-US" sz="1100" dirty="0">
+                <a:solidFill>
+                  <a:srgbClr val="FF7C51"/>
+                </a:solidFill>
+                <a:latin typeface="Arial" pitchFamily="34" charset="0"/>
+                <a:ea typeface="Arial" pitchFamily="34" charset="-122"/>
+                <a:cs typeface="Arial" pitchFamily="34" charset="-120"/>
+              </a:rPr>
+              <a:t>Retiros, jornadas de autoconhecimento e produtos com propósito de virada de chave ganham espaço à frente do consumo só por status.</a:t>
+            </a:r>
+            <a:endParaRPr lang="en-US" sz="1100" dirty="0"/>
+          </a:p>
+        </p:txBody>
+      </p:sp>
+      <p:sp>
+        <p:nvSpPr>
+          <p:cNvPr id="14" name="Text 10"/>
+          <p:cNvSpPr/>
+          <p:nvPr/>
+        </p:nvSpPr>
+        <p:spPr>
+          <a:xfrm>
+            <a:off x="731520" y="7973568"/>
+            <a:ext cx="6766560" cy="548640"/>
           </a:xfrm>
           <a:prstGeom prst="rect">
             <a:avLst/>

--- a/entregas-agosto26/carrossel-instagram-agosto26.pptx
+++ b/entregas-agosto26/carrossel-instagram-agosto26.pptx
@@ -3001,7 +3001,7 @@
       </p:sp>
       <p:pic>
         <p:nvPicPr>
-          <p:cNvPr id="42" name="Image 0" descr="/home/user/data-manipulation-exercises/.claude/skills/brand-guidelines/assets/textures/globe-black.png">    </p:cNvPr>
+          <p:cNvPr id="42" name="Image 0" descr="/tmp/claude-0/-home-user-data-manipulation-exercises/f19acac8-ccb4-5197-8e49-c3b6029ad477/scratchpad/texture-check/assets/globe-black.png">    </p:cNvPr>
           <p:cNvPicPr>
             <a:picLocks noChangeAspect="1"/>
           </p:cNvPicPr>
@@ -3081,7 +3081,7 @@
       </p:sp>
       <p:pic>
         <p:nvPicPr>
-          <p:cNvPr id="44" name="Image 1" descr="/home/user/data-manipulation-exercises/.claude/skills/arpejo-report-desdobramento/assets/arpejo-report-logo-all-black.png">    </p:cNvPr>
+          <p:cNvPr id="44" name="Image 1" descr="../assets/arpejo-report-logo-all-black.png">    </p:cNvPr>
           <p:cNvPicPr>
             <a:picLocks noChangeAspect="1"/>
           </p:cNvPicPr>
@@ -3105,7 +3105,7 @@
       </p:pic>
       <p:pic>
         <p:nvPicPr>
-          <p:cNvPr id="45" name="Image 2" descr="/home/user/data-manipulation-exercises/.claude/skills/brand-guidelines/assets/textures/arrow-black.png">    </p:cNvPr>
+          <p:cNvPr id="45" name="Image 2" descr="/tmp/claude-0/-home-user-data-manipulation-exercises/f19acac8-ccb4-5197-8e49-c3b6029ad477/scratchpad/texture-check/assets/arrow-black.png">    </p:cNvPr>
           <p:cNvPicPr>
             <a:picLocks noChangeAspect="1"/>
           </p:cNvPicPr>
@@ -3373,7 +3373,7 @@
       </p:sp>
       <p:pic>
         <p:nvPicPr>
-          <p:cNvPr id="6" name="Image 0" descr="/home/user/data-manipulation-exercises/.claude/skills/brand-guidelines/assets/textures/globe-lime.png">    </p:cNvPr>
+          <p:cNvPr id="6" name="Image 0" descr="/tmp/claude-0/-home-user-data-manipulation-exercises/f19acac8-ccb4-5197-8e49-c3b6029ad477/scratchpad/texture-check/assets/globe-lime.png">    </p:cNvPr>
           <p:cNvPicPr>
             <a:picLocks noChangeAspect="1"/>
           </p:cNvPicPr>
@@ -3527,7 +3527,7 @@
         </p:nvPicPr>
         <p:blipFill>
           <a:blip r:embed="rId2"/>
-          <a:srcRect l="0" r="0" t="0" b="0"/>
+          <a:srcRect l="0" r="0" t="25676" b="25676"/>
           <a:stretch/>
         </p:blipFill>
         <p:spPr>
@@ -3847,7 +3847,7 @@
       </p:sp>
       <p:pic>
         <p:nvPicPr>
-          <p:cNvPr id="6" name="Image 0" descr="/home/user/data-manipulation-exercises/.claude/skills/brand-guidelines/assets/textures/globe-black.png">    </p:cNvPr>
+          <p:cNvPr id="6" name="Image 0" descr="/tmp/claude-0/-home-user-data-manipulation-exercises/f19acac8-ccb4-5197-8e49-c3b6029ad477/scratchpad/texture-check/assets/globe-black.png">    </p:cNvPr>
           <p:cNvPicPr>
             <a:picLocks noChangeAspect="1"/>
           </p:cNvPicPr>
@@ -4001,7 +4001,7 @@
         </p:nvPicPr>
         <p:blipFill>
           <a:blip r:embed="rId2"/>
-          <a:srcRect l="0" r="0" t="0" b="0"/>
+          <a:srcRect l="0" r="0" t="3222" b="3222"/>
           <a:stretch/>
         </p:blipFill>
         <p:spPr>
@@ -4321,7 +4321,7 @@
       </p:sp>
       <p:pic>
         <p:nvPicPr>
-          <p:cNvPr id="6" name="Image 0" descr="/home/user/data-manipulation-exercises/.claude/skills/brand-guidelines/assets/textures/globe-black.png">    </p:cNvPr>
+          <p:cNvPr id="6" name="Image 0" descr="/tmp/claude-0/-home-user-data-manipulation-exercises/f19acac8-ccb4-5197-8e49-c3b6029ad477/scratchpad/texture-check/assets/globe-black.png">    </p:cNvPr>
           <p:cNvPicPr>
             <a:picLocks noChangeAspect="1"/>
           </p:cNvPicPr>
@@ -4475,7 +4475,7 @@
         </p:nvPicPr>
         <p:blipFill>
           <a:blip r:embed="rId2"/>
-          <a:srcRect l="0" r="0" t="0" b="0"/>
+          <a:srcRect l="0" r="0" t="25676" b="25676"/>
           <a:stretch/>
         </p:blipFill>
         <p:spPr>
@@ -4795,7 +4795,7 @@
       </p:sp>
       <p:pic>
         <p:nvPicPr>
-          <p:cNvPr id="6" name="Image 0" descr="/home/user/data-manipulation-exercises/.claude/skills/brand-guidelines/assets/textures/globe-lime.png">    </p:cNvPr>
+          <p:cNvPr id="6" name="Image 0" descr="/tmp/claude-0/-home-user-data-manipulation-exercises/f19acac8-ccb4-5197-8e49-c3b6029ad477/scratchpad/texture-check/assets/globe-lime.png">    </p:cNvPr>
           <p:cNvPicPr>
             <a:picLocks noChangeAspect="1"/>
           </p:cNvPicPr>
@@ -5066,7 +5066,7 @@
         </p:nvPicPr>
         <p:blipFill>
           <a:blip r:embed="rId2"/>
-          <a:srcRect l="0" r="0" t="0" b="0"/>
+          <a:srcRect l="0" r="0" t="25556" b="25556"/>
           <a:stretch/>
         </p:blipFill>
         <p:spPr>
@@ -5269,7 +5269,7 @@
       </p:sp>
       <p:pic>
         <p:nvPicPr>
-          <p:cNvPr id="6" name="Image 0" descr="/home/user/data-manipulation-exercises/.claude/skills/brand-guidelines/assets/textures/globe-black.png">    </p:cNvPr>
+          <p:cNvPr id="6" name="Image 0" descr="/tmp/claude-0/-home-user-data-manipulation-exercises/f19acac8-ccb4-5197-8e49-c3b6029ad477/scratchpad/texture-check/assets/globe-black.png">    </p:cNvPr>
           <p:cNvPicPr>
             <a:picLocks noChangeAspect="1"/>
           </p:cNvPicPr>
@@ -5423,7 +5423,7 @@
         </p:nvPicPr>
         <p:blipFill>
           <a:blip r:embed="rId2"/>
-          <a:srcRect l="0" r="0" t="0" b="0"/>
+          <a:srcRect l="0" r="0" t="25676" b="25676"/>
           <a:stretch/>
         </p:blipFill>
         <p:spPr>
@@ -7459,7 +7459,7 @@
       </p:sp>
       <p:pic>
         <p:nvPicPr>
-          <p:cNvPr id="50" name="Image 0" descr="/home/user/data-manipulation-exercises/.claude/skills/brand-guidelines/assets/textures/arrow-lime.png">    </p:cNvPr>
+          <p:cNvPr id="50" name="Image 0" descr="/tmp/claude-0/-home-user-data-manipulation-exercises/f19acac8-ccb4-5197-8e49-c3b6029ad477/scratchpad/texture-check/assets/arrow-lime.png">    </p:cNvPr>
           <p:cNvPicPr>
             <a:picLocks noChangeAspect="1"/>
           </p:cNvPicPr>
@@ -7483,7 +7483,7 @@
       </p:pic>
       <p:pic>
         <p:nvPicPr>
-          <p:cNvPr id="51" name="Image 1" descr="/home/user/data-manipulation-exercises/.claude/skills/brand-guidelines/assets/textures/arrow-lime.png">    </p:cNvPr>
+          <p:cNvPr id="51" name="Image 1" descr="/tmp/claude-0/-home-user-data-manipulation-exercises/f19acac8-ccb4-5197-8e49-c3b6029ad477/scratchpad/texture-check/assets/arrow-lime.png">    </p:cNvPr>
           <p:cNvPicPr>
             <a:picLocks noChangeAspect="1"/>
           </p:cNvPicPr>
@@ -7507,7 +7507,7 @@
       </p:pic>
       <p:pic>
         <p:nvPicPr>
-          <p:cNvPr id="52" name="Image 2" descr="/home/user/data-manipulation-exercises/.claude/skills/brand-guidelines/assets/textures/arrow-lime.png">    </p:cNvPr>
+          <p:cNvPr id="52" name="Image 2" descr="/tmp/claude-0/-home-user-data-manipulation-exercises/f19acac8-ccb4-5197-8e49-c3b6029ad477/scratchpad/texture-check/assets/arrow-lime.png">    </p:cNvPr>
           <p:cNvPicPr>
             <a:picLocks noChangeAspect="1"/>
           </p:cNvPicPr>
@@ -7531,7 +7531,7 @@
       </p:pic>
       <p:pic>
         <p:nvPicPr>
-          <p:cNvPr id="53" name="Image 3" descr="/home/user/data-manipulation-exercises/.claude/skills/brand-guidelines/assets/textures/arrow-lime.png">    </p:cNvPr>
+          <p:cNvPr id="53" name="Image 3" descr="/tmp/claude-0/-home-user-data-manipulation-exercises/f19acac8-ccb4-5197-8e49-c3b6029ad477/scratchpad/texture-check/assets/arrow-lime.png">    </p:cNvPr>
           <p:cNvPicPr>
             <a:picLocks noChangeAspect="1"/>
           </p:cNvPicPr>
@@ -7723,7 +7723,7 @@
       </p:sp>
       <p:pic>
         <p:nvPicPr>
-          <p:cNvPr id="57" name="Image 4" descr="/home/user/data-manipulation-exercises/.claude/skills/arpejo-report-desdobramento/assets/arpejo-report-logo.png">    </p:cNvPr>
+          <p:cNvPr id="57" name="Image 4" descr="../assets/arpejo-report-logo.png">    </p:cNvPr>
           <p:cNvPicPr>
             <a:picLocks noChangeAspect="1"/>
           </p:cNvPicPr>
